--- a/技术路线图_LLM消费信贷.pptx
+++ b/技术路线图_LLM消费信贷.pptx
@@ -6,6 +6,12 @@
   </p:sldMasterIdLst>
   <p:sldIdLst>
     <p:sldId id="256" r:id="rId7"/>
+    <p:sldId id="257" r:id="rId9"/>
+    <p:sldId id="258" r:id="rId10"/>
+    <p:sldId id="259" r:id="rId11"/>
+    <p:sldId id="260" r:id="rId12"/>
+    <p:sldId id="261" r:id="rId13"/>
+    <p:sldId id="262" r:id="rId14"/>
   </p:sldIdLst>
   <p:sldSz cx="12191695" cy="6858000" type="screen4x3"/>
   <p:notesSz cx="6858000" cy="9144000"/>
@@ -502,32 +508,7 @@
           <a:lstStyle/>
           <a:p>
             <a:r>
-              <a:t>讲稿：</a:t>
-            </a:r>
-          </a:p>
-          <a:p>
-            <a:r>
-              <a:t>1. 自变量是 LLM 大模型接入这一可识别的技术冲击，非泛泛“AI”。</a:t>
-            </a:r>
-          </a:p>
-          <a:p>
-            <a:r>
-              <a:t>2. 两条机制：模型更会找有意向的人、更会个性化劝说。</a:t>
-            </a:r>
-          </a:p>
-          <a:p>
-            <a:r>
-              <a:t>3. 落脚不在转化率，而在双刃——可得性与脆弱性是否同时上升。</a:t>
-            </a:r>
-          </a:p>
-          <a:p>
-            <a:r>
-              <a:t>4. 关键识别任务：脆弱性上升是“更脆弱的人被卷入”还是“同类人借得更糟”。</a:t>
-            </a:r>
-          </a:p>
-          <a:p>
-            <a:r>
-              <a:t>5. 同一条 X→Y 链在微观/中观/宏观三套数据各识别一遍，互证后收口政策。</a:t>
+              <a:t>1. X 是 LLM 接入这一可识别技术冲击；2. 双机制：识别↑、劝说↑；3. 落脚双刃而非转化率；4. 关键：脆弱性升来自组成 vs 行为；5. 微观/中观/宏观三套数据各识别一遍，收口政策。</a:t>
             </a:r>
           </a:p>
         </p:txBody>
@@ -3541,10 +3522,63 @@
         </p:nvSpPr>
         <p:spPr>
           <a:xfrm>
-            <a:off x="274320" y="109728"/>
-            <a:ext cx="11643055" cy="548640"/>
+            <a:off x="0" y="0"/>
+            <a:ext cx="12191695" cy="603504"/>
           </a:xfrm>
           <a:prstGeom prst="rect">
+            <a:avLst/>
+          </a:prstGeom>
+          <a:solidFill>
+            <a:srgbClr val="1F3B5B"/>
+          </a:solidFill>
+          <a:ln>
+            <a:noFill/>
+          </a:ln>
+          <a:effectLst/>
+        </p:spPr>
+        <p:style>
+          <a:lnRef idx="1">
+            <a:schemeClr val="accent1"/>
+          </a:lnRef>
+          <a:fillRef idx="3">
+            <a:schemeClr val="accent1"/>
+          </a:fillRef>
+          <a:effectRef idx="2">
+            <a:schemeClr val="accent1"/>
+          </a:effectRef>
+          <a:fontRef idx="minor">
+            <a:schemeClr val="lt1"/>
+          </a:fontRef>
+        </p:style>
+        <p:txBody>
+          <a:bodyPr rtlCol="0" anchor="ctr" wrap="square"/>
+          <a:lstStyle/>
+          <a:p>
+            <a:pPr algn="ctr"/>
+            <a:r>
+              <a:rPr sz="1900" b="1">
+                <a:solidFill>
+                  <a:srgbClr val="FFFFFF"/>
+                </a:solidFill>
+                <a:latin typeface="Microsoft YaHei"/>
+              </a:rPr>
+              <a:t>总框架·模型技术路线图  X → 双机制 → 双刃Y → 三层识别</a:t>
+            </a:r>
+          </a:p>
+        </p:txBody>
+      </p:sp>
+      <p:sp>
+        <p:nvSpPr>
+          <p:cNvPr id="3" name="Rounded Rectangle 2"/>
+          <p:cNvSpPr/>
+          <p:nvPr/>
+        </p:nvSpPr>
+        <p:spPr>
+          <a:xfrm>
+            <a:off x="3901744" y="786384"/>
+            <a:ext cx="4389120" cy="512064"/>
+          </a:xfrm>
+          <a:prstGeom prst="roundRect">
             <a:avLst/>
           </a:prstGeom>
           <a:solidFill>
@@ -3577,29 +3611,1265 @@
           <a:p>
             <a:pPr algn="ctr"/>
             <a:r>
-              <a:rPr sz="2000" b="1">
+              <a:rPr sz="1400" b="1">
                 <a:solidFill>
                   <a:srgbClr val="FFFFFF"/>
                 </a:solidFill>
                 <a:latin typeface="Microsoft YaHei"/>
               </a:rPr>
-              <a:t>技术路线图 — LLM 大模型接入对消费者借贷行为的影响</a:t>
-            </a:r>
-          </a:p>
-        </p:txBody>
-      </p:sp>
-      <p:sp>
-        <p:nvSpPr>
-          <p:cNvPr id="3" name="Rounded Rectangle 2"/>
+              <a:t>X｜LLM 大模型接入·数字信贷触达升级</a:t>
+            </a:r>
+          </a:p>
+        </p:txBody>
+      </p:sp>
+      <p:sp>
+        <p:nvSpPr>
+          <p:cNvPr id="4" name="Rounded Rectangle 3"/>
           <p:cNvSpPr/>
           <p:nvPr/>
         </p:nvSpPr>
         <p:spPr>
           <a:xfrm>
-            <a:off x="3901744" y="841248"/>
-            <a:ext cx="4389120" cy="548640"/>
+            <a:off x="2255824" y="1517904"/>
+            <a:ext cx="3291840" cy="475488"/>
           </a:xfrm>
           <a:prstGeom prst="roundRect">
+            <a:avLst/>
+          </a:prstGeom>
+          <a:solidFill>
+            <a:srgbClr val="1B7F79"/>
+          </a:solidFill>
+          <a:ln w="12700">
+            <a:solidFill>
+              <a:srgbClr val="1B7F79"/>
+            </a:solidFill>
+          </a:ln>
+          <a:effectLst/>
+        </p:spPr>
+        <p:style>
+          <a:lnRef idx="1">
+            <a:schemeClr val="accent1"/>
+          </a:lnRef>
+          <a:fillRef idx="3">
+            <a:schemeClr val="accent1"/>
+          </a:fillRef>
+          <a:effectRef idx="2">
+            <a:schemeClr val="accent1"/>
+          </a:effectRef>
+          <a:fontRef idx="minor">
+            <a:schemeClr val="lt1"/>
+          </a:fontRef>
+        </p:style>
+        <p:txBody>
+          <a:bodyPr rtlCol="0" anchor="ctr" wrap="square" lIns="50800" rIns="50800" tIns="25400" bIns="25400"/>
+          <a:lstStyle/>
+          <a:p>
+            <a:pPr algn="ctr"/>
+            <a:r>
+              <a:rPr sz="1200" b="1">
+                <a:solidFill>
+                  <a:srgbClr val="FFFFFF"/>
+                </a:solidFill>
+                <a:latin typeface="Microsoft YaHei"/>
+              </a:rPr>
+              <a:t>机制① 意向识别能力 ↑</a:t>
+            </a:r>
+          </a:p>
+        </p:txBody>
+      </p:sp>
+      <p:sp>
+        <p:nvSpPr>
+          <p:cNvPr id="5" name="Rounded Rectangle 4"/>
+          <p:cNvSpPr/>
+          <p:nvPr/>
+        </p:nvSpPr>
+        <p:spPr>
+          <a:xfrm>
+            <a:off x="6644944" y="1517904"/>
+            <a:ext cx="3291840" cy="475488"/>
+          </a:xfrm>
+          <a:prstGeom prst="roundRect">
+            <a:avLst/>
+          </a:prstGeom>
+          <a:solidFill>
+            <a:srgbClr val="1B7F79"/>
+          </a:solidFill>
+          <a:ln w="12700">
+            <a:solidFill>
+              <a:srgbClr val="1B7F79"/>
+            </a:solidFill>
+          </a:ln>
+          <a:effectLst/>
+        </p:spPr>
+        <p:style>
+          <a:lnRef idx="1">
+            <a:schemeClr val="accent1"/>
+          </a:lnRef>
+          <a:fillRef idx="3">
+            <a:schemeClr val="accent1"/>
+          </a:fillRef>
+          <a:effectRef idx="2">
+            <a:schemeClr val="accent1"/>
+          </a:effectRef>
+          <a:fontRef idx="minor">
+            <a:schemeClr val="lt1"/>
+          </a:fontRef>
+        </p:style>
+        <p:txBody>
+          <a:bodyPr rtlCol="0" anchor="ctr" wrap="square" lIns="50800" rIns="50800" tIns="25400" bIns="25400"/>
+          <a:lstStyle/>
+          <a:p>
+            <a:pPr algn="ctr"/>
+            <a:r>
+              <a:rPr sz="1200" b="1">
+                <a:solidFill>
+                  <a:srgbClr val="FFFFFF"/>
+                </a:solidFill>
+                <a:latin typeface="Microsoft YaHei"/>
+              </a:rPr>
+              <a:t>机制② 个性化劝说力 ↑</a:t>
+            </a:r>
+          </a:p>
+        </p:txBody>
+      </p:sp>
+      <p:sp>
+        <p:nvSpPr>
+          <p:cNvPr id="6" name="Rounded Rectangle 5"/>
+          <p:cNvSpPr/>
+          <p:nvPr/>
+        </p:nvSpPr>
+        <p:spPr>
+          <a:xfrm>
+            <a:off x="411480" y="2286000"/>
+            <a:ext cx="3200400" cy="676656"/>
+          </a:xfrm>
+          <a:prstGeom prst="roundRect">
+            <a:avLst/>
+          </a:prstGeom>
+          <a:solidFill>
+            <a:srgbClr val="2E7D32"/>
+          </a:solidFill>
+          <a:ln w="12700">
+            <a:solidFill>
+              <a:srgbClr val="2E7D32"/>
+            </a:solidFill>
+          </a:ln>
+          <a:effectLst/>
+        </p:spPr>
+        <p:style>
+          <a:lnRef idx="1">
+            <a:schemeClr val="accent1"/>
+          </a:lnRef>
+          <a:fillRef idx="3">
+            <a:schemeClr val="accent1"/>
+          </a:fillRef>
+          <a:effectRef idx="2">
+            <a:schemeClr val="accent1"/>
+          </a:effectRef>
+          <a:fontRef idx="minor">
+            <a:schemeClr val="lt1"/>
+          </a:fontRef>
+        </p:style>
+        <p:txBody>
+          <a:bodyPr rtlCol="0" anchor="ctr" wrap="square" lIns="50800" rIns="50800" tIns="25400" bIns="25400"/>
+          <a:lstStyle/>
+          <a:p>
+            <a:pPr algn="ctr"/>
+            <a:r>
+              <a:rPr sz="1200" b="1">
+                <a:solidFill>
+                  <a:srgbClr val="FFFFFF"/>
+                </a:solidFill>
+                <a:latin typeface="Microsoft YaHei"/>
+              </a:rPr>
+              <a:t>Y-A 信贷可得性 ↑</a:t>
+            </a:r>
+          </a:p>
+          <a:p>
+            <a:pPr algn="ctr"/>
+            <a:r>
+              <a:rPr sz="1200" b="1">
+                <a:solidFill>
+                  <a:srgbClr val="FFFFFF"/>
+                </a:solidFill>
+                <a:latin typeface="Microsoft YaHei"/>
+              </a:rPr>
+              <a:t>更多人·更易借到</a:t>
+            </a:r>
+          </a:p>
+        </p:txBody>
+      </p:sp>
+      <p:sp>
+        <p:nvSpPr>
+          <p:cNvPr id="7" name="Rounded Rectangle 6"/>
+          <p:cNvSpPr/>
+          <p:nvPr/>
+        </p:nvSpPr>
+        <p:spPr>
+          <a:xfrm>
+            <a:off x="8579815" y="2286000"/>
+            <a:ext cx="3200400" cy="676656"/>
+          </a:xfrm>
+          <a:prstGeom prst="roundRect">
+            <a:avLst/>
+          </a:prstGeom>
+          <a:solidFill>
+            <a:srgbClr val="B03A2E"/>
+          </a:solidFill>
+          <a:ln w="12700">
+            <a:solidFill>
+              <a:srgbClr val="B03A2E"/>
+            </a:solidFill>
+          </a:ln>
+          <a:effectLst/>
+        </p:spPr>
+        <p:style>
+          <a:lnRef idx="1">
+            <a:schemeClr val="accent1"/>
+          </a:lnRef>
+          <a:fillRef idx="3">
+            <a:schemeClr val="accent1"/>
+          </a:fillRef>
+          <a:effectRef idx="2">
+            <a:schemeClr val="accent1"/>
+          </a:effectRef>
+          <a:fontRef idx="minor">
+            <a:schemeClr val="lt1"/>
+          </a:fontRef>
+        </p:style>
+        <p:txBody>
+          <a:bodyPr rtlCol="0" anchor="ctr" wrap="square" lIns="50800" rIns="50800" tIns="25400" bIns="25400"/>
+          <a:lstStyle/>
+          <a:p>
+            <a:pPr algn="ctr"/>
+            <a:r>
+              <a:rPr sz="1200" b="1">
+                <a:solidFill>
+                  <a:srgbClr val="FFFFFF"/>
+                </a:solidFill>
+                <a:latin typeface="Microsoft YaHei"/>
+              </a:rPr>
+              <a:t>Y-B 金融脆弱性 ↑</a:t>
+            </a:r>
+          </a:p>
+          <a:p>
+            <a:pPr algn="ctr"/>
+            <a:r>
+              <a:rPr sz="1200" b="1">
+                <a:solidFill>
+                  <a:srgbClr val="FFFFFF"/>
+                </a:solidFill>
+                <a:latin typeface="Microsoft YaHei"/>
+              </a:rPr>
+              <a:t>重复借贷·多头·逾期违约</a:t>
+            </a:r>
+          </a:p>
+        </p:txBody>
+      </p:sp>
+      <p:sp>
+        <p:nvSpPr>
+          <p:cNvPr id="8" name="TextBox 7"/>
+          <p:cNvSpPr txBox="1"/>
+          <p:nvPr/>
+        </p:nvSpPr>
+        <p:spPr>
+          <a:xfrm>
+            <a:off x="4572000" y="1993392"/>
+            <a:ext cx="3047695" cy="274320"/>
+          </a:xfrm>
+          <a:prstGeom prst="rect">
+            <a:avLst/>
+          </a:prstGeom>
+          <a:noFill/>
+        </p:spPr>
+        <p:txBody>
+          <a:bodyPr wrap="square" anchor="ctr">
+            <a:spAutoFit/>
+          </a:bodyPr>
+          <a:lstStyle/>
+          <a:p>
+            <a:pPr algn="ctr"/>
+            <a:r>
+              <a:rPr sz="1200" i="1" b="1">
+                <a:solidFill>
+                  <a:srgbClr val="8A4B08"/>
+                </a:solidFill>
+                <a:latin typeface="Microsoft YaHei"/>
+              </a:rPr>
+              <a:t>—— 双刃张力 ——</a:t>
+            </a:r>
+          </a:p>
+        </p:txBody>
+      </p:sp>
+      <p:cxnSp>
+        <p:nvCxnSpPr>
+          <p:cNvPr id="9" name="Connector 8"/>
+          <p:cNvCxnSpPr/>
+          <p:nvPr/>
+        </p:nvCxnSpPr>
+        <p:spPr>
+          <a:xfrm>
+            <a:off x="3611880" y="2624328"/>
+            <a:ext cx="4967935" cy="0"/>
+          </a:xfrm>
+          <a:prstGeom prst="line">
+            <a:avLst/>
+          </a:prstGeom>
+          <a:ln w="19050">
+            <a:solidFill>
+              <a:srgbClr val="8A4B08"/>
+            </a:solidFill>
+            <a:prstDash val="dash"/>
+          </a:ln>
+          <a:effectLst/>
+        </p:spPr>
+        <p:style>
+          <a:lnRef idx="2">
+            <a:schemeClr val="accent1"/>
+          </a:lnRef>
+          <a:fillRef idx="0">
+            <a:schemeClr val="accent1"/>
+          </a:fillRef>
+          <a:effectRef idx="1">
+            <a:schemeClr val="accent1"/>
+          </a:effectRef>
+          <a:fontRef idx="minor">
+            <a:schemeClr val="tx1"/>
+          </a:fontRef>
+        </p:style>
+      </p:cxnSp>
+      <p:sp>
+        <p:nvSpPr>
+          <p:cNvPr id="10" name="Diamond 9"/>
+          <p:cNvSpPr/>
+          <p:nvPr/>
+        </p:nvSpPr>
+        <p:spPr>
+          <a:xfrm>
+            <a:off x="5227624" y="3163824"/>
+            <a:ext cx="1737360" cy="868680"/>
+          </a:xfrm>
+          <a:prstGeom prst="diamond">
+            <a:avLst/>
+          </a:prstGeom>
+          <a:solidFill>
+            <a:srgbClr val="C87F0A"/>
+          </a:solidFill>
+          <a:ln w="12700">
+            <a:solidFill>
+              <a:srgbClr val="C87F0A"/>
+            </a:solidFill>
+          </a:ln>
+          <a:effectLst/>
+        </p:spPr>
+        <p:style>
+          <a:lnRef idx="1">
+            <a:schemeClr val="accent1"/>
+          </a:lnRef>
+          <a:fillRef idx="3">
+            <a:schemeClr val="accent1"/>
+          </a:fillRef>
+          <a:effectRef idx="2">
+            <a:schemeClr val="accent1"/>
+          </a:effectRef>
+          <a:fontRef idx="minor">
+            <a:schemeClr val="lt1"/>
+          </a:fontRef>
+        </p:style>
+        <p:txBody>
+          <a:bodyPr rtlCol="0" anchor="ctr" wrap="square" lIns="50800" rIns="50800" tIns="25400" bIns="25400"/>
+          <a:lstStyle/>
+          <a:p>
+            <a:pPr algn="ctr"/>
+            <a:r>
+              <a:rPr sz="1100" b="1">
+                <a:solidFill>
+                  <a:srgbClr val="FFFFFF"/>
+                </a:solidFill>
+                <a:latin typeface="Microsoft YaHei"/>
+              </a:rPr>
+              <a:t>脆弱性</a:t>
+            </a:r>
+          </a:p>
+          <a:p>
+            <a:pPr algn="ctr"/>
+            <a:r>
+              <a:rPr sz="1100" b="1">
+                <a:solidFill>
+                  <a:srgbClr val="FFFFFF"/>
+                </a:solidFill>
+                <a:latin typeface="Microsoft YaHei"/>
+              </a:rPr>
+              <a:t>来源分解</a:t>
+            </a:r>
+          </a:p>
+        </p:txBody>
+      </p:sp>
+      <p:sp>
+        <p:nvSpPr>
+          <p:cNvPr id="11" name="Rounded Rectangle 10"/>
+          <p:cNvSpPr/>
+          <p:nvPr/>
+        </p:nvSpPr>
+        <p:spPr>
+          <a:xfrm>
+            <a:off x="3246120" y="4224528"/>
+            <a:ext cx="2651760" cy="530352"/>
+          </a:xfrm>
+          <a:prstGeom prst="roundRect">
+            <a:avLst/>
+          </a:prstGeom>
+          <a:solidFill>
+            <a:srgbClr val="F1D9A8"/>
+          </a:solidFill>
+          <a:ln w="12700">
+            <a:solidFill>
+              <a:srgbClr val="F1D9A8"/>
+            </a:solidFill>
+          </a:ln>
+          <a:effectLst/>
+        </p:spPr>
+        <p:style>
+          <a:lnRef idx="1">
+            <a:schemeClr val="accent1"/>
+          </a:lnRef>
+          <a:fillRef idx="3">
+            <a:schemeClr val="accent1"/>
+          </a:fillRef>
+          <a:effectRef idx="2">
+            <a:schemeClr val="accent1"/>
+          </a:effectRef>
+          <a:fontRef idx="minor">
+            <a:schemeClr val="lt1"/>
+          </a:fontRef>
+        </p:style>
+        <p:txBody>
+          <a:bodyPr rtlCol="0" anchor="ctr" wrap="square" lIns="50800" rIns="50800" tIns="25400" bIns="25400"/>
+          <a:lstStyle/>
+          <a:p>
+            <a:pPr algn="ctr"/>
+            <a:r>
+              <a:rPr sz="1100" b="1">
+                <a:solidFill>
+                  <a:srgbClr val="202833"/>
+                </a:solidFill>
+                <a:latin typeface="Microsoft YaHei"/>
+              </a:rPr>
+              <a:t>组成·外延</a:t>
+            </a:r>
+          </a:p>
+          <a:p>
+            <a:pPr algn="ctr"/>
+            <a:r>
+              <a:rPr sz="1100" b="1">
+                <a:solidFill>
+                  <a:srgbClr val="202833"/>
+                </a:solidFill>
+                <a:latin typeface="Microsoft YaHei"/>
+              </a:rPr>
+              <a:t>更脆弱人群被卷入</a:t>
+            </a:r>
+          </a:p>
+        </p:txBody>
+      </p:sp>
+      <p:sp>
+        <p:nvSpPr>
+          <p:cNvPr id="12" name="Rounded Rectangle 11"/>
+          <p:cNvSpPr/>
+          <p:nvPr/>
+        </p:nvSpPr>
+        <p:spPr>
+          <a:xfrm>
+            <a:off x="6293815" y="4224528"/>
+            <a:ext cx="2651760" cy="530352"/>
+          </a:xfrm>
+          <a:prstGeom prst="roundRect">
+            <a:avLst/>
+          </a:prstGeom>
+          <a:solidFill>
+            <a:srgbClr val="F1D9A8"/>
+          </a:solidFill>
+          <a:ln w="12700">
+            <a:solidFill>
+              <a:srgbClr val="F1D9A8"/>
+            </a:solidFill>
+          </a:ln>
+          <a:effectLst/>
+        </p:spPr>
+        <p:style>
+          <a:lnRef idx="1">
+            <a:schemeClr val="accent1"/>
+          </a:lnRef>
+          <a:fillRef idx="3">
+            <a:schemeClr val="accent1"/>
+          </a:fillRef>
+          <a:effectRef idx="2">
+            <a:schemeClr val="accent1"/>
+          </a:effectRef>
+          <a:fontRef idx="minor">
+            <a:schemeClr val="lt1"/>
+          </a:fontRef>
+        </p:style>
+        <p:txBody>
+          <a:bodyPr rtlCol="0" anchor="ctr" wrap="square" lIns="50800" rIns="50800" tIns="25400" bIns="25400"/>
+          <a:lstStyle/>
+          <a:p>
+            <a:pPr algn="ctr"/>
+            <a:r>
+              <a:rPr sz="1100" b="1">
+                <a:solidFill>
+                  <a:srgbClr val="202833"/>
+                </a:solidFill>
+                <a:latin typeface="Microsoft YaHei"/>
+              </a:rPr>
+              <a:t>行为·内涵</a:t>
+            </a:r>
+          </a:p>
+          <a:p>
+            <a:pPr algn="ctr"/>
+            <a:r>
+              <a:rPr sz="1100" b="1">
+                <a:solidFill>
+                  <a:srgbClr val="202833"/>
+                </a:solidFill>
+                <a:latin typeface="Microsoft YaHei"/>
+              </a:rPr>
+              <a:t>同类人借贷恶化</a:t>
+            </a:r>
+          </a:p>
+        </p:txBody>
+      </p:sp>
+      <p:sp>
+        <p:nvSpPr>
+          <p:cNvPr id="13" name="Rounded Rectangle 12"/>
+          <p:cNvSpPr/>
+          <p:nvPr/>
+        </p:nvSpPr>
+        <p:spPr>
+          <a:xfrm>
+            <a:off x="475488" y="4937760"/>
+            <a:ext cx="3611880" cy="676656"/>
+          </a:xfrm>
+          <a:prstGeom prst="roundRect">
+            <a:avLst/>
+          </a:prstGeom>
+          <a:solidFill>
+            <a:srgbClr val="2E5E8C"/>
+          </a:solidFill>
+          <a:ln w="12700">
+            <a:solidFill>
+              <a:srgbClr val="2E5E8C"/>
+            </a:solidFill>
+          </a:ln>
+          <a:effectLst/>
+        </p:spPr>
+        <p:style>
+          <a:lnRef idx="1">
+            <a:schemeClr val="accent1"/>
+          </a:lnRef>
+          <a:fillRef idx="3">
+            <a:schemeClr val="accent1"/>
+          </a:fillRef>
+          <a:effectRef idx="2">
+            <a:schemeClr val="accent1"/>
+          </a:effectRef>
+          <a:fontRef idx="minor">
+            <a:schemeClr val="lt1"/>
+          </a:fontRef>
+        </p:style>
+        <p:txBody>
+          <a:bodyPr rtlCol="0" anchor="ctr" wrap="square" lIns="50800" rIns="50800" tIns="25400" bIns="25400"/>
+          <a:lstStyle/>
+          <a:p>
+            <a:pPr algn="ctr"/>
+            <a:r>
+              <a:rPr sz="1100" b="1">
+                <a:solidFill>
+                  <a:srgbClr val="FFFFFF"/>
+                </a:solidFill>
+                <a:latin typeface="Microsoft YaHei"/>
+              </a:rPr>
+              <a:t>第一章·微观 马消客户级</a:t>
+            </a:r>
+          </a:p>
+          <a:p>
+            <a:pPr algn="ctr"/>
+            <a:r>
+              <a:rPr sz="1100" b="1">
+                <a:solidFill>
+                  <a:srgbClr val="FFFFFF"/>
+                </a:solidFill>
+                <a:latin typeface="Microsoft YaHei"/>
+              </a:rPr>
+              <a:t>Stacked RD-in-time + DFL分解</a:t>
+            </a:r>
+          </a:p>
+        </p:txBody>
+      </p:sp>
+      <p:sp>
+        <p:nvSpPr>
+          <p:cNvPr id="14" name="Rounded Rectangle 13"/>
+          <p:cNvSpPr/>
+          <p:nvPr/>
+        </p:nvSpPr>
+        <p:spPr>
+          <a:xfrm>
+            <a:off x="4288536" y="4937760"/>
+            <a:ext cx="3611880" cy="676656"/>
+          </a:xfrm>
+          <a:prstGeom prst="roundRect">
+            <a:avLst/>
+          </a:prstGeom>
+          <a:solidFill>
+            <a:srgbClr val="2E5E8C"/>
+          </a:solidFill>
+          <a:ln w="12700">
+            <a:solidFill>
+              <a:srgbClr val="2E5E8C"/>
+            </a:solidFill>
+          </a:ln>
+          <a:effectLst/>
+        </p:spPr>
+        <p:style>
+          <a:lnRef idx="1">
+            <a:schemeClr val="accent1"/>
+          </a:lnRef>
+          <a:fillRef idx="3">
+            <a:schemeClr val="accent1"/>
+          </a:fillRef>
+          <a:effectRef idx="2">
+            <a:schemeClr val="accent1"/>
+          </a:effectRef>
+          <a:fontRef idx="minor">
+            <a:schemeClr val="lt1"/>
+          </a:fontRef>
+        </p:style>
+        <p:txBody>
+          <a:bodyPr rtlCol="0" anchor="ctr" wrap="square" lIns="50800" rIns="50800" tIns="25400" bIns="25400"/>
+          <a:lstStyle/>
+          <a:p>
+            <a:pPr algn="ctr"/>
+            <a:r>
+              <a:rPr sz="1100" b="1">
+                <a:solidFill>
+                  <a:srgbClr val="FFFFFF"/>
+                </a:solidFill>
+                <a:latin typeface="Microsoft YaHei"/>
+              </a:rPr>
+              <a:t>第二章·中观 裁判文书+扩散</a:t>
+            </a:r>
+          </a:p>
+          <a:p>
+            <a:pPr algn="ctr"/>
+            <a:r>
+              <a:rPr sz="1100" b="1">
+                <a:solidFill>
+                  <a:srgbClr val="FFFFFF"/>
+                </a:solidFill>
+                <a:latin typeface="Microsoft YaHei"/>
+              </a:rPr>
+              <a:t>双向FE + Bartik IV</a:t>
+            </a:r>
+          </a:p>
+        </p:txBody>
+      </p:sp>
+      <p:sp>
+        <p:nvSpPr>
+          <p:cNvPr id="15" name="Rounded Rectangle 14"/>
+          <p:cNvSpPr/>
+          <p:nvPr/>
+        </p:nvSpPr>
+        <p:spPr>
+          <a:xfrm>
+            <a:off x="8101583" y="4937760"/>
+            <a:ext cx="3611880" cy="676656"/>
+          </a:xfrm>
+          <a:prstGeom prst="roundRect">
+            <a:avLst/>
+          </a:prstGeom>
+          <a:solidFill>
+            <a:srgbClr val="2E5E8C"/>
+          </a:solidFill>
+          <a:ln w="12700">
+            <a:solidFill>
+              <a:srgbClr val="2E5E8C"/>
+            </a:solidFill>
+          </a:ln>
+          <a:effectLst/>
+        </p:spPr>
+        <p:style>
+          <a:lnRef idx="1">
+            <a:schemeClr val="accent1"/>
+          </a:lnRef>
+          <a:fillRef idx="3">
+            <a:schemeClr val="accent1"/>
+          </a:fillRef>
+          <a:effectRef idx="2">
+            <a:schemeClr val="accent1"/>
+          </a:effectRef>
+          <a:fontRef idx="minor">
+            <a:schemeClr val="lt1"/>
+          </a:fontRef>
+        </p:style>
+        <p:txBody>
+          <a:bodyPr rtlCol="0" anchor="ctr" wrap="square" lIns="50800" rIns="50800" tIns="25400" bIns="25400"/>
+          <a:lstStyle/>
+          <a:p>
+            <a:pPr algn="ctr"/>
+            <a:r>
+              <a:rPr sz="1100" b="1">
+                <a:solidFill>
+                  <a:srgbClr val="FFFFFF"/>
+                </a:solidFill>
+                <a:latin typeface="Microsoft YaHei"/>
+              </a:rPr>
+              <a:t>第三章·宏观 CHFS/CFPS</a:t>
+            </a:r>
+          </a:p>
+          <a:p>
+            <a:pPr algn="ctr"/>
+            <a:r>
+              <a:rPr sz="1100" b="1">
+                <a:solidFill>
+                  <a:srgbClr val="FFFFFF"/>
+                </a:solidFill>
+                <a:latin typeface="Microsoft YaHei"/>
+              </a:rPr>
+              <a:t>监管DDD + 2SLS</a:t>
+            </a:r>
+          </a:p>
+        </p:txBody>
+      </p:sp>
+      <p:cxnSp>
+        <p:nvCxnSpPr>
+          <p:cNvPr id="16" name="Connector 15"/>
+          <p:cNvCxnSpPr/>
+          <p:nvPr/>
+        </p:nvCxnSpPr>
+        <p:spPr>
+          <a:xfrm flipH="1">
+            <a:off x="3901744" y="1298448"/>
+            <a:ext cx="2194560" cy="219456"/>
+          </a:xfrm>
+          <a:prstGeom prst="line">
+            <a:avLst/>
+          </a:prstGeom>
+          <a:ln w="19050">
+            <a:solidFill>
+              <a:srgbClr val="5A6B7B"/>
+            </a:solidFill>
+            <a:tailEnd type="triangle" w="med" len="med"/>
+          </a:ln>
+          <a:effectLst/>
+        </p:spPr>
+        <p:style>
+          <a:lnRef idx="2">
+            <a:schemeClr val="accent1"/>
+          </a:lnRef>
+          <a:fillRef idx="0">
+            <a:schemeClr val="accent1"/>
+          </a:fillRef>
+          <a:effectRef idx="1">
+            <a:schemeClr val="accent1"/>
+          </a:effectRef>
+          <a:fontRef idx="minor">
+            <a:schemeClr val="tx1"/>
+          </a:fontRef>
+        </p:style>
+      </p:cxnSp>
+      <p:cxnSp>
+        <p:nvCxnSpPr>
+          <p:cNvPr id="17" name="Connector 16"/>
+          <p:cNvCxnSpPr/>
+          <p:nvPr/>
+        </p:nvCxnSpPr>
+        <p:spPr>
+          <a:xfrm>
+            <a:off x="6096304" y="1298448"/>
+            <a:ext cx="2194560" cy="219456"/>
+          </a:xfrm>
+          <a:prstGeom prst="line">
+            <a:avLst/>
+          </a:prstGeom>
+          <a:ln w="19050">
+            <a:solidFill>
+              <a:srgbClr val="5A6B7B"/>
+            </a:solidFill>
+            <a:tailEnd type="triangle" w="med" len="med"/>
+          </a:ln>
+          <a:effectLst/>
+        </p:spPr>
+        <p:style>
+          <a:lnRef idx="2">
+            <a:schemeClr val="accent1"/>
+          </a:lnRef>
+          <a:fillRef idx="0">
+            <a:schemeClr val="accent1"/>
+          </a:fillRef>
+          <a:effectRef idx="1">
+            <a:schemeClr val="accent1"/>
+          </a:effectRef>
+          <a:fontRef idx="minor">
+            <a:schemeClr val="tx1"/>
+          </a:fontRef>
+        </p:style>
+      </p:cxnSp>
+      <p:cxnSp>
+        <p:nvCxnSpPr>
+          <p:cNvPr id="18" name="Connector 17"/>
+          <p:cNvCxnSpPr/>
+          <p:nvPr/>
+        </p:nvCxnSpPr>
+        <p:spPr>
+          <a:xfrm flipH="1">
+            <a:off x="2011680" y="1993392"/>
+            <a:ext cx="1890064" cy="292608"/>
+          </a:xfrm>
+          <a:prstGeom prst="line">
+            <a:avLst/>
+          </a:prstGeom>
+          <a:ln w="19050">
+            <a:solidFill>
+              <a:srgbClr val="5A6B7B"/>
+            </a:solidFill>
+            <a:tailEnd type="triangle" w="med" len="med"/>
+          </a:ln>
+          <a:effectLst/>
+        </p:spPr>
+        <p:style>
+          <a:lnRef idx="2">
+            <a:schemeClr val="accent1"/>
+          </a:lnRef>
+          <a:fillRef idx="0">
+            <a:schemeClr val="accent1"/>
+          </a:fillRef>
+          <a:effectRef idx="1">
+            <a:schemeClr val="accent1"/>
+          </a:effectRef>
+          <a:fontRef idx="minor">
+            <a:schemeClr val="tx1"/>
+          </a:fontRef>
+        </p:style>
+      </p:cxnSp>
+      <p:cxnSp>
+        <p:nvCxnSpPr>
+          <p:cNvPr id="19" name="Connector 18"/>
+          <p:cNvCxnSpPr/>
+          <p:nvPr/>
+        </p:nvCxnSpPr>
+        <p:spPr>
+          <a:xfrm>
+            <a:off x="8290864" y="1993392"/>
+            <a:ext cx="1889151" cy="292608"/>
+          </a:xfrm>
+          <a:prstGeom prst="line">
+            <a:avLst/>
+          </a:prstGeom>
+          <a:ln w="19050">
+            <a:solidFill>
+              <a:srgbClr val="5A6B7B"/>
+            </a:solidFill>
+            <a:tailEnd type="triangle" w="med" len="med"/>
+          </a:ln>
+          <a:effectLst/>
+        </p:spPr>
+        <p:style>
+          <a:lnRef idx="2">
+            <a:schemeClr val="accent1"/>
+          </a:lnRef>
+          <a:fillRef idx="0">
+            <a:schemeClr val="accent1"/>
+          </a:fillRef>
+          <a:effectRef idx="1">
+            <a:schemeClr val="accent1"/>
+          </a:effectRef>
+          <a:fontRef idx="minor">
+            <a:schemeClr val="tx1"/>
+          </a:fontRef>
+        </p:style>
+      </p:cxnSp>
+      <p:cxnSp>
+        <p:nvCxnSpPr>
+          <p:cNvPr id="20" name="Connector 19"/>
+          <p:cNvCxnSpPr/>
+          <p:nvPr/>
+        </p:nvCxnSpPr>
+        <p:spPr>
+          <a:xfrm>
+            <a:off x="3901744" y="1993392"/>
+            <a:ext cx="7649871" cy="292608"/>
+          </a:xfrm>
+          <a:prstGeom prst="line">
+            <a:avLst/>
+          </a:prstGeom>
+          <a:ln w="12700">
+            <a:solidFill>
+              <a:srgbClr val="9AA7B2"/>
+            </a:solidFill>
+            <a:tailEnd type="triangle" w="med" len="med"/>
+          </a:ln>
+          <a:effectLst/>
+        </p:spPr>
+        <p:style>
+          <a:lnRef idx="2">
+            <a:schemeClr val="accent1"/>
+          </a:lnRef>
+          <a:fillRef idx="0">
+            <a:schemeClr val="accent1"/>
+          </a:fillRef>
+          <a:effectRef idx="1">
+            <a:schemeClr val="accent1"/>
+          </a:effectRef>
+          <a:fontRef idx="minor">
+            <a:schemeClr val="tx1"/>
+          </a:fontRef>
+        </p:style>
+      </p:cxnSp>
+      <p:cxnSp>
+        <p:nvCxnSpPr>
+          <p:cNvPr id="21" name="Connector 20"/>
+          <p:cNvCxnSpPr/>
+          <p:nvPr/>
+        </p:nvCxnSpPr>
+        <p:spPr>
+          <a:xfrm flipH="1">
+            <a:off x="640080" y="1993392"/>
+            <a:ext cx="7650784" cy="292608"/>
+          </a:xfrm>
+          <a:prstGeom prst="line">
+            <a:avLst/>
+          </a:prstGeom>
+          <a:ln w="12700">
+            <a:solidFill>
+              <a:srgbClr val="9AA7B2"/>
+            </a:solidFill>
+            <a:tailEnd type="triangle" w="med" len="med"/>
+          </a:ln>
+          <a:effectLst/>
+        </p:spPr>
+        <p:style>
+          <a:lnRef idx="2">
+            <a:schemeClr val="accent1"/>
+          </a:lnRef>
+          <a:fillRef idx="0">
+            <a:schemeClr val="accent1"/>
+          </a:fillRef>
+          <a:effectRef idx="1">
+            <a:schemeClr val="accent1"/>
+          </a:effectRef>
+          <a:fontRef idx="minor">
+            <a:schemeClr val="tx1"/>
+          </a:fontRef>
+        </p:style>
+      </p:cxnSp>
+      <p:cxnSp>
+        <p:nvCxnSpPr>
+          <p:cNvPr id="22" name="Connector 21"/>
+          <p:cNvCxnSpPr/>
+          <p:nvPr/>
+        </p:nvCxnSpPr>
+        <p:spPr>
+          <a:xfrm flipH="1">
+            <a:off x="6096304" y="2962656"/>
+            <a:ext cx="4083711" cy="201168"/>
+          </a:xfrm>
+          <a:prstGeom prst="line">
+            <a:avLst/>
+          </a:prstGeom>
+          <a:ln w="19050">
+            <a:solidFill>
+              <a:srgbClr val="5A6B7B"/>
+            </a:solidFill>
+            <a:tailEnd type="triangle" w="med" len="med"/>
+          </a:ln>
+          <a:effectLst/>
+        </p:spPr>
+        <p:style>
+          <a:lnRef idx="2">
+            <a:schemeClr val="accent1"/>
+          </a:lnRef>
+          <a:fillRef idx="0">
+            <a:schemeClr val="accent1"/>
+          </a:fillRef>
+          <a:effectRef idx="1">
+            <a:schemeClr val="accent1"/>
+          </a:effectRef>
+          <a:fontRef idx="minor">
+            <a:schemeClr val="tx1"/>
+          </a:fontRef>
+        </p:style>
+      </p:cxnSp>
+      <p:cxnSp>
+        <p:nvCxnSpPr>
+          <p:cNvPr id="23" name="Connector 22"/>
+          <p:cNvCxnSpPr/>
+          <p:nvPr/>
+        </p:nvCxnSpPr>
+        <p:spPr>
+          <a:xfrm flipH="1">
+            <a:off x="4572000" y="4032504"/>
+            <a:ext cx="1524304" cy="192024"/>
+          </a:xfrm>
+          <a:prstGeom prst="line">
+            <a:avLst/>
+          </a:prstGeom>
+          <a:ln w="19050">
+            <a:solidFill>
+              <a:srgbClr val="5A6B7B"/>
+            </a:solidFill>
+            <a:tailEnd type="triangle" w="med" len="med"/>
+          </a:ln>
+          <a:effectLst/>
+        </p:spPr>
+        <p:style>
+          <a:lnRef idx="2">
+            <a:schemeClr val="accent1"/>
+          </a:lnRef>
+          <a:fillRef idx="0">
+            <a:schemeClr val="accent1"/>
+          </a:fillRef>
+          <a:effectRef idx="1">
+            <a:schemeClr val="accent1"/>
+          </a:effectRef>
+          <a:fontRef idx="minor">
+            <a:schemeClr val="tx1"/>
+          </a:fontRef>
+        </p:style>
+      </p:cxnSp>
+      <p:cxnSp>
+        <p:nvCxnSpPr>
+          <p:cNvPr id="24" name="Connector 23"/>
+          <p:cNvCxnSpPr/>
+          <p:nvPr/>
+        </p:nvCxnSpPr>
+        <p:spPr>
+          <a:xfrm>
+            <a:off x="6096304" y="4032504"/>
+            <a:ext cx="1523391" cy="192024"/>
+          </a:xfrm>
+          <a:prstGeom prst="line">
+            <a:avLst/>
+          </a:prstGeom>
+          <a:ln w="19050">
+            <a:solidFill>
+              <a:srgbClr val="5A6B7B"/>
+            </a:solidFill>
+            <a:tailEnd type="triangle" w="med" len="med"/>
+          </a:ln>
+          <a:effectLst/>
+        </p:spPr>
+        <p:style>
+          <a:lnRef idx="2">
+            <a:schemeClr val="accent1"/>
+          </a:lnRef>
+          <a:fillRef idx="0">
+            <a:schemeClr val="accent1"/>
+          </a:fillRef>
+          <a:effectRef idx="1">
+            <a:schemeClr val="accent1"/>
+          </a:effectRef>
+          <a:fontRef idx="minor">
+            <a:schemeClr val="tx1"/>
+          </a:fontRef>
+        </p:style>
+      </p:cxnSp>
+      <p:cxnSp>
+        <p:nvCxnSpPr>
+          <p:cNvPr id="25" name="Connector 24"/>
+          <p:cNvCxnSpPr/>
+          <p:nvPr/>
+        </p:nvCxnSpPr>
+        <p:spPr>
+          <a:xfrm flipH="1">
+            <a:off x="1915668" y="2962656"/>
+            <a:ext cx="96012" cy="1975104"/>
+          </a:xfrm>
+          <a:prstGeom prst="line">
+            <a:avLst/>
+          </a:prstGeom>
+          <a:ln w="19050">
+            <a:solidFill>
+              <a:srgbClr val="5A6B7B"/>
+            </a:solidFill>
+            <a:tailEnd type="triangle" w="med" len="med"/>
+          </a:ln>
+          <a:effectLst/>
+        </p:spPr>
+        <p:style>
+          <a:lnRef idx="2">
+            <a:schemeClr val="accent1"/>
+          </a:lnRef>
+          <a:fillRef idx="0">
+            <a:schemeClr val="accent1"/>
+          </a:fillRef>
+          <a:effectRef idx="1">
+            <a:schemeClr val="accent1"/>
+          </a:effectRef>
+          <a:fontRef idx="minor">
+            <a:schemeClr val="tx1"/>
+          </a:fontRef>
+        </p:style>
+      </p:cxnSp>
+      <p:cxnSp>
+        <p:nvCxnSpPr>
+          <p:cNvPr id="26" name="Connector 25"/>
+          <p:cNvCxnSpPr/>
+          <p:nvPr/>
+        </p:nvCxnSpPr>
+        <p:spPr>
+          <a:xfrm flipH="1">
+            <a:off x="2281428" y="4754880"/>
+            <a:ext cx="2290572" cy="182880"/>
+          </a:xfrm>
+          <a:prstGeom prst="line">
+            <a:avLst/>
+          </a:prstGeom>
+          <a:ln w="19050">
+            <a:solidFill>
+              <a:srgbClr val="5A6B7B"/>
+            </a:solidFill>
+            <a:tailEnd type="triangle" w="med" len="med"/>
+          </a:ln>
+          <a:effectLst/>
+        </p:spPr>
+        <p:style>
+          <a:lnRef idx="2">
+            <a:schemeClr val="accent1"/>
+          </a:lnRef>
+          <a:fillRef idx="0">
+            <a:schemeClr val="accent1"/>
+          </a:fillRef>
+          <a:effectRef idx="1">
+            <a:schemeClr val="accent1"/>
+          </a:effectRef>
+          <a:fontRef idx="minor">
+            <a:schemeClr val="tx1"/>
+          </a:fontRef>
+        </p:style>
+      </p:cxnSp>
+      <p:cxnSp>
+        <p:nvCxnSpPr>
+          <p:cNvPr id="27" name="Connector 26"/>
+          <p:cNvCxnSpPr/>
+          <p:nvPr/>
+        </p:nvCxnSpPr>
+        <p:spPr>
+          <a:xfrm flipH="1">
+            <a:off x="2647188" y="4754880"/>
+            <a:ext cx="4972507" cy="182880"/>
+          </a:xfrm>
+          <a:prstGeom prst="line">
+            <a:avLst/>
+          </a:prstGeom>
+          <a:ln w="19050">
+            <a:solidFill>
+              <a:srgbClr val="5A6B7B"/>
+            </a:solidFill>
+            <a:tailEnd type="triangle" w="med" len="med"/>
+          </a:ln>
+          <a:effectLst/>
+        </p:spPr>
+        <p:style>
+          <a:lnRef idx="2">
+            <a:schemeClr val="accent1"/>
+          </a:lnRef>
+          <a:fillRef idx="0">
+            <a:schemeClr val="accent1"/>
+          </a:fillRef>
+          <a:effectRef idx="1">
+            <a:schemeClr val="accent1"/>
+          </a:effectRef>
+          <a:fontRef idx="minor">
+            <a:schemeClr val="tx1"/>
+          </a:fontRef>
+        </p:style>
+      </p:cxnSp>
+      <p:cxnSp>
+        <p:nvCxnSpPr>
+          <p:cNvPr id="28" name="Connector 27"/>
+          <p:cNvCxnSpPr/>
+          <p:nvPr/>
+        </p:nvCxnSpPr>
+        <p:spPr>
+          <a:xfrm>
+            <a:off x="4087368" y="5276088"/>
+            <a:ext cx="201168" cy="0"/>
+          </a:xfrm>
+          <a:prstGeom prst="line">
+            <a:avLst/>
+          </a:prstGeom>
+          <a:ln w="19050">
+            <a:solidFill>
+              <a:srgbClr val="5A6B7B"/>
+            </a:solidFill>
+            <a:tailEnd type="triangle" w="med" len="med"/>
+          </a:ln>
+          <a:effectLst/>
+        </p:spPr>
+        <p:style>
+          <a:lnRef idx="2">
+            <a:schemeClr val="accent1"/>
+          </a:lnRef>
+          <a:fillRef idx="0">
+            <a:schemeClr val="accent1"/>
+          </a:fillRef>
+          <a:effectRef idx="1">
+            <a:schemeClr val="accent1"/>
+          </a:effectRef>
+          <a:fontRef idx="minor">
+            <a:schemeClr val="tx1"/>
+          </a:fontRef>
+        </p:style>
+      </p:cxnSp>
+      <p:cxnSp>
+        <p:nvCxnSpPr>
+          <p:cNvPr id="29" name="Connector 28"/>
+          <p:cNvCxnSpPr/>
+          <p:nvPr/>
+        </p:nvCxnSpPr>
+        <p:spPr>
+          <a:xfrm>
+            <a:off x="7900416" y="5276088"/>
+            <a:ext cx="201167" cy="0"/>
+          </a:xfrm>
+          <a:prstGeom prst="line">
+            <a:avLst/>
+          </a:prstGeom>
+          <a:ln w="19050">
+            <a:solidFill>
+              <a:srgbClr val="5A6B7B"/>
+            </a:solidFill>
+            <a:tailEnd type="triangle" w="med" len="med"/>
+          </a:ln>
+          <a:effectLst/>
+        </p:spPr>
+        <p:style>
+          <a:lnRef idx="2">
+            <a:schemeClr val="accent1"/>
+          </a:lnRef>
+          <a:fillRef idx="0">
+            <a:schemeClr val="accent1"/>
+          </a:fillRef>
+          <a:effectRef idx="1">
+            <a:schemeClr val="accent1"/>
+          </a:effectRef>
+          <a:fontRef idx="minor">
+            <a:schemeClr val="tx1"/>
+          </a:fontRef>
+        </p:style>
+      </p:cxnSp>
+      <p:sp>
+        <p:nvSpPr>
+          <p:cNvPr id="30" name="Rectangle 29"/>
+          <p:cNvSpPr/>
+          <p:nvPr/>
+        </p:nvSpPr>
+        <p:spPr>
+          <a:xfrm>
+            <a:off x="274320" y="6053328"/>
+            <a:ext cx="11643055" cy="384048"/>
+          </a:xfrm>
+          <a:prstGeom prst="rect">
             <a:avLst/>
           </a:prstGeom>
           <a:solidFill>
@@ -3632,27 +4902,306 @@
           <a:p>
             <a:pPr algn="ctr"/>
             <a:r>
-              <a:rPr sz="1400" b="1">
+              <a:rPr sz="1050" b="1">
                 <a:solidFill>
                   <a:srgbClr val="FFFFFF"/>
                 </a:solidFill>
                 <a:latin typeface="Microsoft YaHei"/>
               </a:rPr>
-              <a:t>X｜LLM 大模型接入·数字信贷触达升级</a:t>
-            </a:r>
-          </a:p>
-        </p:txBody>
-      </p:sp>
-      <p:sp>
-        <p:nvSpPr>
-          <p:cNvPr id="4" name="Rounded Rectangle 3"/>
+              <a:t>结论与政策：智能信贷触达让更多人借到钱——是否也让更多人陷进去？  金融AI消费者保护 · 共债治理</a:t>
+            </a:r>
+          </a:p>
+        </p:txBody>
+      </p:sp>
+    </p:spTree>
+  </p:cSld>
+  <p:clrMapOvr>
+    <a:masterClrMapping/>
+  </p:clrMapOvr>
+</p:sld>
+</file>
+
+<file path=ppt/slides/slide2.xml><?xml version="1.0" encoding="utf-8"?>
+<p:sld xmlns:a="http://schemas.openxmlformats.org/drawingml/2006/main" xmlns:p="http://schemas.openxmlformats.org/presentationml/2006/main" xmlns:r="http://schemas.openxmlformats.org/officeDocument/2006/relationships">
+  <p:cSld>
+    <p:spTree>
+      <p:nvGrpSpPr>
+        <p:cNvPr id="1" name=""/>
+        <p:cNvGrpSpPr/>
+        <p:nvPr/>
+      </p:nvGrpSpPr>
+      <p:grpSpPr/>
+      <p:sp>
+        <p:nvSpPr>
+          <p:cNvPr id="2" name="Rectangle 1"/>
           <p:cNvSpPr/>
           <p:nvPr/>
         </p:nvSpPr>
         <p:spPr>
           <a:xfrm>
-            <a:off x="2255824" y="1627632"/>
-            <a:ext cx="3291840" cy="512064"/>
+            <a:off x="0" y="0"/>
+            <a:ext cx="12191695" cy="603504"/>
+          </a:xfrm>
+          <a:prstGeom prst="rect">
+            <a:avLst/>
+          </a:prstGeom>
+          <a:solidFill>
+            <a:srgbClr val="1F3B5B"/>
+          </a:solidFill>
+          <a:ln>
+            <a:noFill/>
+          </a:ln>
+          <a:effectLst/>
+        </p:spPr>
+        <p:style>
+          <a:lnRef idx="1">
+            <a:schemeClr val="accent1"/>
+          </a:lnRef>
+          <a:fillRef idx="3">
+            <a:schemeClr val="accent1"/>
+          </a:fillRef>
+          <a:effectRef idx="2">
+            <a:schemeClr val="accent1"/>
+          </a:effectRef>
+          <a:fontRef idx="minor">
+            <a:schemeClr val="lt1"/>
+          </a:fontRef>
+        </p:style>
+        <p:txBody>
+          <a:bodyPr rtlCol="0" anchor="ctr" wrap="square"/>
+          <a:lstStyle/>
+          <a:p>
+            <a:pPr algn="ctr"/>
+            <a:r>
+              <a:rPr sz="1900" b="1">
+                <a:solidFill>
+                  <a:srgbClr val="FFFFFF"/>
+                </a:solidFill>
+                <a:latin typeface="Microsoft YaHei"/>
+              </a:rPr>
+              <a:t>第一章 框架图  X →（中介机制M）→ Y，调节W·控制Z</a:t>
+            </a:r>
+          </a:p>
+        </p:txBody>
+      </p:sp>
+      <p:sp>
+        <p:nvSpPr>
+          <p:cNvPr id="3" name="TextBox 2"/>
+          <p:cNvSpPr txBox="1"/>
+          <p:nvPr/>
+        </p:nvSpPr>
+        <p:spPr>
+          <a:xfrm>
+            <a:off x="164592" y="1024128"/>
+            <a:ext cx="1463040" cy="457200"/>
+          </a:xfrm>
+          <a:prstGeom prst="rect">
+            <a:avLst/>
+          </a:prstGeom>
+          <a:noFill/>
+        </p:spPr>
+        <p:txBody>
+          <a:bodyPr wrap="square" anchor="ctr">
+            <a:spAutoFit/>
+          </a:bodyPr>
+          <a:lstStyle/>
+          <a:p>
+            <a:pPr algn="ctr"/>
+            <a:r>
+              <a:rPr sz="1100" i="0" b="1">
+                <a:solidFill>
+                  <a:srgbClr val="1F3B5B"/>
+                </a:solidFill>
+                <a:latin typeface="Microsoft YaHei"/>
+              </a:rPr>
+              <a:t>自变量</a:t>
+            </a:r>
+          </a:p>
+          <a:p>
+            <a:pPr algn="ctr"/>
+            <a:r>
+              <a:rPr sz="1100" i="0" b="1">
+                <a:solidFill>
+                  <a:srgbClr val="1F3B5B"/>
+                </a:solidFill>
+                <a:latin typeface="Microsoft YaHei"/>
+              </a:rPr>
+              <a:t>X</a:t>
+            </a:r>
+          </a:p>
+        </p:txBody>
+      </p:sp>
+      <p:sp>
+        <p:nvSpPr>
+          <p:cNvPr id="4" name="TextBox 3"/>
+          <p:cNvSpPr txBox="1"/>
+          <p:nvPr/>
+        </p:nvSpPr>
+        <p:spPr>
+          <a:xfrm>
+            <a:off x="164592" y="2331720"/>
+            <a:ext cx="1463040" cy="457200"/>
+          </a:xfrm>
+          <a:prstGeom prst="rect">
+            <a:avLst/>
+          </a:prstGeom>
+          <a:noFill/>
+        </p:spPr>
+        <p:txBody>
+          <a:bodyPr wrap="square" anchor="ctr">
+            <a:spAutoFit/>
+          </a:bodyPr>
+          <a:lstStyle/>
+          <a:p>
+            <a:pPr algn="ctr"/>
+            <a:r>
+              <a:rPr sz="1100" i="0" b="1">
+                <a:solidFill>
+                  <a:srgbClr val="1B7F79"/>
+                </a:solidFill>
+                <a:latin typeface="Microsoft YaHei"/>
+              </a:rPr>
+              <a:t>中介机制</a:t>
+            </a:r>
+          </a:p>
+          <a:p>
+            <a:pPr algn="ctr"/>
+            <a:r>
+              <a:rPr sz="1100" i="0" b="1">
+                <a:solidFill>
+                  <a:srgbClr val="1B7F79"/>
+                </a:solidFill>
+                <a:latin typeface="Microsoft YaHei"/>
+              </a:rPr>
+              <a:t>M</a:t>
+            </a:r>
+          </a:p>
+        </p:txBody>
+      </p:sp>
+      <p:sp>
+        <p:nvSpPr>
+          <p:cNvPr id="5" name="TextBox 4"/>
+          <p:cNvSpPr txBox="1"/>
+          <p:nvPr/>
+        </p:nvSpPr>
+        <p:spPr>
+          <a:xfrm>
+            <a:off x="164592" y="3611880"/>
+            <a:ext cx="1463040" cy="457200"/>
+          </a:xfrm>
+          <a:prstGeom prst="rect">
+            <a:avLst/>
+          </a:prstGeom>
+          <a:noFill/>
+        </p:spPr>
+        <p:txBody>
+          <a:bodyPr wrap="square" anchor="ctr">
+            <a:spAutoFit/>
+          </a:bodyPr>
+          <a:lstStyle/>
+          <a:p>
+            <a:pPr algn="ctr"/>
+            <a:r>
+              <a:rPr sz="1100" i="0" b="1">
+                <a:solidFill>
+                  <a:srgbClr val="B03A2E"/>
+                </a:solidFill>
+                <a:latin typeface="Microsoft YaHei"/>
+              </a:rPr>
+              <a:t>因变量</a:t>
+            </a:r>
+          </a:p>
+          <a:p>
+            <a:pPr algn="ctr"/>
+            <a:r>
+              <a:rPr sz="1100" i="0" b="1">
+                <a:solidFill>
+                  <a:srgbClr val="B03A2E"/>
+                </a:solidFill>
+                <a:latin typeface="Microsoft YaHei"/>
+              </a:rPr>
+              <a:t>Y（双刃）</a:t>
+            </a:r>
+          </a:p>
+        </p:txBody>
+      </p:sp>
+      <p:sp>
+        <p:nvSpPr>
+          <p:cNvPr id="6" name="Rounded Rectangle 5"/>
+          <p:cNvSpPr/>
+          <p:nvPr/>
+        </p:nvSpPr>
+        <p:spPr>
+          <a:xfrm>
+            <a:off x="1691640" y="914400"/>
+            <a:ext cx="4023360" cy="713232"/>
+          </a:xfrm>
+          <a:prstGeom prst="roundRect">
+            <a:avLst/>
+          </a:prstGeom>
+          <a:solidFill>
+            <a:srgbClr val="1F3B5B"/>
+          </a:solidFill>
+          <a:ln w="12700">
+            <a:solidFill>
+              <a:srgbClr val="1F3B5B"/>
+            </a:solidFill>
+          </a:ln>
+          <a:effectLst/>
+        </p:spPr>
+        <p:style>
+          <a:lnRef idx="1">
+            <a:schemeClr val="accent1"/>
+          </a:lnRef>
+          <a:fillRef idx="3">
+            <a:schemeClr val="accent1"/>
+          </a:fillRef>
+          <a:effectRef idx="2">
+            <a:schemeClr val="accent1"/>
+          </a:effectRef>
+          <a:fontRef idx="minor">
+            <a:schemeClr val="lt1"/>
+          </a:fontRef>
+        </p:style>
+        <p:txBody>
+          <a:bodyPr rtlCol="0" anchor="ctr" wrap="square" lIns="50800" rIns="50800" tIns="25400" bIns="25400"/>
+          <a:lstStyle/>
+          <a:p>
+            <a:pPr algn="ctr"/>
+            <a:r>
+              <a:rPr sz="1100" b="1">
+                <a:solidFill>
+                  <a:srgbClr val="FFFFFF"/>
+                </a:solidFill>
+                <a:latin typeface="Microsoft YaHei"/>
+              </a:rPr>
+              <a:t>X｜LLM大模型接入·数字信贷触达升级</a:t>
+            </a:r>
+          </a:p>
+          <a:p>
+            <a:pPr algn="ctr"/>
+            <a:r>
+              <a:rPr sz="1100" b="1">
+                <a:solidFill>
+                  <a:srgbClr val="FFFFFF"/>
+                </a:solidFill>
+                <a:latin typeface="Microsoft YaHei"/>
+              </a:rPr>
+              <a:t>剂量梯度：IVR → LLM-v1 → LLM-v2</a:t>
+            </a:r>
+          </a:p>
+        </p:txBody>
+      </p:sp>
+      <p:sp>
+        <p:nvSpPr>
+          <p:cNvPr id="7" name="Rounded Rectangle 6"/>
+          <p:cNvSpPr/>
+          <p:nvPr/>
+        </p:nvSpPr>
+        <p:spPr>
+          <a:xfrm>
+            <a:off x="1691640" y="2212848"/>
+            <a:ext cx="4023360" cy="512064"/>
           </a:xfrm>
           <a:prstGeom prst="roundRect">
             <a:avLst/>
@@ -3687,27 +5236,27 @@
           <a:p>
             <a:pPr algn="ctr"/>
             <a:r>
-              <a:rPr sz="1200" b="1">
+              <a:rPr sz="1100" b="1">
                 <a:solidFill>
                   <a:srgbClr val="FFFFFF"/>
                 </a:solidFill>
                 <a:latin typeface="Microsoft YaHei"/>
               </a:rPr>
-              <a:t>机制①  意向识别能力 ↑</a:t>
-            </a:r>
-          </a:p>
-        </p:txBody>
-      </p:sp>
-      <p:sp>
-        <p:nvSpPr>
-          <p:cNvPr id="5" name="Rounded Rectangle 4"/>
+              <a:t>M₁ 意向识别能力 ↑</a:t>
+            </a:r>
+          </a:p>
+        </p:txBody>
+      </p:sp>
+      <p:sp>
+        <p:nvSpPr>
+          <p:cNvPr id="8" name="Rounded Rectangle 7"/>
           <p:cNvSpPr/>
           <p:nvPr/>
         </p:nvSpPr>
         <p:spPr>
           <a:xfrm>
-            <a:off x="6644944" y="1627632"/>
-            <a:ext cx="3291840" cy="512064"/>
+            <a:off x="1691640" y="2798064"/>
+            <a:ext cx="4023360" cy="512064"/>
           </a:xfrm>
           <a:prstGeom prst="roundRect">
             <a:avLst/>
@@ -3742,27 +5291,27 @@
           <a:p>
             <a:pPr algn="ctr"/>
             <a:r>
-              <a:rPr sz="1200" b="1">
+              <a:rPr sz="1100" b="1">
                 <a:solidFill>
                   <a:srgbClr val="FFFFFF"/>
                 </a:solidFill>
                 <a:latin typeface="Microsoft YaHei"/>
               </a:rPr>
-              <a:t>机制②  个性化劝说力 ↑</a:t>
-            </a:r>
-          </a:p>
-        </p:txBody>
-      </p:sp>
-      <p:sp>
-        <p:nvSpPr>
-          <p:cNvPr id="6" name="Rounded Rectangle 5"/>
+              <a:t>M₂ 个性化劝说力 ↑</a:t>
+            </a:r>
+          </a:p>
+        </p:txBody>
+      </p:sp>
+      <p:sp>
+        <p:nvSpPr>
+          <p:cNvPr id="9" name="Rounded Rectangle 8"/>
           <p:cNvSpPr/>
           <p:nvPr/>
         </p:nvSpPr>
         <p:spPr>
           <a:xfrm>
-            <a:off x="411480" y="2432304"/>
-            <a:ext cx="3200400" cy="731520"/>
+            <a:off x="6446520" y="1783080"/>
+            <a:ext cx="5394960" cy="713232"/>
           </a:xfrm>
           <a:prstGeom prst="roundRect">
             <a:avLst/>
@@ -3797,28 +5346,39 @@
           <a:p>
             <a:pPr algn="ctr"/>
             <a:r>
-              <a:rPr sz="1200" b="1">
+              <a:rPr sz="1100" b="1">
                 <a:solidFill>
                   <a:srgbClr val="FFFFFF"/>
                 </a:solidFill>
                 <a:latin typeface="Microsoft YaHei"/>
               </a:rPr>
-              <a:t>Y-A 信贷可得性 ↑
-更多人·更易借到</a:t>
-            </a:r>
-          </a:p>
-        </p:txBody>
-      </p:sp>
-      <p:sp>
-        <p:nvSpPr>
-          <p:cNvPr id="7" name="Rounded Rectangle 6"/>
+              <a:t>Y-A 信贷可得性 ↑（H1）</a:t>
+            </a:r>
+          </a:p>
+          <a:p>
+            <a:pPr algn="ctr"/>
+            <a:r>
+              <a:rPr sz="1100" b="1">
+                <a:solidFill>
+                  <a:srgbClr val="FFFFFF"/>
+                </a:solidFill>
+                <a:latin typeface="Microsoft YaHei"/>
+              </a:rPr>
+              <a:t>借款概率·获批·放款规模·授信额度</a:t>
+            </a:r>
+          </a:p>
+        </p:txBody>
+      </p:sp>
+      <p:sp>
+        <p:nvSpPr>
+          <p:cNvPr id="10" name="Rounded Rectangle 9"/>
           <p:cNvSpPr/>
           <p:nvPr/>
         </p:nvSpPr>
         <p:spPr>
           <a:xfrm>
-            <a:off x="8579815" y="2432304"/>
-            <a:ext cx="3200400" cy="731520"/>
+            <a:off x="6446520" y="3246120"/>
+            <a:ext cx="5394960" cy="713232"/>
           </a:xfrm>
           <a:prstGeom prst="roundRect">
             <a:avLst/>
@@ -3853,28 +5413,39 @@
           <a:p>
             <a:pPr algn="ctr"/>
             <a:r>
-              <a:rPr sz="1200" b="1">
+              <a:rPr sz="1100" b="1">
                 <a:solidFill>
                   <a:srgbClr val="FFFFFF"/>
                 </a:solidFill>
                 <a:latin typeface="Microsoft YaHei"/>
               </a:rPr>
-              <a:t>Y-B 金融脆弱性 ↑
-重复借贷·多头·逾期违约</a:t>
-            </a:r>
-          </a:p>
-        </p:txBody>
-      </p:sp>
-      <p:sp>
-        <p:nvSpPr>
-          <p:cNvPr id="8" name="TextBox 7"/>
+              <a:t>Y-B 金融脆弱性 ↑（H2）</a:t>
+            </a:r>
+          </a:p>
+          <a:p>
+            <a:pPr algn="ctr"/>
+            <a:r>
+              <a:rPr sz="1100" b="1">
+                <a:solidFill>
+                  <a:srgbClr val="FFFFFF"/>
+                </a:solidFill>
+                <a:latin typeface="Microsoft YaHei"/>
+              </a:rPr>
+              <a:t>重复借贷·applist多头·DPD30+/违约·脆弱指数</a:t>
+            </a:r>
+          </a:p>
+        </p:txBody>
+      </p:sp>
+      <p:sp>
+        <p:nvSpPr>
+          <p:cNvPr id="11" name="TextBox 10"/>
           <p:cNvSpPr txBox="1"/>
           <p:nvPr/>
         </p:nvSpPr>
         <p:spPr>
           <a:xfrm>
-            <a:off x="4572000" y="2103120"/>
-            <a:ext cx="3047695" cy="292608"/>
+            <a:off x="6446520" y="2560320"/>
+            <a:ext cx="5394960" cy="274320"/>
           </a:xfrm>
           <a:prstGeom prst="rect">
             <a:avLst/>
@@ -3889,36 +5460,36 @@
           <a:p>
             <a:pPr algn="ctr"/>
             <a:r>
-              <a:rPr sz="1200" i="1" b="1">
+              <a:rPr sz="1100" i="1" b="1">
                 <a:solidFill>
                   <a:srgbClr val="8A4B08"/>
                 </a:solidFill>
                 <a:latin typeface="Microsoft YaHei"/>
               </a:rPr>
-              <a:t>—— 双刃张力 ——</a:t>
+              <a:t>◄—— 双刃张力 ——►</a:t>
             </a:r>
           </a:p>
         </p:txBody>
       </p:sp>
       <p:cxnSp>
         <p:nvCxnSpPr>
-          <p:cNvPr id="9" name="Connector 8"/>
+          <p:cNvPr id="12" name="Connector 11"/>
           <p:cNvCxnSpPr/>
           <p:nvPr/>
         </p:nvCxnSpPr>
         <p:spPr>
           <a:xfrm>
-            <a:off x="3611880" y="2798064"/>
-            <a:ext cx="4967935" cy="0"/>
+            <a:off x="3703320" y="1627632"/>
+            <a:ext cx="0" cy="585216"/>
           </a:xfrm>
           <a:prstGeom prst="line">
             <a:avLst/>
           </a:prstGeom>
           <a:ln w="19050">
             <a:solidFill>
-              <a:srgbClr val="8A4B08"/>
+              <a:srgbClr val="5A6B7B"/>
             </a:solidFill>
-            <a:prstDash val="dash"/>
+            <a:tailEnd type="triangle" w="med" len="med"/>
           </a:ln>
           <a:effectLst/>
         </p:spPr>
@@ -3937,16 +5508,163 @@
           </a:fontRef>
         </p:style>
       </p:cxnSp>
-      <p:sp>
-        <p:nvSpPr>
-          <p:cNvPr id="10" name="Diamond 9"/>
+      <p:cxnSp>
+        <p:nvCxnSpPr>
+          <p:cNvPr id="13" name="Connector 12"/>
+          <p:cNvCxnSpPr/>
+          <p:nvPr/>
+        </p:nvCxnSpPr>
+        <p:spPr>
+          <a:xfrm>
+            <a:off x="3703320" y="2724912"/>
+            <a:ext cx="0" cy="73152"/>
+          </a:xfrm>
+          <a:prstGeom prst="line">
+            <a:avLst/>
+          </a:prstGeom>
+          <a:ln w="19050">
+            <a:solidFill>
+              <a:srgbClr val="5A6B7B"/>
+            </a:solidFill>
+          </a:ln>
+          <a:effectLst/>
+        </p:spPr>
+        <p:style>
+          <a:lnRef idx="2">
+            <a:schemeClr val="accent1"/>
+          </a:lnRef>
+          <a:fillRef idx="0">
+            <a:schemeClr val="accent1"/>
+          </a:fillRef>
+          <a:effectRef idx="1">
+            <a:schemeClr val="accent1"/>
+          </a:effectRef>
+          <a:fontRef idx="minor">
+            <a:schemeClr val="tx1"/>
+          </a:fontRef>
+        </p:style>
+      </p:cxnSp>
+      <p:cxnSp>
+        <p:nvCxnSpPr>
+          <p:cNvPr id="14" name="Connector 13"/>
+          <p:cNvCxnSpPr/>
+          <p:nvPr/>
+        </p:nvCxnSpPr>
+        <p:spPr>
+          <a:xfrm flipV="1">
+            <a:off x="5715000" y="2139696"/>
+            <a:ext cx="731520" cy="914400"/>
+          </a:xfrm>
+          <a:prstGeom prst="line">
+            <a:avLst/>
+          </a:prstGeom>
+          <a:ln w="19050">
+            <a:solidFill>
+              <a:srgbClr val="5A6B7B"/>
+            </a:solidFill>
+            <a:tailEnd type="triangle" w="med" len="med"/>
+          </a:ln>
+          <a:effectLst/>
+        </p:spPr>
+        <p:style>
+          <a:lnRef idx="2">
+            <a:schemeClr val="accent1"/>
+          </a:lnRef>
+          <a:fillRef idx="0">
+            <a:schemeClr val="accent1"/>
+          </a:fillRef>
+          <a:effectRef idx="1">
+            <a:schemeClr val="accent1"/>
+          </a:effectRef>
+          <a:fontRef idx="minor">
+            <a:schemeClr val="tx1"/>
+          </a:fontRef>
+        </p:style>
+      </p:cxnSp>
+      <p:cxnSp>
+        <p:nvCxnSpPr>
+          <p:cNvPr id="15" name="Connector 14"/>
+          <p:cNvCxnSpPr/>
+          <p:nvPr/>
+        </p:nvCxnSpPr>
+        <p:spPr>
+          <a:xfrm>
+            <a:off x="5715000" y="3054096"/>
+            <a:ext cx="731520" cy="548640"/>
+          </a:xfrm>
+          <a:prstGeom prst="line">
+            <a:avLst/>
+          </a:prstGeom>
+          <a:ln w="19050">
+            <a:solidFill>
+              <a:srgbClr val="5A6B7B"/>
+            </a:solidFill>
+            <a:tailEnd type="triangle" w="med" len="med"/>
+          </a:ln>
+          <a:effectLst/>
+        </p:spPr>
+        <p:style>
+          <a:lnRef idx="2">
+            <a:schemeClr val="accent1"/>
+          </a:lnRef>
+          <a:fillRef idx="0">
+            <a:schemeClr val="accent1"/>
+          </a:fillRef>
+          <a:effectRef idx="1">
+            <a:schemeClr val="accent1"/>
+          </a:effectRef>
+          <a:fontRef idx="minor">
+            <a:schemeClr val="tx1"/>
+          </a:fontRef>
+        </p:style>
+      </p:cxnSp>
+      <p:cxnSp>
+        <p:nvCxnSpPr>
+          <p:cNvPr id="16" name="Connector 15"/>
+          <p:cNvCxnSpPr/>
+          <p:nvPr/>
+        </p:nvCxnSpPr>
+        <p:spPr>
+          <a:xfrm flipV="1">
+            <a:off x="5715000" y="1993391"/>
+            <a:ext cx="731520" cy="475489"/>
+          </a:xfrm>
+          <a:prstGeom prst="line">
+            <a:avLst/>
+          </a:prstGeom>
+          <a:ln w="12700">
+            <a:solidFill>
+              <a:srgbClr val="9AA7B2"/>
+            </a:solidFill>
+            <a:tailEnd type="triangle" w="med" len="med"/>
+          </a:ln>
+          <a:effectLst/>
+        </p:spPr>
+        <p:style>
+          <a:lnRef idx="2">
+            <a:schemeClr val="accent1"/>
+          </a:lnRef>
+          <a:fillRef idx="0">
+            <a:schemeClr val="accent1"/>
+          </a:fillRef>
+          <a:effectRef idx="1">
+            <a:schemeClr val="accent1"/>
+          </a:effectRef>
+          <a:fontRef idx="minor">
+            <a:schemeClr val="tx1"/>
+          </a:fontRef>
+        </p:style>
+      </p:cxnSp>
+      <p:sp>
+        <p:nvSpPr>
+          <p:cNvPr id="17" name="Diamond 16"/>
           <p:cNvSpPr/>
           <p:nvPr/>
         </p:nvSpPr>
         <p:spPr>
           <a:xfrm>
-            <a:off x="5227624" y="3346704"/>
-            <a:ext cx="1737360" cy="914400"/>
+            <a:off x="6446520" y="4160520"/>
+            <a:ext cx="1554480" cy="777240"/>
           </a:xfrm>
           <a:prstGeom prst="diamond">
             <a:avLst/>
@@ -3981,28 +5699,39 @@
           <a:p>
             <a:pPr algn="ctr"/>
             <a:r>
-              <a:rPr sz="1100" b="1">
+              <a:rPr sz="1000" b="1">
                 <a:solidFill>
                   <a:srgbClr val="FFFFFF"/>
                 </a:solidFill>
                 <a:latin typeface="Microsoft YaHei"/>
               </a:rPr>
-              <a:t>脆弱性
-来源分解</a:t>
-            </a:r>
-          </a:p>
-        </p:txBody>
-      </p:sp>
-      <p:sp>
-        <p:nvSpPr>
-          <p:cNvPr id="11" name="Rounded Rectangle 10"/>
+              <a:t>脆弱性</a:t>
+            </a:r>
+          </a:p>
+          <a:p>
+            <a:pPr algn="ctr"/>
+            <a:r>
+              <a:rPr sz="1000" b="1">
+                <a:solidFill>
+                  <a:srgbClr val="FFFFFF"/>
+                </a:solidFill>
+                <a:latin typeface="Microsoft YaHei"/>
+              </a:rPr>
+              <a:t>来源（H3）</a:t>
+            </a:r>
+          </a:p>
+        </p:txBody>
+      </p:sp>
+      <p:sp>
+        <p:nvSpPr>
+          <p:cNvPr id="18" name="Rounded Rectangle 17"/>
           <p:cNvSpPr/>
           <p:nvPr/>
         </p:nvSpPr>
         <p:spPr>
           <a:xfrm>
-            <a:off x="3246120" y="4434840"/>
-            <a:ext cx="2651760" cy="566928"/>
+            <a:off x="8229600" y="4133087"/>
+            <a:ext cx="1737360" cy="384048"/>
           </a:xfrm>
           <a:prstGeom prst="roundRect">
             <a:avLst/>
@@ -4037,28 +5766,27 @@
           <a:p>
             <a:pPr algn="ctr"/>
             <a:r>
-              <a:rPr sz="1100" b="1">
+              <a:rPr sz="950" b="1">
                 <a:solidFill>
                   <a:srgbClr val="202833"/>
                 </a:solidFill>
                 <a:latin typeface="Microsoft YaHei"/>
               </a:rPr>
-              <a:t>组成·外延
-更脆弱人群被卷入</a:t>
-            </a:r>
-          </a:p>
-        </p:txBody>
-      </p:sp>
-      <p:sp>
-        <p:nvSpPr>
-          <p:cNvPr id="12" name="Rounded Rectangle 11"/>
+              <a:t>组成·外延 更脆弱人群被卷入</a:t>
+            </a:r>
+          </a:p>
+        </p:txBody>
+      </p:sp>
+      <p:sp>
+        <p:nvSpPr>
+          <p:cNvPr id="19" name="Rounded Rectangle 18"/>
           <p:cNvSpPr/>
           <p:nvPr/>
         </p:nvSpPr>
         <p:spPr>
           <a:xfrm>
-            <a:off x="6293815" y="4434840"/>
-            <a:ext cx="2651760" cy="566928"/>
+            <a:off x="8229600" y="4572000"/>
+            <a:ext cx="1737360" cy="384048"/>
           </a:xfrm>
           <a:prstGeom prst="roundRect">
             <a:avLst/>
@@ -4093,28 +5821,764 @@
           <a:p>
             <a:pPr algn="ctr"/>
             <a:r>
-              <a:rPr sz="1100" b="1">
+              <a:rPr sz="950" b="1">
                 <a:solidFill>
                   <a:srgbClr val="202833"/>
                 </a:solidFill>
                 <a:latin typeface="Microsoft YaHei"/>
               </a:rPr>
-              <a:t>行为·内涵
-同类人借贷恶化</a:t>
-            </a:r>
-          </a:p>
-        </p:txBody>
-      </p:sp>
-      <p:sp>
-        <p:nvSpPr>
-          <p:cNvPr id="13" name="Rounded Rectangle 12"/>
+              <a:t>行为·内涵 同类人借贷恶化</a:t>
+            </a:r>
+          </a:p>
+        </p:txBody>
+      </p:sp>
+      <p:cxnSp>
+        <p:nvCxnSpPr>
+          <p:cNvPr id="20" name="Connector 19"/>
+          <p:cNvCxnSpPr/>
+          <p:nvPr/>
+        </p:nvCxnSpPr>
+        <p:spPr>
+          <a:xfrm flipH="1">
+            <a:off x="7223760" y="3959352"/>
+            <a:ext cx="1920240" cy="201168"/>
+          </a:xfrm>
+          <a:prstGeom prst="line">
+            <a:avLst/>
+          </a:prstGeom>
+          <a:ln w="19050">
+            <a:solidFill>
+              <a:srgbClr val="5A6B7B"/>
+            </a:solidFill>
+            <a:tailEnd type="triangle" w="med" len="med"/>
+          </a:ln>
+          <a:effectLst/>
+        </p:spPr>
+        <p:style>
+          <a:lnRef idx="2">
+            <a:schemeClr val="accent1"/>
+          </a:lnRef>
+          <a:fillRef idx="0">
+            <a:schemeClr val="accent1"/>
+          </a:fillRef>
+          <a:effectRef idx="1">
+            <a:schemeClr val="accent1"/>
+          </a:effectRef>
+          <a:fontRef idx="minor">
+            <a:schemeClr val="tx1"/>
+          </a:fontRef>
+        </p:style>
+      </p:cxnSp>
+      <p:cxnSp>
+        <p:nvCxnSpPr>
+          <p:cNvPr id="21" name="Connector 20"/>
+          <p:cNvCxnSpPr/>
+          <p:nvPr/>
+        </p:nvCxnSpPr>
+        <p:spPr>
+          <a:xfrm flipV="1">
+            <a:off x="8001000" y="4325111"/>
+            <a:ext cx="228600" cy="224029"/>
+          </a:xfrm>
+          <a:prstGeom prst="line">
+            <a:avLst/>
+          </a:prstGeom>
+          <a:ln w="19050">
+            <a:solidFill>
+              <a:srgbClr val="5A6B7B"/>
+            </a:solidFill>
+            <a:tailEnd type="triangle" w="med" len="med"/>
+          </a:ln>
+          <a:effectLst/>
+        </p:spPr>
+        <p:style>
+          <a:lnRef idx="2">
+            <a:schemeClr val="accent1"/>
+          </a:lnRef>
+          <a:fillRef idx="0">
+            <a:schemeClr val="accent1"/>
+          </a:fillRef>
+          <a:effectRef idx="1">
+            <a:schemeClr val="accent1"/>
+          </a:effectRef>
+          <a:fontRef idx="minor">
+            <a:schemeClr val="tx1"/>
+          </a:fontRef>
+        </p:style>
+      </p:cxnSp>
+      <p:cxnSp>
+        <p:nvCxnSpPr>
+          <p:cNvPr id="22" name="Connector 21"/>
+          <p:cNvCxnSpPr/>
+          <p:nvPr/>
+        </p:nvCxnSpPr>
+        <p:spPr>
+          <a:xfrm>
+            <a:off x="8001000" y="4549140"/>
+            <a:ext cx="228600" cy="214884"/>
+          </a:xfrm>
+          <a:prstGeom prst="line">
+            <a:avLst/>
+          </a:prstGeom>
+          <a:ln w="19050">
+            <a:solidFill>
+              <a:srgbClr val="5A6B7B"/>
+            </a:solidFill>
+            <a:tailEnd type="triangle" w="med" len="med"/>
+          </a:ln>
+          <a:effectLst/>
+        </p:spPr>
+        <p:style>
+          <a:lnRef idx="2">
+            <a:schemeClr val="accent1"/>
+          </a:lnRef>
+          <a:fillRef idx="0">
+            <a:schemeClr val="accent1"/>
+          </a:fillRef>
+          <a:effectRef idx="1">
+            <a:schemeClr val="accent1"/>
+          </a:effectRef>
+          <a:fontRef idx="minor">
+            <a:schemeClr val="tx1"/>
+          </a:fontRef>
+        </p:style>
+      </p:cxnSp>
+      <p:sp>
+        <p:nvSpPr>
+          <p:cNvPr id="23" name="Rounded Rectangle 22"/>
           <p:cNvSpPr/>
           <p:nvPr/>
         </p:nvSpPr>
         <p:spPr>
           <a:xfrm>
-            <a:off x="475488" y="5175504"/>
-            <a:ext cx="3611880" cy="731520"/>
+            <a:off x="1691640" y="5029200"/>
+            <a:ext cx="4023360" cy="713232"/>
+          </a:xfrm>
+          <a:prstGeom prst="roundRect">
+            <a:avLst/>
+          </a:prstGeom>
+          <a:solidFill>
+            <a:srgbClr val="6A3D9A"/>
+          </a:solidFill>
+          <a:ln w="12700">
+            <a:solidFill>
+              <a:srgbClr val="6A3D9A"/>
+            </a:solidFill>
+          </a:ln>
+          <a:effectLst/>
+        </p:spPr>
+        <p:style>
+          <a:lnRef idx="1">
+            <a:schemeClr val="accent1"/>
+          </a:lnRef>
+          <a:fillRef idx="3">
+            <a:schemeClr val="accent1"/>
+          </a:fillRef>
+          <a:effectRef idx="2">
+            <a:schemeClr val="accent1"/>
+          </a:effectRef>
+          <a:fontRef idx="minor">
+            <a:schemeClr val="lt1"/>
+          </a:fontRef>
+        </p:style>
+        <p:txBody>
+          <a:bodyPr rtlCol="0" anchor="ctr" wrap="square" lIns="50800" rIns="50800" tIns="25400" bIns="25400"/>
+          <a:lstStyle/>
+          <a:p>
+            <a:pPr algn="ctr"/>
+            <a:r>
+              <a:rPr sz="1000" b="1">
+                <a:solidFill>
+                  <a:srgbClr val="FFFFFF"/>
+                </a:solidFill>
+                <a:latin typeface="Microsoft YaHei"/>
+              </a:rPr>
+              <a:t>调节变量 W（H4·异质性）</a:t>
+            </a:r>
+          </a:p>
+          <a:p>
+            <a:pPr algn="ctr"/>
+            <a:r>
+              <a:rPr sz="1000" b="1">
+                <a:solidFill>
+                  <a:srgbClr val="FFFFFF"/>
+                </a:solidFill>
+                <a:latin typeface="Microsoft YaHei"/>
+              </a:rPr>
+              <a:t>IVR→LLM 智能化梯度（剂量响应）｜客户风险类型·征信分</a:t>
+            </a:r>
+          </a:p>
+        </p:txBody>
+      </p:sp>
+      <p:cxnSp>
+        <p:nvCxnSpPr>
+          <p:cNvPr id="24" name="Connector 23"/>
+          <p:cNvCxnSpPr/>
+          <p:nvPr/>
+        </p:nvCxnSpPr>
+        <p:spPr>
+          <a:xfrm flipV="1">
+            <a:off x="3703320" y="3328416"/>
+            <a:ext cx="0" cy="1700784"/>
+          </a:xfrm>
+          <a:prstGeom prst="line">
+            <a:avLst/>
+          </a:prstGeom>
+          <a:ln w="16510">
+            <a:solidFill>
+              <a:srgbClr val="6A3D9A"/>
+            </a:solidFill>
+            <a:prstDash val="dash"/>
+            <a:tailEnd type="triangle" w="med" len="med"/>
+          </a:ln>
+          <a:effectLst/>
+        </p:spPr>
+        <p:style>
+          <a:lnRef idx="2">
+            <a:schemeClr val="accent1"/>
+          </a:lnRef>
+          <a:fillRef idx="0">
+            <a:schemeClr val="accent1"/>
+          </a:fillRef>
+          <a:effectRef idx="1">
+            <a:schemeClr val="accent1"/>
+          </a:effectRef>
+          <a:fontRef idx="minor">
+            <a:schemeClr val="tx1"/>
+          </a:fontRef>
+        </p:style>
+      </p:cxnSp>
+      <p:sp>
+        <p:nvSpPr>
+          <p:cNvPr id="25" name="Rectangle 24"/>
+          <p:cNvSpPr/>
+          <p:nvPr/>
+        </p:nvSpPr>
+        <p:spPr>
+          <a:xfrm>
+            <a:off x="274320" y="6053328"/>
+            <a:ext cx="11643055" cy="384048"/>
+          </a:xfrm>
+          <a:prstGeom prst="rect">
+            <a:avLst/>
+          </a:prstGeom>
+          <a:solidFill>
+            <a:srgbClr val="1F3B5B"/>
+          </a:solidFill>
+          <a:ln w="12700">
+            <a:solidFill>
+              <a:srgbClr val="1F3B5B"/>
+            </a:solidFill>
+          </a:ln>
+          <a:effectLst/>
+        </p:spPr>
+        <p:style>
+          <a:lnRef idx="1">
+            <a:schemeClr val="accent1"/>
+          </a:lnRef>
+          <a:fillRef idx="3">
+            <a:schemeClr val="accent1"/>
+          </a:fillRef>
+          <a:effectRef idx="2">
+            <a:schemeClr val="accent1"/>
+          </a:effectRef>
+          <a:fontRef idx="minor">
+            <a:schemeClr val="lt1"/>
+          </a:fontRef>
+        </p:style>
+        <p:txBody>
+          <a:bodyPr rtlCol="0" anchor="ctr" wrap="square" lIns="50800" rIns="50800" tIns="25400" bIns="25400"/>
+          <a:lstStyle/>
+          <a:p>
+            <a:pPr algn="ctr"/>
+            <a:r>
+              <a:rPr sz="1050" b="1">
+                <a:solidFill>
+                  <a:srgbClr val="FFFFFF"/>
+                </a:solidFill>
+                <a:latin typeface="Microsoft YaHei"/>
+              </a:rPr>
+              <a:t>控制 Z：征信分·历史多头·负债收入比·年龄·名单来源·活动类型·时段·地域　|　识别：以升级日为外生时点的 Stacked RD-in-time</a:t>
+            </a:r>
+          </a:p>
+        </p:txBody>
+      </p:sp>
+      <p:sp>
+        <p:nvSpPr>
+          <p:cNvPr id="26" name="Rectangle 25"/>
+          <p:cNvSpPr/>
+          <p:nvPr/>
+        </p:nvSpPr>
+        <p:spPr>
+          <a:xfrm>
+            <a:off x="274320" y="6446520"/>
+            <a:ext cx="201168" cy="146304"/>
+          </a:xfrm>
+          <a:prstGeom prst="rect">
+            <a:avLst/>
+          </a:prstGeom>
+          <a:solidFill>
+            <a:srgbClr val="1F3B5B"/>
+          </a:solidFill>
+          <a:ln>
+            <a:noFill/>
+          </a:ln>
+          <a:effectLst/>
+        </p:spPr>
+        <p:style>
+          <a:lnRef idx="1">
+            <a:schemeClr val="accent1"/>
+          </a:lnRef>
+          <a:fillRef idx="3">
+            <a:schemeClr val="accent1"/>
+          </a:fillRef>
+          <a:effectRef idx="2">
+            <a:schemeClr val="accent1"/>
+          </a:effectRef>
+          <a:fontRef idx="minor">
+            <a:schemeClr val="lt1"/>
+          </a:fontRef>
+        </p:style>
+        <p:txBody>
+          <a:bodyPr rtlCol="0" anchor="ctr"/>
+          <a:lstStyle/>
+          <a:p>
+            <a:pPr algn="ctr"/>
+          </a:p>
+        </p:txBody>
+      </p:sp>
+      <p:sp>
+        <p:nvSpPr>
+          <p:cNvPr id="27" name="TextBox 26"/>
+          <p:cNvSpPr txBox="1"/>
+          <p:nvPr/>
+        </p:nvSpPr>
+        <p:spPr>
+          <a:xfrm>
+            <a:off x="512064" y="6391656"/>
+            <a:ext cx="1737360" cy="274320"/>
+          </a:xfrm>
+          <a:prstGeom prst="rect">
+            <a:avLst/>
+          </a:prstGeom>
+          <a:noFill/>
+        </p:spPr>
+        <p:txBody>
+          <a:bodyPr wrap="square" anchor="ctr">
+            <a:spAutoFit/>
+          </a:bodyPr>
+          <a:lstStyle/>
+          <a:p>
+            <a:pPr algn="l"/>
+            <a:r>
+              <a:rPr sz="900" i="0" b="0">
+                <a:solidFill>
+                  <a:srgbClr val="202833"/>
+                </a:solidFill>
+                <a:latin typeface="Microsoft YaHei"/>
+              </a:rPr>
+              <a:t>自变量X</a:t>
+            </a:r>
+          </a:p>
+        </p:txBody>
+      </p:sp>
+      <p:sp>
+        <p:nvSpPr>
+          <p:cNvPr id="28" name="Rectangle 27"/>
+          <p:cNvSpPr/>
+          <p:nvPr/>
+        </p:nvSpPr>
+        <p:spPr>
+          <a:xfrm>
+            <a:off x="1773936" y="6446520"/>
+            <a:ext cx="201168" cy="146304"/>
+          </a:xfrm>
+          <a:prstGeom prst="rect">
+            <a:avLst/>
+          </a:prstGeom>
+          <a:solidFill>
+            <a:srgbClr val="1B7F79"/>
+          </a:solidFill>
+          <a:ln>
+            <a:noFill/>
+          </a:ln>
+          <a:effectLst/>
+        </p:spPr>
+        <p:style>
+          <a:lnRef idx="1">
+            <a:schemeClr val="accent1"/>
+          </a:lnRef>
+          <a:fillRef idx="3">
+            <a:schemeClr val="accent1"/>
+          </a:fillRef>
+          <a:effectRef idx="2">
+            <a:schemeClr val="accent1"/>
+          </a:effectRef>
+          <a:fontRef idx="minor">
+            <a:schemeClr val="lt1"/>
+          </a:fontRef>
+        </p:style>
+        <p:txBody>
+          <a:bodyPr rtlCol="0" anchor="ctr"/>
+          <a:lstStyle/>
+          <a:p>
+            <a:pPr algn="ctr"/>
+          </a:p>
+        </p:txBody>
+      </p:sp>
+      <p:sp>
+        <p:nvSpPr>
+          <p:cNvPr id="29" name="TextBox 28"/>
+          <p:cNvSpPr txBox="1"/>
+          <p:nvPr/>
+        </p:nvSpPr>
+        <p:spPr>
+          <a:xfrm>
+            <a:off x="2011680" y="6391656"/>
+            <a:ext cx="1737360" cy="274320"/>
+          </a:xfrm>
+          <a:prstGeom prst="rect">
+            <a:avLst/>
+          </a:prstGeom>
+          <a:noFill/>
+        </p:spPr>
+        <p:txBody>
+          <a:bodyPr wrap="square" anchor="ctr">
+            <a:spAutoFit/>
+          </a:bodyPr>
+          <a:lstStyle/>
+          <a:p>
+            <a:pPr algn="l"/>
+            <a:r>
+              <a:rPr sz="900" i="0" b="0">
+                <a:solidFill>
+                  <a:srgbClr val="202833"/>
+                </a:solidFill>
+                <a:latin typeface="Microsoft YaHei"/>
+              </a:rPr>
+              <a:t>中介机制M</a:t>
+            </a:r>
+          </a:p>
+        </p:txBody>
+      </p:sp>
+      <p:sp>
+        <p:nvSpPr>
+          <p:cNvPr id="30" name="Rectangle 29"/>
+          <p:cNvSpPr/>
+          <p:nvPr/>
+        </p:nvSpPr>
+        <p:spPr>
+          <a:xfrm>
+            <a:off x="3419856" y="6446520"/>
+            <a:ext cx="201168" cy="146304"/>
+          </a:xfrm>
+          <a:prstGeom prst="rect">
+            <a:avLst/>
+          </a:prstGeom>
+          <a:solidFill>
+            <a:srgbClr val="B03A2E"/>
+          </a:solidFill>
+          <a:ln>
+            <a:noFill/>
+          </a:ln>
+          <a:effectLst/>
+        </p:spPr>
+        <p:style>
+          <a:lnRef idx="1">
+            <a:schemeClr val="accent1"/>
+          </a:lnRef>
+          <a:fillRef idx="3">
+            <a:schemeClr val="accent1"/>
+          </a:fillRef>
+          <a:effectRef idx="2">
+            <a:schemeClr val="accent1"/>
+          </a:effectRef>
+          <a:fontRef idx="minor">
+            <a:schemeClr val="lt1"/>
+          </a:fontRef>
+        </p:style>
+        <p:txBody>
+          <a:bodyPr rtlCol="0" anchor="ctr"/>
+          <a:lstStyle/>
+          <a:p>
+            <a:pPr algn="ctr"/>
+          </a:p>
+        </p:txBody>
+      </p:sp>
+      <p:sp>
+        <p:nvSpPr>
+          <p:cNvPr id="31" name="TextBox 30"/>
+          <p:cNvSpPr txBox="1"/>
+          <p:nvPr/>
+        </p:nvSpPr>
+        <p:spPr>
+          <a:xfrm>
+            <a:off x="3657600" y="6391656"/>
+            <a:ext cx="1737360" cy="274320"/>
+          </a:xfrm>
+          <a:prstGeom prst="rect">
+            <a:avLst/>
+          </a:prstGeom>
+          <a:noFill/>
+        </p:spPr>
+        <p:txBody>
+          <a:bodyPr wrap="square" anchor="ctr">
+            <a:spAutoFit/>
+          </a:bodyPr>
+          <a:lstStyle/>
+          <a:p>
+            <a:pPr algn="l"/>
+            <a:r>
+              <a:rPr sz="900" i="0" b="0">
+                <a:solidFill>
+                  <a:srgbClr val="202833"/>
+                </a:solidFill>
+                <a:latin typeface="Microsoft YaHei"/>
+              </a:rPr>
+              <a:t>因变量Y</a:t>
+            </a:r>
+          </a:p>
+        </p:txBody>
+      </p:sp>
+      <p:sp>
+        <p:nvSpPr>
+          <p:cNvPr id="32" name="Rectangle 31"/>
+          <p:cNvSpPr/>
+          <p:nvPr/>
+        </p:nvSpPr>
+        <p:spPr>
+          <a:xfrm>
+            <a:off x="4919472" y="6446520"/>
+            <a:ext cx="201168" cy="146304"/>
+          </a:xfrm>
+          <a:prstGeom prst="rect">
+            <a:avLst/>
+          </a:prstGeom>
+          <a:solidFill>
+            <a:srgbClr val="6A3D9A"/>
+          </a:solidFill>
+          <a:ln>
+            <a:noFill/>
+          </a:ln>
+          <a:effectLst/>
+        </p:spPr>
+        <p:style>
+          <a:lnRef idx="1">
+            <a:schemeClr val="accent1"/>
+          </a:lnRef>
+          <a:fillRef idx="3">
+            <a:schemeClr val="accent1"/>
+          </a:fillRef>
+          <a:effectRef idx="2">
+            <a:schemeClr val="accent1"/>
+          </a:effectRef>
+          <a:fontRef idx="minor">
+            <a:schemeClr val="lt1"/>
+          </a:fontRef>
+        </p:style>
+        <p:txBody>
+          <a:bodyPr rtlCol="0" anchor="ctr"/>
+          <a:lstStyle/>
+          <a:p>
+            <a:pPr algn="ctr"/>
+          </a:p>
+        </p:txBody>
+      </p:sp>
+      <p:sp>
+        <p:nvSpPr>
+          <p:cNvPr id="33" name="TextBox 32"/>
+          <p:cNvSpPr txBox="1"/>
+          <p:nvPr/>
+        </p:nvSpPr>
+        <p:spPr>
+          <a:xfrm>
+            <a:off x="5157216" y="6391656"/>
+            <a:ext cx="1737360" cy="274320"/>
+          </a:xfrm>
+          <a:prstGeom prst="rect">
+            <a:avLst/>
+          </a:prstGeom>
+          <a:noFill/>
+        </p:spPr>
+        <p:txBody>
+          <a:bodyPr wrap="square" anchor="ctr">
+            <a:spAutoFit/>
+          </a:bodyPr>
+          <a:lstStyle/>
+          <a:p>
+            <a:pPr algn="l"/>
+            <a:r>
+              <a:rPr sz="900" i="0" b="0">
+                <a:solidFill>
+                  <a:srgbClr val="202833"/>
+                </a:solidFill>
+                <a:latin typeface="Microsoft YaHei"/>
+              </a:rPr>
+              <a:t>调节W</a:t>
+            </a:r>
+          </a:p>
+        </p:txBody>
+      </p:sp>
+      <p:sp>
+        <p:nvSpPr>
+          <p:cNvPr id="34" name="Rectangle 33"/>
+          <p:cNvSpPr/>
+          <p:nvPr/>
+        </p:nvSpPr>
+        <p:spPr>
+          <a:xfrm>
+            <a:off x="6272784" y="6446520"/>
+            <a:ext cx="201168" cy="146304"/>
+          </a:xfrm>
+          <a:prstGeom prst="rect">
+            <a:avLst/>
+          </a:prstGeom>
+          <a:solidFill>
+            <a:srgbClr val="C87F0A"/>
+          </a:solidFill>
+          <a:ln>
+            <a:noFill/>
+          </a:ln>
+          <a:effectLst/>
+        </p:spPr>
+        <p:style>
+          <a:lnRef idx="1">
+            <a:schemeClr val="accent1"/>
+          </a:lnRef>
+          <a:fillRef idx="3">
+            <a:schemeClr val="accent1"/>
+          </a:fillRef>
+          <a:effectRef idx="2">
+            <a:schemeClr val="accent1"/>
+          </a:effectRef>
+          <a:fontRef idx="minor">
+            <a:schemeClr val="lt1"/>
+          </a:fontRef>
+        </p:style>
+        <p:txBody>
+          <a:bodyPr rtlCol="0" anchor="ctr"/>
+          <a:lstStyle/>
+          <a:p>
+            <a:pPr algn="ctr"/>
+          </a:p>
+        </p:txBody>
+      </p:sp>
+      <p:sp>
+        <p:nvSpPr>
+          <p:cNvPr id="35" name="TextBox 34"/>
+          <p:cNvSpPr txBox="1"/>
+          <p:nvPr/>
+        </p:nvSpPr>
+        <p:spPr>
+          <a:xfrm>
+            <a:off x="6510528" y="6391656"/>
+            <a:ext cx="1737360" cy="274320"/>
+          </a:xfrm>
+          <a:prstGeom prst="rect">
+            <a:avLst/>
+          </a:prstGeom>
+          <a:noFill/>
+        </p:spPr>
+        <p:txBody>
+          <a:bodyPr wrap="square" anchor="ctr">
+            <a:spAutoFit/>
+          </a:bodyPr>
+          <a:lstStyle/>
+          <a:p>
+            <a:pPr algn="l"/>
+            <a:r>
+              <a:rPr sz="900" i="0" b="0">
+                <a:solidFill>
+                  <a:srgbClr val="202833"/>
+                </a:solidFill>
+                <a:latin typeface="Microsoft YaHei"/>
+              </a:rPr>
+              <a:t>分解/识别</a:t>
+            </a:r>
+          </a:p>
+        </p:txBody>
+      </p:sp>
+    </p:spTree>
+  </p:cSld>
+  <p:clrMapOvr>
+    <a:masterClrMapping/>
+  </p:clrMapOvr>
+</p:sld>
+</file>
+
+<file path=ppt/slides/slide3.xml><?xml version="1.0" encoding="utf-8"?>
+<p:sld xmlns:a="http://schemas.openxmlformats.org/drawingml/2006/main" xmlns:p="http://schemas.openxmlformats.org/presentationml/2006/main" xmlns:r="http://schemas.openxmlformats.org/officeDocument/2006/relationships">
+  <p:cSld>
+    <p:spTree>
+      <p:nvGrpSpPr>
+        <p:cNvPr id="1" name=""/>
+        <p:cNvGrpSpPr/>
+        <p:nvPr/>
+      </p:nvGrpSpPr>
+      <p:grpSpPr/>
+      <p:sp>
+        <p:nvSpPr>
+          <p:cNvPr id="2" name="Rectangle 1"/>
+          <p:cNvSpPr/>
+          <p:nvPr/>
+        </p:nvSpPr>
+        <p:spPr>
+          <a:xfrm>
+            <a:off x="0" y="0"/>
+            <a:ext cx="12191695" cy="603504"/>
+          </a:xfrm>
+          <a:prstGeom prst="rect">
+            <a:avLst/>
+          </a:prstGeom>
+          <a:solidFill>
+            <a:srgbClr val="1F3B5B"/>
+          </a:solidFill>
+          <a:ln>
+            <a:noFill/>
+          </a:ln>
+          <a:effectLst/>
+        </p:spPr>
+        <p:style>
+          <a:lnRef idx="1">
+            <a:schemeClr val="accent1"/>
+          </a:lnRef>
+          <a:fillRef idx="3">
+            <a:schemeClr val="accent1"/>
+          </a:fillRef>
+          <a:effectRef idx="2">
+            <a:schemeClr val="accent1"/>
+          </a:effectRef>
+          <a:fontRef idx="minor">
+            <a:schemeClr val="lt1"/>
+          </a:fontRef>
+        </p:style>
+        <p:txBody>
+          <a:bodyPr rtlCol="0" anchor="ctr" wrap="square"/>
+          <a:lstStyle/>
+          <a:p>
+            <a:pPr algn="ctr"/>
+            <a:r>
+              <a:rPr sz="1900" b="1">
+                <a:solidFill>
+                  <a:srgbClr val="FFFFFF"/>
+                </a:solidFill>
+                <a:latin typeface="Microsoft YaHei"/>
+              </a:rPr>
+              <a:t>第一章 技术路线图  问题 → 数据 → 识别 → 检验 → 结论</a:t>
+            </a:r>
+          </a:p>
+        </p:txBody>
+      </p:sp>
+      <p:sp>
+        <p:nvSpPr>
+          <p:cNvPr id="3" name="Rounded Rectangle 2"/>
+          <p:cNvSpPr/>
+          <p:nvPr/>
+        </p:nvSpPr>
+        <p:spPr>
+          <a:xfrm>
+            <a:off x="3355848" y="777240"/>
+            <a:ext cx="5486400" cy="512064"/>
           </a:xfrm>
           <a:prstGeom prst="roundRect">
             <a:avLst/>
@@ -4149,28 +6613,27 @@
           <a:p>
             <a:pPr algn="ctr"/>
             <a:r>
-              <a:rPr sz="1100" b="1">
+              <a:rPr sz="1200" b="1">
                 <a:solidFill>
                   <a:srgbClr val="FFFFFF"/>
                 </a:solidFill>
                 <a:latin typeface="Microsoft YaHei"/>
               </a:rPr>
-              <a:t>第一章·微观 马消客户级
-Stacked RD-in-time + DFL 分解</a:t>
-            </a:r>
-          </a:p>
-        </p:txBody>
-      </p:sp>
-      <p:sp>
-        <p:nvSpPr>
-          <p:cNvPr id="14" name="Rounded Rectangle 13"/>
+              <a:t>研究问题：LLM接入是否同时抬高信贷可得性与金融脆弱性？</a:t>
+            </a:r>
+          </a:p>
+        </p:txBody>
+      </p:sp>
+      <p:sp>
+        <p:nvSpPr>
+          <p:cNvPr id="4" name="Rounded Rectangle 3"/>
           <p:cNvSpPr/>
           <p:nvPr/>
         </p:nvSpPr>
         <p:spPr>
           <a:xfrm>
-            <a:off x="4288536" y="5175504"/>
-            <a:ext cx="3611880" cy="731520"/>
+            <a:off x="3355848" y="1481328"/>
+            <a:ext cx="5486400" cy="512064"/>
           </a:xfrm>
           <a:prstGeom prst="roundRect">
             <a:avLst/>
@@ -4211,22 +6674,21 @@
                 </a:solidFill>
                 <a:latin typeface="Microsoft YaHei"/>
               </a:rPr>
-              <a:t>第二章·中观 裁判文书+扩散代理
-双向FE + Bartik IV</a:t>
-            </a:r>
-          </a:p>
-        </p:txBody>
-      </p:sp>
-      <p:sp>
-        <p:nvSpPr>
-          <p:cNvPr id="15" name="Rounded Rectangle 14"/>
+              <a:t>数据：全量AI拨打 + 每通模型版本 + 用信表 + applist多头</a:t>
+            </a:r>
+          </a:p>
+        </p:txBody>
+      </p:sp>
+      <p:sp>
+        <p:nvSpPr>
+          <p:cNvPr id="5" name="Rounded Rectangle 4"/>
           <p:cNvSpPr/>
           <p:nvPr/>
         </p:nvSpPr>
         <p:spPr>
           <a:xfrm>
-            <a:off x="8101583" y="5175504"/>
-            <a:ext cx="3611880" cy="731520"/>
+            <a:off x="3355848" y="2185416"/>
+            <a:ext cx="5486400" cy="512064"/>
           </a:xfrm>
           <a:prstGeom prst="roundRect">
             <a:avLst/>
@@ -4267,22 +6729,592 @@
                 </a:solidFill>
                 <a:latin typeface="Microsoft YaHei"/>
               </a:rPr>
-              <a:t>第三章·宏观 CHFS/CFPS
-监管DDD + 2SLS</a:t>
-            </a:r>
-          </a:p>
-        </p:txBody>
-      </p:sp>
-      <p:sp>
-        <p:nvSpPr>
-          <p:cNvPr id="16" name="Rectangle 15"/>
+              <a:t>反推 LLM 接入日 g  +  采用曲线诊断（陡跳 / 灰度爬坡）</a:t>
+            </a:r>
+          </a:p>
+        </p:txBody>
+      </p:sp>
+      <p:sp>
+        <p:nvSpPr>
+          <p:cNvPr id="6" name="Rounded Rectangle 5"/>
           <p:cNvSpPr/>
           <p:nvPr/>
         </p:nvSpPr>
         <p:spPr>
           <a:xfrm>
+            <a:off x="1463040" y="2926080"/>
+            <a:ext cx="4206240" cy="566928"/>
+          </a:xfrm>
+          <a:prstGeom prst="roundRect">
+            <a:avLst/>
+          </a:prstGeom>
+          <a:solidFill>
+            <a:srgbClr val="1B7F79"/>
+          </a:solidFill>
+          <a:ln w="12700">
+            <a:solidFill>
+              <a:srgbClr val="1B7F79"/>
+            </a:solidFill>
+          </a:ln>
+          <a:effectLst/>
+        </p:spPr>
+        <p:style>
+          <a:lnRef idx="1">
+            <a:schemeClr val="accent1"/>
+          </a:lnRef>
+          <a:fillRef idx="3">
+            <a:schemeClr val="accent1"/>
+          </a:fillRef>
+          <a:effectRef idx="2">
+            <a:schemeClr val="accent1"/>
+          </a:effectRef>
+          <a:fontRef idx="minor">
+            <a:schemeClr val="lt1"/>
+          </a:fontRef>
+        </p:style>
+        <p:txBody>
+          <a:bodyPr rtlCol="0" anchor="ctr" wrap="square" lIns="50800" rIns="50800" tIns="25400" bIns="25400"/>
+          <a:lstStyle/>
+          <a:p>
+            <a:pPr algn="ctr"/>
+            <a:r>
+              <a:rPr sz="1100" b="1">
+                <a:solidFill>
+                  <a:srgbClr val="FFFFFF"/>
+                </a:solidFill>
+                <a:latin typeface="Microsoft YaHei"/>
+              </a:rPr>
+              <a:t>陡跳 → Stacked RD-in-time（主模型）</a:t>
+            </a:r>
+          </a:p>
+        </p:txBody>
+      </p:sp>
+      <p:sp>
+        <p:nvSpPr>
+          <p:cNvPr id="7" name="Rounded Rectangle 6"/>
+          <p:cNvSpPr/>
+          <p:nvPr/>
+        </p:nvSpPr>
+        <p:spPr>
+          <a:xfrm>
+            <a:off x="6492240" y="2926080"/>
+            <a:ext cx="4206240" cy="566928"/>
+          </a:xfrm>
+          <a:prstGeom prst="roundRect">
+            <a:avLst/>
+          </a:prstGeom>
+          <a:solidFill>
+            <a:srgbClr val="C87F0A"/>
+          </a:solidFill>
+          <a:ln w="12700">
+            <a:solidFill>
+              <a:srgbClr val="C87F0A"/>
+            </a:solidFill>
+          </a:ln>
+          <a:effectLst/>
+        </p:spPr>
+        <p:style>
+          <a:lnRef idx="1">
+            <a:schemeClr val="accent1"/>
+          </a:lnRef>
+          <a:fillRef idx="3">
+            <a:schemeClr val="accent1"/>
+          </a:fillRef>
+          <a:effectRef idx="2">
+            <a:schemeClr val="accent1"/>
+          </a:effectRef>
+          <a:fontRef idx="minor">
+            <a:schemeClr val="lt1"/>
+          </a:fontRef>
+        </p:style>
+        <p:txBody>
+          <a:bodyPr rtlCol="0" anchor="ctr" wrap="square" lIns="50800" rIns="50800" tIns="25400" bIns="25400"/>
+          <a:lstStyle/>
+          <a:p>
+            <a:pPr algn="ctr"/>
+            <a:r>
+              <a:rPr sz="1100" b="1">
+                <a:solidFill>
+                  <a:srgbClr val="FFFFFF"/>
+                </a:solidFill>
+                <a:latin typeface="Microsoft YaHei"/>
+              </a:rPr>
+              <a:t>爬坡 → Fuzzy RD / 剂量交错DiD</a:t>
+            </a:r>
+          </a:p>
+        </p:txBody>
+      </p:sp>
+      <p:sp>
+        <p:nvSpPr>
+          <p:cNvPr id="8" name="Rounded Rectangle 7"/>
+          <p:cNvSpPr/>
+          <p:nvPr/>
+        </p:nvSpPr>
+        <p:spPr>
+          <a:xfrm>
+            <a:off x="3355848" y="3703320"/>
+            <a:ext cx="5486400" cy="512064"/>
+          </a:xfrm>
+          <a:prstGeom prst="roundRect">
+            <a:avLst/>
+          </a:prstGeom>
+          <a:solidFill>
+            <a:srgbClr val="2E7D32"/>
+          </a:solidFill>
+          <a:ln w="12700">
+            <a:solidFill>
+              <a:srgbClr val="2E7D32"/>
+            </a:solidFill>
+          </a:ln>
+          <a:effectLst/>
+        </p:spPr>
+        <p:style>
+          <a:lnRef idx="1">
+            <a:schemeClr val="accent1"/>
+          </a:lnRef>
+          <a:fillRef idx="3">
+            <a:schemeClr val="accent1"/>
+          </a:fillRef>
+          <a:effectRef idx="2">
+            <a:schemeClr val="accent1"/>
+          </a:effectRef>
+          <a:fontRef idx="minor">
+            <a:schemeClr val="lt1"/>
+          </a:fontRef>
+        </p:style>
+        <p:txBody>
+          <a:bodyPr rtlCol="0" anchor="ctr" wrap="square" lIns="50800" rIns="50800" tIns="25400" bIns="25400"/>
+          <a:lstStyle/>
+          <a:p>
+            <a:pPr algn="ctr"/>
+            <a:r>
+              <a:rPr sz="1100" b="1">
+                <a:solidFill>
+                  <a:srgbClr val="FFFFFF"/>
+                </a:solidFill>
+                <a:latin typeface="Microsoft YaHei"/>
+              </a:rPr>
+              <a:t>估计 双结果：Y-A 信贷可得性  &amp;  Y-B 金融脆弱性</a:t>
+            </a:r>
+          </a:p>
+        </p:txBody>
+      </p:sp>
+      <p:sp>
+        <p:nvSpPr>
+          <p:cNvPr id="9" name="Rounded Rectangle 8"/>
+          <p:cNvSpPr/>
+          <p:nvPr/>
+        </p:nvSpPr>
+        <p:spPr>
+          <a:xfrm>
+            <a:off x="3355848" y="4407408"/>
+            <a:ext cx="5486400" cy="512064"/>
+          </a:xfrm>
+          <a:prstGeom prst="roundRect">
+            <a:avLst/>
+          </a:prstGeom>
+          <a:solidFill>
+            <a:srgbClr val="C87F0A"/>
+          </a:solidFill>
+          <a:ln w="12700">
+            <a:solidFill>
+              <a:srgbClr val="C87F0A"/>
+            </a:solidFill>
+          </a:ln>
+          <a:effectLst/>
+        </p:spPr>
+        <p:style>
+          <a:lnRef idx="1">
+            <a:schemeClr val="accent1"/>
+          </a:lnRef>
+          <a:fillRef idx="3">
+            <a:schemeClr val="accent1"/>
+          </a:fillRef>
+          <a:effectRef idx="2">
+            <a:schemeClr val="accent1"/>
+          </a:effectRef>
+          <a:fontRef idx="minor">
+            <a:schemeClr val="lt1"/>
+          </a:fontRef>
+        </p:style>
+        <p:txBody>
+          <a:bodyPr rtlCol="0" anchor="ctr" wrap="square" lIns="50800" rIns="50800" tIns="25400" bIns="25400"/>
+          <a:lstStyle/>
+          <a:p>
+            <a:pPr algn="ctr"/>
+            <a:r>
+              <a:rPr sz="1100" b="1">
+                <a:solidFill>
+                  <a:srgbClr val="FFFFFF"/>
+                </a:solidFill>
+                <a:latin typeface="Microsoft YaHei"/>
+              </a:rPr>
+              <a:t>DFL 重加权分解：组成·外延  vs  行为·内涵</a:t>
+            </a:r>
+          </a:p>
+        </p:txBody>
+      </p:sp>
+      <p:sp>
+        <p:nvSpPr>
+          <p:cNvPr id="10" name="Rounded Rectangle 9"/>
+          <p:cNvSpPr/>
+          <p:nvPr/>
+        </p:nvSpPr>
+        <p:spPr>
+          <a:xfrm>
+            <a:off x="3355848" y="5111496"/>
+            <a:ext cx="5486400" cy="512064"/>
+          </a:xfrm>
+          <a:prstGeom prst="roundRect">
+            <a:avLst/>
+          </a:prstGeom>
+          <a:solidFill>
+            <a:srgbClr val="6B7682"/>
+          </a:solidFill>
+          <a:ln w="12700">
+            <a:solidFill>
+              <a:srgbClr val="6B7682"/>
+            </a:solidFill>
+          </a:ln>
+          <a:effectLst/>
+        </p:spPr>
+        <p:style>
+          <a:lnRef idx="1">
+            <a:schemeClr val="accent1"/>
+          </a:lnRef>
+          <a:fillRef idx="3">
+            <a:schemeClr val="accent1"/>
+          </a:fillRef>
+          <a:effectRef idx="2">
+            <a:schemeClr val="accent1"/>
+          </a:effectRef>
+          <a:fontRef idx="minor">
+            <a:schemeClr val="lt1"/>
+          </a:fontRef>
+        </p:style>
+        <p:txBody>
+          <a:bodyPr rtlCol="0" anchor="ctr" wrap="square" lIns="50800" rIns="50800" tIns="25400" bIns="25400"/>
+          <a:lstStyle/>
+          <a:p>
+            <a:pPr algn="ctr"/>
+            <a:r>
+              <a:rPr sz="1050" b="1">
+                <a:solidFill>
+                  <a:srgbClr val="FFFFFF"/>
+                </a:solidFill>
+                <a:latin typeface="Microsoft YaHei"/>
+              </a:rPr>
+              <a:t>识别检验：密度连续 · 安慰剂升级日 · donut-RD · 机制三角</a:t>
+            </a:r>
+          </a:p>
+        </p:txBody>
+      </p:sp>
+      <p:cxnSp>
+        <p:nvCxnSpPr>
+          <p:cNvPr id="11" name="Connector 10"/>
+          <p:cNvCxnSpPr/>
+          <p:nvPr/>
+        </p:nvCxnSpPr>
+        <p:spPr>
+          <a:xfrm>
+            <a:off x="6099048" y="1289304"/>
+            <a:ext cx="0" cy="192024"/>
+          </a:xfrm>
+          <a:prstGeom prst="line">
+            <a:avLst/>
+          </a:prstGeom>
+          <a:ln w="19050">
+            <a:solidFill>
+              <a:srgbClr val="5A6B7B"/>
+            </a:solidFill>
+            <a:tailEnd type="triangle" w="med" len="med"/>
+          </a:ln>
+          <a:effectLst/>
+        </p:spPr>
+        <p:style>
+          <a:lnRef idx="2">
+            <a:schemeClr val="accent1"/>
+          </a:lnRef>
+          <a:fillRef idx="0">
+            <a:schemeClr val="accent1"/>
+          </a:fillRef>
+          <a:effectRef idx="1">
+            <a:schemeClr val="accent1"/>
+          </a:effectRef>
+          <a:fontRef idx="minor">
+            <a:schemeClr val="tx1"/>
+          </a:fontRef>
+        </p:style>
+      </p:cxnSp>
+      <p:cxnSp>
+        <p:nvCxnSpPr>
+          <p:cNvPr id="12" name="Connector 11"/>
+          <p:cNvCxnSpPr/>
+          <p:nvPr/>
+        </p:nvCxnSpPr>
+        <p:spPr>
+          <a:xfrm>
+            <a:off x="6099048" y="1993392"/>
+            <a:ext cx="0" cy="192024"/>
+          </a:xfrm>
+          <a:prstGeom prst="line">
+            <a:avLst/>
+          </a:prstGeom>
+          <a:ln w="19050">
+            <a:solidFill>
+              <a:srgbClr val="5A6B7B"/>
+            </a:solidFill>
+            <a:tailEnd type="triangle" w="med" len="med"/>
+          </a:ln>
+          <a:effectLst/>
+        </p:spPr>
+        <p:style>
+          <a:lnRef idx="2">
+            <a:schemeClr val="accent1"/>
+          </a:lnRef>
+          <a:fillRef idx="0">
+            <a:schemeClr val="accent1"/>
+          </a:fillRef>
+          <a:effectRef idx="1">
+            <a:schemeClr val="accent1"/>
+          </a:effectRef>
+          <a:fontRef idx="minor">
+            <a:schemeClr val="tx1"/>
+          </a:fontRef>
+        </p:style>
+      </p:cxnSp>
+      <p:cxnSp>
+        <p:nvCxnSpPr>
+          <p:cNvPr id="13" name="Connector 12"/>
+          <p:cNvCxnSpPr/>
+          <p:nvPr/>
+        </p:nvCxnSpPr>
+        <p:spPr>
+          <a:xfrm flipH="1">
+            <a:off x="3566160" y="2697480"/>
+            <a:ext cx="2532888" cy="228600"/>
+          </a:xfrm>
+          <a:prstGeom prst="line">
+            <a:avLst/>
+          </a:prstGeom>
+          <a:ln w="19050">
+            <a:solidFill>
+              <a:srgbClr val="5A6B7B"/>
+            </a:solidFill>
+            <a:tailEnd type="triangle" w="med" len="med"/>
+          </a:ln>
+          <a:effectLst/>
+        </p:spPr>
+        <p:style>
+          <a:lnRef idx="2">
+            <a:schemeClr val="accent1"/>
+          </a:lnRef>
+          <a:fillRef idx="0">
+            <a:schemeClr val="accent1"/>
+          </a:fillRef>
+          <a:effectRef idx="1">
+            <a:schemeClr val="accent1"/>
+          </a:effectRef>
+          <a:fontRef idx="minor">
+            <a:schemeClr val="tx1"/>
+          </a:fontRef>
+        </p:style>
+      </p:cxnSp>
+      <p:cxnSp>
+        <p:nvCxnSpPr>
+          <p:cNvPr id="14" name="Connector 13"/>
+          <p:cNvCxnSpPr/>
+          <p:nvPr/>
+        </p:nvCxnSpPr>
+        <p:spPr>
+          <a:xfrm>
+            <a:off x="6099048" y="2697480"/>
+            <a:ext cx="2496312" cy="228600"/>
+          </a:xfrm>
+          <a:prstGeom prst="line">
+            <a:avLst/>
+          </a:prstGeom>
+          <a:ln w="19050">
+            <a:solidFill>
+              <a:srgbClr val="5A6B7B"/>
+            </a:solidFill>
+            <a:tailEnd type="triangle" w="med" len="med"/>
+          </a:ln>
+          <a:effectLst/>
+        </p:spPr>
+        <p:style>
+          <a:lnRef idx="2">
+            <a:schemeClr val="accent1"/>
+          </a:lnRef>
+          <a:fillRef idx="0">
+            <a:schemeClr val="accent1"/>
+          </a:fillRef>
+          <a:effectRef idx="1">
+            <a:schemeClr val="accent1"/>
+          </a:effectRef>
+          <a:fontRef idx="minor">
+            <a:schemeClr val="tx1"/>
+          </a:fontRef>
+        </p:style>
+      </p:cxnSp>
+      <p:cxnSp>
+        <p:nvCxnSpPr>
+          <p:cNvPr id="15" name="Connector 14"/>
+          <p:cNvCxnSpPr/>
+          <p:nvPr/>
+        </p:nvCxnSpPr>
+        <p:spPr>
+          <a:xfrm>
+            <a:off x="3566160" y="3493008"/>
+            <a:ext cx="2258568" cy="210312"/>
+          </a:xfrm>
+          <a:prstGeom prst="line">
+            <a:avLst/>
+          </a:prstGeom>
+          <a:ln w="19050">
+            <a:solidFill>
+              <a:srgbClr val="5A6B7B"/>
+            </a:solidFill>
+            <a:tailEnd type="triangle" w="med" len="med"/>
+          </a:ln>
+          <a:effectLst/>
+        </p:spPr>
+        <p:style>
+          <a:lnRef idx="2">
+            <a:schemeClr val="accent1"/>
+          </a:lnRef>
+          <a:fillRef idx="0">
+            <a:schemeClr val="accent1"/>
+          </a:fillRef>
+          <a:effectRef idx="1">
+            <a:schemeClr val="accent1"/>
+          </a:effectRef>
+          <a:fontRef idx="minor">
+            <a:schemeClr val="tx1"/>
+          </a:fontRef>
+        </p:style>
+      </p:cxnSp>
+      <p:cxnSp>
+        <p:nvCxnSpPr>
+          <p:cNvPr id="16" name="Connector 15"/>
+          <p:cNvCxnSpPr/>
+          <p:nvPr/>
+        </p:nvCxnSpPr>
+        <p:spPr>
+          <a:xfrm flipH="1">
+            <a:off x="6373368" y="3493008"/>
+            <a:ext cx="2221992" cy="210312"/>
+          </a:xfrm>
+          <a:prstGeom prst="line">
+            <a:avLst/>
+          </a:prstGeom>
+          <a:ln w="19050">
+            <a:solidFill>
+              <a:srgbClr val="5A6B7B"/>
+            </a:solidFill>
+            <a:tailEnd type="triangle" w="med" len="med"/>
+          </a:ln>
+          <a:effectLst/>
+        </p:spPr>
+        <p:style>
+          <a:lnRef idx="2">
+            <a:schemeClr val="accent1"/>
+          </a:lnRef>
+          <a:fillRef idx="0">
+            <a:schemeClr val="accent1"/>
+          </a:fillRef>
+          <a:effectRef idx="1">
+            <a:schemeClr val="accent1"/>
+          </a:effectRef>
+          <a:fontRef idx="minor">
+            <a:schemeClr val="tx1"/>
+          </a:fontRef>
+        </p:style>
+      </p:cxnSp>
+      <p:cxnSp>
+        <p:nvCxnSpPr>
+          <p:cNvPr id="17" name="Connector 16"/>
+          <p:cNvCxnSpPr/>
+          <p:nvPr/>
+        </p:nvCxnSpPr>
+        <p:spPr>
+          <a:xfrm>
+            <a:off x="6099048" y="4215384"/>
+            <a:ext cx="0" cy="192024"/>
+          </a:xfrm>
+          <a:prstGeom prst="line">
+            <a:avLst/>
+          </a:prstGeom>
+          <a:ln w="19050">
+            <a:solidFill>
+              <a:srgbClr val="5A6B7B"/>
+            </a:solidFill>
+            <a:tailEnd type="triangle" w="med" len="med"/>
+          </a:ln>
+          <a:effectLst/>
+        </p:spPr>
+        <p:style>
+          <a:lnRef idx="2">
+            <a:schemeClr val="accent1"/>
+          </a:lnRef>
+          <a:fillRef idx="0">
+            <a:schemeClr val="accent1"/>
+          </a:fillRef>
+          <a:effectRef idx="1">
+            <a:schemeClr val="accent1"/>
+          </a:effectRef>
+          <a:fontRef idx="minor">
+            <a:schemeClr val="tx1"/>
+          </a:fontRef>
+        </p:style>
+      </p:cxnSp>
+      <p:cxnSp>
+        <p:nvCxnSpPr>
+          <p:cNvPr id="18" name="Connector 17"/>
+          <p:cNvCxnSpPr/>
+          <p:nvPr/>
+        </p:nvCxnSpPr>
+        <p:spPr>
+          <a:xfrm>
+            <a:off x="6099048" y="4919472"/>
+            <a:ext cx="0" cy="192024"/>
+          </a:xfrm>
+          <a:prstGeom prst="line">
+            <a:avLst/>
+          </a:prstGeom>
+          <a:ln w="19050">
+            <a:solidFill>
+              <a:srgbClr val="5A6B7B"/>
+            </a:solidFill>
+            <a:tailEnd type="triangle" w="med" len="med"/>
+          </a:ln>
+          <a:effectLst/>
+        </p:spPr>
+        <p:style>
+          <a:lnRef idx="2">
+            <a:schemeClr val="accent1"/>
+          </a:lnRef>
+          <a:fillRef idx="0">
+            <a:schemeClr val="accent1"/>
+          </a:fillRef>
+          <a:effectRef idx="1">
+            <a:schemeClr val="accent1"/>
+          </a:effectRef>
+          <a:fontRef idx="minor">
+            <a:schemeClr val="tx1"/>
+          </a:fontRef>
+        </p:style>
+      </p:cxnSp>
+      <p:sp>
+        <p:nvSpPr>
+          <p:cNvPr id="19" name="Rectangle 18"/>
+          <p:cNvSpPr/>
+          <p:nvPr/>
+        </p:nvSpPr>
+        <p:spPr>
+          <a:xfrm>
             <a:off x="274320" y="6053328"/>
-            <a:ext cx="11643055" cy="548640"/>
+            <a:ext cx="11643055" cy="384048"/>
           </a:xfrm>
           <a:prstGeom prst="rect">
             <a:avLst/>
@@ -4317,27 +7349,544 @@
           <a:p>
             <a:pPr algn="ctr"/>
             <a:r>
-              <a:rPr sz="1200" b="1">
+              <a:rPr sz="1050" b="1">
                 <a:solidFill>
                   <a:srgbClr val="FFFFFF"/>
                 </a:solidFill>
                 <a:latin typeface="Microsoft YaHei"/>
               </a:rPr>
-              <a:t>结论与政策：智能信贷触达让更多人借到钱——是否也让更多人陷进去？  金融AI消费者保护 · 共债治理</a:t>
+              <a:t>结论：信贷可得性与金融脆弱性并存（双刃），并判定脆弱性主驱动＝组成 抑或 行为</a:t>
+            </a:r>
+          </a:p>
+        </p:txBody>
+      </p:sp>
+    </p:spTree>
+  </p:cSld>
+  <p:clrMapOvr>
+    <a:masterClrMapping/>
+  </p:clrMapOvr>
+</p:sld>
+</file>
+
+<file path=ppt/slides/slide4.xml><?xml version="1.0" encoding="utf-8"?>
+<p:sld xmlns:a="http://schemas.openxmlformats.org/drawingml/2006/main" xmlns:p="http://schemas.openxmlformats.org/presentationml/2006/main" xmlns:r="http://schemas.openxmlformats.org/officeDocument/2006/relationships">
+  <p:cSld>
+    <p:spTree>
+      <p:nvGrpSpPr>
+        <p:cNvPr id="1" name=""/>
+        <p:cNvGrpSpPr/>
+        <p:nvPr/>
+      </p:nvGrpSpPr>
+      <p:grpSpPr/>
+      <p:sp>
+        <p:nvSpPr>
+          <p:cNvPr id="2" name="Rectangle 1"/>
+          <p:cNvSpPr/>
+          <p:nvPr/>
+        </p:nvSpPr>
+        <p:spPr>
+          <a:xfrm>
+            <a:off x="0" y="0"/>
+            <a:ext cx="12191695" cy="603504"/>
+          </a:xfrm>
+          <a:prstGeom prst="rect">
+            <a:avLst/>
+          </a:prstGeom>
+          <a:solidFill>
+            <a:srgbClr val="1F3B5B"/>
+          </a:solidFill>
+          <a:ln>
+            <a:noFill/>
+          </a:ln>
+          <a:effectLst/>
+        </p:spPr>
+        <p:style>
+          <a:lnRef idx="1">
+            <a:schemeClr val="accent1"/>
+          </a:lnRef>
+          <a:fillRef idx="3">
+            <a:schemeClr val="accent1"/>
+          </a:fillRef>
+          <a:effectRef idx="2">
+            <a:schemeClr val="accent1"/>
+          </a:effectRef>
+          <a:fontRef idx="minor">
+            <a:schemeClr val="lt1"/>
+          </a:fontRef>
+        </p:style>
+        <p:txBody>
+          <a:bodyPr rtlCol="0" anchor="ctr" wrap="square"/>
+          <a:lstStyle/>
+          <a:p>
+            <a:pPr algn="ctr"/>
+            <a:r>
+              <a:rPr sz="1900" b="1">
+                <a:solidFill>
+                  <a:srgbClr val="FFFFFF"/>
+                </a:solidFill>
+                <a:latin typeface="Microsoft YaHei"/>
+              </a:rPr>
+              <a:t>第二章 框架图  扩散X →（机制M）→ 区域过度负债Y</a:t>
+            </a:r>
+          </a:p>
+        </p:txBody>
+      </p:sp>
+      <p:sp>
+        <p:nvSpPr>
+          <p:cNvPr id="3" name="TextBox 2"/>
+          <p:cNvSpPr txBox="1"/>
+          <p:nvPr/>
+        </p:nvSpPr>
+        <p:spPr>
+          <a:xfrm>
+            <a:off x="164592" y="960120"/>
+            <a:ext cx="1463040" cy="457200"/>
+          </a:xfrm>
+          <a:prstGeom prst="rect">
+            <a:avLst/>
+          </a:prstGeom>
+          <a:noFill/>
+        </p:spPr>
+        <p:txBody>
+          <a:bodyPr wrap="square" anchor="ctr">
+            <a:spAutoFit/>
+          </a:bodyPr>
+          <a:lstStyle/>
+          <a:p>
+            <a:pPr algn="ctr"/>
+            <a:r>
+              <a:rPr sz="1100" i="0" b="1">
+                <a:solidFill>
+                  <a:srgbClr val="C87F0A"/>
+                </a:solidFill>
+                <a:latin typeface="Microsoft YaHei"/>
+              </a:rPr>
+              <a:t>识别</a:t>
+            </a:r>
+          </a:p>
+          <a:p>
+            <a:pPr algn="ctr"/>
+            <a:r>
+              <a:rPr sz="1100" i="0" b="1">
+                <a:solidFill>
+                  <a:srgbClr val="C87F0A"/>
+                </a:solidFill>
+                <a:latin typeface="Microsoft YaHei"/>
+              </a:rPr>
+              <a:t>IV/冲击</a:t>
+            </a:r>
+          </a:p>
+        </p:txBody>
+      </p:sp>
+      <p:sp>
+        <p:nvSpPr>
+          <p:cNvPr id="4" name="TextBox 3"/>
+          <p:cNvSpPr txBox="1"/>
+          <p:nvPr/>
+        </p:nvSpPr>
+        <p:spPr>
+          <a:xfrm>
+            <a:off x="164592" y="2240280"/>
+            <a:ext cx="1463040" cy="457200"/>
+          </a:xfrm>
+          <a:prstGeom prst="rect">
+            <a:avLst/>
+          </a:prstGeom>
+          <a:noFill/>
+        </p:spPr>
+        <p:txBody>
+          <a:bodyPr wrap="square" anchor="ctr">
+            <a:spAutoFit/>
+          </a:bodyPr>
+          <a:lstStyle/>
+          <a:p>
+            <a:pPr algn="ctr"/>
+            <a:r>
+              <a:rPr sz="1100" i="0" b="1">
+                <a:solidFill>
+                  <a:srgbClr val="1F3B5B"/>
+                </a:solidFill>
+                <a:latin typeface="Microsoft YaHei"/>
+              </a:rPr>
+              <a:t>自变量</a:t>
+            </a:r>
+          </a:p>
+          <a:p>
+            <a:pPr algn="ctr"/>
+            <a:r>
+              <a:rPr sz="1100" i="0" b="1">
+                <a:solidFill>
+                  <a:srgbClr val="1F3B5B"/>
+                </a:solidFill>
+                <a:latin typeface="Microsoft YaHei"/>
+              </a:rPr>
+              <a:t>X</a:t>
+            </a:r>
+          </a:p>
+        </p:txBody>
+      </p:sp>
+      <p:sp>
+        <p:nvSpPr>
+          <p:cNvPr id="5" name="TextBox 4"/>
+          <p:cNvSpPr txBox="1"/>
+          <p:nvPr/>
+        </p:nvSpPr>
+        <p:spPr>
+          <a:xfrm>
+            <a:off x="164592" y="3383280"/>
+            <a:ext cx="1463040" cy="457200"/>
+          </a:xfrm>
+          <a:prstGeom prst="rect">
+            <a:avLst/>
+          </a:prstGeom>
+          <a:noFill/>
+        </p:spPr>
+        <p:txBody>
+          <a:bodyPr wrap="square" anchor="ctr">
+            <a:spAutoFit/>
+          </a:bodyPr>
+          <a:lstStyle/>
+          <a:p>
+            <a:pPr algn="ctr"/>
+            <a:r>
+              <a:rPr sz="1100" i="0" b="1">
+                <a:solidFill>
+                  <a:srgbClr val="1B7F79"/>
+                </a:solidFill>
+                <a:latin typeface="Microsoft YaHei"/>
+              </a:rPr>
+              <a:t>中介机制</a:t>
+            </a:r>
+          </a:p>
+          <a:p>
+            <a:pPr algn="ctr"/>
+            <a:r>
+              <a:rPr sz="1100" i="0" b="1">
+                <a:solidFill>
+                  <a:srgbClr val="1B7F79"/>
+                </a:solidFill>
+                <a:latin typeface="Microsoft YaHei"/>
+              </a:rPr>
+              <a:t>M</a:t>
+            </a:r>
+          </a:p>
+        </p:txBody>
+      </p:sp>
+      <p:sp>
+        <p:nvSpPr>
+          <p:cNvPr id="6" name="TextBox 5"/>
+          <p:cNvSpPr txBox="1"/>
+          <p:nvPr/>
+        </p:nvSpPr>
+        <p:spPr>
+          <a:xfrm>
+            <a:off x="164592" y="4526280"/>
+            <a:ext cx="1463040" cy="457200"/>
+          </a:xfrm>
+          <a:prstGeom prst="rect">
+            <a:avLst/>
+          </a:prstGeom>
+          <a:noFill/>
+        </p:spPr>
+        <p:txBody>
+          <a:bodyPr wrap="square" anchor="ctr">
+            <a:spAutoFit/>
+          </a:bodyPr>
+          <a:lstStyle/>
+          <a:p>
+            <a:pPr algn="ctr"/>
+            <a:r>
+              <a:rPr sz="1100" i="0" b="1">
+                <a:solidFill>
+                  <a:srgbClr val="C05A16"/>
+                </a:solidFill>
+                <a:latin typeface="Microsoft YaHei"/>
+              </a:rPr>
+              <a:t>因变量</a:t>
+            </a:r>
+          </a:p>
+          <a:p>
+            <a:pPr algn="ctr"/>
+            <a:r>
+              <a:rPr sz="1100" i="0" b="1">
+                <a:solidFill>
+                  <a:srgbClr val="C05A16"/>
+                </a:solidFill>
+                <a:latin typeface="Microsoft YaHei"/>
+              </a:rPr>
+              <a:t>Y</a:t>
+            </a:r>
+          </a:p>
+        </p:txBody>
+      </p:sp>
+      <p:sp>
+        <p:nvSpPr>
+          <p:cNvPr id="7" name="Rounded Rectangle 6"/>
+          <p:cNvSpPr/>
+          <p:nvPr/>
+        </p:nvSpPr>
+        <p:spPr>
+          <a:xfrm>
+            <a:off x="1691640" y="868680"/>
+            <a:ext cx="8778240" cy="512064"/>
+          </a:xfrm>
+          <a:prstGeom prst="roundRect">
+            <a:avLst/>
+          </a:prstGeom>
+          <a:solidFill>
+            <a:srgbClr val="C87F0A"/>
+          </a:solidFill>
+          <a:ln w="12700">
+            <a:solidFill>
+              <a:srgbClr val="C87F0A"/>
+            </a:solidFill>
+          </a:ln>
+          <a:effectLst/>
+        </p:spPr>
+        <p:style>
+          <a:lnRef idx="1">
+            <a:schemeClr val="accent1"/>
+          </a:lnRef>
+          <a:fillRef idx="3">
+            <a:schemeClr val="accent1"/>
+          </a:fillRef>
+          <a:effectRef idx="2">
+            <a:schemeClr val="accent1"/>
+          </a:effectRef>
+          <a:fontRef idx="minor">
+            <a:schemeClr val="lt1"/>
+          </a:fontRef>
+        </p:style>
+        <p:txBody>
+          <a:bodyPr rtlCol="0" anchor="ctr" wrap="square" lIns="50800" rIns="50800" tIns="25400" bIns="25400"/>
+          <a:lstStyle/>
+          <a:p>
+            <a:pPr algn="ctr"/>
+            <a:r>
+              <a:rPr sz="1100" b="1">
+                <a:solidFill>
+                  <a:srgbClr val="FFFFFF"/>
+                </a:solidFill>
+                <a:latin typeface="Microsoft YaHei"/>
+              </a:rPr>
+              <a:t>识别：Bartik 移动份额IV  /  2017现金贷·2020网络小贷监管冲击</a:t>
+            </a:r>
+          </a:p>
+        </p:txBody>
+      </p:sp>
+      <p:sp>
+        <p:nvSpPr>
+          <p:cNvPr id="8" name="Rounded Rectangle 7"/>
+          <p:cNvSpPr/>
+          <p:nvPr/>
+        </p:nvSpPr>
+        <p:spPr>
+          <a:xfrm>
+            <a:off x="1691640" y="2148840"/>
+            <a:ext cx="8778240" cy="512064"/>
+          </a:xfrm>
+          <a:prstGeom prst="roundRect">
+            <a:avLst/>
+          </a:prstGeom>
+          <a:solidFill>
+            <a:srgbClr val="1F3B5B"/>
+          </a:solidFill>
+          <a:ln w="12700">
+            <a:solidFill>
+              <a:srgbClr val="1F3B5B"/>
+            </a:solidFill>
+          </a:ln>
+          <a:effectLst/>
+        </p:spPr>
+        <p:style>
+          <a:lnRef idx="1">
+            <a:schemeClr val="accent1"/>
+          </a:lnRef>
+          <a:fillRef idx="3">
+            <a:schemeClr val="accent1"/>
+          </a:fillRef>
+          <a:effectRef idx="2">
+            <a:schemeClr val="accent1"/>
+          </a:effectRef>
+          <a:fontRef idx="minor">
+            <a:schemeClr val="lt1"/>
+          </a:fontRef>
+        </p:style>
+        <p:txBody>
+          <a:bodyPr rtlCol="0" anchor="ctr" wrap="square" lIns="50800" rIns="50800" tIns="25400" bIns="25400"/>
+          <a:lstStyle/>
+          <a:p>
+            <a:pPr algn="ctr"/>
+            <a:r>
+              <a:rPr sz="1100" b="1">
+                <a:solidFill>
+                  <a:srgbClr val="FFFFFF"/>
+                </a:solidFill>
+                <a:latin typeface="Microsoft YaHei"/>
+              </a:rPr>
+              <a:t>X｜区域智能外呼·数字营销扩散度（招聘大数据构造 / 数字普惠信贷子项）</a:t>
+            </a:r>
+          </a:p>
+        </p:txBody>
+      </p:sp>
+      <p:sp>
+        <p:nvSpPr>
+          <p:cNvPr id="9" name="Rounded Rectangle 8"/>
+          <p:cNvSpPr/>
+          <p:nvPr/>
+        </p:nvSpPr>
+        <p:spPr>
+          <a:xfrm>
+            <a:off x="1691640" y="3291840"/>
+            <a:ext cx="8778240" cy="512064"/>
+          </a:xfrm>
+          <a:prstGeom prst="roundRect">
+            <a:avLst/>
+          </a:prstGeom>
+          <a:solidFill>
+            <a:srgbClr val="1B7F79"/>
+          </a:solidFill>
+          <a:ln w="12700">
+            <a:solidFill>
+              <a:srgbClr val="1B7F79"/>
+            </a:solidFill>
+          </a:ln>
+          <a:effectLst/>
+        </p:spPr>
+        <p:style>
+          <a:lnRef idx="1">
+            <a:schemeClr val="accent1"/>
+          </a:lnRef>
+          <a:fillRef idx="3">
+            <a:schemeClr val="accent1"/>
+          </a:fillRef>
+          <a:effectRef idx="2">
+            <a:schemeClr val="accent1"/>
+          </a:effectRef>
+          <a:fontRef idx="minor">
+            <a:schemeClr val="lt1"/>
+          </a:fontRef>
+        </p:style>
+        <p:txBody>
+          <a:bodyPr rtlCol="0" anchor="ctr" wrap="square" lIns="50800" rIns="50800" tIns="25400" bIns="25400"/>
+          <a:lstStyle/>
+          <a:p>
+            <a:pPr algn="ctr"/>
+            <a:r>
+              <a:rPr sz="1100" b="1">
+                <a:solidFill>
+                  <a:srgbClr val="FFFFFF"/>
+                </a:solidFill>
+                <a:latin typeface="Microsoft YaHei"/>
+              </a:rPr>
+              <a:t>M｜获客技术扩散 → 边际·脆弱客群被开发</a:t>
+            </a:r>
+          </a:p>
+        </p:txBody>
+      </p:sp>
+      <p:sp>
+        <p:nvSpPr>
+          <p:cNvPr id="10" name="Rounded Rectangle 9"/>
+          <p:cNvSpPr/>
+          <p:nvPr/>
+        </p:nvSpPr>
+        <p:spPr>
+          <a:xfrm>
+            <a:off x="1691640" y="4434840"/>
+            <a:ext cx="8778240" cy="566928"/>
+          </a:xfrm>
+          <a:prstGeom prst="roundRect">
+            <a:avLst/>
+          </a:prstGeom>
+          <a:solidFill>
+            <a:srgbClr val="C05A16"/>
+          </a:solidFill>
+          <a:ln w="12700">
+            <a:solidFill>
+              <a:srgbClr val="C05A16"/>
+            </a:solidFill>
+          </a:ln>
+          <a:effectLst/>
+        </p:spPr>
+        <p:style>
+          <a:lnRef idx="1">
+            <a:schemeClr val="accent1"/>
+          </a:lnRef>
+          <a:fillRef idx="3">
+            <a:schemeClr val="accent1"/>
+          </a:fillRef>
+          <a:effectRef idx="2">
+            <a:schemeClr val="accent1"/>
+          </a:effectRef>
+          <a:fontRef idx="minor">
+            <a:schemeClr val="lt1"/>
+          </a:fontRef>
+        </p:style>
+        <p:txBody>
+          <a:bodyPr rtlCol="0" anchor="ctr" wrap="square" lIns="50800" rIns="50800" tIns="25400" bIns="25400"/>
+          <a:lstStyle/>
+          <a:p>
+            <a:pPr algn="ctr"/>
+            <a:r>
+              <a:rPr sz="1100" b="1">
+                <a:solidFill>
+                  <a:srgbClr val="FFFFFF"/>
+                </a:solidFill>
+                <a:latin typeface="Microsoft YaHei"/>
+              </a:rPr>
+              <a:t>Y｜区域金融借款/民间借贷纠纷（人口标准化）· 区域过度负债 ↑</a:t>
             </a:r>
           </a:p>
         </p:txBody>
       </p:sp>
       <p:cxnSp>
         <p:nvCxnSpPr>
-          <p:cNvPr id="17" name="Connector 16"/>
+          <p:cNvPr id="11" name="Connector 10"/>
           <p:cNvCxnSpPr/>
           <p:nvPr/>
         </p:nvCxnSpPr>
         <p:spPr>
-          <a:xfrm flipH="1">
-            <a:off x="3901744" y="1389888"/>
-            <a:ext cx="2194560" cy="237744"/>
+          <a:xfrm flipV="1">
+            <a:off x="6080760" y="1380744"/>
+            <a:ext cx="0" cy="768096"/>
+          </a:xfrm>
+          <a:prstGeom prst="line">
+            <a:avLst/>
+          </a:prstGeom>
+          <a:ln w="16510">
+            <a:solidFill>
+              <a:srgbClr val="C87F0A"/>
+            </a:solidFill>
+            <a:prstDash val="dash"/>
+            <a:tailEnd type="triangle" w="med" len="med"/>
+          </a:ln>
+          <a:effectLst/>
+        </p:spPr>
+        <p:style>
+          <a:lnRef idx="2">
+            <a:schemeClr val="accent1"/>
+          </a:lnRef>
+          <a:fillRef idx="0">
+            <a:schemeClr val="accent1"/>
+          </a:fillRef>
+          <a:effectRef idx="1">
+            <a:schemeClr val="accent1"/>
+          </a:effectRef>
+          <a:fontRef idx="minor">
+            <a:schemeClr val="tx1"/>
+          </a:fontRef>
+        </p:style>
+      </p:cxnSp>
+      <p:cxnSp>
+        <p:nvCxnSpPr>
+          <p:cNvPr id="12" name="Connector 11"/>
+          <p:cNvCxnSpPr/>
+          <p:nvPr/>
+        </p:nvCxnSpPr>
+        <p:spPr>
+          <a:xfrm>
+            <a:off x="6080760" y="2660904"/>
+            <a:ext cx="0" cy="630936"/>
           </a:xfrm>
           <a:prstGeom prst="line">
             <a:avLst/>
@@ -4367,14 +7916,14 @@
       </p:cxnSp>
       <p:cxnSp>
         <p:nvCxnSpPr>
-          <p:cNvPr id="18" name="Connector 17"/>
+          <p:cNvPr id="13" name="Connector 12"/>
           <p:cNvCxnSpPr/>
           <p:nvPr/>
         </p:nvCxnSpPr>
         <p:spPr>
           <a:xfrm>
-            <a:off x="6096304" y="1389888"/>
-            <a:ext cx="2194560" cy="237744"/>
+            <a:off x="6080760" y="3803904"/>
+            <a:ext cx="0" cy="630936"/>
           </a:xfrm>
           <a:prstGeom prst="line">
             <a:avLst/>
@@ -4402,16 +7951,733 @@
           </a:fontRef>
         </p:style>
       </p:cxnSp>
+      <p:sp>
+        <p:nvSpPr>
+          <p:cNvPr id="14" name="Rectangle 13"/>
+          <p:cNvSpPr/>
+          <p:nvPr/>
+        </p:nvSpPr>
+        <p:spPr>
+          <a:xfrm>
+            <a:off x="274320" y="6053328"/>
+            <a:ext cx="11643055" cy="384048"/>
+          </a:xfrm>
+          <a:prstGeom prst="rect">
+            <a:avLst/>
+          </a:prstGeom>
+          <a:solidFill>
+            <a:srgbClr val="1F3B5B"/>
+          </a:solidFill>
+          <a:ln w="12700">
+            <a:solidFill>
+              <a:srgbClr val="1F3B5B"/>
+            </a:solidFill>
+          </a:ln>
+          <a:effectLst/>
+        </p:spPr>
+        <p:style>
+          <a:lnRef idx="1">
+            <a:schemeClr val="accent1"/>
+          </a:lnRef>
+          <a:fillRef idx="3">
+            <a:schemeClr val="accent1"/>
+          </a:fillRef>
+          <a:effectRef idx="2">
+            <a:schemeClr val="accent1"/>
+          </a:effectRef>
+          <a:fontRef idx="minor">
+            <a:schemeClr val="lt1"/>
+          </a:fontRef>
+        </p:style>
+        <p:txBody>
+          <a:bodyPr rtlCol="0" anchor="ctr" wrap="square" lIns="50800" rIns="50800" tIns="25400" bIns="25400"/>
+          <a:lstStyle/>
+          <a:p>
+            <a:pPr algn="ctr"/>
+            <a:r>
+              <a:rPr sz="1050" b="1">
+                <a:solidFill>
+                  <a:srgbClr val="FFFFFF"/>
+                </a:solidFill>
+                <a:latin typeface="Microsoft YaHei"/>
+              </a:rPr>
+              <a:t>控制 Z：人均GDP·人口·产业结构·传统金融密度　|　单元：城市(或省)×年面板，双向固定效应 μ_r + λ_t</a:t>
+            </a:r>
+          </a:p>
+        </p:txBody>
+      </p:sp>
+      <p:sp>
+        <p:nvSpPr>
+          <p:cNvPr id="15" name="Rectangle 14"/>
+          <p:cNvSpPr/>
+          <p:nvPr/>
+        </p:nvSpPr>
+        <p:spPr>
+          <a:xfrm>
+            <a:off x="274320" y="6446520"/>
+            <a:ext cx="201168" cy="146304"/>
+          </a:xfrm>
+          <a:prstGeom prst="rect">
+            <a:avLst/>
+          </a:prstGeom>
+          <a:solidFill>
+            <a:srgbClr val="C87F0A"/>
+          </a:solidFill>
+          <a:ln>
+            <a:noFill/>
+          </a:ln>
+          <a:effectLst/>
+        </p:spPr>
+        <p:style>
+          <a:lnRef idx="1">
+            <a:schemeClr val="accent1"/>
+          </a:lnRef>
+          <a:fillRef idx="3">
+            <a:schemeClr val="accent1"/>
+          </a:fillRef>
+          <a:effectRef idx="2">
+            <a:schemeClr val="accent1"/>
+          </a:effectRef>
+          <a:fontRef idx="minor">
+            <a:schemeClr val="lt1"/>
+          </a:fontRef>
+        </p:style>
+        <p:txBody>
+          <a:bodyPr rtlCol="0" anchor="ctr"/>
+          <a:lstStyle/>
+          <a:p>
+            <a:pPr algn="ctr"/>
+          </a:p>
+        </p:txBody>
+      </p:sp>
+      <p:sp>
+        <p:nvSpPr>
+          <p:cNvPr id="16" name="TextBox 15"/>
+          <p:cNvSpPr txBox="1"/>
+          <p:nvPr/>
+        </p:nvSpPr>
+        <p:spPr>
+          <a:xfrm>
+            <a:off x="512064" y="6391656"/>
+            <a:ext cx="1737360" cy="274320"/>
+          </a:xfrm>
+          <a:prstGeom prst="rect">
+            <a:avLst/>
+          </a:prstGeom>
+          <a:noFill/>
+        </p:spPr>
+        <p:txBody>
+          <a:bodyPr wrap="square" anchor="ctr">
+            <a:spAutoFit/>
+          </a:bodyPr>
+          <a:lstStyle/>
+          <a:p>
+            <a:pPr algn="l"/>
+            <a:r>
+              <a:rPr sz="900" i="0" b="0">
+                <a:solidFill>
+                  <a:srgbClr val="202833"/>
+                </a:solidFill>
+                <a:latin typeface="Microsoft YaHei"/>
+              </a:rPr>
+              <a:t>识别IV</a:t>
+            </a:r>
+          </a:p>
+        </p:txBody>
+      </p:sp>
+      <p:sp>
+        <p:nvSpPr>
+          <p:cNvPr id="17" name="Rectangle 16"/>
+          <p:cNvSpPr/>
+          <p:nvPr/>
+        </p:nvSpPr>
+        <p:spPr>
+          <a:xfrm>
+            <a:off x="1773936" y="6446520"/>
+            <a:ext cx="201168" cy="146304"/>
+          </a:xfrm>
+          <a:prstGeom prst="rect">
+            <a:avLst/>
+          </a:prstGeom>
+          <a:solidFill>
+            <a:srgbClr val="1F3B5B"/>
+          </a:solidFill>
+          <a:ln>
+            <a:noFill/>
+          </a:ln>
+          <a:effectLst/>
+        </p:spPr>
+        <p:style>
+          <a:lnRef idx="1">
+            <a:schemeClr val="accent1"/>
+          </a:lnRef>
+          <a:fillRef idx="3">
+            <a:schemeClr val="accent1"/>
+          </a:fillRef>
+          <a:effectRef idx="2">
+            <a:schemeClr val="accent1"/>
+          </a:effectRef>
+          <a:fontRef idx="minor">
+            <a:schemeClr val="lt1"/>
+          </a:fontRef>
+        </p:style>
+        <p:txBody>
+          <a:bodyPr rtlCol="0" anchor="ctr"/>
+          <a:lstStyle/>
+          <a:p>
+            <a:pPr algn="ctr"/>
+          </a:p>
+        </p:txBody>
+      </p:sp>
+      <p:sp>
+        <p:nvSpPr>
+          <p:cNvPr id="18" name="TextBox 17"/>
+          <p:cNvSpPr txBox="1"/>
+          <p:nvPr/>
+        </p:nvSpPr>
+        <p:spPr>
+          <a:xfrm>
+            <a:off x="2011680" y="6391656"/>
+            <a:ext cx="1737360" cy="274320"/>
+          </a:xfrm>
+          <a:prstGeom prst="rect">
+            <a:avLst/>
+          </a:prstGeom>
+          <a:noFill/>
+        </p:spPr>
+        <p:txBody>
+          <a:bodyPr wrap="square" anchor="ctr">
+            <a:spAutoFit/>
+          </a:bodyPr>
+          <a:lstStyle/>
+          <a:p>
+            <a:pPr algn="l"/>
+            <a:r>
+              <a:rPr sz="900" i="0" b="0">
+                <a:solidFill>
+                  <a:srgbClr val="202833"/>
+                </a:solidFill>
+                <a:latin typeface="Microsoft YaHei"/>
+              </a:rPr>
+              <a:t>自变量X</a:t>
+            </a:r>
+          </a:p>
+        </p:txBody>
+      </p:sp>
+      <p:sp>
+        <p:nvSpPr>
+          <p:cNvPr id="19" name="Rectangle 18"/>
+          <p:cNvSpPr/>
+          <p:nvPr/>
+        </p:nvSpPr>
+        <p:spPr>
+          <a:xfrm>
+            <a:off x="3273552" y="6446520"/>
+            <a:ext cx="201168" cy="146304"/>
+          </a:xfrm>
+          <a:prstGeom prst="rect">
+            <a:avLst/>
+          </a:prstGeom>
+          <a:solidFill>
+            <a:srgbClr val="1B7F79"/>
+          </a:solidFill>
+          <a:ln>
+            <a:noFill/>
+          </a:ln>
+          <a:effectLst/>
+        </p:spPr>
+        <p:style>
+          <a:lnRef idx="1">
+            <a:schemeClr val="accent1"/>
+          </a:lnRef>
+          <a:fillRef idx="3">
+            <a:schemeClr val="accent1"/>
+          </a:fillRef>
+          <a:effectRef idx="2">
+            <a:schemeClr val="accent1"/>
+          </a:effectRef>
+          <a:fontRef idx="minor">
+            <a:schemeClr val="lt1"/>
+          </a:fontRef>
+        </p:style>
+        <p:txBody>
+          <a:bodyPr rtlCol="0" anchor="ctr"/>
+          <a:lstStyle/>
+          <a:p>
+            <a:pPr algn="ctr"/>
+          </a:p>
+        </p:txBody>
+      </p:sp>
+      <p:sp>
+        <p:nvSpPr>
+          <p:cNvPr id="20" name="TextBox 19"/>
+          <p:cNvSpPr txBox="1"/>
+          <p:nvPr/>
+        </p:nvSpPr>
+        <p:spPr>
+          <a:xfrm>
+            <a:off x="3511296" y="6391656"/>
+            <a:ext cx="1737360" cy="274320"/>
+          </a:xfrm>
+          <a:prstGeom prst="rect">
+            <a:avLst/>
+          </a:prstGeom>
+          <a:noFill/>
+        </p:spPr>
+        <p:txBody>
+          <a:bodyPr wrap="square" anchor="ctr">
+            <a:spAutoFit/>
+          </a:bodyPr>
+          <a:lstStyle/>
+          <a:p>
+            <a:pPr algn="l"/>
+            <a:r>
+              <a:rPr sz="900" i="0" b="0">
+                <a:solidFill>
+                  <a:srgbClr val="202833"/>
+                </a:solidFill>
+                <a:latin typeface="Microsoft YaHei"/>
+              </a:rPr>
+              <a:t>中介机制M</a:t>
+            </a:r>
+          </a:p>
+        </p:txBody>
+      </p:sp>
+      <p:sp>
+        <p:nvSpPr>
+          <p:cNvPr id="21" name="Rectangle 20"/>
+          <p:cNvSpPr/>
+          <p:nvPr/>
+        </p:nvSpPr>
+        <p:spPr>
+          <a:xfrm>
+            <a:off x="4919472" y="6446520"/>
+            <a:ext cx="201168" cy="146304"/>
+          </a:xfrm>
+          <a:prstGeom prst="rect">
+            <a:avLst/>
+          </a:prstGeom>
+          <a:solidFill>
+            <a:srgbClr val="C05A16"/>
+          </a:solidFill>
+          <a:ln>
+            <a:noFill/>
+          </a:ln>
+          <a:effectLst/>
+        </p:spPr>
+        <p:style>
+          <a:lnRef idx="1">
+            <a:schemeClr val="accent1"/>
+          </a:lnRef>
+          <a:fillRef idx="3">
+            <a:schemeClr val="accent1"/>
+          </a:fillRef>
+          <a:effectRef idx="2">
+            <a:schemeClr val="accent1"/>
+          </a:effectRef>
+          <a:fontRef idx="minor">
+            <a:schemeClr val="lt1"/>
+          </a:fontRef>
+        </p:style>
+        <p:txBody>
+          <a:bodyPr rtlCol="0" anchor="ctr"/>
+          <a:lstStyle/>
+          <a:p>
+            <a:pPr algn="ctr"/>
+          </a:p>
+        </p:txBody>
+      </p:sp>
+      <p:sp>
+        <p:nvSpPr>
+          <p:cNvPr id="22" name="TextBox 21"/>
+          <p:cNvSpPr txBox="1"/>
+          <p:nvPr/>
+        </p:nvSpPr>
+        <p:spPr>
+          <a:xfrm>
+            <a:off x="5157216" y="6391656"/>
+            <a:ext cx="1737360" cy="274320"/>
+          </a:xfrm>
+          <a:prstGeom prst="rect">
+            <a:avLst/>
+          </a:prstGeom>
+          <a:noFill/>
+        </p:spPr>
+        <p:txBody>
+          <a:bodyPr wrap="square" anchor="ctr">
+            <a:spAutoFit/>
+          </a:bodyPr>
+          <a:lstStyle/>
+          <a:p>
+            <a:pPr algn="l"/>
+            <a:r>
+              <a:rPr sz="900" i="0" b="0">
+                <a:solidFill>
+                  <a:srgbClr val="202833"/>
+                </a:solidFill>
+                <a:latin typeface="Microsoft YaHei"/>
+              </a:rPr>
+              <a:t>因变量Y</a:t>
+            </a:r>
+          </a:p>
+        </p:txBody>
+      </p:sp>
+    </p:spTree>
+  </p:cSld>
+  <p:clrMapOvr>
+    <a:masterClrMapping/>
+  </p:clrMapOvr>
+</p:sld>
+</file>
+
+<file path=ppt/slides/slide5.xml><?xml version="1.0" encoding="utf-8"?>
+<p:sld xmlns:a="http://schemas.openxmlformats.org/drawingml/2006/main" xmlns:p="http://schemas.openxmlformats.org/presentationml/2006/main" xmlns:r="http://schemas.openxmlformats.org/officeDocument/2006/relationships">
+  <p:cSld>
+    <p:spTree>
+      <p:nvGrpSpPr>
+        <p:cNvPr id="1" name=""/>
+        <p:cNvGrpSpPr/>
+        <p:nvPr/>
+      </p:nvGrpSpPr>
+      <p:grpSpPr/>
+      <p:sp>
+        <p:nvSpPr>
+          <p:cNvPr id="2" name="Rectangle 1"/>
+          <p:cNvSpPr/>
+          <p:nvPr/>
+        </p:nvSpPr>
+        <p:spPr>
+          <a:xfrm>
+            <a:off x="0" y="0"/>
+            <a:ext cx="12191695" cy="603504"/>
+          </a:xfrm>
+          <a:prstGeom prst="rect">
+            <a:avLst/>
+          </a:prstGeom>
+          <a:solidFill>
+            <a:srgbClr val="1F3B5B"/>
+          </a:solidFill>
+          <a:ln>
+            <a:noFill/>
+          </a:ln>
+          <a:effectLst/>
+        </p:spPr>
+        <p:style>
+          <a:lnRef idx="1">
+            <a:schemeClr val="accent1"/>
+          </a:lnRef>
+          <a:fillRef idx="3">
+            <a:schemeClr val="accent1"/>
+          </a:fillRef>
+          <a:effectRef idx="2">
+            <a:schemeClr val="accent1"/>
+          </a:effectRef>
+          <a:fontRef idx="minor">
+            <a:schemeClr val="lt1"/>
+          </a:fontRef>
+        </p:style>
+        <p:txBody>
+          <a:bodyPr rtlCol="0" anchor="ctr" wrap="square"/>
+          <a:lstStyle/>
+          <a:p>
+            <a:pPr algn="ctr"/>
+            <a:r>
+              <a:rPr sz="1900" b="1">
+                <a:solidFill>
+                  <a:srgbClr val="FFFFFF"/>
+                </a:solidFill>
+                <a:latin typeface="Microsoft YaHei"/>
+              </a:rPr>
+              <a:t>第二章 技术路线图  问题 → 数据 → 识别 → 备择 → 结论</a:t>
+            </a:r>
+          </a:p>
+        </p:txBody>
+      </p:sp>
+      <p:sp>
+        <p:nvSpPr>
+          <p:cNvPr id="3" name="Rounded Rectangle 2"/>
+          <p:cNvSpPr/>
+          <p:nvPr/>
+        </p:nvSpPr>
+        <p:spPr>
+          <a:xfrm>
+            <a:off x="3355848" y="960120"/>
+            <a:ext cx="5486400" cy="566928"/>
+          </a:xfrm>
+          <a:prstGeom prst="roundRect">
+            <a:avLst/>
+          </a:prstGeom>
+          <a:solidFill>
+            <a:srgbClr val="2E5E8C"/>
+          </a:solidFill>
+          <a:ln w="12700">
+            <a:solidFill>
+              <a:srgbClr val="2E5E8C"/>
+            </a:solidFill>
+          </a:ln>
+          <a:effectLst/>
+        </p:spPr>
+        <p:style>
+          <a:lnRef idx="1">
+            <a:schemeClr val="accent1"/>
+          </a:lnRef>
+          <a:fillRef idx="3">
+            <a:schemeClr val="accent1"/>
+          </a:fillRef>
+          <a:effectRef idx="2">
+            <a:schemeClr val="accent1"/>
+          </a:effectRef>
+          <a:fontRef idx="minor">
+            <a:schemeClr val="lt1"/>
+          </a:fontRef>
+        </p:style>
+        <p:txBody>
+          <a:bodyPr rtlCol="0" anchor="ctr" wrap="square" lIns="50800" rIns="50800" tIns="25400" bIns="25400"/>
+          <a:lstStyle/>
+          <a:p>
+            <a:pPr algn="ctr"/>
+            <a:r>
+              <a:rPr sz="1200" b="1">
+                <a:solidFill>
+                  <a:srgbClr val="FFFFFF"/>
+                </a:solidFill>
+                <a:latin typeface="Microsoft YaHei"/>
+              </a:rPr>
+              <a:t>研究问题：智能外呼扩散是否伴随区域过度负债上升？</a:t>
+            </a:r>
+          </a:p>
+        </p:txBody>
+      </p:sp>
+      <p:sp>
+        <p:nvSpPr>
+          <p:cNvPr id="4" name="Rounded Rectangle 3"/>
+          <p:cNvSpPr/>
+          <p:nvPr/>
+        </p:nvSpPr>
+        <p:spPr>
+          <a:xfrm>
+            <a:off x="3355848" y="1874519"/>
+            <a:ext cx="5486400" cy="640080"/>
+          </a:xfrm>
+          <a:prstGeom prst="roundRect">
+            <a:avLst/>
+          </a:prstGeom>
+          <a:solidFill>
+            <a:srgbClr val="2E5E8C"/>
+          </a:solidFill>
+          <a:ln w="12700">
+            <a:solidFill>
+              <a:srgbClr val="2E5E8C"/>
+            </a:solidFill>
+          </a:ln>
+          <a:effectLst/>
+        </p:spPr>
+        <p:style>
+          <a:lnRef idx="1">
+            <a:schemeClr val="accent1"/>
+          </a:lnRef>
+          <a:fillRef idx="3">
+            <a:schemeClr val="accent1"/>
+          </a:fillRef>
+          <a:effectRef idx="2">
+            <a:schemeClr val="accent1"/>
+          </a:effectRef>
+          <a:fontRef idx="minor">
+            <a:schemeClr val="lt1"/>
+          </a:fontRef>
+        </p:style>
+        <p:txBody>
+          <a:bodyPr rtlCol="0" anchor="ctr" wrap="square" lIns="50800" rIns="50800" tIns="25400" bIns="25400"/>
+          <a:lstStyle/>
+          <a:p>
+            <a:pPr algn="ctr"/>
+            <a:r>
+              <a:rPr sz="1100" b="1">
+                <a:solidFill>
+                  <a:srgbClr val="FFFFFF"/>
+                </a:solidFill>
+                <a:latin typeface="Microsoft YaHei"/>
+              </a:rPr>
+              <a:t>数据：裁判文书面板 + 招聘数据构造扩散代理 + 数字普惠指数</a:t>
+            </a:r>
+          </a:p>
+        </p:txBody>
+      </p:sp>
+      <p:sp>
+        <p:nvSpPr>
+          <p:cNvPr id="5" name="Rounded Rectangle 4"/>
+          <p:cNvSpPr/>
+          <p:nvPr/>
+        </p:nvSpPr>
+        <p:spPr>
+          <a:xfrm>
+            <a:off x="3355848" y="2862072"/>
+            <a:ext cx="5486400" cy="566928"/>
+          </a:xfrm>
+          <a:prstGeom prst="roundRect">
+            <a:avLst/>
+          </a:prstGeom>
+          <a:solidFill>
+            <a:srgbClr val="1B7F79"/>
+          </a:solidFill>
+          <a:ln w="12700">
+            <a:solidFill>
+              <a:srgbClr val="1B7F79"/>
+            </a:solidFill>
+          </a:ln>
+          <a:effectLst/>
+        </p:spPr>
+        <p:style>
+          <a:lnRef idx="1">
+            <a:schemeClr val="accent1"/>
+          </a:lnRef>
+          <a:fillRef idx="3">
+            <a:schemeClr val="accent1"/>
+          </a:fillRef>
+          <a:effectRef idx="2">
+            <a:schemeClr val="accent1"/>
+          </a:effectRef>
+          <a:fontRef idx="minor">
+            <a:schemeClr val="lt1"/>
+          </a:fontRef>
+        </p:style>
+        <p:txBody>
+          <a:bodyPr rtlCol="0" anchor="ctr" wrap="square" lIns="50800" rIns="50800" tIns="25400" bIns="25400"/>
+          <a:lstStyle/>
+          <a:p>
+            <a:pPr algn="ctr"/>
+            <a:r>
+              <a:rPr sz="1100" b="1">
+                <a:solidFill>
+                  <a:srgbClr val="FFFFFF"/>
+                </a:solidFill>
+                <a:latin typeface="Microsoft YaHei"/>
+              </a:rPr>
+              <a:t>基准：双向固定效应  +  Bartik 移动份额 IV</a:t>
+            </a:r>
+          </a:p>
+        </p:txBody>
+      </p:sp>
+      <p:sp>
+        <p:nvSpPr>
+          <p:cNvPr id="6" name="Rounded Rectangle 5"/>
+          <p:cNvSpPr/>
+          <p:nvPr/>
+        </p:nvSpPr>
+        <p:spPr>
+          <a:xfrm>
+            <a:off x="3355848" y="3703320"/>
+            <a:ext cx="5486400" cy="640080"/>
+          </a:xfrm>
+          <a:prstGeom prst="roundRect">
+            <a:avLst/>
+          </a:prstGeom>
+          <a:solidFill>
+            <a:srgbClr val="C87F0A"/>
+          </a:solidFill>
+          <a:ln w="12700">
+            <a:solidFill>
+              <a:srgbClr val="C87F0A"/>
+            </a:solidFill>
+          </a:ln>
+          <a:effectLst/>
+        </p:spPr>
+        <p:style>
+          <a:lnRef idx="1">
+            <a:schemeClr val="accent1"/>
+          </a:lnRef>
+          <a:fillRef idx="3">
+            <a:schemeClr val="accent1"/>
+          </a:fillRef>
+          <a:effectRef idx="2">
+            <a:schemeClr val="accent1"/>
+          </a:effectRef>
+          <a:fontRef idx="minor">
+            <a:schemeClr val="lt1"/>
+          </a:fontRef>
+        </p:style>
+        <p:txBody>
+          <a:bodyPr rtlCol="0" anchor="ctr" wrap="square" lIns="50800" rIns="50800" tIns="25400" bIns="25400"/>
+          <a:lstStyle/>
+          <a:p>
+            <a:pPr algn="ctr"/>
+            <a:r>
+              <a:rPr sz="1100" b="1">
+                <a:solidFill>
+                  <a:srgbClr val="FFFFFF"/>
+                </a:solidFill>
+                <a:latin typeface="Microsoft YaHei"/>
+              </a:rPr>
+              <a:t>备择识别：2017/2020 监管冲击 DiD/DDD  +  事件研究前趋势检验</a:t>
+            </a:r>
+          </a:p>
+        </p:txBody>
+      </p:sp>
+      <p:sp>
+        <p:nvSpPr>
+          <p:cNvPr id="7" name="Rounded Rectangle 6"/>
+          <p:cNvSpPr/>
+          <p:nvPr/>
+        </p:nvSpPr>
+        <p:spPr>
+          <a:xfrm>
+            <a:off x="3355848" y="4690872"/>
+            <a:ext cx="5486400" cy="566928"/>
+          </a:xfrm>
+          <a:prstGeom prst="roundRect">
+            <a:avLst/>
+          </a:prstGeom>
+          <a:solidFill>
+            <a:srgbClr val="C05A16"/>
+          </a:solidFill>
+          <a:ln w="12700">
+            <a:solidFill>
+              <a:srgbClr val="C05A16"/>
+            </a:solidFill>
+          </a:ln>
+          <a:effectLst/>
+        </p:spPr>
+        <p:style>
+          <a:lnRef idx="1">
+            <a:schemeClr val="accent1"/>
+          </a:lnRef>
+          <a:fillRef idx="3">
+            <a:schemeClr val="accent1"/>
+          </a:fillRef>
+          <a:effectRef idx="2">
+            <a:schemeClr val="accent1"/>
+          </a:effectRef>
+          <a:fontRef idx="minor">
+            <a:schemeClr val="lt1"/>
+          </a:fontRef>
+        </p:style>
+        <p:txBody>
+          <a:bodyPr rtlCol="0" anchor="ctr" wrap="square" lIns="50800" rIns="50800" tIns="25400" bIns="25400"/>
+          <a:lstStyle/>
+          <a:p>
+            <a:pPr algn="ctr"/>
+            <a:r>
+              <a:rPr sz="1100" b="1">
+                <a:solidFill>
+                  <a:srgbClr val="FFFFFF"/>
+                </a:solidFill>
+                <a:latin typeface="Microsoft YaHei"/>
+              </a:rPr>
+              <a:t>结论：中观扩散 → 区域过度负债 的因果证据</a:t>
+            </a:r>
+          </a:p>
+        </p:txBody>
+      </p:sp>
       <p:cxnSp>
         <p:nvCxnSpPr>
-          <p:cNvPr id="19" name="Connector 18"/>
+          <p:cNvPr id="8" name="Connector 7"/>
           <p:cNvCxnSpPr/>
           <p:nvPr/>
         </p:nvCxnSpPr>
         <p:spPr>
-          <a:xfrm flipH="1">
-            <a:off x="2011680" y="2139696"/>
-            <a:ext cx="1890064" cy="292608"/>
+          <a:xfrm>
+            <a:off x="6099048" y="1527048"/>
+            <a:ext cx="0" cy="347471"/>
           </a:xfrm>
           <a:prstGeom prst="line">
             <a:avLst/>
@@ -4441,14 +8707,14 @@
       </p:cxnSp>
       <p:cxnSp>
         <p:nvCxnSpPr>
-          <p:cNvPr id="20" name="Connector 19"/>
+          <p:cNvPr id="9" name="Connector 8"/>
           <p:cNvCxnSpPr/>
           <p:nvPr/>
         </p:nvCxnSpPr>
         <p:spPr>
           <a:xfrm>
-            <a:off x="8290864" y="2139696"/>
-            <a:ext cx="1889151" cy="292608"/>
+            <a:off x="6099048" y="2514599"/>
+            <a:ext cx="0" cy="347473"/>
           </a:xfrm>
           <a:prstGeom prst="line">
             <a:avLst/>
@@ -4478,88 +8744,14 @@
       </p:cxnSp>
       <p:cxnSp>
         <p:nvCxnSpPr>
-          <p:cNvPr id="21" name="Connector 20"/>
+          <p:cNvPr id="10" name="Connector 9"/>
           <p:cNvCxnSpPr/>
           <p:nvPr/>
         </p:nvCxnSpPr>
         <p:spPr>
           <a:xfrm>
-            <a:off x="3901744" y="2139696"/>
-            <a:ext cx="7695591" cy="292608"/>
-          </a:xfrm>
-          <a:prstGeom prst="line">
-            <a:avLst/>
-          </a:prstGeom>
-          <a:ln w="12700">
-            <a:solidFill>
-              <a:srgbClr val="9AA7B2"/>
-            </a:solidFill>
-            <a:tailEnd type="triangle" w="med" len="med"/>
-          </a:ln>
-          <a:effectLst/>
-        </p:spPr>
-        <p:style>
-          <a:lnRef idx="2">
-            <a:schemeClr val="accent1"/>
-          </a:lnRef>
-          <a:fillRef idx="0">
-            <a:schemeClr val="accent1"/>
-          </a:fillRef>
-          <a:effectRef idx="1">
-            <a:schemeClr val="accent1"/>
-          </a:effectRef>
-          <a:fontRef idx="minor">
-            <a:schemeClr val="tx1"/>
-          </a:fontRef>
-        </p:style>
-      </p:cxnSp>
-      <p:cxnSp>
-        <p:nvCxnSpPr>
-          <p:cNvPr id="22" name="Connector 21"/>
-          <p:cNvCxnSpPr/>
-          <p:nvPr/>
-        </p:nvCxnSpPr>
-        <p:spPr>
-          <a:xfrm flipH="1">
-            <a:off x="594360" y="2139696"/>
-            <a:ext cx="7696504" cy="292608"/>
-          </a:xfrm>
-          <a:prstGeom prst="line">
-            <a:avLst/>
-          </a:prstGeom>
-          <a:ln w="12700">
-            <a:solidFill>
-              <a:srgbClr val="9AA7B2"/>
-            </a:solidFill>
-            <a:tailEnd type="triangle" w="med" len="med"/>
-          </a:ln>
-          <a:effectLst/>
-        </p:spPr>
-        <p:style>
-          <a:lnRef idx="2">
-            <a:schemeClr val="accent1"/>
-          </a:lnRef>
-          <a:fillRef idx="0">
-            <a:schemeClr val="accent1"/>
-          </a:fillRef>
-          <a:effectRef idx="1">
-            <a:schemeClr val="accent1"/>
-          </a:effectRef>
-          <a:fontRef idx="minor">
-            <a:schemeClr val="tx1"/>
-          </a:fontRef>
-        </p:style>
-      </p:cxnSp>
-      <p:cxnSp>
-        <p:nvCxnSpPr>
-          <p:cNvPr id="23" name="Connector 22"/>
-          <p:cNvCxnSpPr/>
-          <p:nvPr/>
-        </p:nvCxnSpPr>
-        <p:spPr>
-          <a:xfrm flipH="1">
-            <a:off x="6096304" y="3163824"/>
-            <a:ext cx="4083711" cy="182880"/>
+            <a:off x="6099048" y="3429000"/>
+            <a:ext cx="0" cy="274320"/>
           </a:xfrm>
           <a:prstGeom prst="line">
             <a:avLst/>
@@ -4589,14 +8781,14 @@
       </p:cxnSp>
       <p:cxnSp>
         <p:nvCxnSpPr>
-          <p:cNvPr id="24" name="Connector 23"/>
+          <p:cNvPr id="11" name="Connector 10"/>
           <p:cNvCxnSpPr/>
           <p:nvPr/>
         </p:nvCxnSpPr>
         <p:spPr>
-          <a:xfrm flipH="1">
-            <a:off x="4572000" y="4261104"/>
-            <a:ext cx="1524304" cy="173736"/>
+          <a:xfrm>
+            <a:off x="6099048" y="4343400"/>
+            <a:ext cx="0" cy="347472"/>
           </a:xfrm>
           <a:prstGeom prst="line">
             <a:avLst/>
@@ -4624,16 +8816,550 @@
           </a:fontRef>
         </p:style>
       </p:cxnSp>
+      <p:sp>
+        <p:nvSpPr>
+          <p:cNvPr id="12" name="Rectangle 11"/>
+          <p:cNvSpPr/>
+          <p:nvPr/>
+        </p:nvSpPr>
+        <p:spPr>
+          <a:xfrm>
+            <a:off x="274320" y="6053328"/>
+            <a:ext cx="11643055" cy="384048"/>
+          </a:xfrm>
+          <a:prstGeom prst="rect">
+            <a:avLst/>
+          </a:prstGeom>
+          <a:solidFill>
+            <a:srgbClr val="1F3B5B"/>
+          </a:solidFill>
+          <a:ln w="12700">
+            <a:solidFill>
+              <a:srgbClr val="1F3B5B"/>
+            </a:solidFill>
+          </a:ln>
+          <a:effectLst/>
+        </p:spPr>
+        <p:style>
+          <a:lnRef idx="1">
+            <a:schemeClr val="accent1"/>
+          </a:lnRef>
+          <a:fillRef idx="3">
+            <a:schemeClr val="accent1"/>
+          </a:fillRef>
+          <a:effectRef idx="2">
+            <a:schemeClr val="accent1"/>
+          </a:effectRef>
+          <a:fontRef idx="minor">
+            <a:schemeClr val="lt1"/>
+          </a:fontRef>
+        </p:style>
+        <p:txBody>
+          <a:bodyPr rtlCol="0" anchor="ctr" wrap="square" lIns="50800" rIns="50800" tIns="25400" bIns="25400"/>
+          <a:lstStyle/>
+          <a:p>
+            <a:pPr algn="ctr"/>
+            <a:r>
+              <a:rPr sz="1050" b="1">
+                <a:solidFill>
+                  <a:srgbClr val="FFFFFF"/>
+                </a:solidFill>
+                <a:latin typeface="Microsoft YaHei"/>
+              </a:rPr>
+              <a:t>工具变量有效性报告：Goldsmith-Pinkham-Sorkin-Swift / Borusyak-Hull-Jaravel 检验</a:t>
+            </a:r>
+          </a:p>
+        </p:txBody>
+      </p:sp>
+    </p:spTree>
+  </p:cSld>
+  <p:clrMapOvr>
+    <a:masterClrMapping/>
+  </p:clrMapOvr>
+</p:sld>
+</file>
+
+<file path=ppt/slides/slide6.xml><?xml version="1.0" encoding="utf-8"?>
+<p:sld xmlns:a="http://schemas.openxmlformats.org/drawingml/2006/main" xmlns:p="http://schemas.openxmlformats.org/presentationml/2006/main" xmlns:r="http://schemas.openxmlformats.org/officeDocument/2006/relationships">
+  <p:cSld>
+    <p:spTree>
+      <p:nvGrpSpPr>
+        <p:cNvPr id="1" name=""/>
+        <p:cNvGrpSpPr/>
+        <p:nvPr/>
+      </p:nvGrpSpPr>
+      <p:grpSpPr/>
+      <p:sp>
+        <p:nvSpPr>
+          <p:cNvPr id="2" name="Rectangle 1"/>
+          <p:cNvSpPr/>
+          <p:nvPr/>
+        </p:nvSpPr>
+        <p:spPr>
+          <a:xfrm>
+            <a:off x="0" y="0"/>
+            <a:ext cx="12191695" cy="603504"/>
+          </a:xfrm>
+          <a:prstGeom prst="rect">
+            <a:avLst/>
+          </a:prstGeom>
+          <a:solidFill>
+            <a:srgbClr val="1F3B5B"/>
+          </a:solidFill>
+          <a:ln>
+            <a:noFill/>
+          </a:ln>
+          <a:effectLst/>
+        </p:spPr>
+        <p:style>
+          <a:lnRef idx="1">
+            <a:schemeClr val="accent1"/>
+          </a:lnRef>
+          <a:fillRef idx="3">
+            <a:schemeClr val="accent1"/>
+          </a:fillRef>
+          <a:effectRef idx="2">
+            <a:schemeClr val="accent1"/>
+          </a:effectRef>
+          <a:fontRef idx="minor">
+            <a:schemeClr val="lt1"/>
+          </a:fontRef>
+        </p:style>
+        <p:txBody>
+          <a:bodyPr rtlCol="0" anchor="ctr" wrap="square"/>
+          <a:lstStyle/>
+          <a:p>
+            <a:pPr algn="ctr"/>
+            <a:r>
+              <a:rPr sz="1900" b="1">
+                <a:solidFill>
+                  <a:srgbClr val="FFFFFF"/>
+                </a:solidFill>
+                <a:latin typeface="Microsoft YaHei"/>
+              </a:rPr>
+              <a:t>第三章 框架图  数字金融/AI信贷X →（家庭传导M）→ 脆弱性Y</a:t>
+            </a:r>
+          </a:p>
+        </p:txBody>
+      </p:sp>
+      <p:sp>
+        <p:nvSpPr>
+          <p:cNvPr id="3" name="TextBox 2"/>
+          <p:cNvSpPr txBox="1"/>
+          <p:nvPr/>
+        </p:nvSpPr>
+        <p:spPr>
+          <a:xfrm>
+            <a:off x="164592" y="1143000"/>
+            <a:ext cx="1463040" cy="457200"/>
+          </a:xfrm>
+          <a:prstGeom prst="rect">
+            <a:avLst/>
+          </a:prstGeom>
+          <a:noFill/>
+        </p:spPr>
+        <p:txBody>
+          <a:bodyPr wrap="square" anchor="ctr">
+            <a:spAutoFit/>
+          </a:bodyPr>
+          <a:lstStyle/>
+          <a:p>
+            <a:pPr algn="ctr"/>
+            <a:r>
+              <a:rPr sz="1100" i="0" b="1">
+                <a:solidFill>
+                  <a:srgbClr val="1F3B5B"/>
+                </a:solidFill>
+                <a:latin typeface="Microsoft YaHei"/>
+              </a:rPr>
+              <a:t>自变量</a:t>
+            </a:r>
+          </a:p>
+          <a:p>
+            <a:pPr algn="ctr"/>
+            <a:r>
+              <a:rPr sz="1100" i="0" b="1">
+                <a:solidFill>
+                  <a:srgbClr val="1F3B5B"/>
+                </a:solidFill>
+                <a:latin typeface="Microsoft YaHei"/>
+              </a:rPr>
+              <a:t>X</a:t>
+            </a:r>
+          </a:p>
+        </p:txBody>
+      </p:sp>
+      <p:sp>
+        <p:nvSpPr>
+          <p:cNvPr id="4" name="TextBox 3"/>
+          <p:cNvSpPr txBox="1"/>
+          <p:nvPr/>
+        </p:nvSpPr>
+        <p:spPr>
+          <a:xfrm>
+            <a:off x="164592" y="2423160"/>
+            <a:ext cx="1463040" cy="457200"/>
+          </a:xfrm>
+          <a:prstGeom prst="rect">
+            <a:avLst/>
+          </a:prstGeom>
+          <a:noFill/>
+        </p:spPr>
+        <p:txBody>
+          <a:bodyPr wrap="square" anchor="ctr">
+            <a:spAutoFit/>
+          </a:bodyPr>
+          <a:lstStyle/>
+          <a:p>
+            <a:pPr algn="ctr"/>
+            <a:r>
+              <a:rPr sz="1100" i="0" b="1">
+                <a:solidFill>
+                  <a:srgbClr val="1B7F79"/>
+                </a:solidFill>
+                <a:latin typeface="Microsoft YaHei"/>
+              </a:rPr>
+              <a:t>中介机制</a:t>
+            </a:r>
+          </a:p>
+          <a:p>
+            <a:pPr algn="ctr"/>
+            <a:r>
+              <a:rPr sz="1100" i="0" b="1">
+                <a:solidFill>
+                  <a:srgbClr val="1B7F79"/>
+                </a:solidFill>
+                <a:latin typeface="Microsoft YaHei"/>
+              </a:rPr>
+              <a:t>M</a:t>
+            </a:r>
+          </a:p>
+        </p:txBody>
+      </p:sp>
+      <p:sp>
+        <p:nvSpPr>
+          <p:cNvPr id="5" name="TextBox 4"/>
+          <p:cNvSpPr txBox="1"/>
+          <p:nvPr/>
+        </p:nvSpPr>
+        <p:spPr>
+          <a:xfrm>
+            <a:off x="164592" y="3566160"/>
+            <a:ext cx="1463040" cy="457200"/>
+          </a:xfrm>
+          <a:prstGeom prst="rect">
+            <a:avLst/>
+          </a:prstGeom>
+          <a:noFill/>
+        </p:spPr>
+        <p:txBody>
+          <a:bodyPr wrap="square" anchor="ctr">
+            <a:spAutoFit/>
+          </a:bodyPr>
+          <a:lstStyle/>
+          <a:p>
+            <a:pPr algn="ctr"/>
+            <a:r>
+              <a:rPr sz="1100" i="0" b="1">
+                <a:solidFill>
+                  <a:srgbClr val="C05A16"/>
+                </a:solidFill>
+                <a:latin typeface="Microsoft YaHei"/>
+              </a:rPr>
+              <a:t>因变量</a:t>
+            </a:r>
+          </a:p>
+          <a:p>
+            <a:pPr algn="ctr"/>
+            <a:r>
+              <a:rPr sz="1100" i="0" b="1">
+                <a:solidFill>
+                  <a:srgbClr val="C05A16"/>
+                </a:solidFill>
+                <a:latin typeface="Microsoft YaHei"/>
+              </a:rPr>
+              <a:t>Y</a:t>
+            </a:r>
+          </a:p>
+        </p:txBody>
+      </p:sp>
+      <p:sp>
+        <p:nvSpPr>
+          <p:cNvPr id="6" name="TextBox 5"/>
+          <p:cNvSpPr txBox="1"/>
+          <p:nvPr/>
+        </p:nvSpPr>
+        <p:spPr>
+          <a:xfrm>
+            <a:off x="164592" y="4709160"/>
+            <a:ext cx="1463040" cy="457200"/>
+          </a:xfrm>
+          <a:prstGeom prst="rect">
+            <a:avLst/>
+          </a:prstGeom>
+          <a:noFill/>
+        </p:spPr>
+        <p:txBody>
+          <a:bodyPr wrap="square" anchor="ctr">
+            <a:spAutoFit/>
+          </a:bodyPr>
+          <a:lstStyle/>
+          <a:p>
+            <a:pPr algn="ctr"/>
+            <a:r>
+              <a:rPr sz="1100" i="0" b="1">
+                <a:solidFill>
+                  <a:srgbClr val="6A3D9A"/>
+                </a:solidFill>
+                <a:latin typeface="Microsoft YaHei"/>
+              </a:rPr>
+              <a:t>调节</a:t>
+            </a:r>
+          </a:p>
+          <a:p>
+            <a:pPr algn="ctr"/>
+            <a:r>
+              <a:rPr sz="1100" i="0" b="1">
+                <a:solidFill>
+                  <a:srgbClr val="6A3D9A"/>
+                </a:solidFill>
+                <a:latin typeface="Microsoft YaHei"/>
+              </a:rPr>
+              <a:t>W·异质</a:t>
+            </a:r>
+          </a:p>
+        </p:txBody>
+      </p:sp>
+      <p:sp>
+        <p:nvSpPr>
+          <p:cNvPr id="7" name="Rounded Rectangle 6"/>
+          <p:cNvSpPr/>
+          <p:nvPr/>
+        </p:nvSpPr>
+        <p:spPr>
+          <a:xfrm>
+            <a:off x="1691640" y="1051560"/>
+            <a:ext cx="8778240" cy="566928"/>
+          </a:xfrm>
+          <a:prstGeom prst="roundRect">
+            <a:avLst/>
+          </a:prstGeom>
+          <a:solidFill>
+            <a:srgbClr val="1F3B5B"/>
+          </a:solidFill>
+          <a:ln w="12700">
+            <a:solidFill>
+              <a:srgbClr val="1F3B5B"/>
+            </a:solidFill>
+          </a:ln>
+          <a:effectLst/>
+        </p:spPr>
+        <p:style>
+          <a:lnRef idx="1">
+            <a:schemeClr val="accent1"/>
+          </a:lnRef>
+          <a:fillRef idx="3">
+            <a:schemeClr val="accent1"/>
+          </a:fillRef>
+          <a:effectRef idx="2">
+            <a:schemeClr val="accent1"/>
+          </a:effectRef>
+          <a:fontRef idx="minor">
+            <a:schemeClr val="lt1"/>
+          </a:fontRef>
+        </p:style>
+        <p:txBody>
+          <a:bodyPr rtlCol="0" anchor="ctr" wrap="square" lIns="50800" rIns="50800" tIns="25400" bIns="25400"/>
+          <a:lstStyle/>
+          <a:p>
+            <a:pPr algn="ctr"/>
+            <a:r>
+              <a:rPr sz="1100" b="1">
+                <a:solidFill>
+                  <a:srgbClr val="FFFFFF"/>
+                </a:solidFill>
+                <a:latin typeface="Microsoft YaHei"/>
+              </a:rPr>
+              <a:t>X｜数字金融·AI信贷暴露  +  2017/2020 监管冲击（准实验）</a:t>
+            </a:r>
+          </a:p>
+        </p:txBody>
+      </p:sp>
+      <p:sp>
+        <p:nvSpPr>
+          <p:cNvPr id="8" name="Rounded Rectangle 7"/>
+          <p:cNvSpPr/>
+          <p:nvPr/>
+        </p:nvSpPr>
+        <p:spPr>
+          <a:xfrm>
+            <a:off x="1691640" y="2331720"/>
+            <a:ext cx="8778240" cy="512064"/>
+          </a:xfrm>
+          <a:prstGeom prst="roundRect">
+            <a:avLst/>
+          </a:prstGeom>
+          <a:solidFill>
+            <a:srgbClr val="1B7F79"/>
+          </a:solidFill>
+          <a:ln w="12700">
+            <a:solidFill>
+              <a:srgbClr val="1B7F79"/>
+            </a:solidFill>
+          </a:ln>
+          <a:effectLst/>
+        </p:spPr>
+        <p:style>
+          <a:lnRef idx="1">
+            <a:schemeClr val="accent1"/>
+          </a:lnRef>
+          <a:fillRef idx="3">
+            <a:schemeClr val="accent1"/>
+          </a:fillRef>
+          <a:effectRef idx="2">
+            <a:schemeClr val="accent1"/>
+          </a:effectRef>
+          <a:fontRef idx="minor">
+            <a:schemeClr val="lt1"/>
+          </a:fontRef>
+        </p:style>
+        <p:txBody>
+          <a:bodyPr rtlCol="0" anchor="ctr" wrap="square" lIns="50800" rIns="50800" tIns="25400" bIns="25400"/>
+          <a:lstStyle/>
+          <a:p>
+            <a:pPr algn="ctr"/>
+            <a:r>
+              <a:rPr sz="1100" b="1">
+                <a:solidFill>
+                  <a:srgbClr val="FFFFFF"/>
+                </a:solidFill>
+                <a:latin typeface="Microsoft YaHei"/>
+              </a:rPr>
+              <a:t>M｜信贷可得 与 劝说 在家庭层的传导</a:t>
+            </a:r>
+          </a:p>
+        </p:txBody>
+      </p:sp>
+      <p:sp>
+        <p:nvSpPr>
+          <p:cNvPr id="9" name="Rounded Rectangle 8"/>
+          <p:cNvSpPr/>
+          <p:nvPr/>
+        </p:nvSpPr>
+        <p:spPr>
+          <a:xfrm>
+            <a:off x="1691640" y="3474720"/>
+            <a:ext cx="8778240" cy="566928"/>
+          </a:xfrm>
+          <a:prstGeom prst="roundRect">
+            <a:avLst/>
+          </a:prstGeom>
+          <a:solidFill>
+            <a:srgbClr val="C05A16"/>
+          </a:solidFill>
+          <a:ln w="12700">
+            <a:solidFill>
+              <a:srgbClr val="C05A16"/>
+            </a:solidFill>
+          </a:ln>
+          <a:effectLst/>
+        </p:spPr>
+        <p:style>
+          <a:lnRef idx="1">
+            <a:schemeClr val="accent1"/>
+          </a:lnRef>
+          <a:fillRef idx="3">
+            <a:schemeClr val="accent1"/>
+          </a:fillRef>
+          <a:effectRef idx="2">
+            <a:schemeClr val="accent1"/>
+          </a:effectRef>
+          <a:fontRef idx="minor">
+            <a:schemeClr val="lt1"/>
+          </a:fontRef>
+        </p:style>
+        <p:txBody>
+          <a:bodyPr rtlCol="0" anchor="ctr" wrap="square" lIns="50800" rIns="50800" tIns="25400" bIns="25400"/>
+          <a:lstStyle/>
+          <a:p>
+            <a:pPr algn="ctr"/>
+            <a:r>
+              <a:rPr sz="1100" b="1">
+                <a:solidFill>
+                  <a:srgbClr val="FFFFFF"/>
+                </a:solidFill>
+                <a:latin typeface="Microsoft YaHei"/>
+              </a:rPr>
+              <a:t>Y｜负债收入比·偿债比·逾期·无法应急筹款·是否多头</a:t>
+            </a:r>
+          </a:p>
+        </p:txBody>
+      </p:sp>
+      <p:sp>
+        <p:nvSpPr>
+          <p:cNvPr id="10" name="Rounded Rectangle 9"/>
+          <p:cNvSpPr/>
+          <p:nvPr/>
+        </p:nvSpPr>
+        <p:spPr>
+          <a:xfrm>
+            <a:off x="1691640" y="4617720"/>
+            <a:ext cx="8778240" cy="512064"/>
+          </a:xfrm>
+          <a:prstGeom prst="roundRect">
+            <a:avLst/>
+          </a:prstGeom>
+          <a:solidFill>
+            <a:srgbClr val="6A3D9A"/>
+          </a:solidFill>
+          <a:ln w="12700">
+            <a:solidFill>
+              <a:srgbClr val="6A3D9A"/>
+            </a:solidFill>
+          </a:ln>
+          <a:effectLst/>
+        </p:spPr>
+        <p:style>
+          <a:lnRef idx="1">
+            <a:schemeClr val="accent1"/>
+          </a:lnRef>
+          <a:fillRef idx="3">
+            <a:schemeClr val="accent1"/>
+          </a:fillRef>
+          <a:effectRef idx="2">
+            <a:schemeClr val="accent1"/>
+          </a:effectRef>
+          <a:fontRef idx="minor">
+            <a:schemeClr val="lt1"/>
+          </a:fontRef>
+        </p:style>
+        <p:txBody>
+          <a:bodyPr rtlCol="0" anchor="ctr" wrap="square" lIns="50800" rIns="50800" tIns="25400" bIns="25400"/>
+          <a:lstStyle/>
+          <a:p>
+            <a:pPr algn="ctr"/>
+            <a:r>
+              <a:rPr sz="1100" b="1">
+                <a:solidFill>
+                  <a:srgbClr val="FFFFFF"/>
+                </a:solidFill>
+                <a:latin typeface="Microsoft YaHei"/>
+              </a:rPr>
+              <a:t>调节 W·异质性：低收入 / 年轻 / 已多头 组效应更强</a:t>
+            </a:r>
+          </a:p>
+        </p:txBody>
+      </p:sp>
       <p:cxnSp>
         <p:nvCxnSpPr>
-          <p:cNvPr id="25" name="Connector 24"/>
+          <p:cNvPr id="11" name="Connector 10"/>
           <p:cNvCxnSpPr/>
           <p:nvPr/>
         </p:nvCxnSpPr>
         <p:spPr>
           <a:xfrm>
-            <a:off x="6096304" y="4261104"/>
-            <a:ext cx="1523391" cy="173736"/>
+            <a:off x="6080760" y="1618488"/>
+            <a:ext cx="0" cy="713232"/>
           </a:xfrm>
           <a:prstGeom prst="line">
             <a:avLst/>
@@ -4663,14 +9389,14 @@
       </p:cxnSp>
       <p:cxnSp>
         <p:nvCxnSpPr>
-          <p:cNvPr id="26" name="Connector 25"/>
+          <p:cNvPr id="12" name="Connector 11"/>
           <p:cNvCxnSpPr/>
           <p:nvPr/>
         </p:nvCxnSpPr>
         <p:spPr>
-          <a:xfrm flipH="1">
-            <a:off x="1915668" y="3163824"/>
-            <a:ext cx="96012" cy="2011680"/>
+          <a:xfrm>
+            <a:off x="6080760" y="2843784"/>
+            <a:ext cx="0" cy="630936"/>
           </a:xfrm>
           <a:prstGeom prst="line">
             <a:avLst/>
@@ -4700,14 +9426,824 @@
       </p:cxnSp>
       <p:cxnSp>
         <p:nvCxnSpPr>
-          <p:cNvPr id="27" name="Connector 26"/>
+          <p:cNvPr id="13" name="Connector 12"/>
           <p:cNvCxnSpPr/>
           <p:nvPr/>
         </p:nvCxnSpPr>
         <p:spPr>
-          <a:xfrm flipH="1">
-            <a:off x="2281428" y="5001768"/>
-            <a:ext cx="2290572" cy="173736"/>
+          <a:xfrm flipV="1">
+            <a:off x="6080760" y="4041648"/>
+            <a:ext cx="0" cy="576072"/>
+          </a:xfrm>
+          <a:prstGeom prst="line">
+            <a:avLst/>
+          </a:prstGeom>
+          <a:ln w="16510">
+            <a:solidFill>
+              <a:srgbClr val="6A3D9A"/>
+            </a:solidFill>
+            <a:prstDash val="dash"/>
+            <a:tailEnd type="triangle" w="med" len="med"/>
+          </a:ln>
+          <a:effectLst/>
+        </p:spPr>
+        <p:style>
+          <a:lnRef idx="2">
+            <a:schemeClr val="accent1"/>
+          </a:lnRef>
+          <a:fillRef idx="0">
+            <a:schemeClr val="accent1"/>
+          </a:fillRef>
+          <a:effectRef idx="1">
+            <a:schemeClr val="accent1"/>
+          </a:effectRef>
+          <a:fontRef idx="minor">
+            <a:schemeClr val="tx1"/>
+          </a:fontRef>
+        </p:style>
+      </p:cxnSp>
+      <p:sp>
+        <p:nvSpPr>
+          <p:cNvPr id="14" name="Rectangle 13"/>
+          <p:cNvSpPr/>
+          <p:nvPr/>
+        </p:nvSpPr>
+        <p:spPr>
+          <a:xfrm>
+            <a:off x="274320" y="6053328"/>
+            <a:ext cx="11643055" cy="384048"/>
+          </a:xfrm>
+          <a:prstGeom prst="rect">
+            <a:avLst/>
+          </a:prstGeom>
+          <a:solidFill>
+            <a:srgbClr val="1F3B5B"/>
+          </a:solidFill>
+          <a:ln w="12700">
+            <a:solidFill>
+              <a:srgbClr val="1F3B5B"/>
+            </a:solidFill>
+          </a:ln>
+          <a:effectLst/>
+        </p:spPr>
+        <p:style>
+          <a:lnRef idx="1">
+            <a:schemeClr val="accent1"/>
+          </a:lnRef>
+          <a:fillRef idx="3">
+            <a:schemeClr val="accent1"/>
+          </a:fillRef>
+          <a:effectRef idx="2">
+            <a:schemeClr val="accent1"/>
+          </a:effectRef>
+          <a:fontRef idx="minor">
+            <a:schemeClr val="lt1"/>
+          </a:fontRef>
+        </p:style>
+        <p:txBody>
+          <a:bodyPr rtlCol="0" anchor="ctr" wrap="square" lIns="50800" rIns="50800" tIns="25400" bIns="25400"/>
+          <a:lstStyle/>
+          <a:p>
+            <a:pPr algn="ctr"/>
+            <a:r>
+              <a:rPr sz="1050" b="1">
+                <a:solidFill>
+                  <a:srgbClr val="FFFFFF"/>
+                </a:solidFill>
+                <a:latin typeface="Microsoft YaHei"/>
+              </a:rPr>
+              <a:t>识别：高/低暴露区 × 前后 三重差分(DDD)　|　稳健：数字普惠指数连续处理 2SLS（到杭州距离/历史银行网点）+ PSM-DID</a:t>
+            </a:r>
+          </a:p>
+        </p:txBody>
+      </p:sp>
+      <p:sp>
+        <p:nvSpPr>
+          <p:cNvPr id="15" name="Rectangle 14"/>
+          <p:cNvSpPr/>
+          <p:nvPr/>
+        </p:nvSpPr>
+        <p:spPr>
+          <a:xfrm>
+            <a:off x="274320" y="6446520"/>
+            <a:ext cx="201168" cy="146304"/>
+          </a:xfrm>
+          <a:prstGeom prst="rect">
+            <a:avLst/>
+          </a:prstGeom>
+          <a:solidFill>
+            <a:srgbClr val="1F3B5B"/>
+          </a:solidFill>
+          <a:ln>
+            <a:noFill/>
+          </a:ln>
+          <a:effectLst/>
+        </p:spPr>
+        <p:style>
+          <a:lnRef idx="1">
+            <a:schemeClr val="accent1"/>
+          </a:lnRef>
+          <a:fillRef idx="3">
+            <a:schemeClr val="accent1"/>
+          </a:fillRef>
+          <a:effectRef idx="2">
+            <a:schemeClr val="accent1"/>
+          </a:effectRef>
+          <a:fontRef idx="minor">
+            <a:schemeClr val="lt1"/>
+          </a:fontRef>
+        </p:style>
+        <p:txBody>
+          <a:bodyPr rtlCol="0" anchor="ctr"/>
+          <a:lstStyle/>
+          <a:p>
+            <a:pPr algn="ctr"/>
+          </a:p>
+        </p:txBody>
+      </p:sp>
+      <p:sp>
+        <p:nvSpPr>
+          <p:cNvPr id="16" name="TextBox 15"/>
+          <p:cNvSpPr txBox="1"/>
+          <p:nvPr/>
+        </p:nvSpPr>
+        <p:spPr>
+          <a:xfrm>
+            <a:off x="512064" y="6391656"/>
+            <a:ext cx="1737360" cy="274320"/>
+          </a:xfrm>
+          <a:prstGeom prst="rect">
+            <a:avLst/>
+          </a:prstGeom>
+          <a:noFill/>
+        </p:spPr>
+        <p:txBody>
+          <a:bodyPr wrap="square" anchor="ctr">
+            <a:spAutoFit/>
+          </a:bodyPr>
+          <a:lstStyle/>
+          <a:p>
+            <a:pPr algn="l"/>
+            <a:r>
+              <a:rPr sz="900" i="0" b="0">
+                <a:solidFill>
+                  <a:srgbClr val="202833"/>
+                </a:solidFill>
+                <a:latin typeface="Microsoft YaHei"/>
+              </a:rPr>
+              <a:t>自变量X</a:t>
+            </a:r>
+          </a:p>
+        </p:txBody>
+      </p:sp>
+      <p:sp>
+        <p:nvSpPr>
+          <p:cNvPr id="17" name="Rectangle 16"/>
+          <p:cNvSpPr/>
+          <p:nvPr/>
+        </p:nvSpPr>
+        <p:spPr>
+          <a:xfrm>
+            <a:off x="1773936" y="6446520"/>
+            <a:ext cx="201168" cy="146304"/>
+          </a:xfrm>
+          <a:prstGeom prst="rect">
+            <a:avLst/>
+          </a:prstGeom>
+          <a:solidFill>
+            <a:srgbClr val="1B7F79"/>
+          </a:solidFill>
+          <a:ln>
+            <a:noFill/>
+          </a:ln>
+          <a:effectLst/>
+        </p:spPr>
+        <p:style>
+          <a:lnRef idx="1">
+            <a:schemeClr val="accent1"/>
+          </a:lnRef>
+          <a:fillRef idx="3">
+            <a:schemeClr val="accent1"/>
+          </a:fillRef>
+          <a:effectRef idx="2">
+            <a:schemeClr val="accent1"/>
+          </a:effectRef>
+          <a:fontRef idx="minor">
+            <a:schemeClr val="lt1"/>
+          </a:fontRef>
+        </p:style>
+        <p:txBody>
+          <a:bodyPr rtlCol="0" anchor="ctr"/>
+          <a:lstStyle/>
+          <a:p>
+            <a:pPr algn="ctr"/>
+          </a:p>
+        </p:txBody>
+      </p:sp>
+      <p:sp>
+        <p:nvSpPr>
+          <p:cNvPr id="18" name="TextBox 17"/>
+          <p:cNvSpPr txBox="1"/>
+          <p:nvPr/>
+        </p:nvSpPr>
+        <p:spPr>
+          <a:xfrm>
+            <a:off x="2011680" y="6391656"/>
+            <a:ext cx="1737360" cy="274320"/>
+          </a:xfrm>
+          <a:prstGeom prst="rect">
+            <a:avLst/>
+          </a:prstGeom>
+          <a:noFill/>
+        </p:spPr>
+        <p:txBody>
+          <a:bodyPr wrap="square" anchor="ctr">
+            <a:spAutoFit/>
+          </a:bodyPr>
+          <a:lstStyle/>
+          <a:p>
+            <a:pPr algn="l"/>
+            <a:r>
+              <a:rPr sz="900" i="0" b="0">
+                <a:solidFill>
+                  <a:srgbClr val="202833"/>
+                </a:solidFill>
+                <a:latin typeface="Microsoft YaHei"/>
+              </a:rPr>
+              <a:t>中介机制M</a:t>
+            </a:r>
+          </a:p>
+        </p:txBody>
+      </p:sp>
+      <p:sp>
+        <p:nvSpPr>
+          <p:cNvPr id="19" name="Rectangle 18"/>
+          <p:cNvSpPr/>
+          <p:nvPr/>
+        </p:nvSpPr>
+        <p:spPr>
+          <a:xfrm>
+            <a:off x="3419856" y="6446520"/>
+            <a:ext cx="201168" cy="146304"/>
+          </a:xfrm>
+          <a:prstGeom prst="rect">
+            <a:avLst/>
+          </a:prstGeom>
+          <a:solidFill>
+            <a:srgbClr val="C05A16"/>
+          </a:solidFill>
+          <a:ln>
+            <a:noFill/>
+          </a:ln>
+          <a:effectLst/>
+        </p:spPr>
+        <p:style>
+          <a:lnRef idx="1">
+            <a:schemeClr val="accent1"/>
+          </a:lnRef>
+          <a:fillRef idx="3">
+            <a:schemeClr val="accent1"/>
+          </a:fillRef>
+          <a:effectRef idx="2">
+            <a:schemeClr val="accent1"/>
+          </a:effectRef>
+          <a:fontRef idx="minor">
+            <a:schemeClr val="lt1"/>
+          </a:fontRef>
+        </p:style>
+        <p:txBody>
+          <a:bodyPr rtlCol="0" anchor="ctr"/>
+          <a:lstStyle/>
+          <a:p>
+            <a:pPr algn="ctr"/>
+          </a:p>
+        </p:txBody>
+      </p:sp>
+      <p:sp>
+        <p:nvSpPr>
+          <p:cNvPr id="20" name="TextBox 19"/>
+          <p:cNvSpPr txBox="1"/>
+          <p:nvPr/>
+        </p:nvSpPr>
+        <p:spPr>
+          <a:xfrm>
+            <a:off x="3657600" y="6391656"/>
+            <a:ext cx="1737360" cy="274320"/>
+          </a:xfrm>
+          <a:prstGeom prst="rect">
+            <a:avLst/>
+          </a:prstGeom>
+          <a:noFill/>
+        </p:spPr>
+        <p:txBody>
+          <a:bodyPr wrap="square" anchor="ctr">
+            <a:spAutoFit/>
+          </a:bodyPr>
+          <a:lstStyle/>
+          <a:p>
+            <a:pPr algn="l"/>
+            <a:r>
+              <a:rPr sz="900" i="0" b="0">
+                <a:solidFill>
+                  <a:srgbClr val="202833"/>
+                </a:solidFill>
+                <a:latin typeface="Microsoft YaHei"/>
+              </a:rPr>
+              <a:t>因变量Y</a:t>
+            </a:r>
+          </a:p>
+        </p:txBody>
+      </p:sp>
+      <p:sp>
+        <p:nvSpPr>
+          <p:cNvPr id="21" name="Rectangle 20"/>
+          <p:cNvSpPr/>
+          <p:nvPr/>
+        </p:nvSpPr>
+        <p:spPr>
+          <a:xfrm>
+            <a:off x="4919472" y="6446520"/>
+            <a:ext cx="201168" cy="146304"/>
+          </a:xfrm>
+          <a:prstGeom prst="rect">
+            <a:avLst/>
+          </a:prstGeom>
+          <a:solidFill>
+            <a:srgbClr val="6A3D9A"/>
+          </a:solidFill>
+          <a:ln>
+            <a:noFill/>
+          </a:ln>
+          <a:effectLst/>
+        </p:spPr>
+        <p:style>
+          <a:lnRef idx="1">
+            <a:schemeClr val="accent1"/>
+          </a:lnRef>
+          <a:fillRef idx="3">
+            <a:schemeClr val="accent1"/>
+          </a:fillRef>
+          <a:effectRef idx="2">
+            <a:schemeClr val="accent1"/>
+          </a:effectRef>
+          <a:fontRef idx="minor">
+            <a:schemeClr val="lt1"/>
+          </a:fontRef>
+        </p:style>
+        <p:txBody>
+          <a:bodyPr rtlCol="0" anchor="ctr"/>
+          <a:lstStyle/>
+          <a:p>
+            <a:pPr algn="ctr"/>
+          </a:p>
+        </p:txBody>
+      </p:sp>
+      <p:sp>
+        <p:nvSpPr>
+          <p:cNvPr id="22" name="TextBox 21"/>
+          <p:cNvSpPr txBox="1"/>
+          <p:nvPr/>
+        </p:nvSpPr>
+        <p:spPr>
+          <a:xfrm>
+            <a:off x="5157216" y="6391656"/>
+            <a:ext cx="1737360" cy="274320"/>
+          </a:xfrm>
+          <a:prstGeom prst="rect">
+            <a:avLst/>
+          </a:prstGeom>
+          <a:noFill/>
+        </p:spPr>
+        <p:txBody>
+          <a:bodyPr wrap="square" anchor="ctr">
+            <a:spAutoFit/>
+          </a:bodyPr>
+          <a:lstStyle/>
+          <a:p>
+            <a:pPr algn="l"/>
+            <a:r>
+              <a:rPr sz="900" i="0" b="0">
+                <a:solidFill>
+                  <a:srgbClr val="202833"/>
+                </a:solidFill>
+                <a:latin typeface="Microsoft YaHei"/>
+              </a:rPr>
+              <a:t>调节W</a:t>
+            </a:r>
+          </a:p>
+        </p:txBody>
+      </p:sp>
+    </p:spTree>
+  </p:cSld>
+  <p:clrMapOvr>
+    <a:masterClrMapping/>
+  </p:clrMapOvr>
+</p:sld>
+</file>
+
+<file path=ppt/slides/slide7.xml><?xml version="1.0" encoding="utf-8"?>
+<p:sld xmlns:a="http://schemas.openxmlformats.org/drawingml/2006/main" xmlns:p="http://schemas.openxmlformats.org/presentationml/2006/main" xmlns:r="http://schemas.openxmlformats.org/officeDocument/2006/relationships">
+  <p:cSld>
+    <p:spTree>
+      <p:nvGrpSpPr>
+        <p:cNvPr id="1" name=""/>
+        <p:cNvGrpSpPr/>
+        <p:nvPr/>
+      </p:nvGrpSpPr>
+      <p:grpSpPr/>
+      <p:sp>
+        <p:nvSpPr>
+          <p:cNvPr id="2" name="Rectangle 1"/>
+          <p:cNvSpPr/>
+          <p:nvPr/>
+        </p:nvSpPr>
+        <p:spPr>
+          <a:xfrm>
+            <a:off x="0" y="0"/>
+            <a:ext cx="12191695" cy="603504"/>
+          </a:xfrm>
+          <a:prstGeom prst="rect">
+            <a:avLst/>
+          </a:prstGeom>
+          <a:solidFill>
+            <a:srgbClr val="1F3B5B"/>
+          </a:solidFill>
+          <a:ln>
+            <a:noFill/>
+          </a:ln>
+          <a:effectLst/>
+        </p:spPr>
+        <p:style>
+          <a:lnRef idx="1">
+            <a:schemeClr val="accent1"/>
+          </a:lnRef>
+          <a:fillRef idx="3">
+            <a:schemeClr val="accent1"/>
+          </a:fillRef>
+          <a:effectRef idx="2">
+            <a:schemeClr val="accent1"/>
+          </a:effectRef>
+          <a:fontRef idx="minor">
+            <a:schemeClr val="lt1"/>
+          </a:fontRef>
+        </p:style>
+        <p:txBody>
+          <a:bodyPr rtlCol="0" anchor="ctr" wrap="square"/>
+          <a:lstStyle/>
+          <a:p>
+            <a:pPr algn="ctr"/>
+            <a:r>
+              <a:rPr sz="1900" b="1">
+                <a:solidFill>
+                  <a:srgbClr val="FFFFFF"/>
+                </a:solidFill>
+                <a:latin typeface="Microsoft YaHei"/>
+              </a:rPr>
+              <a:t>第三章 技术路线图  问题 → 数据 → 主识别 → 稳健 → 异质 → 政策</a:t>
+            </a:r>
+          </a:p>
+        </p:txBody>
+      </p:sp>
+      <p:sp>
+        <p:nvSpPr>
+          <p:cNvPr id="3" name="Rounded Rectangle 2"/>
+          <p:cNvSpPr/>
+          <p:nvPr/>
+        </p:nvSpPr>
+        <p:spPr>
+          <a:xfrm>
+            <a:off x="3355848" y="822960"/>
+            <a:ext cx="5486400" cy="512064"/>
+          </a:xfrm>
+          <a:prstGeom prst="roundRect">
+            <a:avLst/>
+          </a:prstGeom>
+          <a:solidFill>
+            <a:srgbClr val="2E5E8C"/>
+          </a:solidFill>
+          <a:ln w="12700">
+            <a:solidFill>
+              <a:srgbClr val="2E5E8C"/>
+            </a:solidFill>
+          </a:ln>
+          <a:effectLst/>
+        </p:spPr>
+        <p:style>
+          <a:lnRef idx="1">
+            <a:schemeClr val="accent1"/>
+          </a:lnRef>
+          <a:fillRef idx="3">
+            <a:schemeClr val="accent1"/>
+          </a:fillRef>
+          <a:effectRef idx="2">
+            <a:schemeClr val="accent1"/>
+          </a:effectRef>
+          <a:fontRef idx="minor">
+            <a:schemeClr val="lt1"/>
+          </a:fontRef>
+        </p:style>
+        <p:txBody>
+          <a:bodyPr rtlCol="0" anchor="ctr" wrap="square" lIns="50800" rIns="50800" tIns="25400" bIns="25400"/>
+          <a:lstStyle/>
+          <a:p>
+            <a:pPr algn="ctr"/>
+            <a:r>
+              <a:rPr sz="1200" b="1">
+                <a:solidFill>
+                  <a:srgbClr val="FFFFFF"/>
+                </a:solidFill>
+                <a:latin typeface="Microsoft YaHei"/>
+              </a:rPr>
+              <a:t>研究问题：家庭金融脆弱性后果与监管含义为何？</a:t>
+            </a:r>
+          </a:p>
+        </p:txBody>
+      </p:sp>
+      <p:sp>
+        <p:nvSpPr>
+          <p:cNvPr id="4" name="Rounded Rectangle 3"/>
+          <p:cNvSpPr/>
+          <p:nvPr/>
+        </p:nvSpPr>
+        <p:spPr>
+          <a:xfrm>
+            <a:off x="3355848" y="1517904"/>
+            <a:ext cx="5486400" cy="512064"/>
+          </a:xfrm>
+          <a:prstGeom prst="roundRect">
+            <a:avLst/>
+          </a:prstGeom>
+          <a:solidFill>
+            <a:srgbClr val="2E5E8C"/>
+          </a:solidFill>
+          <a:ln w="12700">
+            <a:solidFill>
+              <a:srgbClr val="2E5E8C"/>
+            </a:solidFill>
+          </a:ln>
+          <a:effectLst/>
+        </p:spPr>
+        <p:style>
+          <a:lnRef idx="1">
+            <a:schemeClr val="accent1"/>
+          </a:lnRef>
+          <a:fillRef idx="3">
+            <a:schemeClr val="accent1"/>
+          </a:fillRef>
+          <a:effectRef idx="2">
+            <a:schemeClr val="accent1"/>
+          </a:effectRef>
+          <a:fontRef idx="minor">
+            <a:schemeClr val="lt1"/>
+          </a:fontRef>
+        </p:style>
+        <p:txBody>
+          <a:bodyPr rtlCol="0" anchor="ctr" wrap="square" lIns="50800" rIns="50800" tIns="25400" bIns="25400"/>
+          <a:lstStyle/>
+          <a:p>
+            <a:pPr algn="ctr"/>
+            <a:r>
+              <a:rPr sz="1100" b="1">
+                <a:solidFill>
+                  <a:srgbClr val="FFFFFF"/>
+                </a:solidFill>
+                <a:latin typeface="Microsoft YaHei"/>
+              </a:rPr>
+              <a:t>数据：CHFS / CFPS + 数字普惠指数 + 监管事件</a:t>
+            </a:r>
+          </a:p>
+        </p:txBody>
+      </p:sp>
+      <p:sp>
+        <p:nvSpPr>
+          <p:cNvPr id="5" name="Rounded Rectangle 4"/>
+          <p:cNvSpPr/>
+          <p:nvPr/>
+        </p:nvSpPr>
+        <p:spPr>
+          <a:xfrm>
+            <a:off x="3355848" y="2212848"/>
+            <a:ext cx="5486400" cy="512064"/>
+          </a:xfrm>
+          <a:prstGeom prst="roundRect">
+            <a:avLst/>
+          </a:prstGeom>
+          <a:solidFill>
+            <a:srgbClr val="1B7F79"/>
+          </a:solidFill>
+          <a:ln w="12700">
+            <a:solidFill>
+              <a:srgbClr val="1B7F79"/>
+            </a:solidFill>
+          </a:ln>
+          <a:effectLst/>
+        </p:spPr>
+        <p:style>
+          <a:lnRef idx="1">
+            <a:schemeClr val="accent1"/>
+          </a:lnRef>
+          <a:fillRef idx="3">
+            <a:schemeClr val="accent1"/>
+          </a:fillRef>
+          <a:effectRef idx="2">
+            <a:schemeClr val="accent1"/>
+          </a:effectRef>
+          <a:fontRef idx="minor">
+            <a:schemeClr val="lt1"/>
+          </a:fontRef>
+        </p:style>
+        <p:txBody>
+          <a:bodyPr rtlCol="0" anchor="ctr" wrap="square" lIns="50800" rIns="50800" tIns="25400" bIns="25400"/>
+          <a:lstStyle/>
+          <a:p>
+            <a:pPr algn="ctr"/>
+            <a:r>
+              <a:rPr sz="1100" b="1">
+                <a:solidFill>
+                  <a:srgbClr val="FFFFFF"/>
+                </a:solidFill>
+                <a:latin typeface="Microsoft YaHei"/>
+              </a:rPr>
+              <a:t>主识别：高/低暴露区 × 前后  三重差分（DDD）</a:t>
+            </a:r>
+          </a:p>
+        </p:txBody>
+      </p:sp>
+      <p:sp>
+        <p:nvSpPr>
+          <p:cNvPr id="6" name="Rounded Rectangle 5"/>
+          <p:cNvSpPr/>
+          <p:nvPr/>
+        </p:nvSpPr>
+        <p:spPr>
+          <a:xfrm>
+            <a:off x="3355848" y="2907792"/>
+            <a:ext cx="5486400" cy="566928"/>
+          </a:xfrm>
+          <a:prstGeom prst="roundRect">
+            <a:avLst/>
+          </a:prstGeom>
+          <a:solidFill>
+            <a:srgbClr val="C87F0A"/>
+          </a:solidFill>
+          <a:ln w="12700">
+            <a:solidFill>
+              <a:srgbClr val="C87F0A"/>
+            </a:solidFill>
+          </a:ln>
+          <a:effectLst/>
+        </p:spPr>
+        <p:style>
+          <a:lnRef idx="1">
+            <a:schemeClr val="accent1"/>
+          </a:lnRef>
+          <a:fillRef idx="3">
+            <a:schemeClr val="accent1"/>
+          </a:fillRef>
+          <a:effectRef idx="2">
+            <a:schemeClr val="accent1"/>
+          </a:effectRef>
+          <a:fontRef idx="minor">
+            <a:schemeClr val="lt1"/>
+          </a:fontRef>
+        </p:style>
+        <p:txBody>
+          <a:bodyPr rtlCol="0" anchor="ctr" wrap="square" lIns="50800" rIns="50800" tIns="25400" bIns="25400"/>
+          <a:lstStyle/>
+          <a:p>
+            <a:pPr algn="ctr"/>
+            <a:r>
+              <a:rPr sz="1100" b="1">
+                <a:solidFill>
+                  <a:srgbClr val="FFFFFF"/>
+                </a:solidFill>
+                <a:latin typeface="Microsoft YaHei"/>
+              </a:rPr>
+              <a:t>稳健：数字普惠连续处理 2SLS  +  PSM-DID  +  平行趋势</a:t>
+            </a:r>
+          </a:p>
+        </p:txBody>
+      </p:sp>
+      <p:sp>
+        <p:nvSpPr>
+          <p:cNvPr id="7" name="Rounded Rectangle 6"/>
+          <p:cNvSpPr/>
+          <p:nvPr/>
+        </p:nvSpPr>
+        <p:spPr>
+          <a:xfrm>
+            <a:off x="3355848" y="3675887"/>
+            <a:ext cx="5486400" cy="512064"/>
+          </a:xfrm>
+          <a:prstGeom prst="roundRect">
+            <a:avLst/>
+          </a:prstGeom>
+          <a:solidFill>
+            <a:srgbClr val="6A3D9A"/>
+          </a:solidFill>
+          <a:ln w="12700">
+            <a:solidFill>
+              <a:srgbClr val="6A3D9A"/>
+            </a:solidFill>
+          </a:ln>
+          <a:effectLst/>
+        </p:spPr>
+        <p:style>
+          <a:lnRef idx="1">
+            <a:schemeClr val="accent1"/>
+          </a:lnRef>
+          <a:fillRef idx="3">
+            <a:schemeClr val="accent1"/>
+          </a:fillRef>
+          <a:effectRef idx="2">
+            <a:schemeClr val="accent1"/>
+          </a:effectRef>
+          <a:fontRef idx="minor">
+            <a:schemeClr val="lt1"/>
+          </a:fontRef>
+        </p:style>
+        <p:txBody>
+          <a:bodyPr rtlCol="0" anchor="ctr" wrap="square" lIns="50800" rIns="50800" tIns="25400" bIns="25400"/>
+          <a:lstStyle/>
+          <a:p>
+            <a:pPr algn="ctr"/>
+            <a:r>
+              <a:rPr sz="1100" b="1">
+                <a:solidFill>
+                  <a:srgbClr val="FFFFFF"/>
+                </a:solidFill>
+                <a:latin typeface="Microsoft YaHei"/>
+              </a:rPr>
+              <a:t>异质性：低收入 / 年轻 / 已多头 组应更强</a:t>
+            </a:r>
+          </a:p>
+        </p:txBody>
+      </p:sp>
+      <p:sp>
+        <p:nvSpPr>
+          <p:cNvPr id="8" name="Rounded Rectangle 7"/>
+          <p:cNvSpPr/>
+          <p:nvPr/>
+        </p:nvSpPr>
+        <p:spPr>
+          <a:xfrm>
+            <a:off x="3355848" y="4370832"/>
+            <a:ext cx="5486400" cy="566928"/>
+          </a:xfrm>
+          <a:prstGeom prst="roundRect">
+            <a:avLst/>
+          </a:prstGeom>
+          <a:solidFill>
+            <a:srgbClr val="C05A16"/>
+          </a:solidFill>
+          <a:ln w="12700">
+            <a:solidFill>
+              <a:srgbClr val="C05A16"/>
+            </a:solidFill>
+          </a:ln>
+          <a:effectLst/>
+        </p:spPr>
+        <p:style>
+          <a:lnRef idx="1">
+            <a:schemeClr val="accent1"/>
+          </a:lnRef>
+          <a:fillRef idx="3">
+            <a:schemeClr val="accent1"/>
+          </a:fillRef>
+          <a:effectRef idx="2">
+            <a:schemeClr val="accent1"/>
+          </a:effectRef>
+          <a:fontRef idx="minor">
+            <a:schemeClr val="lt1"/>
+          </a:fontRef>
+        </p:style>
+        <p:txBody>
+          <a:bodyPr rtlCol="0" anchor="ctr" wrap="square" lIns="50800" rIns="50800" tIns="25400" bIns="25400"/>
+          <a:lstStyle/>
+          <a:p>
+            <a:pPr algn="ctr"/>
+            <a:r>
+              <a:rPr sz="1100" b="1">
+                <a:solidFill>
+                  <a:srgbClr val="FFFFFF"/>
+                </a:solidFill>
+                <a:latin typeface="Microsoft YaHei"/>
+              </a:rPr>
+              <a:t>结论与政策闭环：金融AI消费者保护 · 共债治理</a:t>
+            </a:r>
+          </a:p>
+        </p:txBody>
+      </p:sp>
+      <p:cxnSp>
+        <p:nvCxnSpPr>
+          <p:cNvPr id="9" name="Connector 8"/>
+          <p:cNvCxnSpPr/>
+          <p:nvPr/>
+        </p:nvCxnSpPr>
+        <p:spPr>
+          <a:xfrm>
+            <a:off x="6099048" y="1335024"/>
+            <a:ext cx="0" cy="182880"/>
           </a:xfrm>
           <a:prstGeom prst="line">
             <a:avLst/>
@@ -4737,14 +10273,14 @@
       </p:cxnSp>
       <p:cxnSp>
         <p:nvCxnSpPr>
-          <p:cNvPr id="28" name="Connector 27"/>
+          <p:cNvPr id="10" name="Connector 9"/>
           <p:cNvCxnSpPr/>
           <p:nvPr/>
         </p:nvCxnSpPr>
         <p:spPr>
-          <a:xfrm flipH="1">
-            <a:off x="2647188" y="5001768"/>
-            <a:ext cx="4972507" cy="173736"/>
+          <a:xfrm>
+            <a:off x="6099048" y="2029968"/>
+            <a:ext cx="0" cy="182880"/>
           </a:xfrm>
           <a:prstGeom prst="line">
             <a:avLst/>
@@ -4774,14 +10310,14 @@
       </p:cxnSp>
       <p:cxnSp>
         <p:nvCxnSpPr>
-          <p:cNvPr id="29" name="Connector 28"/>
+          <p:cNvPr id="11" name="Connector 10"/>
           <p:cNvCxnSpPr/>
           <p:nvPr/>
         </p:nvCxnSpPr>
         <p:spPr>
           <a:xfrm>
-            <a:off x="4087368" y="5541264"/>
-            <a:ext cx="201168" cy="0"/>
+            <a:off x="6099048" y="2724912"/>
+            <a:ext cx="0" cy="182880"/>
           </a:xfrm>
           <a:prstGeom prst="line">
             <a:avLst/>
@@ -4811,14 +10347,14 @@
       </p:cxnSp>
       <p:cxnSp>
         <p:nvCxnSpPr>
-          <p:cNvPr id="30" name="Connector 29"/>
+          <p:cNvPr id="12" name="Connector 11"/>
           <p:cNvCxnSpPr/>
           <p:nvPr/>
         </p:nvCxnSpPr>
         <p:spPr>
           <a:xfrm>
-            <a:off x="7900416" y="5541264"/>
-            <a:ext cx="201167" cy="0"/>
+            <a:off x="6099048" y="3474720"/>
+            <a:ext cx="0" cy="201167"/>
           </a:xfrm>
           <a:prstGeom prst="line">
             <a:avLst/>
@@ -4848,14 +10384,14 @@
       </p:cxnSp>
       <p:cxnSp>
         <p:nvCxnSpPr>
-          <p:cNvPr id="31" name="Connector 30"/>
+          <p:cNvPr id="13" name="Connector 12"/>
           <p:cNvCxnSpPr/>
           <p:nvPr/>
         </p:nvCxnSpPr>
         <p:spPr>
           <a:xfrm>
-            <a:off x="9907523" y="5907024"/>
-            <a:ext cx="0" cy="146304"/>
+            <a:off x="6099048" y="4187951"/>
+            <a:ext cx="0" cy="182881"/>
           </a:xfrm>
           <a:prstGeom prst="line">
             <a:avLst/>
@@ -4883,6 +10419,61 @@
           </a:fontRef>
         </p:style>
       </p:cxnSp>
+      <p:sp>
+        <p:nvSpPr>
+          <p:cNvPr id="14" name="Rectangle 13"/>
+          <p:cNvSpPr/>
+          <p:nvPr/>
+        </p:nvSpPr>
+        <p:spPr>
+          <a:xfrm>
+            <a:off x="274320" y="6053328"/>
+            <a:ext cx="11643055" cy="384048"/>
+          </a:xfrm>
+          <a:prstGeom prst="rect">
+            <a:avLst/>
+          </a:prstGeom>
+          <a:solidFill>
+            <a:srgbClr val="1F3B5B"/>
+          </a:solidFill>
+          <a:ln w="12700">
+            <a:solidFill>
+              <a:srgbClr val="1F3B5B"/>
+            </a:solidFill>
+          </a:ln>
+          <a:effectLst/>
+        </p:spPr>
+        <p:style>
+          <a:lnRef idx="1">
+            <a:schemeClr val="accent1"/>
+          </a:lnRef>
+          <a:fillRef idx="3">
+            <a:schemeClr val="accent1"/>
+          </a:fillRef>
+          <a:effectRef idx="2">
+            <a:schemeClr val="accent1"/>
+          </a:effectRef>
+          <a:fontRef idx="minor">
+            <a:schemeClr val="lt1"/>
+          </a:fontRef>
+        </p:style>
+        <p:txBody>
+          <a:bodyPr rtlCol="0" anchor="ctr" wrap="square" lIns="50800" rIns="50800" tIns="25400" bIns="25400"/>
+          <a:lstStyle/>
+          <a:p>
+            <a:pPr algn="ctr"/>
+            <a:r>
+              <a:rPr sz="1050" b="1">
+                <a:solidFill>
+                  <a:srgbClr val="FFFFFF"/>
+                </a:solidFill>
+                <a:latin typeface="Microsoft YaHei"/>
+              </a:rPr>
+              <a:t>三章逻辑闭环：微观(公司内组成效应) → 中观(行业/区域扩散) → 宏观(家庭脆弱性与监管)</a:t>
+            </a:r>
+          </a:p>
+        </p:txBody>
+      </p:sp>
     </p:spTree>
   </p:cSld>
   <p:clrMapOvr>

--- a/技术路线图_LLM消费信贷.pptx
+++ b/技术路线图_LLM消费信贷.pptx
@@ -4860,7 +4860,172 @@
       </p:cxnSp>
       <p:sp>
         <p:nvSpPr>
-          <p:cNvPr id="30" name="Rectangle 29"/>
+          <p:cNvPr id="30" name="Rounded Rectangle 29"/>
+          <p:cNvSpPr/>
+          <p:nvPr/>
+        </p:nvSpPr>
+        <p:spPr>
+          <a:xfrm>
+            <a:off x="2715768" y="2002536"/>
+            <a:ext cx="475488" cy="274320"/>
+          </a:xfrm>
+          <a:prstGeom prst="roundRect">
+            <a:avLst/>
+          </a:prstGeom>
+          <a:solidFill>
+            <a:srgbClr val="FFFFFF"/>
+          </a:solidFill>
+          <a:ln w="15875">
+            <a:solidFill>
+              <a:srgbClr val="2E7D32"/>
+            </a:solidFill>
+          </a:ln>
+          <a:effectLst/>
+        </p:spPr>
+        <p:style>
+          <a:lnRef idx="1">
+            <a:schemeClr val="accent1"/>
+          </a:lnRef>
+          <a:fillRef idx="3">
+            <a:schemeClr val="accent1"/>
+          </a:fillRef>
+          <a:effectRef idx="2">
+            <a:schemeClr val="accent1"/>
+          </a:effectRef>
+          <a:fontRef idx="minor">
+            <a:schemeClr val="lt1"/>
+          </a:fontRef>
+        </p:style>
+        <p:txBody>
+          <a:bodyPr rtlCol="0" anchor="ctr" wrap="none" lIns="12700" rIns="12700" tIns="0" bIns="0"/>
+          <a:lstStyle/>
+          <a:p>
+            <a:pPr algn="ctr"/>
+            <a:r>
+              <a:rPr sz="1000" b="1">
+                <a:solidFill>
+                  <a:srgbClr val="2E7D32"/>
+                </a:solidFill>
+                <a:latin typeface="Microsoft YaHei"/>
+              </a:rPr>
+              <a:t>H1</a:t>
+            </a:r>
+          </a:p>
+        </p:txBody>
+      </p:sp>
+      <p:sp>
+        <p:nvSpPr>
+          <p:cNvPr id="31" name="Rounded Rectangle 30"/>
+          <p:cNvSpPr/>
+          <p:nvPr/>
+        </p:nvSpPr>
+        <p:spPr>
+          <a:xfrm>
+            <a:off x="8997696" y="2002536"/>
+            <a:ext cx="475488" cy="274320"/>
+          </a:xfrm>
+          <a:prstGeom prst="roundRect">
+            <a:avLst/>
+          </a:prstGeom>
+          <a:solidFill>
+            <a:srgbClr val="FFFFFF"/>
+          </a:solidFill>
+          <a:ln w="15875">
+            <a:solidFill>
+              <a:srgbClr val="B03A2E"/>
+            </a:solidFill>
+          </a:ln>
+          <a:effectLst/>
+        </p:spPr>
+        <p:style>
+          <a:lnRef idx="1">
+            <a:schemeClr val="accent1"/>
+          </a:lnRef>
+          <a:fillRef idx="3">
+            <a:schemeClr val="accent1"/>
+          </a:fillRef>
+          <a:effectRef idx="2">
+            <a:schemeClr val="accent1"/>
+          </a:effectRef>
+          <a:fontRef idx="minor">
+            <a:schemeClr val="lt1"/>
+          </a:fontRef>
+        </p:style>
+        <p:txBody>
+          <a:bodyPr rtlCol="0" anchor="ctr" wrap="none" lIns="12700" rIns="12700" tIns="0" bIns="0"/>
+          <a:lstStyle/>
+          <a:p>
+            <a:pPr algn="ctr"/>
+            <a:r>
+              <a:rPr sz="1000" b="1">
+                <a:solidFill>
+                  <a:srgbClr val="B03A2E"/>
+                </a:solidFill>
+                <a:latin typeface="Microsoft YaHei"/>
+              </a:rPr>
+              <a:t>H2</a:t>
+            </a:r>
+          </a:p>
+        </p:txBody>
+      </p:sp>
+      <p:sp>
+        <p:nvSpPr>
+          <p:cNvPr id="32" name="Rounded Rectangle 31"/>
+          <p:cNvSpPr/>
+          <p:nvPr/>
+        </p:nvSpPr>
+        <p:spPr>
+          <a:xfrm>
+            <a:off x="5861304" y="2834640"/>
+            <a:ext cx="475488" cy="274320"/>
+          </a:xfrm>
+          <a:prstGeom prst="roundRect">
+            <a:avLst/>
+          </a:prstGeom>
+          <a:solidFill>
+            <a:srgbClr val="FFFFFF"/>
+          </a:solidFill>
+          <a:ln w="15875">
+            <a:solidFill>
+              <a:srgbClr val="C87F0A"/>
+            </a:solidFill>
+          </a:ln>
+          <a:effectLst/>
+        </p:spPr>
+        <p:style>
+          <a:lnRef idx="1">
+            <a:schemeClr val="accent1"/>
+          </a:lnRef>
+          <a:fillRef idx="3">
+            <a:schemeClr val="accent1"/>
+          </a:fillRef>
+          <a:effectRef idx="2">
+            <a:schemeClr val="accent1"/>
+          </a:effectRef>
+          <a:fontRef idx="minor">
+            <a:schemeClr val="lt1"/>
+          </a:fontRef>
+        </p:style>
+        <p:txBody>
+          <a:bodyPr rtlCol="0" anchor="ctr" wrap="none" lIns="12700" rIns="12700" tIns="0" bIns="0"/>
+          <a:lstStyle/>
+          <a:p>
+            <a:pPr algn="ctr"/>
+            <a:r>
+              <a:rPr sz="1000" b="1">
+                <a:solidFill>
+                  <a:srgbClr val="C87F0A"/>
+                </a:solidFill>
+                <a:latin typeface="Microsoft YaHei"/>
+              </a:rPr>
+              <a:t>H3</a:t>
+            </a:r>
+          </a:p>
+        </p:txBody>
+      </p:sp>
+      <p:sp>
+        <p:nvSpPr>
+          <p:cNvPr id="33" name="Rectangle 32"/>
           <p:cNvSpPr/>
           <p:nvPr/>
         </p:nvSpPr>
@@ -6019,12 +6184,12 @@
         <p:spPr>
           <a:xfrm flipV="1">
             <a:off x="3703320" y="3328416"/>
-            <a:ext cx="0" cy="1700784"/>
+            <a:ext cx="2377440" cy="1700784"/>
           </a:xfrm>
           <a:prstGeom prst="line">
             <a:avLst/>
           </a:prstGeom>
-          <a:ln w="16510">
+          <a:ln w="17780">
             <a:solidFill>
               <a:srgbClr val="6A3D9A"/>
             </a:solidFill>
@@ -6050,7 +6215,227 @@
       </p:cxnSp>
       <p:sp>
         <p:nvSpPr>
-          <p:cNvPr id="25" name="Rectangle 24"/>
+          <p:cNvPr id="25" name="Rounded Rectangle 24"/>
+          <p:cNvSpPr/>
+          <p:nvPr/>
+        </p:nvSpPr>
+        <p:spPr>
+          <a:xfrm>
+            <a:off x="5843016" y="2459736"/>
+            <a:ext cx="475488" cy="274320"/>
+          </a:xfrm>
+          <a:prstGeom prst="roundRect">
+            <a:avLst/>
+          </a:prstGeom>
+          <a:solidFill>
+            <a:srgbClr val="FFFFFF"/>
+          </a:solidFill>
+          <a:ln w="15875">
+            <a:solidFill>
+              <a:srgbClr val="2E7D32"/>
+            </a:solidFill>
+          </a:ln>
+          <a:effectLst/>
+        </p:spPr>
+        <p:style>
+          <a:lnRef idx="1">
+            <a:schemeClr val="accent1"/>
+          </a:lnRef>
+          <a:fillRef idx="3">
+            <a:schemeClr val="accent1"/>
+          </a:fillRef>
+          <a:effectRef idx="2">
+            <a:schemeClr val="accent1"/>
+          </a:effectRef>
+          <a:fontRef idx="minor">
+            <a:schemeClr val="lt1"/>
+          </a:fontRef>
+        </p:style>
+        <p:txBody>
+          <a:bodyPr rtlCol="0" anchor="ctr" wrap="none" lIns="12700" rIns="12700" tIns="0" bIns="0"/>
+          <a:lstStyle/>
+          <a:p>
+            <a:pPr algn="ctr"/>
+            <a:r>
+              <a:rPr sz="1000" b="1">
+                <a:solidFill>
+                  <a:srgbClr val="2E7D32"/>
+                </a:solidFill>
+                <a:latin typeface="Microsoft YaHei"/>
+              </a:rPr>
+              <a:t>H1</a:t>
+            </a:r>
+          </a:p>
+        </p:txBody>
+      </p:sp>
+      <p:sp>
+        <p:nvSpPr>
+          <p:cNvPr id="26" name="Rounded Rectangle 25"/>
+          <p:cNvSpPr/>
+          <p:nvPr/>
+        </p:nvSpPr>
+        <p:spPr>
+          <a:xfrm>
+            <a:off x="5843016" y="3191256"/>
+            <a:ext cx="475488" cy="274320"/>
+          </a:xfrm>
+          <a:prstGeom prst="roundRect">
+            <a:avLst/>
+          </a:prstGeom>
+          <a:solidFill>
+            <a:srgbClr val="FFFFFF"/>
+          </a:solidFill>
+          <a:ln w="15875">
+            <a:solidFill>
+              <a:srgbClr val="B03A2E"/>
+            </a:solidFill>
+          </a:ln>
+          <a:effectLst/>
+        </p:spPr>
+        <p:style>
+          <a:lnRef idx="1">
+            <a:schemeClr val="accent1"/>
+          </a:lnRef>
+          <a:fillRef idx="3">
+            <a:schemeClr val="accent1"/>
+          </a:fillRef>
+          <a:effectRef idx="2">
+            <a:schemeClr val="accent1"/>
+          </a:effectRef>
+          <a:fontRef idx="minor">
+            <a:schemeClr val="lt1"/>
+          </a:fontRef>
+        </p:style>
+        <p:txBody>
+          <a:bodyPr rtlCol="0" anchor="ctr" wrap="none" lIns="12700" rIns="12700" tIns="0" bIns="0"/>
+          <a:lstStyle/>
+          <a:p>
+            <a:pPr algn="ctr"/>
+            <a:r>
+              <a:rPr sz="1000" b="1">
+                <a:solidFill>
+                  <a:srgbClr val="B03A2E"/>
+                </a:solidFill>
+                <a:latin typeface="Microsoft YaHei"/>
+              </a:rPr>
+              <a:t>H2</a:t>
+            </a:r>
+          </a:p>
+        </p:txBody>
+      </p:sp>
+      <p:sp>
+        <p:nvSpPr>
+          <p:cNvPr id="27" name="Rounded Rectangle 26"/>
+          <p:cNvSpPr/>
+          <p:nvPr/>
+        </p:nvSpPr>
+        <p:spPr>
+          <a:xfrm>
+            <a:off x="6967728" y="3895344"/>
+            <a:ext cx="475488" cy="274320"/>
+          </a:xfrm>
+          <a:prstGeom prst="roundRect">
+            <a:avLst/>
+          </a:prstGeom>
+          <a:solidFill>
+            <a:srgbClr val="FFFFFF"/>
+          </a:solidFill>
+          <a:ln w="15875">
+            <a:solidFill>
+              <a:srgbClr val="C87F0A"/>
+            </a:solidFill>
+          </a:ln>
+          <a:effectLst/>
+        </p:spPr>
+        <p:style>
+          <a:lnRef idx="1">
+            <a:schemeClr val="accent1"/>
+          </a:lnRef>
+          <a:fillRef idx="3">
+            <a:schemeClr val="accent1"/>
+          </a:fillRef>
+          <a:effectRef idx="2">
+            <a:schemeClr val="accent1"/>
+          </a:effectRef>
+          <a:fontRef idx="minor">
+            <a:schemeClr val="lt1"/>
+          </a:fontRef>
+        </p:style>
+        <p:txBody>
+          <a:bodyPr rtlCol="0" anchor="ctr" wrap="none" lIns="12700" rIns="12700" tIns="0" bIns="0"/>
+          <a:lstStyle/>
+          <a:p>
+            <a:pPr algn="ctr"/>
+            <a:r>
+              <a:rPr sz="1000" b="1">
+                <a:solidFill>
+                  <a:srgbClr val="C87F0A"/>
+                </a:solidFill>
+                <a:latin typeface="Microsoft YaHei"/>
+              </a:rPr>
+              <a:t>H3</a:t>
+            </a:r>
+          </a:p>
+        </p:txBody>
+      </p:sp>
+      <p:sp>
+        <p:nvSpPr>
+          <p:cNvPr id="28" name="Rounded Rectangle 27"/>
+          <p:cNvSpPr/>
+          <p:nvPr/>
+        </p:nvSpPr>
+        <p:spPr>
+          <a:xfrm>
+            <a:off x="4626864" y="4023360"/>
+            <a:ext cx="475488" cy="274320"/>
+          </a:xfrm>
+          <a:prstGeom prst="roundRect">
+            <a:avLst/>
+          </a:prstGeom>
+          <a:solidFill>
+            <a:srgbClr val="FFFFFF"/>
+          </a:solidFill>
+          <a:ln w="15875">
+            <a:solidFill>
+              <a:srgbClr val="6A3D9A"/>
+            </a:solidFill>
+          </a:ln>
+          <a:effectLst/>
+        </p:spPr>
+        <p:style>
+          <a:lnRef idx="1">
+            <a:schemeClr val="accent1"/>
+          </a:lnRef>
+          <a:fillRef idx="3">
+            <a:schemeClr val="accent1"/>
+          </a:fillRef>
+          <a:effectRef idx="2">
+            <a:schemeClr val="accent1"/>
+          </a:effectRef>
+          <a:fontRef idx="minor">
+            <a:schemeClr val="lt1"/>
+          </a:fontRef>
+        </p:style>
+        <p:txBody>
+          <a:bodyPr rtlCol="0" anchor="ctr" wrap="none" lIns="12700" rIns="12700" tIns="0" bIns="0"/>
+          <a:lstStyle/>
+          <a:p>
+            <a:pPr algn="ctr"/>
+            <a:r>
+              <a:rPr sz="1000" b="1">
+                <a:solidFill>
+                  <a:srgbClr val="6A3D9A"/>
+                </a:solidFill>
+                <a:latin typeface="Microsoft YaHei"/>
+              </a:rPr>
+              <a:t>H4</a:t>
+            </a:r>
+          </a:p>
+        </p:txBody>
+      </p:sp>
+      <p:sp>
+        <p:nvSpPr>
+          <p:cNvPr id="29" name="Rectangle 28"/>
           <p:cNvSpPr/>
           <p:nvPr/>
         </p:nvSpPr>
@@ -6105,7 +6490,7 @@
       </p:sp>
       <p:sp>
         <p:nvSpPr>
-          <p:cNvPr id="26" name="Rectangle 25"/>
+          <p:cNvPr id="30" name="Rectangle 29"/>
           <p:cNvSpPr/>
           <p:nvPr/>
         </p:nvSpPr>
@@ -6149,7 +6534,7 @@
       </p:sp>
       <p:sp>
         <p:nvSpPr>
-          <p:cNvPr id="27" name="TextBox 26"/>
+          <p:cNvPr id="31" name="TextBox 30"/>
           <p:cNvSpPr txBox="1"/>
           <p:nvPr/>
         </p:nvSpPr>
@@ -6184,7 +6569,7 @@
       </p:sp>
       <p:sp>
         <p:nvSpPr>
-          <p:cNvPr id="28" name="Rectangle 27"/>
+          <p:cNvPr id="32" name="Rectangle 31"/>
           <p:cNvSpPr/>
           <p:nvPr/>
         </p:nvSpPr>
@@ -6228,7 +6613,7 @@
       </p:sp>
       <p:sp>
         <p:nvSpPr>
-          <p:cNvPr id="29" name="TextBox 28"/>
+          <p:cNvPr id="33" name="TextBox 32"/>
           <p:cNvSpPr txBox="1"/>
           <p:nvPr/>
         </p:nvSpPr>
@@ -6263,7 +6648,7 @@
       </p:sp>
       <p:sp>
         <p:nvSpPr>
-          <p:cNvPr id="30" name="Rectangle 29"/>
+          <p:cNvPr id="34" name="Rectangle 33"/>
           <p:cNvSpPr/>
           <p:nvPr/>
         </p:nvSpPr>
@@ -6307,7 +6692,7 @@
       </p:sp>
       <p:sp>
         <p:nvSpPr>
-          <p:cNvPr id="31" name="TextBox 30"/>
+          <p:cNvPr id="35" name="TextBox 34"/>
           <p:cNvSpPr txBox="1"/>
           <p:nvPr/>
         </p:nvSpPr>
@@ -6342,7 +6727,7 @@
       </p:sp>
       <p:sp>
         <p:nvSpPr>
-          <p:cNvPr id="32" name="Rectangle 31"/>
+          <p:cNvPr id="36" name="Rectangle 35"/>
           <p:cNvSpPr/>
           <p:nvPr/>
         </p:nvSpPr>
@@ -6386,7 +6771,7 @@
       </p:sp>
       <p:sp>
         <p:nvSpPr>
-          <p:cNvPr id="33" name="TextBox 32"/>
+          <p:cNvPr id="37" name="TextBox 36"/>
           <p:cNvSpPr txBox="1"/>
           <p:nvPr/>
         </p:nvSpPr>
@@ -6421,7 +6806,7 @@
       </p:sp>
       <p:sp>
         <p:nvSpPr>
-          <p:cNvPr id="34" name="Rectangle 33"/>
+          <p:cNvPr id="38" name="Rectangle 37"/>
           <p:cNvSpPr/>
           <p:nvPr/>
         </p:nvSpPr>
@@ -6465,7 +6850,7 @@
       </p:sp>
       <p:sp>
         <p:nvSpPr>
-          <p:cNvPr id="35" name="TextBox 34"/>
+          <p:cNvPr id="39" name="TextBox 38"/>
           <p:cNvSpPr txBox="1"/>
           <p:nvPr/>
         </p:nvSpPr>
@@ -9432,13 +9817,13 @@
         </p:nvCxnSpPr>
         <p:spPr>
           <a:xfrm flipV="1">
-            <a:off x="6080760" y="4041648"/>
-            <a:ext cx="0" cy="576072"/>
+            <a:off x="6080760" y="3159252"/>
+            <a:ext cx="0" cy="1458468"/>
           </a:xfrm>
           <a:prstGeom prst="line">
             <a:avLst/>
           </a:prstGeom>
-          <a:ln w="16510">
+          <a:ln w="17780">
             <a:solidFill>
               <a:srgbClr val="6A3D9A"/>
             </a:solidFill>
@@ -9464,7 +9849,42 @@
       </p:cxnSp>
       <p:sp>
         <p:nvSpPr>
-          <p:cNvPr id="14" name="Rectangle 13"/>
+          <p:cNvPr id="14" name="TextBox 13"/>
+          <p:cNvSpPr txBox="1"/>
+          <p:nvPr/>
+        </p:nvSpPr>
+        <p:spPr>
+          <a:xfrm>
+            <a:off x="6263640" y="3611880"/>
+            <a:ext cx="1280160" cy="274320"/>
+          </a:xfrm>
+          <a:prstGeom prst="rect">
+            <a:avLst/>
+          </a:prstGeom>
+          <a:noFill/>
+        </p:spPr>
+        <p:txBody>
+          <a:bodyPr wrap="square" anchor="ctr">
+            <a:spAutoFit/>
+          </a:bodyPr>
+          <a:lstStyle/>
+          <a:p>
+            <a:pPr algn="l"/>
+            <a:r>
+              <a:rPr sz="900" i="1" b="0">
+                <a:solidFill>
+                  <a:srgbClr val="6A3D9A"/>
+                </a:solidFill>
+                <a:latin typeface="Microsoft YaHei"/>
+              </a:rPr>
+              <a:t>调节路径</a:t>
+            </a:r>
+          </a:p>
+        </p:txBody>
+      </p:sp>
+      <p:sp>
+        <p:nvSpPr>
+          <p:cNvPr id="15" name="Rectangle 14"/>
           <p:cNvSpPr/>
           <p:nvPr/>
         </p:nvSpPr>
@@ -9519,7 +9939,7 @@
       </p:sp>
       <p:sp>
         <p:nvSpPr>
-          <p:cNvPr id="15" name="Rectangle 14"/>
+          <p:cNvPr id="16" name="Rectangle 15"/>
           <p:cNvSpPr/>
           <p:nvPr/>
         </p:nvSpPr>
@@ -9563,7 +9983,7 @@
       </p:sp>
       <p:sp>
         <p:nvSpPr>
-          <p:cNvPr id="16" name="TextBox 15"/>
+          <p:cNvPr id="17" name="TextBox 16"/>
           <p:cNvSpPr txBox="1"/>
           <p:nvPr/>
         </p:nvSpPr>
@@ -9598,7 +10018,7 @@
       </p:sp>
       <p:sp>
         <p:nvSpPr>
-          <p:cNvPr id="17" name="Rectangle 16"/>
+          <p:cNvPr id="18" name="Rectangle 17"/>
           <p:cNvSpPr/>
           <p:nvPr/>
         </p:nvSpPr>
@@ -9642,7 +10062,7 @@
       </p:sp>
       <p:sp>
         <p:nvSpPr>
-          <p:cNvPr id="18" name="TextBox 17"/>
+          <p:cNvPr id="19" name="TextBox 18"/>
           <p:cNvSpPr txBox="1"/>
           <p:nvPr/>
         </p:nvSpPr>
@@ -9677,7 +10097,7 @@
       </p:sp>
       <p:sp>
         <p:nvSpPr>
-          <p:cNvPr id="19" name="Rectangle 18"/>
+          <p:cNvPr id="20" name="Rectangle 19"/>
           <p:cNvSpPr/>
           <p:nvPr/>
         </p:nvSpPr>
@@ -9721,7 +10141,7 @@
       </p:sp>
       <p:sp>
         <p:nvSpPr>
-          <p:cNvPr id="20" name="TextBox 19"/>
+          <p:cNvPr id="21" name="TextBox 20"/>
           <p:cNvSpPr txBox="1"/>
           <p:nvPr/>
         </p:nvSpPr>
@@ -9756,7 +10176,7 @@
       </p:sp>
       <p:sp>
         <p:nvSpPr>
-          <p:cNvPr id="21" name="Rectangle 20"/>
+          <p:cNvPr id="22" name="Rectangle 21"/>
           <p:cNvSpPr/>
           <p:nvPr/>
         </p:nvSpPr>
@@ -9800,7 +10220,7 @@
       </p:sp>
       <p:sp>
         <p:nvSpPr>
-          <p:cNvPr id="22" name="TextBox 21"/>
+          <p:cNvPr id="23" name="TextBox 22"/>
           <p:cNvSpPr txBox="1"/>
           <p:nvPr/>
         </p:nvSpPr>

--- a/技术路线图_LLM消费信贷.pptx
+++ b/技术路线图_LLM消费信贷.pptx
@@ -508,7 +508,7 @@
           <a:lstStyle/>
           <a:p>
             <a:r>
-              <a:t>1. X 是 LLM 接入这一可识别技术冲击；2. 双机制：识别↑、劝说↑；3. 落脚双刃而非转化率；4. 关键：脆弱性升来自组成 vs 行为；5. 微观/中观/宏观三套数据各识别一遍，收口政策。</a:t>
+              <a:t>1. 第一章在机构内造出脆弱性（X→转化→Y1）；2. 第二章在市场显化为投诉，并分解真实风险 vs 表达成本；3. 第三章治理冲击经治理过程纠偏，回拉投诉、闭环；同一风险构念被机构数据/公开投诉/治理准实验三测互证。</a:t>
             </a:r>
           </a:p>
         </p:txBody>
@@ -3523,7 +3523,7 @@
         <p:spPr>
           <a:xfrm>
             <a:off x="0" y="0"/>
-            <a:ext cx="12191695" cy="603504"/>
+            <a:ext cx="12191695" cy="566928"/>
           </a:xfrm>
           <a:prstGeom prst="rect">
             <a:avLst/>
@@ -3556,27 +3556,82 @@
           <a:p>
             <a:pPr algn="ctr"/>
             <a:r>
-              <a:rPr sz="1900" b="1">
+              <a:rPr sz="1800" b="1">
                 <a:solidFill>
                   <a:srgbClr val="FFFFFF"/>
                 </a:solidFill>
                 <a:latin typeface="Microsoft YaHei"/>
               </a:rPr>
-              <a:t>总框架·模型技术路线图  X → 双机制 → 双刃Y → 三层识别</a:t>
-            </a:r>
-          </a:p>
-        </p:txBody>
-      </p:sp>
-      <p:sp>
-        <p:nvSpPr>
-          <p:cNvPr id="3" name="Rounded Rectangle 2"/>
+              <a:t>总框架·三章串联：风险产生 → 风险显化 → 风险纠偏（闭环）</a:t>
+            </a:r>
+          </a:p>
+        </p:txBody>
+      </p:sp>
+      <p:sp>
+        <p:nvSpPr>
+          <p:cNvPr id="3" name="Rectangle 2"/>
           <p:cNvSpPr/>
           <p:nvPr/>
         </p:nvSpPr>
         <p:spPr>
           <a:xfrm>
-            <a:off x="3901744" y="786384"/>
-            <a:ext cx="4389120" cy="512064"/>
+            <a:off x="274320" y="640080"/>
+            <a:ext cx="11643055" cy="402336"/>
+          </a:xfrm>
+          <a:prstGeom prst="rect">
+            <a:avLst/>
+          </a:prstGeom>
+          <a:solidFill>
+            <a:srgbClr val="2E5E8C"/>
+          </a:solidFill>
+          <a:ln w="12700">
+            <a:solidFill>
+              <a:srgbClr val="2E5E8C"/>
+            </a:solidFill>
+          </a:ln>
+          <a:effectLst/>
+        </p:spPr>
+        <p:style>
+          <a:lnRef idx="1">
+            <a:schemeClr val="accent1"/>
+          </a:lnRef>
+          <a:fillRef idx="3">
+            <a:schemeClr val="accent1"/>
+          </a:fillRef>
+          <a:effectRef idx="2">
+            <a:schemeClr val="accent1"/>
+          </a:effectRef>
+          <a:fontRef idx="minor">
+            <a:schemeClr val="lt1"/>
+          </a:fontRef>
+        </p:style>
+        <p:txBody>
+          <a:bodyPr rtlCol="0" anchor="ctr" wrap="square" lIns="50800" rIns="50800" tIns="25400" bIns="25400"/>
+          <a:lstStyle/>
+          <a:p>
+            <a:pPr algn="ctr"/>
+            <a:r>
+              <a:rPr sz="1150" b="1">
+                <a:solidFill>
+                  <a:srgbClr val="FFFFFF"/>
+                </a:solidFill>
+                <a:latin typeface="Microsoft YaHei"/>
+              </a:rPr>
+              <a:t>总问题：LLM 触达升级是否在抬高获客转化的同时推高借款人脆弱性与市场风险，监管与智慧投诉治理又能否纠偏？</a:t>
+            </a:r>
+          </a:p>
+        </p:txBody>
+      </p:sp>
+      <p:sp>
+        <p:nvSpPr>
+          <p:cNvPr id="4" name="Rounded Rectangle 3"/>
+          <p:cNvSpPr/>
+          <p:nvPr/>
+        </p:nvSpPr>
+        <p:spPr>
+          <a:xfrm>
+            <a:off x="2715768" y="1152144"/>
+            <a:ext cx="6766560" cy="457200"/>
           </a:xfrm>
           <a:prstGeom prst="roundRect">
             <a:avLst/>
@@ -3611,27 +3666,27 @@
           <a:p>
             <a:pPr algn="ctr"/>
             <a:r>
-              <a:rPr sz="1400" b="1">
+              <a:rPr sz="1200" b="1">
                 <a:solidFill>
                   <a:srgbClr val="FFFFFF"/>
                 </a:solidFill>
                 <a:latin typeface="Microsoft YaHei"/>
               </a:rPr>
-              <a:t>X｜LLM 大模型接入·数字信贷触达升级</a:t>
-            </a:r>
-          </a:p>
-        </p:txBody>
-      </p:sp>
-      <p:sp>
-        <p:nvSpPr>
-          <p:cNvPr id="4" name="Rounded Rectangle 3"/>
+              <a:t>X｜LLM 触达升级：电销外呼 IVR → LLM 大模型接入</a:t>
+            </a:r>
+          </a:p>
+        </p:txBody>
+      </p:sp>
+      <p:sp>
+        <p:nvSpPr>
+          <p:cNvPr id="5" name="Rounded Rectangle 4"/>
           <p:cNvSpPr/>
           <p:nvPr/>
         </p:nvSpPr>
         <p:spPr>
           <a:xfrm>
-            <a:off x="2255824" y="1517904"/>
-            <a:ext cx="3291840" cy="475488"/>
+            <a:off x="2715768" y="1682496"/>
+            <a:ext cx="6766560" cy="420624"/>
           </a:xfrm>
           <a:prstGeom prst="roundRect">
             <a:avLst/>
@@ -3666,27 +3721,384 @@
           <a:p>
             <a:pPr algn="ctr"/>
             <a:r>
+              <a:rPr sz="1100" b="1">
+                <a:solidFill>
+                  <a:srgbClr val="FFFFFF"/>
+                </a:solidFill>
+                <a:latin typeface="Microsoft YaHei"/>
+              </a:rPr>
+              <a:t>M｜转化：发起用信申请（意图）→ 成功用信（转化）</a:t>
+            </a:r>
+          </a:p>
+        </p:txBody>
+      </p:sp>
+      <p:sp>
+        <p:nvSpPr>
+          <p:cNvPr id="6" name="Rounded Rectangle 5"/>
+          <p:cNvSpPr/>
+          <p:nvPr/>
+        </p:nvSpPr>
+        <p:spPr>
+          <a:xfrm>
+            <a:off x="2715768" y="2176272"/>
+            <a:ext cx="6766560" cy="530352"/>
+          </a:xfrm>
+          <a:prstGeom prst="roundRect">
+            <a:avLst/>
+          </a:prstGeom>
+          <a:solidFill>
+            <a:srgbClr val="B03A2E"/>
+          </a:solidFill>
+          <a:ln w="12700">
+            <a:solidFill>
+              <a:srgbClr val="B03A2E"/>
+            </a:solidFill>
+          </a:ln>
+          <a:effectLst/>
+        </p:spPr>
+        <p:style>
+          <a:lnRef idx="1">
+            <a:schemeClr val="accent1"/>
+          </a:lnRef>
+          <a:fillRef idx="3">
+            <a:schemeClr val="accent1"/>
+          </a:fillRef>
+          <a:effectRef idx="2">
+            <a:schemeClr val="accent1"/>
+          </a:effectRef>
+          <a:fontRef idx="minor">
+            <a:schemeClr val="lt1"/>
+          </a:fontRef>
+        </p:style>
+        <p:txBody>
+          <a:bodyPr rtlCol="0" anchor="ctr" wrap="square" lIns="50800" rIns="50800" tIns="25400" bIns="25400"/>
+          <a:lstStyle/>
+          <a:p>
+            <a:pPr algn="ctr"/>
+            <a:r>
+              <a:rPr sz="1100" b="1">
+                <a:solidFill>
+                  <a:srgbClr val="FFFFFF"/>
+                </a:solidFill>
+                <a:latin typeface="Microsoft YaHei"/>
+              </a:rPr>
+              <a:t>Y₁｜机构内借款人金融脆弱性：复借·逾期(DPD30+)·额度使用率·借后多头</a:t>
+            </a:r>
+          </a:p>
+        </p:txBody>
+      </p:sp>
+      <p:sp>
+        <p:nvSpPr>
+          <p:cNvPr id="7" name="TextBox 6"/>
+          <p:cNvSpPr txBox="1"/>
+          <p:nvPr/>
+        </p:nvSpPr>
+        <p:spPr>
+          <a:xfrm>
+            <a:off x="2715768" y="2734056"/>
+            <a:ext cx="6766560" cy="201168"/>
+          </a:xfrm>
+          <a:prstGeom prst="rect">
+            <a:avLst/>
+          </a:prstGeom>
+          <a:noFill/>
+        </p:spPr>
+        <p:txBody>
+          <a:bodyPr wrap="square" anchor="ctr">
+            <a:spAutoFit/>
+          </a:bodyPr>
+          <a:lstStyle/>
+          <a:p>
+            <a:pPr algn="ctr"/>
+            <a:r>
+              <a:rPr sz="950" i="1" b="0">
+                <a:solidFill>
+                  <a:srgbClr val="6B7682"/>
+                </a:solidFill>
+                <a:latin typeface="Microsoft YaHei"/>
+              </a:rPr>
+              <a:t>▼ 机构内风险在市场显化为投诉</a:t>
+            </a:r>
+          </a:p>
+        </p:txBody>
+      </p:sp>
+      <p:sp>
+        <p:nvSpPr>
+          <p:cNvPr id="8" name="Rounded Rectangle 7"/>
+          <p:cNvSpPr/>
+          <p:nvPr/>
+        </p:nvSpPr>
+        <p:spPr>
+          <a:xfrm>
+            <a:off x="2788920" y="2944368"/>
+            <a:ext cx="3246120" cy="493776"/>
+          </a:xfrm>
+          <a:prstGeom prst="roundRect">
+            <a:avLst/>
+          </a:prstGeom>
+          <a:solidFill>
+            <a:srgbClr val="C05A16"/>
+          </a:solidFill>
+          <a:ln w="12700">
+            <a:solidFill>
+              <a:srgbClr val="C05A16"/>
+            </a:solidFill>
+          </a:ln>
+          <a:effectLst/>
+        </p:spPr>
+        <p:style>
+          <a:lnRef idx="1">
+            <a:schemeClr val="accent1"/>
+          </a:lnRef>
+          <a:fillRef idx="3">
+            <a:schemeClr val="accent1"/>
+          </a:fillRef>
+          <a:effectRef idx="2">
+            <a:schemeClr val="accent1"/>
+          </a:effectRef>
+          <a:fontRef idx="minor">
+            <a:schemeClr val="lt1"/>
+          </a:fontRef>
+        </p:style>
+        <p:txBody>
+          <a:bodyPr rtlCol="0" anchor="ctr" wrap="square" lIns="50800" rIns="50800" tIns="25400" bIns="25400"/>
+          <a:lstStyle/>
+          <a:p>
+            <a:pPr algn="ctr"/>
+            <a:r>
+              <a:rPr sz="1100" b="1">
+                <a:solidFill>
+                  <a:srgbClr val="FFFFFF"/>
+                </a:solidFill>
+                <a:latin typeface="Microsoft YaHei"/>
+              </a:rPr>
+              <a:t>真实风险暴露 ↑</a:t>
+            </a:r>
+          </a:p>
+        </p:txBody>
+      </p:sp>
+      <p:sp>
+        <p:nvSpPr>
+          <p:cNvPr id="9" name="Rounded Rectangle 8"/>
+          <p:cNvSpPr/>
+          <p:nvPr/>
+        </p:nvSpPr>
+        <p:spPr>
+          <a:xfrm>
+            <a:off x="6144768" y="2944368"/>
+            <a:ext cx="3337560" cy="493776"/>
+          </a:xfrm>
+          <a:prstGeom prst="roundRect">
+            <a:avLst/>
+          </a:prstGeom>
+          <a:solidFill>
+            <a:srgbClr val="6A3D9A"/>
+          </a:solidFill>
+          <a:ln w="12700">
+            <a:solidFill>
+              <a:srgbClr val="6A3D9A"/>
+            </a:solidFill>
+          </a:ln>
+          <a:effectLst/>
+        </p:spPr>
+        <p:style>
+          <a:lnRef idx="1">
+            <a:schemeClr val="accent1"/>
+          </a:lnRef>
+          <a:fillRef idx="3">
+            <a:schemeClr val="accent1"/>
+          </a:fillRef>
+          <a:effectRef idx="2">
+            <a:schemeClr val="accent1"/>
+          </a:effectRef>
+          <a:fontRef idx="minor">
+            <a:schemeClr val="lt1"/>
+          </a:fontRef>
+        </p:style>
+        <p:txBody>
+          <a:bodyPr rtlCol="0" anchor="ctr" wrap="square" lIns="50800" rIns="50800" tIns="25400" bIns="25400"/>
+          <a:lstStyle/>
+          <a:p>
+            <a:pPr algn="ctr"/>
+            <a:r>
+              <a:rPr sz="1000" b="1">
+                <a:solidFill>
+                  <a:srgbClr val="FFFFFF"/>
+                </a:solidFill>
+                <a:latin typeface="Microsoft YaHei"/>
+              </a:rPr>
+              <a:t>客户表达成本 ↓（投诉文本长度/规范性↑）</a:t>
+            </a:r>
+          </a:p>
+        </p:txBody>
+      </p:sp>
+      <p:sp>
+        <p:nvSpPr>
+          <p:cNvPr id="10" name="Rounded Rectangle 9"/>
+          <p:cNvSpPr/>
+          <p:nvPr/>
+        </p:nvSpPr>
+        <p:spPr>
+          <a:xfrm>
+            <a:off x="2715768" y="3529584"/>
+            <a:ext cx="6766560" cy="566928"/>
+          </a:xfrm>
+          <a:prstGeom prst="roundRect">
+            <a:avLst/>
+          </a:prstGeom>
+          <a:solidFill>
+            <a:srgbClr val="B03A2E"/>
+          </a:solidFill>
+          <a:ln w="12700">
+            <a:solidFill>
+              <a:srgbClr val="B03A2E"/>
+            </a:solidFill>
+          </a:ln>
+          <a:effectLst/>
+        </p:spPr>
+        <p:style>
+          <a:lnRef idx="1">
+            <a:schemeClr val="accent1"/>
+          </a:lnRef>
+          <a:fillRef idx="3">
+            <a:schemeClr val="accent1"/>
+          </a:fillRef>
+          <a:effectRef idx="2">
+            <a:schemeClr val="accent1"/>
+          </a:effectRef>
+          <a:fontRef idx="minor">
+            <a:schemeClr val="lt1"/>
+          </a:fontRef>
+        </p:style>
+        <p:txBody>
+          <a:bodyPr rtlCol="0" anchor="ctr" wrap="square" lIns="50800" rIns="50800" tIns="25400" bIns="25400"/>
+          <a:lstStyle/>
+          <a:p>
+            <a:pPr algn="ctr"/>
+            <a:r>
+              <a:rPr sz="1050" b="1">
+                <a:solidFill>
+                  <a:srgbClr val="FFFFFF"/>
+                </a:solidFill>
+                <a:latin typeface="Microsoft YaHei"/>
+              </a:rPr>
+              <a:t>Y₂｜互联网消金高风险投诉 ↑</a:t>
+            </a:r>
+          </a:p>
+          <a:p>
+            <a:pPr algn="ctr"/>
+            <a:r>
+              <a:rPr sz="1050" b="1">
+                <a:solidFill>
+                  <a:srgbClr val="FFFFFF"/>
+                </a:solidFill>
+                <a:latin typeface="Microsoft YaHei"/>
+              </a:rPr>
+              <a:t>催收/逾期/征信/高息/诱导/信息骚扰；占全部投诉比</a:t>
+            </a:r>
+          </a:p>
+        </p:txBody>
+      </p:sp>
+      <p:sp>
+        <p:nvSpPr>
+          <p:cNvPr id="11" name="TextBox 10"/>
+          <p:cNvSpPr txBox="1"/>
+          <p:nvPr/>
+        </p:nvSpPr>
+        <p:spPr>
+          <a:xfrm>
+            <a:off x="2715768" y="4123944"/>
+            <a:ext cx="6766560" cy="201168"/>
+          </a:xfrm>
+          <a:prstGeom prst="rect">
+            <a:avLst/>
+          </a:prstGeom>
+          <a:noFill/>
+        </p:spPr>
+        <p:txBody>
+          <a:bodyPr wrap="square" anchor="ctr">
+            <a:spAutoFit/>
+          </a:bodyPr>
+          <a:lstStyle/>
+          <a:p>
+            <a:pPr algn="ctr"/>
+            <a:r>
+              <a:rPr sz="950" i="1" b="0">
+                <a:solidFill>
+                  <a:srgbClr val="6B7682"/>
+                </a:solidFill>
+                <a:latin typeface="Microsoft YaHei"/>
+              </a:rPr>
+              <a:t>▼ 可观测风险成为治理对象</a:t>
+            </a:r>
+          </a:p>
+        </p:txBody>
+      </p:sp>
+      <p:sp>
+        <p:nvSpPr>
+          <p:cNvPr id="12" name="Rounded Rectangle 11"/>
+          <p:cNvSpPr/>
+          <p:nvPr/>
+        </p:nvSpPr>
+        <p:spPr>
+          <a:xfrm>
+            <a:off x="2715768" y="4334256"/>
+            <a:ext cx="6766560" cy="457200"/>
+          </a:xfrm>
+          <a:prstGeom prst="roundRect">
+            <a:avLst/>
+          </a:prstGeom>
+          <a:solidFill>
+            <a:srgbClr val="C87F0A"/>
+          </a:solidFill>
+          <a:ln w="12700">
+            <a:solidFill>
+              <a:srgbClr val="C87F0A"/>
+            </a:solidFill>
+          </a:ln>
+          <a:effectLst/>
+        </p:spPr>
+        <p:style>
+          <a:lnRef idx="1">
+            <a:schemeClr val="accent1"/>
+          </a:lnRef>
+          <a:fillRef idx="3">
+            <a:schemeClr val="accent1"/>
+          </a:fillRef>
+          <a:effectRef idx="2">
+            <a:schemeClr val="accent1"/>
+          </a:effectRef>
+          <a:fontRef idx="minor">
+            <a:schemeClr val="lt1"/>
+          </a:fontRef>
+        </p:style>
+        <p:txBody>
+          <a:bodyPr rtlCol="0" anchor="ctr" wrap="square" lIns="50800" rIns="50800" tIns="25400" bIns="25400"/>
+          <a:lstStyle/>
+          <a:p>
+            <a:pPr algn="ctr"/>
+            <a:r>
               <a:rPr sz="1200" b="1">
                 <a:solidFill>
                   <a:srgbClr val="FFFFFF"/>
                 </a:solidFill>
                 <a:latin typeface="Microsoft YaHei"/>
               </a:rPr>
-              <a:t>机制① 意向识别能力 ↑</a:t>
-            </a:r>
-          </a:p>
-        </p:txBody>
-      </p:sp>
-      <p:sp>
-        <p:nvSpPr>
-          <p:cNvPr id="5" name="Rounded Rectangle 4"/>
+              <a:t>X₃｜2025 智慧315 / 监管治理冲击</a:t>
+            </a:r>
+          </a:p>
+        </p:txBody>
+      </p:sp>
+      <p:sp>
+        <p:nvSpPr>
+          <p:cNvPr id="13" name="Rounded Rectangle 12"/>
           <p:cNvSpPr/>
           <p:nvPr/>
         </p:nvSpPr>
         <p:spPr>
           <a:xfrm>
-            <a:off x="6644944" y="1517904"/>
-            <a:ext cx="3291840" cy="475488"/>
+            <a:off x="2715768" y="4846320"/>
+            <a:ext cx="6766560" cy="420624"/>
           </a:xfrm>
           <a:prstGeom prst="roundRect">
             <a:avLst/>
@@ -3721,27 +4133,27 @@
           <a:p>
             <a:pPr algn="ctr"/>
             <a:r>
-              <a:rPr sz="1200" b="1">
+              <a:rPr sz="1100" b="1">
                 <a:solidFill>
                   <a:srgbClr val="FFFFFF"/>
                 </a:solidFill>
                 <a:latin typeface="Microsoft YaHei"/>
               </a:rPr>
-              <a:t>机制② 个性化劝说力 ↑</a:t>
-            </a:r>
-          </a:p>
-        </p:txBody>
-      </p:sp>
-      <p:sp>
-        <p:nvSpPr>
-          <p:cNvPr id="6" name="Rounded Rectangle 5"/>
+              <a:t>M｜治理过程：回复率·解决率·响应时长·监管处罚</a:t>
+            </a:r>
+          </a:p>
+        </p:txBody>
+      </p:sp>
+      <p:sp>
+        <p:nvSpPr>
+          <p:cNvPr id="14" name="Rounded Rectangle 13"/>
           <p:cNvSpPr/>
           <p:nvPr/>
         </p:nvSpPr>
         <p:spPr>
           <a:xfrm>
-            <a:off x="411480" y="2286000"/>
-            <a:ext cx="3200400" cy="676656"/>
+            <a:off x="2715768" y="5340096"/>
+            <a:ext cx="6766560" cy="512064"/>
           </a:xfrm>
           <a:prstGeom prst="roundRect">
             <a:avLst/>
@@ -3776,47 +4188,35 @@
           <a:p>
             <a:pPr algn="ctr"/>
             <a:r>
-              <a:rPr sz="1200" b="1">
+              <a:rPr sz="1100" b="1">
                 <a:solidFill>
                   <a:srgbClr val="FFFFFF"/>
                 </a:solidFill>
                 <a:latin typeface="Microsoft YaHei"/>
               </a:rPr>
-              <a:t>Y-A 信贷可得性 ↑</a:t>
-            </a:r>
-          </a:p>
-          <a:p>
-            <a:pPr algn="ctr"/>
-            <a:r>
-              <a:rPr sz="1200" b="1">
-                <a:solidFill>
-                  <a:srgbClr val="FFFFFF"/>
-                </a:solidFill>
-                <a:latin typeface="Microsoft YaHei"/>
-              </a:rPr>
-              <a:t>更多人·更易借到</a:t>
-            </a:r>
-          </a:p>
-        </p:txBody>
-      </p:sp>
-      <p:sp>
-        <p:nvSpPr>
-          <p:cNvPr id="7" name="Rounded Rectangle 6"/>
+              <a:t>Y₃｜治理结果：投诉总数↓·重复投诉↓·高风险占比↓·未解决↓</a:t>
+            </a:r>
+          </a:p>
+        </p:txBody>
+      </p:sp>
+      <p:sp>
+        <p:nvSpPr>
+          <p:cNvPr id="15" name="Rounded Rectangle 14"/>
           <p:cNvSpPr/>
           <p:nvPr/>
         </p:nvSpPr>
         <p:spPr>
           <a:xfrm>
-            <a:off x="8579815" y="2286000"/>
-            <a:ext cx="3200400" cy="676656"/>
+            <a:off x="365760" y="2176272"/>
+            <a:ext cx="1371600" cy="420624"/>
           </a:xfrm>
           <a:prstGeom prst="roundRect">
             <a:avLst/>
           </a:prstGeom>
           <a:solidFill>
-            <a:srgbClr val="B03A2E"/>
+            <a:srgbClr val="FFFFFF"/>
           </a:solidFill>
-          <a:ln w="12700">
+          <a:ln w="19050">
             <a:solidFill>
               <a:srgbClr val="B03A2E"/>
             </a:solidFill>
@@ -3843,513 +4243,137 @@
           <a:p>
             <a:pPr algn="ctr"/>
             <a:r>
-              <a:rPr sz="1200" b="1">
-                <a:solidFill>
-                  <a:srgbClr val="FFFFFF"/>
-                </a:solidFill>
-                <a:latin typeface="Microsoft YaHei"/>
-              </a:rPr>
-              <a:t>Y-B 金融脆弱性 ↑</a:t>
-            </a:r>
-          </a:p>
-          <a:p>
-            <a:pPr algn="ctr"/>
-            <a:r>
-              <a:rPr sz="1200" b="1">
-                <a:solidFill>
-                  <a:srgbClr val="FFFFFF"/>
-                </a:solidFill>
-                <a:latin typeface="Microsoft YaHei"/>
-              </a:rPr>
-              <a:t>重复借贷·多头·逾期违约</a:t>
-            </a:r>
-          </a:p>
-        </p:txBody>
-      </p:sp>
-      <p:sp>
-        <p:nvSpPr>
-          <p:cNvPr id="8" name="TextBox 7"/>
-          <p:cNvSpPr txBox="1"/>
-          <p:nvPr/>
-        </p:nvSpPr>
-        <p:spPr>
-          <a:xfrm>
-            <a:off x="4572000" y="1993392"/>
-            <a:ext cx="3047695" cy="274320"/>
-          </a:xfrm>
-          <a:prstGeom prst="rect">
-            <a:avLst/>
-          </a:prstGeom>
-          <a:noFill/>
-        </p:spPr>
-        <p:txBody>
-          <a:bodyPr wrap="square" anchor="ctr">
-            <a:spAutoFit/>
-          </a:bodyPr>
-          <a:lstStyle/>
-          <a:p>
-            <a:pPr algn="ctr"/>
-            <a:r>
-              <a:rPr sz="1200" i="1" b="1">
-                <a:solidFill>
-                  <a:srgbClr val="8A4B08"/>
-                </a:solidFill>
-                <a:latin typeface="Microsoft YaHei"/>
-              </a:rPr>
-              <a:t>—— 双刃张力 ——</a:t>
+              <a:rPr sz="1050" b="1">
+                <a:solidFill>
+                  <a:srgbClr val="B03A2E"/>
+                </a:solidFill>
+                <a:latin typeface="Microsoft YaHei"/>
+              </a:rPr>
+              <a:t>Q1·产生</a:t>
+            </a:r>
+          </a:p>
+        </p:txBody>
+      </p:sp>
+      <p:sp>
+        <p:nvSpPr>
+          <p:cNvPr id="16" name="Rounded Rectangle 15"/>
+          <p:cNvSpPr/>
+          <p:nvPr/>
+        </p:nvSpPr>
+        <p:spPr>
+          <a:xfrm>
+            <a:off x="365760" y="2944368"/>
+            <a:ext cx="1371600" cy="420624"/>
+          </a:xfrm>
+          <a:prstGeom prst="roundRect">
+            <a:avLst/>
+          </a:prstGeom>
+          <a:solidFill>
+            <a:srgbClr val="FFFFFF"/>
+          </a:solidFill>
+          <a:ln w="19050">
+            <a:solidFill>
+              <a:srgbClr val="C05A16"/>
+            </a:solidFill>
+          </a:ln>
+          <a:effectLst/>
+        </p:spPr>
+        <p:style>
+          <a:lnRef idx="1">
+            <a:schemeClr val="accent1"/>
+          </a:lnRef>
+          <a:fillRef idx="3">
+            <a:schemeClr val="accent1"/>
+          </a:fillRef>
+          <a:effectRef idx="2">
+            <a:schemeClr val="accent1"/>
+          </a:effectRef>
+          <a:fontRef idx="minor">
+            <a:schemeClr val="lt1"/>
+          </a:fontRef>
+        </p:style>
+        <p:txBody>
+          <a:bodyPr rtlCol="0" anchor="ctr" wrap="square" lIns="50800" rIns="50800" tIns="25400" bIns="25400"/>
+          <a:lstStyle/>
+          <a:p>
+            <a:pPr algn="ctr"/>
+            <a:r>
+              <a:rPr sz="1050" b="1">
+                <a:solidFill>
+                  <a:srgbClr val="C05A16"/>
+                </a:solidFill>
+                <a:latin typeface="Microsoft YaHei"/>
+              </a:rPr>
+              <a:t>Q2·显化</a:t>
+            </a:r>
+          </a:p>
+        </p:txBody>
+      </p:sp>
+      <p:sp>
+        <p:nvSpPr>
+          <p:cNvPr id="17" name="Rounded Rectangle 16"/>
+          <p:cNvSpPr/>
+          <p:nvPr/>
+        </p:nvSpPr>
+        <p:spPr>
+          <a:xfrm>
+            <a:off x="365760" y="4334256"/>
+            <a:ext cx="1371600" cy="420624"/>
+          </a:xfrm>
+          <a:prstGeom prst="roundRect">
+            <a:avLst/>
+          </a:prstGeom>
+          <a:solidFill>
+            <a:srgbClr val="FFFFFF"/>
+          </a:solidFill>
+          <a:ln w="19050">
+            <a:solidFill>
+              <a:srgbClr val="2E7D32"/>
+            </a:solidFill>
+          </a:ln>
+          <a:effectLst/>
+        </p:spPr>
+        <p:style>
+          <a:lnRef idx="1">
+            <a:schemeClr val="accent1"/>
+          </a:lnRef>
+          <a:fillRef idx="3">
+            <a:schemeClr val="accent1"/>
+          </a:fillRef>
+          <a:effectRef idx="2">
+            <a:schemeClr val="accent1"/>
+          </a:effectRef>
+          <a:fontRef idx="minor">
+            <a:schemeClr val="lt1"/>
+          </a:fontRef>
+        </p:style>
+        <p:txBody>
+          <a:bodyPr rtlCol="0" anchor="ctr" wrap="square" lIns="50800" rIns="50800" tIns="25400" bIns="25400"/>
+          <a:lstStyle/>
+          <a:p>
+            <a:pPr algn="ctr"/>
+            <a:r>
+              <a:rPr sz="1050" b="1">
+                <a:solidFill>
+                  <a:srgbClr val="2E7D32"/>
+                </a:solidFill>
+                <a:latin typeface="Microsoft YaHei"/>
+              </a:rPr>
+              <a:t>Q3·纠偏</a:t>
             </a:r>
           </a:p>
         </p:txBody>
       </p:sp>
       <p:cxnSp>
         <p:nvCxnSpPr>
-          <p:cNvPr id="9" name="Connector 8"/>
+          <p:cNvPr id="18" name="Connector 17"/>
           <p:cNvCxnSpPr/>
           <p:nvPr/>
         </p:nvCxnSpPr>
         <p:spPr>
           <a:xfrm>
-            <a:off x="3611880" y="2624328"/>
-            <a:ext cx="4967935" cy="0"/>
-          </a:xfrm>
-          <a:prstGeom prst="line">
-            <a:avLst/>
-          </a:prstGeom>
-          <a:ln w="19050">
-            <a:solidFill>
-              <a:srgbClr val="8A4B08"/>
-            </a:solidFill>
-            <a:prstDash val="dash"/>
-          </a:ln>
-          <a:effectLst/>
-        </p:spPr>
-        <p:style>
-          <a:lnRef idx="2">
-            <a:schemeClr val="accent1"/>
-          </a:lnRef>
-          <a:fillRef idx="0">
-            <a:schemeClr val="accent1"/>
-          </a:fillRef>
-          <a:effectRef idx="1">
-            <a:schemeClr val="accent1"/>
-          </a:effectRef>
-          <a:fontRef idx="minor">
-            <a:schemeClr val="tx1"/>
-          </a:fontRef>
-        </p:style>
-      </p:cxnSp>
-      <p:sp>
-        <p:nvSpPr>
-          <p:cNvPr id="10" name="Diamond 9"/>
-          <p:cNvSpPr/>
-          <p:nvPr/>
-        </p:nvSpPr>
-        <p:spPr>
-          <a:xfrm>
-            <a:off x="5227624" y="3163824"/>
-            <a:ext cx="1737360" cy="868680"/>
-          </a:xfrm>
-          <a:prstGeom prst="diamond">
-            <a:avLst/>
-          </a:prstGeom>
-          <a:solidFill>
-            <a:srgbClr val="C87F0A"/>
-          </a:solidFill>
-          <a:ln w="12700">
-            <a:solidFill>
-              <a:srgbClr val="C87F0A"/>
-            </a:solidFill>
-          </a:ln>
-          <a:effectLst/>
-        </p:spPr>
-        <p:style>
-          <a:lnRef idx="1">
-            <a:schemeClr val="accent1"/>
-          </a:lnRef>
-          <a:fillRef idx="3">
-            <a:schemeClr val="accent1"/>
-          </a:fillRef>
-          <a:effectRef idx="2">
-            <a:schemeClr val="accent1"/>
-          </a:effectRef>
-          <a:fontRef idx="minor">
-            <a:schemeClr val="lt1"/>
-          </a:fontRef>
-        </p:style>
-        <p:txBody>
-          <a:bodyPr rtlCol="0" anchor="ctr" wrap="square" lIns="50800" rIns="50800" tIns="25400" bIns="25400"/>
-          <a:lstStyle/>
-          <a:p>
-            <a:pPr algn="ctr"/>
-            <a:r>
-              <a:rPr sz="1100" b="1">
-                <a:solidFill>
-                  <a:srgbClr val="FFFFFF"/>
-                </a:solidFill>
-                <a:latin typeface="Microsoft YaHei"/>
-              </a:rPr>
-              <a:t>脆弱性</a:t>
-            </a:r>
-          </a:p>
-          <a:p>
-            <a:pPr algn="ctr"/>
-            <a:r>
-              <a:rPr sz="1100" b="1">
-                <a:solidFill>
-                  <a:srgbClr val="FFFFFF"/>
-                </a:solidFill>
-                <a:latin typeface="Microsoft YaHei"/>
-              </a:rPr>
-              <a:t>来源分解</a:t>
-            </a:r>
-          </a:p>
-        </p:txBody>
-      </p:sp>
-      <p:sp>
-        <p:nvSpPr>
-          <p:cNvPr id="11" name="Rounded Rectangle 10"/>
-          <p:cNvSpPr/>
-          <p:nvPr/>
-        </p:nvSpPr>
-        <p:spPr>
-          <a:xfrm>
-            <a:off x="3246120" y="4224528"/>
-            <a:ext cx="2651760" cy="530352"/>
-          </a:xfrm>
-          <a:prstGeom prst="roundRect">
-            <a:avLst/>
-          </a:prstGeom>
-          <a:solidFill>
-            <a:srgbClr val="F1D9A8"/>
-          </a:solidFill>
-          <a:ln w="12700">
-            <a:solidFill>
-              <a:srgbClr val="F1D9A8"/>
-            </a:solidFill>
-          </a:ln>
-          <a:effectLst/>
-        </p:spPr>
-        <p:style>
-          <a:lnRef idx="1">
-            <a:schemeClr val="accent1"/>
-          </a:lnRef>
-          <a:fillRef idx="3">
-            <a:schemeClr val="accent1"/>
-          </a:fillRef>
-          <a:effectRef idx="2">
-            <a:schemeClr val="accent1"/>
-          </a:effectRef>
-          <a:fontRef idx="minor">
-            <a:schemeClr val="lt1"/>
-          </a:fontRef>
-        </p:style>
-        <p:txBody>
-          <a:bodyPr rtlCol="0" anchor="ctr" wrap="square" lIns="50800" rIns="50800" tIns="25400" bIns="25400"/>
-          <a:lstStyle/>
-          <a:p>
-            <a:pPr algn="ctr"/>
-            <a:r>
-              <a:rPr sz="1100" b="1">
-                <a:solidFill>
-                  <a:srgbClr val="202833"/>
-                </a:solidFill>
-                <a:latin typeface="Microsoft YaHei"/>
-              </a:rPr>
-              <a:t>组成·外延</a:t>
-            </a:r>
-          </a:p>
-          <a:p>
-            <a:pPr algn="ctr"/>
-            <a:r>
-              <a:rPr sz="1100" b="1">
-                <a:solidFill>
-                  <a:srgbClr val="202833"/>
-                </a:solidFill>
-                <a:latin typeface="Microsoft YaHei"/>
-              </a:rPr>
-              <a:t>更脆弱人群被卷入</a:t>
-            </a:r>
-          </a:p>
-        </p:txBody>
-      </p:sp>
-      <p:sp>
-        <p:nvSpPr>
-          <p:cNvPr id="12" name="Rounded Rectangle 11"/>
-          <p:cNvSpPr/>
-          <p:nvPr/>
-        </p:nvSpPr>
-        <p:spPr>
-          <a:xfrm>
-            <a:off x="6293815" y="4224528"/>
-            <a:ext cx="2651760" cy="530352"/>
-          </a:xfrm>
-          <a:prstGeom prst="roundRect">
-            <a:avLst/>
-          </a:prstGeom>
-          <a:solidFill>
-            <a:srgbClr val="F1D9A8"/>
-          </a:solidFill>
-          <a:ln w="12700">
-            <a:solidFill>
-              <a:srgbClr val="F1D9A8"/>
-            </a:solidFill>
-          </a:ln>
-          <a:effectLst/>
-        </p:spPr>
-        <p:style>
-          <a:lnRef idx="1">
-            <a:schemeClr val="accent1"/>
-          </a:lnRef>
-          <a:fillRef idx="3">
-            <a:schemeClr val="accent1"/>
-          </a:fillRef>
-          <a:effectRef idx="2">
-            <a:schemeClr val="accent1"/>
-          </a:effectRef>
-          <a:fontRef idx="minor">
-            <a:schemeClr val="lt1"/>
-          </a:fontRef>
-        </p:style>
-        <p:txBody>
-          <a:bodyPr rtlCol="0" anchor="ctr" wrap="square" lIns="50800" rIns="50800" tIns="25400" bIns="25400"/>
-          <a:lstStyle/>
-          <a:p>
-            <a:pPr algn="ctr"/>
-            <a:r>
-              <a:rPr sz="1100" b="1">
-                <a:solidFill>
-                  <a:srgbClr val="202833"/>
-                </a:solidFill>
-                <a:latin typeface="Microsoft YaHei"/>
-              </a:rPr>
-              <a:t>行为·内涵</a:t>
-            </a:r>
-          </a:p>
-          <a:p>
-            <a:pPr algn="ctr"/>
-            <a:r>
-              <a:rPr sz="1100" b="1">
-                <a:solidFill>
-                  <a:srgbClr val="202833"/>
-                </a:solidFill>
-                <a:latin typeface="Microsoft YaHei"/>
-              </a:rPr>
-              <a:t>同类人借贷恶化</a:t>
-            </a:r>
-          </a:p>
-        </p:txBody>
-      </p:sp>
-      <p:sp>
-        <p:nvSpPr>
-          <p:cNvPr id="13" name="Rounded Rectangle 12"/>
-          <p:cNvSpPr/>
-          <p:nvPr/>
-        </p:nvSpPr>
-        <p:spPr>
-          <a:xfrm>
-            <a:off x="475488" y="4937760"/>
-            <a:ext cx="3611880" cy="676656"/>
-          </a:xfrm>
-          <a:prstGeom prst="roundRect">
-            <a:avLst/>
-          </a:prstGeom>
-          <a:solidFill>
-            <a:srgbClr val="2E5E8C"/>
-          </a:solidFill>
-          <a:ln w="12700">
-            <a:solidFill>
-              <a:srgbClr val="2E5E8C"/>
-            </a:solidFill>
-          </a:ln>
-          <a:effectLst/>
-        </p:spPr>
-        <p:style>
-          <a:lnRef idx="1">
-            <a:schemeClr val="accent1"/>
-          </a:lnRef>
-          <a:fillRef idx="3">
-            <a:schemeClr val="accent1"/>
-          </a:fillRef>
-          <a:effectRef idx="2">
-            <a:schemeClr val="accent1"/>
-          </a:effectRef>
-          <a:fontRef idx="minor">
-            <a:schemeClr val="lt1"/>
-          </a:fontRef>
-        </p:style>
-        <p:txBody>
-          <a:bodyPr rtlCol="0" anchor="ctr" wrap="square" lIns="50800" rIns="50800" tIns="25400" bIns="25400"/>
-          <a:lstStyle/>
-          <a:p>
-            <a:pPr algn="ctr"/>
-            <a:r>
-              <a:rPr sz="1100" b="1">
-                <a:solidFill>
-                  <a:srgbClr val="FFFFFF"/>
-                </a:solidFill>
-                <a:latin typeface="Microsoft YaHei"/>
-              </a:rPr>
-              <a:t>第一章·微观 马消客户级</a:t>
-            </a:r>
-          </a:p>
-          <a:p>
-            <a:pPr algn="ctr"/>
-            <a:r>
-              <a:rPr sz="1100" b="1">
-                <a:solidFill>
-                  <a:srgbClr val="FFFFFF"/>
-                </a:solidFill>
-                <a:latin typeface="Microsoft YaHei"/>
-              </a:rPr>
-              <a:t>Stacked RD-in-time + DFL分解</a:t>
-            </a:r>
-          </a:p>
-        </p:txBody>
-      </p:sp>
-      <p:sp>
-        <p:nvSpPr>
-          <p:cNvPr id="14" name="Rounded Rectangle 13"/>
-          <p:cNvSpPr/>
-          <p:nvPr/>
-        </p:nvSpPr>
-        <p:spPr>
-          <a:xfrm>
-            <a:off x="4288536" y="4937760"/>
-            <a:ext cx="3611880" cy="676656"/>
-          </a:xfrm>
-          <a:prstGeom prst="roundRect">
-            <a:avLst/>
-          </a:prstGeom>
-          <a:solidFill>
-            <a:srgbClr val="2E5E8C"/>
-          </a:solidFill>
-          <a:ln w="12700">
-            <a:solidFill>
-              <a:srgbClr val="2E5E8C"/>
-            </a:solidFill>
-          </a:ln>
-          <a:effectLst/>
-        </p:spPr>
-        <p:style>
-          <a:lnRef idx="1">
-            <a:schemeClr val="accent1"/>
-          </a:lnRef>
-          <a:fillRef idx="3">
-            <a:schemeClr val="accent1"/>
-          </a:fillRef>
-          <a:effectRef idx="2">
-            <a:schemeClr val="accent1"/>
-          </a:effectRef>
-          <a:fontRef idx="minor">
-            <a:schemeClr val="lt1"/>
-          </a:fontRef>
-        </p:style>
-        <p:txBody>
-          <a:bodyPr rtlCol="0" anchor="ctr" wrap="square" lIns="50800" rIns="50800" tIns="25400" bIns="25400"/>
-          <a:lstStyle/>
-          <a:p>
-            <a:pPr algn="ctr"/>
-            <a:r>
-              <a:rPr sz="1100" b="1">
-                <a:solidFill>
-                  <a:srgbClr val="FFFFFF"/>
-                </a:solidFill>
-                <a:latin typeface="Microsoft YaHei"/>
-              </a:rPr>
-              <a:t>第二章·中观 裁判文书+扩散</a:t>
-            </a:r>
-          </a:p>
-          <a:p>
-            <a:pPr algn="ctr"/>
-            <a:r>
-              <a:rPr sz="1100" b="1">
-                <a:solidFill>
-                  <a:srgbClr val="FFFFFF"/>
-                </a:solidFill>
-                <a:latin typeface="Microsoft YaHei"/>
-              </a:rPr>
-              <a:t>双向FE + Bartik IV</a:t>
-            </a:r>
-          </a:p>
-        </p:txBody>
-      </p:sp>
-      <p:sp>
-        <p:nvSpPr>
-          <p:cNvPr id="15" name="Rounded Rectangle 14"/>
-          <p:cNvSpPr/>
-          <p:nvPr/>
-        </p:nvSpPr>
-        <p:spPr>
-          <a:xfrm>
-            <a:off x="8101583" y="4937760"/>
-            <a:ext cx="3611880" cy="676656"/>
-          </a:xfrm>
-          <a:prstGeom prst="roundRect">
-            <a:avLst/>
-          </a:prstGeom>
-          <a:solidFill>
-            <a:srgbClr val="2E5E8C"/>
-          </a:solidFill>
-          <a:ln w="12700">
-            <a:solidFill>
-              <a:srgbClr val="2E5E8C"/>
-            </a:solidFill>
-          </a:ln>
-          <a:effectLst/>
-        </p:spPr>
-        <p:style>
-          <a:lnRef idx="1">
-            <a:schemeClr val="accent1"/>
-          </a:lnRef>
-          <a:fillRef idx="3">
-            <a:schemeClr val="accent1"/>
-          </a:fillRef>
-          <a:effectRef idx="2">
-            <a:schemeClr val="accent1"/>
-          </a:effectRef>
-          <a:fontRef idx="minor">
-            <a:schemeClr val="lt1"/>
-          </a:fontRef>
-        </p:style>
-        <p:txBody>
-          <a:bodyPr rtlCol="0" anchor="ctr" wrap="square" lIns="50800" rIns="50800" tIns="25400" bIns="25400"/>
-          <a:lstStyle/>
-          <a:p>
-            <a:pPr algn="ctr"/>
-            <a:r>
-              <a:rPr sz="1100" b="1">
-                <a:solidFill>
-                  <a:srgbClr val="FFFFFF"/>
-                </a:solidFill>
-                <a:latin typeface="Microsoft YaHei"/>
-              </a:rPr>
-              <a:t>第三章·宏观 CHFS/CFPS</a:t>
-            </a:r>
-          </a:p>
-          <a:p>
-            <a:pPr algn="ctr"/>
-            <a:r>
-              <a:rPr sz="1100" b="1">
-                <a:solidFill>
-                  <a:srgbClr val="FFFFFF"/>
-                </a:solidFill>
-                <a:latin typeface="Microsoft YaHei"/>
-              </a:rPr>
-              <a:t>监管DDD + 2SLS</a:t>
-            </a:r>
-          </a:p>
-        </p:txBody>
-      </p:sp>
-      <p:cxnSp>
-        <p:nvCxnSpPr>
-          <p:cNvPr id="16" name="Connector 15"/>
-          <p:cNvCxnSpPr/>
-          <p:nvPr/>
-        </p:nvCxnSpPr>
-        <p:spPr>
-          <a:xfrm flipH="1">
-            <a:off x="3901744" y="1298448"/>
-            <a:ext cx="2194560" cy="219456"/>
+            <a:off x="6099048" y="1609344"/>
+            <a:ext cx="0" cy="73152"/>
           </a:xfrm>
           <a:prstGeom prst="line">
             <a:avLst/>
@@ -4379,14 +4403,14 @@
       </p:cxnSp>
       <p:cxnSp>
         <p:nvCxnSpPr>
-          <p:cNvPr id="17" name="Connector 16"/>
+          <p:cNvPr id="19" name="Connector 18"/>
           <p:cNvCxnSpPr/>
           <p:nvPr/>
         </p:nvCxnSpPr>
         <p:spPr>
           <a:xfrm>
-            <a:off x="6096304" y="1298448"/>
-            <a:ext cx="2194560" cy="219456"/>
+            <a:off x="6099048" y="2103120"/>
+            <a:ext cx="0" cy="73152"/>
           </a:xfrm>
           <a:prstGeom prst="line">
             <a:avLst/>
@@ -4416,14 +4440,14 @@
       </p:cxnSp>
       <p:cxnSp>
         <p:nvCxnSpPr>
-          <p:cNvPr id="18" name="Connector 17"/>
+          <p:cNvPr id="20" name="Connector 19"/>
           <p:cNvCxnSpPr/>
           <p:nvPr/>
         </p:nvCxnSpPr>
         <p:spPr>
           <a:xfrm flipH="1">
-            <a:off x="2011680" y="1993392"/>
-            <a:ext cx="1890064" cy="292608"/>
+            <a:off x="4411980" y="2706624"/>
+            <a:ext cx="1687068" cy="237744"/>
           </a:xfrm>
           <a:prstGeom prst="line">
             <a:avLst/>
@@ -4453,14 +4477,14 @@
       </p:cxnSp>
       <p:cxnSp>
         <p:nvCxnSpPr>
-          <p:cNvPr id="19" name="Connector 18"/>
+          <p:cNvPr id="21" name="Connector 20"/>
           <p:cNvCxnSpPr/>
           <p:nvPr/>
         </p:nvCxnSpPr>
         <p:spPr>
           <a:xfrm>
-            <a:off x="8290864" y="1993392"/>
-            <a:ext cx="1889151" cy="292608"/>
+            <a:off x="6099048" y="2706624"/>
+            <a:ext cx="1714500" cy="237744"/>
           </a:xfrm>
           <a:prstGeom prst="line">
             <a:avLst/>
@@ -4490,88 +4514,14 @@
       </p:cxnSp>
       <p:cxnSp>
         <p:nvCxnSpPr>
-          <p:cNvPr id="20" name="Connector 19"/>
-          <p:cNvCxnSpPr/>
-          <p:nvPr/>
-        </p:nvCxnSpPr>
-        <p:spPr>
-          <a:xfrm>
-            <a:off x="3901744" y="1993392"/>
-            <a:ext cx="7649871" cy="292608"/>
-          </a:xfrm>
-          <a:prstGeom prst="line">
-            <a:avLst/>
-          </a:prstGeom>
-          <a:ln w="12700">
-            <a:solidFill>
-              <a:srgbClr val="9AA7B2"/>
-            </a:solidFill>
-            <a:tailEnd type="triangle" w="med" len="med"/>
-          </a:ln>
-          <a:effectLst/>
-        </p:spPr>
-        <p:style>
-          <a:lnRef idx="2">
-            <a:schemeClr val="accent1"/>
-          </a:lnRef>
-          <a:fillRef idx="0">
-            <a:schemeClr val="accent1"/>
-          </a:fillRef>
-          <a:effectRef idx="1">
-            <a:schemeClr val="accent1"/>
-          </a:effectRef>
-          <a:fontRef idx="minor">
-            <a:schemeClr val="tx1"/>
-          </a:fontRef>
-        </p:style>
-      </p:cxnSp>
-      <p:cxnSp>
-        <p:nvCxnSpPr>
-          <p:cNvPr id="21" name="Connector 20"/>
-          <p:cNvCxnSpPr/>
-          <p:nvPr/>
-        </p:nvCxnSpPr>
-        <p:spPr>
-          <a:xfrm flipH="1">
-            <a:off x="640080" y="1993392"/>
-            <a:ext cx="7650784" cy="292608"/>
-          </a:xfrm>
-          <a:prstGeom prst="line">
-            <a:avLst/>
-          </a:prstGeom>
-          <a:ln w="12700">
-            <a:solidFill>
-              <a:srgbClr val="9AA7B2"/>
-            </a:solidFill>
-            <a:tailEnd type="triangle" w="med" len="med"/>
-          </a:ln>
-          <a:effectLst/>
-        </p:spPr>
-        <p:style>
-          <a:lnRef idx="2">
-            <a:schemeClr val="accent1"/>
-          </a:lnRef>
-          <a:fillRef idx="0">
-            <a:schemeClr val="accent1"/>
-          </a:fillRef>
-          <a:effectRef idx="1">
-            <a:schemeClr val="accent1"/>
-          </a:effectRef>
-          <a:fontRef idx="minor">
-            <a:schemeClr val="tx1"/>
-          </a:fontRef>
-        </p:style>
-      </p:cxnSp>
-      <p:cxnSp>
-        <p:nvCxnSpPr>
           <p:cNvPr id="22" name="Connector 21"/>
           <p:cNvCxnSpPr/>
           <p:nvPr/>
         </p:nvCxnSpPr>
         <p:spPr>
-          <a:xfrm flipH="1">
-            <a:off x="6096304" y="2962656"/>
-            <a:ext cx="4083711" cy="201168"/>
+          <a:xfrm>
+            <a:off x="4411980" y="3438144"/>
+            <a:ext cx="1412748" cy="91440"/>
           </a:xfrm>
           <a:prstGeom prst="line">
             <a:avLst/>
@@ -4607,8 +4557,8 @@
         </p:nvCxnSpPr>
         <p:spPr>
           <a:xfrm flipH="1">
-            <a:off x="4572000" y="4032504"/>
-            <a:ext cx="1524304" cy="192024"/>
+            <a:off x="6373368" y="3438144"/>
+            <a:ext cx="1440180" cy="91440"/>
           </a:xfrm>
           <a:prstGeom prst="line">
             <a:avLst/>
@@ -4644,8 +4594,8 @@
         </p:nvCxnSpPr>
         <p:spPr>
           <a:xfrm>
-            <a:off x="6096304" y="4032504"/>
-            <a:ext cx="1523391" cy="192024"/>
+            <a:off x="6099048" y="4096512"/>
+            <a:ext cx="0" cy="237744"/>
           </a:xfrm>
           <a:prstGeom prst="line">
             <a:avLst/>
@@ -4680,9 +4630,9 @@
           <p:nvPr/>
         </p:nvCxnSpPr>
         <p:spPr>
-          <a:xfrm flipH="1">
-            <a:off x="1915668" y="2962656"/>
-            <a:ext cx="96012" cy="1975104"/>
+          <a:xfrm>
+            <a:off x="6099048" y="4791456"/>
+            <a:ext cx="0" cy="54864"/>
           </a:xfrm>
           <a:prstGeom prst="line">
             <a:avLst/>
@@ -4717,9 +4667,9 @@
           <p:nvPr/>
         </p:nvCxnSpPr>
         <p:spPr>
-          <a:xfrm flipH="1">
-            <a:off x="2281428" y="4754880"/>
-            <a:ext cx="2290572" cy="182880"/>
+          <a:xfrm>
+            <a:off x="6099048" y="5266944"/>
+            <a:ext cx="0" cy="73152"/>
           </a:xfrm>
           <a:prstGeom prst="line">
             <a:avLst/>
@@ -4754,284 +4704,81 @@
           <p:nvPr/>
         </p:nvCxnSpPr>
         <p:spPr>
-          <a:xfrm flipH="1">
-            <a:off x="2647188" y="4754880"/>
-            <a:ext cx="4972507" cy="182880"/>
+          <a:xfrm flipV="1">
+            <a:off x="9528048" y="3813048"/>
+            <a:ext cx="0" cy="1783080"/>
           </a:xfrm>
           <a:prstGeom prst="line">
             <a:avLst/>
           </a:prstGeom>
-          <a:ln w="19050">
-            <a:solidFill>
-              <a:srgbClr val="5A6B7B"/>
-            </a:solidFill>
-            <a:tailEnd type="triangle" w="med" len="med"/>
-          </a:ln>
-          <a:effectLst/>
-        </p:spPr>
-        <p:style>
-          <a:lnRef idx="2">
-            <a:schemeClr val="accent1"/>
-          </a:lnRef>
-          <a:fillRef idx="0">
-            <a:schemeClr val="accent1"/>
-          </a:fillRef>
-          <a:effectRef idx="1">
-            <a:schemeClr val="accent1"/>
-          </a:effectRef>
-          <a:fontRef idx="minor">
-            <a:schemeClr val="tx1"/>
-          </a:fontRef>
-        </p:style>
-      </p:cxnSp>
-      <p:cxnSp>
-        <p:nvCxnSpPr>
-          <p:cNvPr id="28" name="Connector 27"/>
-          <p:cNvCxnSpPr/>
-          <p:nvPr/>
-        </p:nvCxnSpPr>
-        <p:spPr>
-          <a:xfrm>
-            <a:off x="4087368" y="5276088"/>
-            <a:ext cx="201168" cy="0"/>
-          </a:xfrm>
-          <a:prstGeom prst="line">
-            <a:avLst/>
-          </a:prstGeom>
-          <a:ln w="19050">
-            <a:solidFill>
-              <a:srgbClr val="5A6B7B"/>
-            </a:solidFill>
-            <a:tailEnd type="triangle" w="med" len="med"/>
-          </a:ln>
-          <a:effectLst/>
-        </p:spPr>
-        <p:style>
-          <a:lnRef idx="2">
-            <a:schemeClr val="accent1"/>
-          </a:lnRef>
-          <a:fillRef idx="0">
-            <a:schemeClr val="accent1"/>
-          </a:fillRef>
-          <a:effectRef idx="1">
-            <a:schemeClr val="accent1"/>
-          </a:effectRef>
-          <a:fontRef idx="minor">
-            <a:schemeClr val="tx1"/>
-          </a:fontRef>
-        </p:style>
-      </p:cxnSp>
-      <p:cxnSp>
-        <p:nvCxnSpPr>
-          <p:cNvPr id="29" name="Connector 28"/>
-          <p:cNvCxnSpPr/>
-          <p:nvPr/>
-        </p:nvCxnSpPr>
-        <p:spPr>
-          <a:xfrm>
-            <a:off x="7900416" y="5276088"/>
-            <a:ext cx="201167" cy="0"/>
-          </a:xfrm>
-          <a:prstGeom prst="line">
-            <a:avLst/>
-          </a:prstGeom>
-          <a:ln w="19050">
-            <a:solidFill>
-              <a:srgbClr val="5A6B7B"/>
-            </a:solidFill>
-            <a:tailEnd type="triangle" w="med" len="med"/>
-          </a:ln>
-          <a:effectLst/>
-        </p:spPr>
-        <p:style>
-          <a:lnRef idx="2">
-            <a:schemeClr val="accent1"/>
-          </a:lnRef>
-          <a:fillRef idx="0">
-            <a:schemeClr val="accent1"/>
-          </a:fillRef>
-          <a:effectRef idx="1">
-            <a:schemeClr val="accent1"/>
-          </a:effectRef>
-          <a:fontRef idx="minor">
-            <a:schemeClr val="tx1"/>
-          </a:fontRef>
-        </p:style>
-      </p:cxnSp>
-      <p:sp>
-        <p:nvSpPr>
-          <p:cNvPr id="30" name="Rounded Rectangle 29"/>
-          <p:cNvSpPr/>
-          <p:nvPr/>
-        </p:nvSpPr>
-        <p:spPr>
-          <a:xfrm>
-            <a:off x="2715768" y="2002536"/>
-            <a:ext cx="475488" cy="274320"/>
-          </a:xfrm>
-          <a:prstGeom prst="roundRect">
-            <a:avLst/>
-          </a:prstGeom>
-          <a:solidFill>
-            <a:srgbClr val="FFFFFF"/>
-          </a:solidFill>
-          <a:ln w="15875">
+          <a:ln w="16510">
             <a:solidFill>
               <a:srgbClr val="2E7D32"/>
             </a:solidFill>
-          </a:ln>
-          <a:effectLst/>
-        </p:spPr>
-        <p:style>
-          <a:lnRef idx="1">
-            <a:schemeClr val="accent1"/>
-          </a:lnRef>
-          <a:fillRef idx="3">
-            <a:schemeClr val="accent1"/>
-          </a:fillRef>
-          <a:effectRef idx="2">
-            <a:schemeClr val="accent1"/>
-          </a:effectRef>
-          <a:fontRef idx="minor">
-            <a:schemeClr val="lt1"/>
-          </a:fontRef>
-        </p:style>
-        <p:txBody>
-          <a:bodyPr rtlCol="0" anchor="ctr" wrap="none" lIns="12700" rIns="12700" tIns="0" bIns="0"/>
-          <a:lstStyle/>
-          <a:p>
-            <a:pPr algn="ctr"/>
-            <a:r>
-              <a:rPr sz="1000" b="1">
+            <a:prstDash val="dash"/>
+            <a:tailEnd type="triangle" w="med" len="med"/>
+          </a:ln>
+          <a:effectLst/>
+        </p:spPr>
+        <p:style>
+          <a:lnRef idx="2">
+            <a:schemeClr val="accent1"/>
+          </a:lnRef>
+          <a:fillRef idx="0">
+            <a:schemeClr val="accent1"/>
+          </a:fillRef>
+          <a:effectRef idx="1">
+            <a:schemeClr val="accent1"/>
+          </a:effectRef>
+          <a:fontRef idx="minor">
+            <a:schemeClr val="tx1"/>
+          </a:fontRef>
+        </p:style>
+      </p:cxnSp>
+      <p:sp>
+        <p:nvSpPr>
+          <p:cNvPr id="28" name="TextBox 27"/>
+          <p:cNvSpPr txBox="1"/>
+          <p:nvPr/>
+        </p:nvSpPr>
+        <p:spPr>
+          <a:xfrm>
+            <a:off x="9601200" y="4023360"/>
+            <a:ext cx="2377440" cy="274320"/>
+          </a:xfrm>
+          <a:prstGeom prst="rect">
+            <a:avLst/>
+          </a:prstGeom>
+          <a:noFill/>
+        </p:spPr>
+        <p:txBody>
+          <a:bodyPr wrap="square" anchor="ctr">
+            <a:spAutoFit/>
+          </a:bodyPr>
+          <a:lstStyle/>
+          <a:p>
+            <a:pPr algn="l"/>
+            <a:r>
+              <a:rPr sz="950" i="1" b="0">
                 <a:solidFill>
                   <a:srgbClr val="2E7D32"/>
                 </a:solidFill>
                 <a:latin typeface="Microsoft YaHei"/>
               </a:rPr>
-              <a:t>H1</a:t>
-            </a:r>
-          </a:p>
-        </p:txBody>
-      </p:sp>
-      <p:sp>
-        <p:nvSpPr>
-          <p:cNvPr id="31" name="Rounded Rectangle 30"/>
+              <a:t>纠偏闭环 ↩</a:t>
+            </a:r>
+          </a:p>
+        </p:txBody>
+      </p:sp>
+      <p:sp>
+        <p:nvSpPr>
+          <p:cNvPr id="29" name="Rectangle 28"/>
           <p:cNvSpPr/>
           <p:nvPr/>
         </p:nvSpPr>
         <p:spPr>
           <a:xfrm>
-            <a:off x="8997696" y="2002536"/>
-            <a:ext cx="475488" cy="274320"/>
-          </a:xfrm>
-          <a:prstGeom prst="roundRect">
-            <a:avLst/>
-          </a:prstGeom>
-          <a:solidFill>
-            <a:srgbClr val="FFFFFF"/>
-          </a:solidFill>
-          <a:ln w="15875">
-            <a:solidFill>
-              <a:srgbClr val="B03A2E"/>
-            </a:solidFill>
-          </a:ln>
-          <a:effectLst/>
-        </p:spPr>
-        <p:style>
-          <a:lnRef idx="1">
-            <a:schemeClr val="accent1"/>
-          </a:lnRef>
-          <a:fillRef idx="3">
-            <a:schemeClr val="accent1"/>
-          </a:fillRef>
-          <a:effectRef idx="2">
-            <a:schemeClr val="accent1"/>
-          </a:effectRef>
-          <a:fontRef idx="minor">
-            <a:schemeClr val="lt1"/>
-          </a:fontRef>
-        </p:style>
-        <p:txBody>
-          <a:bodyPr rtlCol="0" anchor="ctr" wrap="none" lIns="12700" rIns="12700" tIns="0" bIns="0"/>
-          <a:lstStyle/>
-          <a:p>
-            <a:pPr algn="ctr"/>
-            <a:r>
-              <a:rPr sz="1000" b="1">
-                <a:solidFill>
-                  <a:srgbClr val="B03A2E"/>
-                </a:solidFill>
-                <a:latin typeface="Microsoft YaHei"/>
-              </a:rPr>
-              <a:t>H2</a:t>
-            </a:r>
-          </a:p>
-        </p:txBody>
-      </p:sp>
-      <p:sp>
-        <p:nvSpPr>
-          <p:cNvPr id="32" name="Rounded Rectangle 31"/>
-          <p:cNvSpPr/>
-          <p:nvPr/>
-        </p:nvSpPr>
-        <p:spPr>
-          <a:xfrm>
-            <a:off x="5861304" y="2834640"/>
-            <a:ext cx="475488" cy="274320"/>
-          </a:xfrm>
-          <a:prstGeom prst="roundRect">
-            <a:avLst/>
-          </a:prstGeom>
-          <a:solidFill>
-            <a:srgbClr val="FFFFFF"/>
-          </a:solidFill>
-          <a:ln w="15875">
-            <a:solidFill>
-              <a:srgbClr val="C87F0A"/>
-            </a:solidFill>
-          </a:ln>
-          <a:effectLst/>
-        </p:spPr>
-        <p:style>
-          <a:lnRef idx="1">
-            <a:schemeClr val="accent1"/>
-          </a:lnRef>
-          <a:fillRef idx="3">
-            <a:schemeClr val="accent1"/>
-          </a:fillRef>
-          <a:effectRef idx="2">
-            <a:schemeClr val="accent1"/>
-          </a:effectRef>
-          <a:fontRef idx="minor">
-            <a:schemeClr val="lt1"/>
-          </a:fontRef>
-        </p:style>
-        <p:txBody>
-          <a:bodyPr rtlCol="0" anchor="ctr" wrap="none" lIns="12700" rIns="12700" tIns="0" bIns="0"/>
-          <a:lstStyle/>
-          <a:p>
-            <a:pPr algn="ctr"/>
-            <a:r>
-              <a:rPr sz="1000" b="1">
-                <a:solidFill>
-                  <a:srgbClr val="C87F0A"/>
-                </a:solidFill>
-                <a:latin typeface="Microsoft YaHei"/>
-              </a:rPr>
-              <a:t>H3</a:t>
-            </a:r>
-          </a:p>
-        </p:txBody>
-      </p:sp>
-      <p:sp>
-        <p:nvSpPr>
-          <p:cNvPr id="33" name="Rectangle 32"/>
-          <p:cNvSpPr/>
-          <p:nvPr/>
-        </p:nvSpPr>
-        <p:spPr>
-          <a:xfrm>
-            <a:off x="274320" y="6053328"/>
+            <a:off x="274320" y="5998464"/>
             <a:ext cx="11643055" cy="384048"/>
           </a:xfrm>
           <a:prstGeom prst="rect">
@@ -5073,7 +4820,7 @@
                 </a:solidFill>
                 <a:latin typeface="Microsoft YaHei"/>
               </a:rPr>
-              <a:t>结论与政策：智能信贷触达让更多人借到钱——是否也让更多人陷进去？  金融AI消费者保护 · 共债治理</a:t>
+              <a:t>结论与政策闭环：金融AI消费者保护 · 智能外呼合规 · 投诉治理 — 同一风险构念，三套数据三测互证</a:t>
             </a:r>
           </a:p>
         </p:txBody>
@@ -5105,7 +4852,7 @@
         <p:spPr>
           <a:xfrm>
             <a:off x="0" y="0"/>
-            <a:ext cx="12191695" cy="603504"/>
+            <a:ext cx="12191695" cy="566928"/>
           </a:xfrm>
           <a:prstGeom prst="rect">
             <a:avLst/>
@@ -5138,13 +4885,13 @@
           <a:p>
             <a:pPr algn="ctr"/>
             <a:r>
-              <a:rPr sz="1900" b="1">
+              <a:rPr sz="1800" b="1">
                 <a:solidFill>
                   <a:srgbClr val="FFFFFF"/>
                 </a:solidFill>
                 <a:latin typeface="Microsoft YaHei"/>
               </a:rPr>
-              <a:t>第一章 框架图  X →（中介机制M）→ Y，调节W·控制Z</a:t>
+              <a:t>第一章 框架图（风险产生）  X →（中介M·转化）→ Y，调节W·控制Z</a:t>
             </a:r>
           </a:p>
         </p:txBody>
@@ -5157,8 +4904,8 @@
         </p:nvSpPr>
         <p:spPr>
           <a:xfrm>
-            <a:off x="164592" y="1024128"/>
-            <a:ext cx="1463040" cy="457200"/>
+            <a:off x="146304" y="1188720"/>
+            <a:ext cx="1417320" cy="502920"/>
           </a:xfrm>
           <a:prstGeom prst="rect">
             <a:avLst/>
@@ -5204,8 +4951,8 @@
         </p:nvSpPr>
         <p:spPr>
           <a:xfrm>
-            <a:off x="164592" y="2331720"/>
-            <a:ext cx="1463040" cy="457200"/>
+            <a:off x="146304" y="2468880"/>
+            <a:ext cx="1417320" cy="502920"/>
           </a:xfrm>
           <a:prstGeom prst="rect">
             <a:avLst/>
@@ -5226,7 +4973,7 @@
                 </a:solidFill>
                 <a:latin typeface="Microsoft YaHei"/>
               </a:rPr>
-              <a:t>中介机制</a:t>
+              <a:t>中介</a:t>
             </a:r>
           </a:p>
           <a:p>
@@ -5251,8 +4998,8 @@
         </p:nvSpPr>
         <p:spPr>
           <a:xfrm>
-            <a:off x="164592" y="3611880"/>
-            <a:ext cx="1463040" cy="457200"/>
+            <a:off x="146304" y="1783080"/>
+            <a:ext cx="1417320" cy="502920"/>
           </a:xfrm>
           <a:prstGeom prst="rect">
             <a:avLst/>
@@ -5285,21 +5032,68 @@
                 </a:solidFill>
                 <a:latin typeface="Microsoft YaHei"/>
               </a:rPr>
-              <a:t>Y（双刃）</a:t>
-            </a:r>
-          </a:p>
-        </p:txBody>
-      </p:sp>
-      <p:sp>
-        <p:nvSpPr>
-          <p:cNvPr id="6" name="Rounded Rectangle 5"/>
+              <a:t>Y</a:t>
+            </a:r>
+          </a:p>
+        </p:txBody>
+      </p:sp>
+      <p:sp>
+        <p:nvSpPr>
+          <p:cNvPr id="6" name="TextBox 5"/>
+          <p:cNvSpPr txBox="1"/>
+          <p:nvPr/>
+        </p:nvSpPr>
+        <p:spPr>
+          <a:xfrm>
+            <a:off x="146304" y="4160520"/>
+            <a:ext cx="1417320" cy="502920"/>
+          </a:xfrm>
+          <a:prstGeom prst="rect">
+            <a:avLst/>
+          </a:prstGeom>
+          <a:noFill/>
+        </p:spPr>
+        <p:txBody>
+          <a:bodyPr wrap="square" anchor="ctr">
+            <a:spAutoFit/>
+          </a:bodyPr>
+          <a:lstStyle/>
+          <a:p>
+            <a:pPr algn="ctr"/>
+            <a:r>
+              <a:rPr sz="1100" i="0" b="1">
+                <a:solidFill>
+                  <a:srgbClr val="6A3D9A"/>
+                </a:solidFill>
+                <a:latin typeface="Microsoft YaHei"/>
+              </a:rPr>
+              <a:t>调节</a:t>
+            </a:r>
+          </a:p>
+          <a:p>
+            <a:pPr algn="ctr"/>
+            <a:r>
+              <a:rPr sz="1100" i="0" b="1">
+                <a:solidFill>
+                  <a:srgbClr val="6A3D9A"/>
+                </a:solidFill>
+                <a:latin typeface="Microsoft YaHei"/>
+              </a:rPr>
+              <a:t>W</a:t>
+            </a:r>
+          </a:p>
+        </p:txBody>
+      </p:sp>
+      <p:sp>
+        <p:nvSpPr>
+          <p:cNvPr id="7" name="Rounded Rectangle 6"/>
           <p:cNvSpPr/>
           <p:nvPr/>
         </p:nvSpPr>
         <p:spPr>
           <a:xfrm>
-            <a:off x="1691640" y="914400"/>
-            <a:ext cx="4023360" cy="713232"/>
+            <a:off x="1691640" y="1051560"/>
+            <a:ext cx="3931920" cy="777240"/>
           </a:xfrm>
           <a:prstGeom prst="roundRect">
             <a:avLst/>
@@ -5340,7 +5134,7 @@
                 </a:solidFill>
                 <a:latin typeface="Microsoft YaHei"/>
               </a:rPr>
-              <a:t>X｜LLM大模型接入·数字信贷触达升级</a:t>
+              <a:t>X｜LLM 外呼接入·触达升级</a:t>
             </a:r>
           </a:p>
           <a:p>
@@ -5359,14 +5153,14 @@
       </p:sp>
       <p:sp>
         <p:nvSpPr>
-          <p:cNvPr id="7" name="Rounded Rectangle 6"/>
+          <p:cNvPr id="8" name="Rounded Rectangle 7"/>
           <p:cNvSpPr/>
           <p:nvPr/>
         </p:nvSpPr>
         <p:spPr>
           <a:xfrm>
-            <a:off x="1691640" y="2212848"/>
-            <a:ext cx="4023360" cy="512064"/>
+            <a:off x="1691640" y="2331720"/>
+            <a:ext cx="3931920" cy="777240"/>
           </a:xfrm>
           <a:prstGeom prst="roundRect">
             <a:avLst/>
@@ -5401,68 +5195,25 @@
           <a:p>
             <a:pPr algn="ctr"/>
             <a:r>
-              <a:rPr sz="1100" b="1">
+              <a:rPr sz="1050" b="1">
                 <a:solidFill>
                   <a:srgbClr val="FFFFFF"/>
                 </a:solidFill>
                 <a:latin typeface="Microsoft YaHei"/>
               </a:rPr>
-              <a:t>M₁ 意向识别能力 ↑</a:t>
-            </a:r>
-          </a:p>
-        </p:txBody>
-      </p:sp>
-      <p:sp>
-        <p:nvSpPr>
-          <p:cNvPr id="8" name="Rounded Rectangle 7"/>
-          <p:cNvSpPr/>
-          <p:nvPr/>
-        </p:nvSpPr>
-        <p:spPr>
-          <a:xfrm>
-            <a:off x="1691640" y="2798064"/>
-            <a:ext cx="4023360" cy="512064"/>
-          </a:xfrm>
-          <a:prstGeom prst="roundRect">
-            <a:avLst/>
-          </a:prstGeom>
-          <a:solidFill>
-            <a:srgbClr val="1B7F79"/>
-          </a:solidFill>
-          <a:ln w="12700">
-            <a:solidFill>
-              <a:srgbClr val="1B7F79"/>
-            </a:solidFill>
-          </a:ln>
-          <a:effectLst/>
-        </p:spPr>
-        <p:style>
-          <a:lnRef idx="1">
-            <a:schemeClr val="accent1"/>
-          </a:lnRef>
-          <a:fillRef idx="3">
-            <a:schemeClr val="accent1"/>
-          </a:fillRef>
-          <a:effectRef idx="2">
-            <a:schemeClr val="accent1"/>
-          </a:effectRef>
-          <a:fontRef idx="minor">
-            <a:schemeClr val="lt1"/>
-          </a:fontRef>
-        </p:style>
-        <p:txBody>
-          <a:bodyPr rtlCol="0" anchor="ctr" wrap="square" lIns="50800" rIns="50800" tIns="25400" bIns="25400"/>
-          <a:lstStyle/>
-          <a:p>
-            <a:pPr algn="ctr"/>
-            <a:r>
-              <a:rPr sz="1100" b="1">
+              <a:t>M｜转化（中介，非落脚）</a:t>
+            </a:r>
+          </a:p>
+          <a:p>
+            <a:pPr algn="ctr"/>
+            <a:r>
+              <a:rPr sz="1050" b="1">
                 <a:solidFill>
                   <a:srgbClr val="FFFFFF"/>
                 </a:solidFill>
                 <a:latin typeface="Microsoft YaHei"/>
               </a:rPr>
-              <a:t>M₂ 个性化劝说力 ↑</a:t>
+              <a:t>① 是否发起用信申请(意图)  ② 是否成功用信(转化)</a:t>
             </a:r>
           </a:p>
         </p:txBody>
@@ -5475,75 +5226,8 @@
         </p:nvSpPr>
         <p:spPr>
           <a:xfrm>
-            <a:off x="6446520" y="1783080"/>
-            <a:ext cx="5394960" cy="713232"/>
-          </a:xfrm>
-          <a:prstGeom prst="roundRect">
-            <a:avLst/>
-          </a:prstGeom>
-          <a:solidFill>
-            <a:srgbClr val="2E7D32"/>
-          </a:solidFill>
-          <a:ln w="12700">
-            <a:solidFill>
-              <a:srgbClr val="2E7D32"/>
-            </a:solidFill>
-          </a:ln>
-          <a:effectLst/>
-        </p:spPr>
-        <p:style>
-          <a:lnRef idx="1">
-            <a:schemeClr val="accent1"/>
-          </a:lnRef>
-          <a:fillRef idx="3">
-            <a:schemeClr val="accent1"/>
-          </a:fillRef>
-          <a:effectRef idx="2">
-            <a:schemeClr val="accent1"/>
-          </a:effectRef>
-          <a:fontRef idx="minor">
-            <a:schemeClr val="lt1"/>
-          </a:fontRef>
-        </p:style>
-        <p:txBody>
-          <a:bodyPr rtlCol="0" anchor="ctr" wrap="square" lIns="50800" rIns="50800" tIns="25400" bIns="25400"/>
-          <a:lstStyle/>
-          <a:p>
-            <a:pPr algn="ctr"/>
-            <a:r>
-              <a:rPr sz="1100" b="1">
-                <a:solidFill>
-                  <a:srgbClr val="FFFFFF"/>
-                </a:solidFill>
-                <a:latin typeface="Microsoft YaHei"/>
-              </a:rPr>
-              <a:t>Y-A 信贷可得性 ↑（H1）</a:t>
-            </a:r>
-          </a:p>
-          <a:p>
-            <a:pPr algn="ctr"/>
-            <a:r>
-              <a:rPr sz="1100" b="1">
-                <a:solidFill>
-                  <a:srgbClr val="FFFFFF"/>
-                </a:solidFill>
-                <a:latin typeface="Microsoft YaHei"/>
-              </a:rPr>
-              <a:t>借款概率·获批·放款规模·授信额度</a:t>
-            </a:r>
-          </a:p>
-        </p:txBody>
-      </p:sp>
-      <p:sp>
-        <p:nvSpPr>
-          <p:cNvPr id="10" name="Rounded Rectangle 9"/>
-          <p:cNvSpPr/>
-          <p:nvPr/>
-        </p:nvSpPr>
-        <p:spPr>
-          <a:xfrm>
-            <a:off x="6446520" y="3246120"/>
-            <a:ext cx="5394960" cy="713232"/>
+            <a:off x="6446520" y="1417320"/>
+            <a:ext cx="5394960" cy="960120"/>
           </a:xfrm>
           <a:prstGeom prst="roundRect">
             <a:avLst/>
@@ -5584,7 +5268,7 @@
                 </a:solidFill>
                 <a:latin typeface="Microsoft YaHei"/>
               </a:rPr>
-              <a:t>Y-B 金融脆弱性 ↑（H2）</a:t>
+              <a:t>Y｜客户金融脆弱性</a:t>
             </a:r>
           </a:p>
           <a:p>
@@ -5596,240 +5280,33 @@
                 </a:solidFill>
                 <a:latin typeface="Microsoft YaHei"/>
               </a:rPr>
-              <a:t>重复借贷·applist多头·DPD30+/违约·脆弱指数</a:t>
-            </a:r>
-          </a:p>
-        </p:txBody>
-      </p:sp>
-      <p:sp>
-        <p:nvSpPr>
-          <p:cNvPr id="11" name="TextBox 10"/>
-          <p:cNvSpPr txBox="1"/>
-          <p:nvPr/>
-        </p:nvSpPr>
-        <p:spPr>
-          <a:xfrm>
-            <a:off x="6446520" y="2560320"/>
-            <a:ext cx="5394960" cy="274320"/>
-          </a:xfrm>
-          <a:prstGeom prst="rect">
-            <a:avLst/>
-          </a:prstGeom>
-          <a:noFill/>
-        </p:spPr>
-        <p:txBody>
-          <a:bodyPr wrap="square" anchor="ctr">
-            <a:spAutoFit/>
-          </a:bodyPr>
-          <a:lstStyle/>
-          <a:p>
-            <a:pPr algn="ctr"/>
-            <a:r>
-              <a:rPr sz="1100" i="1" b="1">
-                <a:solidFill>
-                  <a:srgbClr val="8A4B08"/>
-                </a:solidFill>
-                <a:latin typeface="Microsoft YaHei"/>
-              </a:rPr>
-              <a:t>◄—— 双刃张力 ——►</a:t>
-            </a:r>
-          </a:p>
-        </p:txBody>
-      </p:sp>
-      <p:cxnSp>
-        <p:nvCxnSpPr>
-          <p:cNvPr id="12" name="Connector 11"/>
-          <p:cNvCxnSpPr/>
-          <p:nvPr/>
-        </p:nvCxnSpPr>
-        <p:spPr>
-          <a:xfrm>
-            <a:off x="3703320" y="1627632"/>
-            <a:ext cx="0" cy="585216"/>
-          </a:xfrm>
-          <a:prstGeom prst="line">
-            <a:avLst/>
-          </a:prstGeom>
-          <a:ln w="19050">
-            <a:solidFill>
-              <a:srgbClr val="5A6B7B"/>
-            </a:solidFill>
-            <a:tailEnd type="triangle" w="med" len="med"/>
-          </a:ln>
-          <a:effectLst/>
-        </p:spPr>
-        <p:style>
-          <a:lnRef idx="2">
-            <a:schemeClr val="accent1"/>
-          </a:lnRef>
-          <a:fillRef idx="0">
-            <a:schemeClr val="accent1"/>
-          </a:fillRef>
-          <a:effectRef idx="1">
-            <a:schemeClr val="accent1"/>
-          </a:effectRef>
-          <a:fontRef idx="minor">
-            <a:schemeClr val="tx1"/>
-          </a:fontRef>
-        </p:style>
-      </p:cxnSp>
-      <p:cxnSp>
-        <p:nvCxnSpPr>
-          <p:cNvPr id="13" name="Connector 12"/>
-          <p:cNvCxnSpPr/>
-          <p:nvPr/>
-        </p:nvCxnSpPr>
-        <p:spPr>
-          <a:xfrm>
-            <a:off x="3703320" y="2724912"/>
-            <a:ext cx="0" cy="73152"/>
-          </a:xfrm>
-          <a:prstGeom prst="line">
-            <a:avLst/>
-          </a:prstGeom>
-          <a:ln w="19050">
-            <a:solidFill>
-              <a:srgbClr val="5A6B7B"/>
-            </a:solidFill>
-          </a:ln>
-          <a:effectLst/>
-        </p:spPr>
-        <p:style>
-          <a:lnRef idx="2">
-            <a:schemeClr val="accent1"/>
-          </a:lnRef>
-          <a:fillRef idx="0">
-            <a:schemeClr val="accent1"/>
-          </a:fillRef>
-          <a:effectRef idx="1">
-            <a:schemeClr val="accent1"/>
-          </a:effectRef>
-          <a:fontRef idx="minor">
-            <a:schemeClr val="tx1"/>
-          </a:fontRef>
-        </p:style>
-      </p:cxnSp>
-      <p:cxnSp>
-        <p:nvCxnSpPr>
-          <p:cNvPr id="14" name="Connector 13"/>
-          <p:cNvCxnSpPr/>
-          <p:nvPr/>
-        </p:nvCxnSpPr>
-        <p:spPr>
-          <a:xfrm flipV="1">
-            <a:off x="5715000" y="2139696"/>
-            <a:ext cx="731520" cy="914400"/>
-          </a:xfrm>
-          <a:prstGeom prst="line">
-            <a:avLst/>
-          </a:prstGeom>
-          <a:ln w="19050">
-            <a:solidFill>
-              <a:srgbClr val="5A6B7B"/>
-            </a:solidFill>
-            <a:tailEnd type="triangle" w="med" len="med"/>
-          </a:ln>
-          <a:effectLst/>
-        </p:spPr>
-        <p:style>
-          <a:lnRef idx="2">
-            <a:schemeClr val="accent1"/>
-          </a:lnRef>
-          <a:fillRef idx="0">
-            <a:schemeClr val="accent1"/>
-          </a:fillRef>
-          <a:effectRef idx="1">
-            <a:schemeClr val="accent1"/>
-          </a:effectRef>
-          <a:fontRef idx="minor">
-            <a:schemeClr val="tx1"/>
-          </a:fontRef>
-        </p:style>
-      </p:cxnSp>
-      <p:cxnSp>
-        <p:nvCxnSpPr>
-          <p:cNvPr id="15" name="Connector 14"/>
-          <p:cNvCxnSpPr/>
-          <p:nvPr/>
-        </p:nvCxnSpPr>
-        <p:spPr>
-          <a:xfrm>
-            <a:off x="5715000" y="3054096"/>
-            <a:ext cx="731520" cy="548640"/>
-          </a:xfrm>
-          <a:prstGeom prst="line">
-            <a:avLst/>
-          </a:prstGeom>
-          <a:ln w="19050">
-            <a:solidFill>
-              <a:srgbClr val="5A6B7B"/>
-            </a:solidFill>
-            <a:tailEnd type="triangle" w="med" len="med"/>
-          </a:ln>
-          <a:effectLst/>
-        </p:spPr>
-        <p:style>
-          <a:lnRef idx="2">
-            <a:schemeClr val="accent1"/>
-          </a:lnRef>
-          <a:fillRef idx="0">
-            <a:schemeClr val="accent1"/>
-          </a:fillRef>
-          <a:effectRef idx="1">
-            <a:schemeClr val="accent1"/>
-          </a:effectRef>
-          <a:fontRef idx="minor">
-            <a:schemeClr val="tx1"/>
-          </a:fontRef>
-        </p:style>
-      </p:cxnSp>
-      <p:cxnSp>
-        <p:nvCxnSpPr>
-          <p:cNvPr id="16" name="Connector 15"/>
-          <p:cNvCxnSpPr/>
-          <p:nvPr/>
-        </p:nvCxnSpPr>
-        <p:spPr>
-          <a:xfrm flipV="1">
-            <a:off x="5715000" y="1993391"/>
-            <a:ext cx="731520" cy="475489"/>
-          </a:xfrm>
-          <a:prstGeom prst="line">
-            <a:avLst/>
-          </a:prstGeom>
-          <a:ln w="12700">
-            <a:solidFill>
-              <a:srgbClr val="9AA7B2"/>
-            </a:solidFill>
-            <a:tailEnd type="triangle" w="med" len="med"/>
-          </a:ln>
-          <a:effectLst/>
-        </p:spPr>
-        <p:style>
-          <a:lnRef idx="2">
-            <a:schemeClr val="accent1"/>
-          </a:lnRef>
-          <a:fillRef idx="0">
-            <a:schemeClr val="accent1"/>
-          </a:fillRef>
-          <a:effectRef idx="1">
-            <a:schemeClr val="accent1"/>
-          </a:effectRef>
-          <a:fontRef idx="minor">
-            <a:schemeClr val="tx1"/>
-          </a:fontRef>
-        </p:style>
-      </p:cxnSp>
-      <p:sp>
-        <p:nvSpPr>
-          <p:cNvPr id="17" name="Diamond 16"/>
+              <a:t>复借次数·逾期率(DPD30+)·额度使用率</a:t>
+            </a:r>
+          </a:p>
+          <a:p>
+            <a:pPr algn="ctr"/>
+            <a:r>
+              <a:rPr sz="1100" b="1">
+                <a:solidFill>
+                  <a:srgbClr val="FFFFFF"/>
+                </a:solidFill>
+                <a:latin typeface="Microsoft YaHei"/>
+              </a:rPr>
+              <a:t>借后下载其他借贷App(applist多头)·脆弱性指数</a:t>
+            </a:r>
+          </a:p>
+        </p:txBody>
+      </p:sp>
+      <p:sp>
+        <p:nvSpPr>
+          <p:cNvPr id="10" name="Diamond 9"/>
           <p:cNvSpPr/>
           <p:nvPr/>
         </p:nvSpPr>
         <p:spPr>
           <a:xfrm>
-            <a:off x="6446520" y="4160520"/>
-            <a:ext cx="1554480" cy="777240"/>
+            <a:off x="5074920" y="2395728"/>
+            <a:ext cx="1234440" cy="658368"/>
           </a:xfrm>
           <a:prstGeom prst="diamond">
             <a:avLst/>
@@ -5864,260 +5341,39 @@
           <a:p>
             <a:pPr algn="ctr"/>
             <a:r>
-              <a:rPr sz="1000" b="1">
+              <a:rPr sz="950" b="1">
                 <a:solidFill>
                   <a:srgbClr val="FFFFFF"/>
                 </a:solidFill>
                 <a:latin typeface="Microsoft YaHei"/>
               </a:rPr>
-              <a:t>脆弱性</a:t>
-            </a:r>
-          </a:p>
-          <a:p>
-            <a:pPr algn="ctr"/>
-            <a:r>
-              <a:rPr sz="1000" b="1">
+              <a:t>外延 vs</a:t>
+            </a:r>
+          </a:p>
+          <a:p>
+            <a:pPr algn="ctr"/>
+            <a:r>
+              <a:rPr sz="950" b="1">
                 <a:solidFill>
                   <a:srgbClr val="FFFFFF"/>
                 </a:solidFill>
                 <a:latin typeface="Microsoft YaHei"/>
               </a:rPr>
-              <a:t>来源（H3）</a:t>
-            </a:r>
-          </a:p>
-        </p:txBody>
-      </p:sp>
-      <p:sp>
-        <p:nvSpPr>
-          <p:cNvPr id="18" name="Rounded Rectangle 17"/>
+              <a:t>内涵(H3)</a:t>
+            </a:r>
+          </a:p>
+        </p:txBody>
+      </p:sp>
+      <p:sp>
+        <p:nvSpPr>
+          <p:cNvPr id="11" name="Rounded Rectangle 10"/>
           <p:cNvSpPr/>
           <p:nvPr/>
         </p:nvSpPr>
         <p:spPr>
           <a:xfrm>
-            <a:off x="8229600" y="4133087"/>
-            <a:ext cx="1737360" cy="384048"/>
-          </a:xfrm>
-          <a:prstGeom prst="roundRect">
-            <a:avLst/>
-          </a:prstGeom>
-          <a:solidFill>
-            <a:srgbClr val="F1D9A8"/>
-          </a:solidFill>
-          <a:ln w="12700">
-            <a:solidFill>
-              <a:srgbClr val="F1D9A8"/>
-            </a:solidFill>
-          </a:ln>
-          <a:effectLst/>
-        </p:spPr>
-        <p:style>
-          <a:lnRef idx="1">
-            <a:schemeClr val="accent1"/>
-          </a:lnRef>
-          <a:fillRef idx="3">
-            <a:schemeClr val="accent1"/>
-          </a:fillRef>
-          <a:effectRef idx="2">
-            <a:schemeClr val="accent1"/>
-          </a:effectRef>
-          <a:fontRef idx="minor">
-            <a:schemeClr val="lt1"/>
-          </a:fontRef>
-        </p:style>
-        <p:txBody>
-          <a:bodyPr rtlCol="0" anchor="ctr" wrap="square" lIns="50800" rIns="50800" tIns="25400" bIns="25400"/>
-          <a:lstStyle/>
-          <a:p>
-            <a:pPr algn="ctr"/>
-            <a:r>
-              <a:rPr sz="950" b="1">
-                <a:solidFill>
-                  <a:srgbClr val="202833"/>
-                </a:solidFill>
-                <a:latin typeface="Microsoft YaHei"/>
-              </a:rPr>
-              <a:t>组成·外延 更脆弱人群被卷入</a:t>
-            </a:r>
-          </a:p>
-        </p:txBody>
-      </p:sp>
-      <p:sp>
-        <p:nvSpPr>
-          <p:cNvPr id="19" name="Rounded Rectangle 18"/>
-          <p:cNvSpPr/>
-          <p:nvPr/>
-        </p:nvSpPr>
-        <p:spPr>
-          <a:xfrm>
-            <a:off x="8229600" y="4572000"/>
-            <a:ext cx="1737360" cy="384048"/>
-          </a:xfrm>
-          <a:prstGeom prst="roundRect">
-            <a:avLst/>
-          </a:prstGeom>
-          <a:solidFill>
-            <a:srgbClr val="F1D9A8"/>
-          </a:solidFill>
-          <a:ln w="12700">
-            <a:solidFill>
-              <a:srgbClr val="F1D9A8"/>
-            </a:solidFill>
-          </a:ln>
-          <a:effectLst/>
-        </p:spPr>
-        <p:style>
-          <a:lnRef idx="1">
-            <a:schemeClr val="accent1"/>
-          </a:lnRef>
-          <a:fillRef idx="3">
-            <a:schemeClr val="accent1"/>
-          </a:fillRef>
-          <a:effectRef idx="2">
-            <a:schemeClr val="accent1"/>
-          </a:effectRef>
-          <a:fontRef idx="minor">
-            <a:schemeClr val="lt1"/>
-          </a:fontRef>
-        </p:style>
-        <p:txBody>
-          <a:bodyPr rtlCol="0" anchor="ctr" wrap="square" lIns="50800" rIns="50800" tIns="25400" bIns="25400"/>
-          <a:lstStyle/>
-          <a:p>
-            <a:pPr algn="ctr"/>
-            <a:r>
-              <a:rPr sz="950" b="1">
-                <a:solidFill>
-                  <a:srgbClr val="202833"/>
-                </a:solidFill>
-                <a:latin typeface="Microsoft YaHei"/>
-              </a:rPr>
-              <a:t>行为·内涵 同类人借贷恶化</a:t>
-            </a:r>
-          </a:p>
-        </p:txBody>
-      </p:sp>
-      <p:cxnSp>
-        <p:nvCxnSpPr>
-          <p:cNvPr id="20" name="Connector 19"/>
-          <p:cNvCxnSpPr/>
-          <p:nvPr/>
-        </p:nvCxnSpPr>
-        <p:spPr>
-          <a:xfrm flipH="1">
-            <a:off x="7223760" y="3959352"/>
-            <a:ext cx="1920240" cy="201168"/>
-          </a:xfrm>
-          <a:prstGeom prst="line">
-            <a:avLst/>
-          </a:prstGeom>
-          <a:ln w="19050">
-            <a:solidFill>
-              <a:srgbClr val="5A6B7B"/>
-            </a:solidFill>
-            <a:tailEnd type="triangle" w="med" len="med"/>
-          </a:ln>
-          <a:effectLst/>
-        </p:spPr>
-        <p:style>
-          <a:lnRef idx="2">
-            <a:schemeClr val="accent1"/>
-          </a:lnRef>
-          <a:fillRef idx="0">
-            <a:schemeClr val="accent1"/>
-          </a:fillRef>
-          <a:effectRef idx="1">
-            <a:schemeClr val="accent1"/>
-          </a:effectRef>
-          <a:fontRef idx="minor">
-            <a:schemeClr val="tx1"/>
-          </a:fontRef>
-        </p:style>
-      </p:cxnSp>
-      <p:cxnSp>
-        <p:nvCxnSpPr>
-          <p:cNvPr id="21" name="Connector 20"/>
-          <p:cNvCxnSpPr/>
-          <p:nvPr/>
-        </p:nvCxnSpPr>
-        <p:spPr>
-          <a:xfrm flipV="1">
-            <a:off x="8001000" y="4325111"/>
-            <a:ext cx="228600" cy="224029"/>
-          </a:xfrm>
-          <a:prstGeom prst="line">
-            <a:avLst/>
-          </a:prstGeom>
-          <a:ln w="19050">
-            <a:solidFill>
-              <a:srgbClr val="5A6B7B"/>
-            </a:solidFill>
-            <a:tailEnd type="triangle" w="med" len="med"/>
-          </a:ln>
-          <a:effectLst/>
-        </p:spPr>
-        <p:style>
-          <a:lnRef idx="2">
-            <a:schemeClr val="accent1"/>
-          </a:lnRef>
-          <a:fillRef idx="0">
-            <a:schemeClr val="accent1"/>
-          </a:fillRef>
-          <a:effectRef idx="1">
-            <a:schemeClr val="accent1"/>
-          </a:effectRef>
-          <a:fontRef idx="minor">
-            <a:schemeClr val="tx1"/>
-          </a:fontRef>
-        </p:style>
-      </p:cxnSp>
-      <p:cxnSp>
-        <p:nvCxnSpPr>
-          <p:cNvPr id="22" name="Connector 21"/>
-          <p:cNvCxnSpPr/>
-          <p:nvPr/>
-        </p:nvCxnSpPr>
-        <p:spPr>
-          <a:xfrm>
-            <a:off x="8001000" y="4549140"/>
-            <a:ext cx="228600" cy="214884"/>
-          </a:xfrm>
-          <a:prstGeom prst="line">
-            <a:avLst/>
-          </a:prstGeom>
-          <a:ln w="19050">
-            <a:solidFill>
-              <a:srgbClr val="5A6B7B"/>
-            </a:solidFill>
-            <a:tailEnd type="triangle" w="med" len="med"/>
-          </a:ln>
-          <a:effectLst/>
-        </p:spPr>
-        <p:style>
-          <a:lnRef idx="2">
-            <a:schemeClr val="accent1"/>
-          </a:lnRef>
-          <a:fillRef idx="0">
-            <a:schemeClr val="accent1"/>
-          </a:fillRef>
-          <a:effectRef idx="1">
-            <a:schemeClr val="accent1"/>
-          </a:effectRef>
-          <a:fontRef idx="minor">
-            <a:schemeClr val="tx1"/>
-          </a:fontRef>
-        </p:style>
-      </p:cxnSp>
-      <p:sp>
-        <p:nvSpPr>
-          <p:cNvPr id="23" name="Rounded Rectangle 22"/>
-          <p:cNvSpPr/>
-          <p:nvPr/>
-        </p:nvSpPr>
-        <p:spPr>
-          <a:xfrm>
-            <a:off x="1691640" y="5029200"/>
-            <a:ext cx="4023360" cy="713232"/>
+            <a:off x="1691640" y="4023360"/>
+            <a:ext cx="3931920" cy="777240"/>
           </a:xfrm>
           <a:prstGeom prst="roundRect">
             <a:avLst/>
@@ -6158,7 +5414,7 @@
                 </a:solidFill>
                 <a:latin typeface="Microsoft YaHei"/>
               </a:rPr>
-              <a:t>调节变量 W（H4·异质性）</a:t>
+              <a:t>调节 W（H4·异质）</a:t>
             </a:r>
           </a:p>
           <a:p>
@@ -6170,21 +5426,167 @@
                 </a:solidFill>
                 <a:latin typeface="Microsoft YaHei"/>
               </a:rPr>
-              <a:t>IVR→LLM 智能化梯度（剂量响应）｜客户风险类型·征信分</a:t>
+              <a:t>IVR→LLM 智能化梯度（剂量响应）· 客户风险类型/征信分</a:t>
             </a:r>
           </a:p>
         </p:txBody>
       </p:sp>
       <p:cxnSp>
         <p:nvCxnSpPr>
-          <p:cNvPr id="24" name="Connector 23"/>
+          <p:cNvPr id="12" name="Connector 11"/>
           <p:cNvCxnSpPr/>
           <p:nvPr/>
         </p:nvCxnSpPr>
         <p:spPr>
+          <a:xfrm>
+            <a:off x="3657600" y="1828800"/>
+            <a:ext cx="0" cy="502920"/>
+          </a:xfrm>
+          <a:prstGeom prst="line">
+            <a:avLst/>
+          </a:prstGeom>
+          <a:ln w="19050">
+            <a:solidFill>
+              <a:srgbClr val="5A6B7B"/>
+            </a:solidFill>
+            <a:tailEnd type="triangle" w="med" len="med"/>
+          </a:ln>
+          <a:effectLst/>
+        </p:spPr>
+        <p:style>
+          <a:lnRef idx="2">
+            <a:schemeClr val="accent1"/>
+          </a:lnRef>
+          <a:fillRef idx="0">
+            <a:schemeClr val="accent1"/>
+          </a:fillRef>
+          <a:effectRef idx="1">
+            <a:schemeClr val="accent1"/>
+          </a:effectRef>
+          <a:fontRef idx="minor">
+            <a:schemeClr val="tx1"/>
+          </a:fontRef>
+        </p:style>
+      </p:cxnSp>
+      <p:cxnSp>
+        <p:nvCxnSpPr>
+          <p:cNvPr id="13" name="Connector 12"/>
+          <p:cNvCxnSpPr/>
+          <p:nvPr/>
+        </p:nvCxnSpPr>
+        <p:spPr>
+          <a:xfrm flipH="1">
+            <a:off x="5074920" y="2720340"/>
+            <a:ext cx="548640" cy="4572"/>
+          </a:xfrm>
+          <a:prstGeom prst="line">
+            <a:avLst/>
+          </a:prstGeom>
+          <a:ln w="19050">
+            <a:solidFill>
+              <a:srgbClr val="5A6B7B"/>
+            </a:solidFill>
+            <a:tailEnd type="triangle" w="med" len="med"/>
+          </a:ln>
+          <a:effectLst/>
+        </p:spPr>
+        <p:style>
+          <a:lnRef idx="2">
+            <a:schemeClr val="accent1"/>
+          </a:lnRef>
+          <a:fillRef idx="0">
+            <a:schemeClr val="accent1"/>
+          </a:fillRef>
+          <a:effectRef idx="1">
+            <a:schemeClr val="accent1"/>
+          </a:effectRef>
+          <a:fontRef idx="minor">
+            <a:schemeClr val="tx1"/>
+          </a:fontRef>
+        </p:style>
+      </p:cxnSp>
+      <p:cxnSp>
+        <p:nvCxnSpPr>
+          <p:cNvPr id="14" name="Connector 13"/>
+          <p:cNvCxnSpPr/>
+          <p:nvPr/>
+        </p:nvCxnSpPr>
+        <p:spPr>
           <a:xfrm flipV="1">
-            <a:off x="3703320" y="3328416"/>
-            <a:ext cx="2377440" cy="1700784"/>
+            <a:off x="6309360" y="1988820"/>
+            <a:ext cx="137160" cy="736092"/>
+          </a:xfrm>
+          <a:prstGeom prst="line">
+            <a:avLst/>
+          </a:prstGeom>
+          <a:ln w="19050">
+            <a:solidFill>
+              <a:srgbClr val="5A6B7B"/>
+            </a:solidFill>
+            <a:tailEnd type="triangle" w="med" len="med"/>
+          </a:ln>
+          <a:effectLst/>
+        </p:spPr>
+        <p:style>
+          <a:lnRef idx="2">
+            <a:schemeClr val="accent1"/>
+          </a:lnRef>
+          <a:fillRef idx="0">
+            <a:schemeClr val="accent1"/>
+          </a:fillRef>
+          <a:effectRef idx="1">
+            <a:schemeClr val="accent1"/>
+          </a:effectRef>
+          <a:fontRef idx="minor">
+            <a:schemeClr val="tx1"/>
+          </a:fontRef>
+        </p:style>
+      </p:cxnSp>
+      <p:sp>
+        <p:nvSpPr>
+          <p:cNvPr id="15" name="TextBox 14"/>
+          <p:cNvSpPr txBox="1"/>
+          <p:nvPr/>
+        </p:nvSpPr>
+        <p:spPr>
+          <a:xfrm>
+            <a:off x="1783080" y="1847088"/>
+            <a:ext cx="3749039" cy="274320"/>
+          </a:xfrm>
+          <a:prstGeom prst="rect">
+            <a:avLst/>
+          </a:prstGeom>
+          <a:noFill/>
+        </p:spPr>
+        <p:txBody>
+          <a:bodyPr wrap="square" anchor="ctr">
+            <a:spAutoFit/>
+          </a:bodyPr>
+          <a:lstStyle/>
+          <a:p>
+            <a:pPr algn="ctr"/>
+            <a:r>
+              <a:rPr sz="900" i="1" b="0">
+                <a:solidFill>
+                  <a:srgbClr val="6B7682"/>
+                </a:solidFill>
+                <a:latin typeface="Microsoft YaHei"/>
+              </a:rPr>
+              <a:t>更多人接触消金（外延边际）</a:t>
+            </a:r>
+          </a:p>
+        </p:txBody>
+      </p:sp>
+      <p:cxnSp>
+        <p:nvCxnSpPr>
+          <p:cNvPr id="16" name="Connector 15"/>
+          <p:cNvCxnSpPr/>
+          <p:nvPr/>
+        </p:nvCxnSpPr>
+        <p:spPr>
+          <a:xfrm flipV="1">
+            <a:off x="3657600" y="3127248"/>
+            <a:ext cx="1417320" cy="896112"/>
           </a:xfrm>
           <a:prstGeom prst="line">
             <a:avLst/>
@@ -6215,14 +5617,14 @@
       </p:cxnSp>
       <p:sp>
         <p:nvSpPr>
-          <p:cNvPr id="25" name="Rounded Rectangle 24"/>
+          <p:cNvPr id="17" name="Rounded Rectangle 16"/>
           <p:cNvSpPr/>
           <p:nvPr/>
         </p:nvSpPr>
         <p:spPr>
           <a:xfrm>
-            <a:off x="5843016" y="2459736"/>
-            <a:ext cx="475488" cy="274320"/>
+            <a:off x="5394960" y="1481328"/>
+            <a:ext cx="502920" cy="274320"/>
           </a:xfrm>
           <a:prstGeom prst="roundRect">
             <a:avLst/>
@@ -6232,7 +5634,7 @@
           </a:solidFill>
           <a:ln w="15875">
             <a:solidFill>
-              <a:srgbClr val="2E7D32"/>
+              <a:srgbClr val="1F3B5B"/>
             </a:solidFill>
           </a:ln>
           <a:effectLst/>
@@ -6259,7 +5661,7 @@
             <a:r>
               <a:rPr sz="1000" b="1">
                 <a:solidFill>
-                  <a:srgbClr val="2E7D32"/>
+                  <a:srgbClr val="1F3B5B"/>
                 </a:solidFill>
                 <a:latin typeface="Microsoft YaHei"/>
               </a:rPr>
@@ -6270,14 +5672,14 @@
       </p:sp>
       <p:sp>
         <p:nvSpPr>
-          <p:cNvPr id="26" name="Rounded Rectangle 25"/>
+          <p:cNvPr id="18" name="Rounded Rectangle 17"/>
           <p:cNvSpPr/>
           <p:nvPr/>
         </p:nvSpPr>
         <p:spPr>
           <a:xfrm>
-            <a:off x="5843016" y="3191256"/>
-            <a:ext cx="475488" cy="274320"/>
+            <a:off x="5897880" y="2542032"/>
+            <a:ext cx="502920" cy="274320"/>
           </a:xfrm>
           <a:prstGeom prst="roundRect">
             <a:avLst/>
@@ -6325,14 +5727,14 @@
       </p:sp>
       <p:sp>
         <p:nvSpPr>
-          <p:cNvPr id="27" name="Rounded Rectangle 26"/>
+          <p:cNvPr id="19" name="Rounded Rectangle 18"/>
           <p:cNvSpPr/>
           <p:nvPr/>
         </p:nvSpPr>
         <p:spPr>
           <a:xfrm>
-            <a:off x="6967728" y="3895344"/>
-            <a:ext cx="475488" cy="274320"/>
+            <a:off x="5285232" y="3090672"/>
+            <a:ext cx="502920" cy="274320"/>
           </a:xfrm>
           <a:prstGeom prst="roundRect">
             <a:avLst/>
@@ -6380,14 +5782,14 @@
       </p:sp>
       <p:sp>
         <p:nvSpPr>
-          <p:cNvPr id="28" name="Rounded Rectangle 27"/>
+          <p:cNvPr id="20" name="Rounded Rectangle 19"/>
           <p:cNvSpPr/>
           <p:nvPr/>
         </p:nvSpPr>
         <p:spPr>
           <a:xfrm>
-            <a:off x="4626864" y="4023360"/>
-            <a:ext cx="475488" cy="274320"/>
+            <a:off x="4983480" y="3611880"/>
+            <a:ext cx="502920" cy="274320"/>
           </a:xfrm>
           <a:prstGeom prst="roundRect">
             <a:avLst/>
@@ -6435,7 +5837,7 @@
       </p:sp>
       <p:sp>
         <p:nvSpPr>
-          <p:cNvPr id="29" name="Rectangle 28"/>
+          <p:cNvPr id="21" name="Rectangle 20"/>
           <p:cNvSpPr/>
           <p:nvPr/>
         </p:nvSpPr>
@@ -6483,14 +5885,14 @@
                 </a:solidFill>
                 <a:latin typeface="Microsoft YaHei"/>
               </a:rPr>
-              <a:t>控制 Z：征信分·历史多头·负债收入比·年龄·名单来源·活动类型·时段·地域　|　识别：以升级日为外生时点的 Stacked RD-in-time</a:t>
-            </a:r>
-          </a:p>
-        </p:txBody>
-      </p:sp>
-      <p:sp>
-        <p:nvSpPr>
-          <p:cNvPr id="30" name="Rectangle 29"/>
+              <a:t>控制 Z：征信分·历史多头·负债收入比·年龄·名单来源·活动类型·时段·地域　|　识别：以 LLM 接入日为外生时点的 Stacked RD-in-time</a:t>
+            </a:r>
+          </a:p>
+        </p:txBody>
+      </p:sp>
+      <p:sp>
+        <p:nvSpPr>
+          <p:cNvPr id="22" name="Rectangle 21"/>
           <p:cNvSpPr/>
           <p:nvPr/>
         </p:nvSpPr>
@@ -6534,7 +5936,7 @@
       </p:sp>
       <p:sp>
         <p:nvSpPr>
-          <p:cNvPr id="31" name="TextBox 30"/>
+          <p:cNvPr id="23" name="TextBox 22"/>
           <p:cNvSpPr txBox="1"/>
           <p:nvPr/>
         </p:nvSpPr>
@@ -6569,7 +5971,7 @@
       </p:sp>
       <p:sp>
         <p:nvSpPr>
-          <p:cNvPr id="32" name="Rectangle 31"/>
+          <p:cNvPr id="24" name="Rectangle 23"/>
           <p:cNvSpPr/>
           <p:nvPr/>
         </p:nvSpPr>
@@ -6613,7 +6015,7 @@
       </p:sp>
       <p:sp>
         <p:nvSpPr>
-          <p:cNvPr id="33" name="TextBox 32"/>
+          <p:cNvPr id="25" name="TextBox 24"/>
           <p:cNvSpPr txBox="1"/>
           <p:nvPr/>
         </p:nvSpPr>
@@ -6641,20 +6043,20 @@
                 </a:solidFill>
                 <a:latin typeface="Microsoft YaHei"/>
               </a:rPr>
-              <a:t>中介机制M</a:t>
-            </a:r>
-          </a:p>
-        </p:txBody>
-      </p:sp>
-      <p:sp>
-        <p:nvSpPr>
-          <p:cNvPr id="34" name="Rectangle 33"/>
+              <a:t>中介M</a:t>
+            </a:r>
+          </a:p>
+        </p:txBody>
+      </p:sp>
+      <p:sp>
+        <p:nvSpPr>
+          <p:cNvPr id="26" name="Rectangle 25"/>
           <p:cNvSpPr/>
           <p:nvPr/>
         </p:nvSpPr>
         <p:spPr>
           <a:xfrm>
-            <a:off x="3419856" y="6446520"/>
+            <a:off x="3127248" y="6446520"/>
             <a:ext cx="201168" cy="146304"/>
           </a:xfrm>
           <a:prstGeom prst="rect">
@@ -6692,13 +6094,13 @@
       </p:sp>
       <p:sp>
         <p:nvSpPr>
-          <p:cNvPr id="35" name="TextBox 34"/>
+          <p:cNvPr id="27" name="TextBox 26"/>
           <p:cNvSpPr txBox="1"/>
           <p:nvPr/>
         </p:nvSpPr>
         <p:spPr>
           <a:xfrm>
-            <a:off x="3657600" y="6391656"/>
+            <a:off x="3364991" y="6391656"/>
             <a:ext cx="1737360" cy="274320"/>
           </a:xfrm>
           <a:prstGeom prst="rect">
@@ -6727,13 +6129,13 @@
       </p:sp>
       <p:sp>
         <p:nvSpPr>
-          <p:cNvPr id="36" name="Rectangle 35"/>
+          <p:cNvPr id="28" name="Rectangle 27"/>
           <p:cNvSpPr/>
           <p:nvPr/>
         </p:nvSpPr>
         <p:spPr>
           <a:xfrm>
-            <a:off x="4919472" y="6446520"/>
+            <a:off x="4626864" y="6446520"/>
             <a:ext cx="201168" cy="146304"/>
           </a:xfrm>
           <a:prstGeom prst="rect">
@@ -6771,13 +6173,13 @@
       </p:sp>
       <p:sp>
         <p:nvSpPr>
-          <p:cNvPr id="37" name="TextBox 36"/>
+          <p:cNvPr id="29" name="TextBox 28"/>
           <p:cNvSpPr txBox="1"/>
           <p:nvPr/>
         </p:nvSpPr>
         <p:spPr>
           <a:xfrm>
-            <a:off x="5157216" y="6391656"/>
+            <a:off x="4864608" y="6391656"/>
             <a:ext cx="1737360" cy="274320"/>
           </a:xfrm>
           <a:prstGeom prst="rect">
@@ -6806,13 +6208,13 @@
       </p:sp>
       <p:sp>
         <p:nvSpPr>
-          <p:cNvPr id="38" name="Rectangle 37"/>
+          <p:cNvPr id="30" name="Rectangle 29"/>
           <p:cNvSpPr/>
           <p:nvPr/>
         </p:nvSpPr>
         <p:spPr>
           <a:xfrm>
-            <a:off x="6272784" y="6446520"/>
+            <a:off x="5980176" y="6446520"/>
             <a:ext cx="201168" cy="146304"/>
           </a:xfrm>
           <a:prstGeom prst="rect">
@@ -6850,13 +6252,13 @@
       </p:sp>
       <p:sp>
         <p:nvSpPr>
-          <p:cNvPr id="39" name="TextBox 38"/>
+          <p:cNvPr id="31" name="TextBox 30"/>
           <p:cNvSpPr txBox="1"/>
           <p:nvPr/>
         </p:nvSpPr>
         <p:spPr>
           <a:xfrm>
-            <a:off x="6510528" y="6391656"/>
+            <a:off x="6217920" y="6391656"/>
             <a:ext cx="1737360" cy="274320"/>
           </a:xfrm>
           <a:prstGeom prst="rect">
@@ -6878,7 +6280,7 @@
                 </a:solidFill>
                 <a:latin typeface="Microsoft YaHei"/>
               </a:rPr>
-              <a:t>分解/识别</a:t>
+              <a:t>分解H3</a:t>
             </a:r>
           </a:p>
         </p:txBody>
@@ -6910,7 +6312,7 @@
         <p:spPr>
           <a:xfrm>
             <a:off x="0" y="0"/>
-            <a:ext cx="12191695" cy="603504"/>
+            <a:ext cx="12191695" cy="566928"/>
           </a:xfrm>
           <a:prstGeom prst="rect">
             <a:avLst/>
@@ -6943,13 +6345,13 @@
           <a:p>
             <a:pPr algn="ctr"/>
             <a:r>
-              <a:rPr sz="1900" b="1">
+              <a:rPr sz="1800" b="1">
                 <a:solidFill>
                   <a:srgbClr val="FFFFFF"/>
                 </a:solidFill>
                 <a:latin typeface="Microsoft YaHei"/>
               </a:rPr>
-              <a:t>第一章 技术路线图  问题 → 数据 → 识别 → 检验 → 结论</a:t>
+              <a:t>第一章 技术路线图（风险产生）  问题→数据→识别→分解→检验→结论</a:t>
             </a:r>
           </a:p>
         </p:txBody>
@@ -6962,8 +6364,8 @@
         </p:nvSpPr>
         <p:spPr>
           <a:xfrm>
-            <a:off x="3355848" y="777240"/>
-            <a:ext cx="5486400" cy="512064"/>
+            <a:off x="3200400" y="731520"/>
+            <a:ext cx="5760720" cy="493776"/>
           </a:xfrm>
           <a:prstGeom prst="roundRect">
             <a:avLst/>
@@ -6998,13 +6400,13 @@
           <a:p>
             <a:pPr algn="ctr"/>
             <a:r>
-              <a:rPr sz="1200" b="1">
+              <a:rPr sz="1150" b="1">
                 <a:solidFill>
                   <a:srgbClr val="FFFFFF"/>
                 </a:solidFill>
                 <a:latin typeface="Microsoft YaHei"/>
               </a:rPr>
-              <a:t>研究问题：LLM接入是否同时抬高信贷可得性与金融脆弱性？</a:t>
+              <a:t>研究问题：LLM 接入是否经转化把更多更脆弱的人卷入并推高其脆弱性？</a:t>
             </a:r>
           </a:p>
         </p:txBody>
@@ -7017,8 +6419,8 @@
         </p:nvSpPr>
         <p:spPr>
           <a:xfrm>
-            <a:off x="3355848" y="1481328"/>
-            <a:ext cx="5486400" cy="512064"/>
+            <a:off x="3200400" y="1389888"/>
+            <a:ext cx="5760720" cy="457200"/>
           </a:xfrm>
           <a:prstGeom prst="roundRect">
             <a:avLst/>
@@ -7072,8 +6474,8 @@
         </p:nvSpPr>
         <p:spPr>
           <a:xfrm>
-            <a:off x="3355848" y="2185416"/>
-            <a:ext cx="5486400" cy="512064"/>
+            <a:off x="3200400" y="2011680"/>
+            <a:ext cx="5760720" cy="457200"/>
           </a:xfrm>
           <a:prstGeom prst="roundRect">
             <a:avLst/>
@@ -7127,8 +6529,8 @@
         </p:nvSpPr>
         <p:spPr>
           <a:xfrm>
-            <a:off x="1463040" y="2926080"/>
-            <a:ext cx="4206240" cy="566928"/>
+            <a:off x="1371600" y="2724912"/>
+            <a:ext cx="4206240" cy="512064"/>
           </a:xfrm>
           <a:prstGeom prst="roundRect">
             <a:avLst/>
@@ -7163,7 +6565,7 @@
           <a:p>
             <a:pPr algn="ctr"/>
             <a:r>
-              <a:rPr sz="1100" b="1">
+              <a:rPr sz="1050" b="1">
                 <a:solidFill>
                   <a:srgbClr val="FFFFFF"/>
                 </a:solidFill>
@@ -7182,8 +6584,8 @@
         </p:nvSpPr>
         <p:spPr>
           <a:xfrm>
-            <a:off x="6492240" y="2926080"/>
-            <a:ext cx="4206240" cy="566928"/>
+            <a:off x="6583680" y="2724912"/>
+            <a:ext cx="4206240" cy="512064"/>
           </a:xfrm>
           <a:prstGeom prst="roundRect">
             <a:avLst/>
@@ -7218,7 +6620,7 @@
           <a:p>
             <a:pPr algn="ctr"/>
             <a:r>
-              <a:rPr sz="1100" b="1">
+              <a:rPr sz="1050" b="1">
                 <a:solidFill>
                   <a:srgbClr val="FFFFFF"/>
                 </a:solidFill>
@@ -7237,8 +6639,8 @@
         </p:nvSpPr>
         <p:spPr>
           <a:xfrm>
-            <a:off x="3355848" y="3703320"/>
-            <a:ext cx="5486400" cy="512064"/>
+            <a:off x="3200400" y="3419856"/>
+            <a:ext cx="5760720" cy="475488"/>
           </a:xfrm>
           <a:prstGeom prst="roundRect">
             <a:avLst/>
@@ -7279,7 +6681,7 @@
                 </a:solidFill>
                 <a:latin typeface="Microsoft YaHei"/>
               </a:rPr>
-              <a:t>估计 双结果：Y-A 信贷可得性  &amp;  Y-B 金融脆弱性</a:t>
+              <a:t>估计：中介 M＝转化(意图/用信)  与  Y＝客户金融脆弱性</a:t>
             </a:r>
           </a:p>
         </p:txBody>
@@ -7292,8 +6694,8 @@
         </p:nvSpPr>
         <p:spPr>
           <a:xfrm>
-            <a:off x="3355848" y="4407408"/>
-            <a:ext cx="5486400" cy="512064"/>
+            <a:off x="3200400" y="4059936"/>
+            <a:ext cx="5760720" cy="512064"/>
           </a:xfrm>
           <a:prstGeom prst="roundRect">
             <a:avLst/>
@@ -7328,13 +6730,25 @@
           <a:p>
             <a:pPr algn="ctr"/>
             <a:r>
-              <a:rPr sz="1100" b="1">
+              <a:rPr sz="1000" b="1">
                 <a:solidFill>
                   <a:srgbClr val="FFFFFF"/>
                 </a:solidFill>
                 <a:latin typeface="Microsoft YaHei"/>
               </a:rPr>
-              <a:t>DFL 重加权分解：组成·外延  vs  行为·内涵</a:t>
+              <a:t>分解：外延(经转化卷入更脆弱人群) vs 内涵(同类恶化)</a:t>
+            </a:r>
+          </a:p>
+          <a:p>
+            <a:pPr algn="ctr"/>
+            <a:r>
+              <a:rPr sz="1000" b="1">
+                <a:solidFill>
+                  <a:srgbClr val="FFFFFF"/>
+                </a:solidFill>
+                <a:latin typeface="Microsoft YaHei"/>
+              </a:rPr>
+              <a:t>因果中介 / DFL重加权</a:t>
             </a:r>
           </a:p>
         </p:txBody>
@@ -7347,8 +6761,8 @@
         </p:nvSpPr>
         <p:spPr>
           <a:xfrm>
-            <a:off x="3355848" y="5111496"/>
-            <a:ext cx="5486400" cy="512064"/>
+            <a:off x="3200400" y="4773168"/>
+            <a:ext cx="5760720" cy="457200"/>
           </a:xfrm>
           <a:prstGeom prst="roundRect">
             <a:avLst/>
@@ -7389,7 +6803,7 @@
                 </a:solidFill>
                 <a:latin typeface="Microsoft YaHei"/>
               </a:rPr>
-              <a:t>识别检验：密度连续 · 安慰剂升级日 · donut-RD · 机制三角</a:t>
+              <a:t>识别检验：密度连续 · 安慰剂日 · donut-RD · 机制三角</a:t>
             </a:r>
           </a:p>
         </p:txBody>
@@ -7402,8 +6816,8 @@
         </p:nvCxnSpPr>
         <p:spPr>
           <a:xfrm>
-            <a:off x="6099048" y="1289304"/>
-            <a:ext cx="0" cy="192024"/>
+            <a:off x="6080760" y="1225296"/>
+            <a:ext cx="0" cy="164592"/>
           </a:xfrm>
           <a:prstGeom prst="line">
             <a:avLst/>
@@ -7439,8 +6853,8 @@
         </p:nvCxnSpPr>
         <p:spPr>
           <a:xfrm>
-            <a:off x="6099048" y="1993392"/>
-            <a:ext cx="0" cy="192024"/>
+            <a:off x="6080760" y="1847088"/>
+            <a:ext cx="0" cy="164592"/>
           </a:xfrm>
           <a:prstGeom prst="line">
             <a:avLst/>
@@ -7476,8 +6890,8 @@
         </p:nvCxnSpPr>
         <p:spPr>
           <a:xfrm flipH="1">
-            <a:off x="3566160" y="2697480"/>
-            <a:ext cx="2532888" cy="228600"/>
+            <a:off x="3474720" y="2468880"/>
+            <a:ext cx="2606040" cy="256032"/>
           </a:xfrm>
           <a:prstGeom prst="line">
             <a:avLst/>
@@ -7513,8 +6927,8 @@
         </p:nvCxnSpPr>
         <p:spPr>
           <a:xfrm>
-            <a:off x="6099048" y="2697480"/>
-            <a:ext cx="2496312" cy="228600"/>
+            <a:off x="6080760" y="2468880"/>
+            <a:ext cx="2606040" cy="256032"/>
           </a:xfrm>
           <a:prstGeom prst="line">
             <a:avLst/>
@@ -7550,8 +6964,8 @@
         </p:nvCxnSpPr>
         <p:spPr>
           <a:xfrm>
-            <a:off x="3566160" y="3493008"/>
-            <a:ext cx="2258568" cy="210312"/>
+            <a:off x="3474720" y="3236976"/>
+            <a:ext cx="2331720" cy="182880"/>
           </a:xfrm>
           <a:prstGeom prst="line">
             <a:avLst/>
@@ -7587,8 +7001,8 @@
         </p:nvCxnSpPr>
         <p:spPr>
           <a:xfrm flipH="1">
-            <a:off x="6373368" y="3493008"/>
-            <a:ext cx="2221992" cy="210312"/>
+            <a:off x="6355080" y="3236976"/>
+            <a:ext cx="2331720" cy="182880"/>
           </a:xfrm>
           <a:prstGeom prst="line">
             <a:avLst/>
@@ -7624,8 +7038,8 @@
         </p:nvCxnSpPr>
         <p:spPr>
           <a:xfrm>
-            <a:off x="6099048" y="4215384"/>
-            <a:ext cx="0" cy="192024"/>
+            <a:off x="6080760" y="3895344"/>
+            <a:ext cx="0" cy="164592"/>
           </a:xfrm>
           <a:prstGeom prst="line">
             <a:avLst/>
@@ -7661,8 +7075,8 @@
         </p:nvCxnSpPr>
         <p:spPr>
           <a:xfrm>
-            <a:off x="6099048" y="4919472"/>
-            <a:ext cx="0" cy="192024"/>
+            <a:off x="6080760" y="4572000"/>
+            <a:ext cx="0" cy="201168"/>
           </a:xfrm>
           <a:prstGeom prst="line">
             <a:avLst/>
@@ -7740,7 +7154,7 @@
                 </a:solidFill>
                 <a:latin typeface="Microsoft YaHei"/>
               </a:rPr>
-              <a:t>结论：信贷可得性与金融脆弱性并存（双刃），并判定脆弱性主驱动＝组成 抑或 行为</a:t>
+              <a:t>结论：LLM 接入经转化推高借款人脆弱性，且“被更多卷入”（外延）为主驱动</a:t>
             </a:r>
           </a:p>
         </p:txBody>
@@ -7772,7 +7186,7 @@
         <p:spPr>
           <a:xfrm>
             <a:off x="0" y="0"/>
-            <a:ext cx="12191695" cy="603504"/>
+            <a:ext cx="12191695" cy="566928"/>
           </a:xfrm>
           <a:prstGeom prst="rect">
             <a:avLst/>
@@ -7805,13 +7219,13 @@
           <a:p>
             <a:pPr algn="ctr"/>
             <a:r>
-              <a:rPr sz="1900" b="1">
+              <a:rPr sz="1800" b="1">
                 <a:solidFill>
                   <a:srgbClr val="FFFFFF"/>
                 </a:solidFill>
                 <a:latin typeface="Microsoft YaHei"/>
               </a:rPr>
-              <a:t>第二章 框架图  扩散X →（机制M）→ 区域过度负债Y</a:t>
+              <a:t>第二章 框架图（风险显化）  X → 双中介 → Y，核心识别 H6</a:t>
             </a:r>
           </a:p>
         </p:txBody>
@@ -7824,8 +7238,8 @@
         </p:nvSpPr>
         <p:spPr>
           <a:xfrm>
-            <a:off x="164592" y="960120"/>
-            <a:ext cx="1463040" cy="457200"/>
+            <a:off x="146304" y="960120"/>
+            <a:ext cx="1417320" cy="502920"/>
           </a:xfrm>
           <a:prstGeom prst="rect">
             <a:avLst/>
@@ -7842,11 +7256,11 @@
             <a:r>
               <a:rPr sz="1100" i="0" b="1">
                 <a:solidFill>
-                  <a:srgbClr val="C87F0A"/>
-                </a:solidFill>
-                <a:latin typeface="Microsoft YaHei"/>
-              </a:rPr>
-              <a:t>识别</a:t>
+                  <a:srgbClr val="1F3B5B"/>
+                </a:solidFill>
+                <a:latin typeface="Microsoft YaHei"/>
+              </a:rPr>
+              <a:t>自变量</a:t>
             </a:r>
           </a:p>
           <a:p>
@@ -7854,11 +7268,11 @@
             <a:r>
               <a:rPr sz="1100" i="0" b="1">
                 <a:solidFill>
-                  <a:srgbClr val="C87F0A"/>
-                </a:solidFill>
-                <a:latin typeface="Microsoft YaHei"/>
-              </a:rPr>
-              <a:t>IV/冲击</a:t>
+                  <a:srgbClr val="1F3B5B"/>
+                </a:solidFill>
+                <a:latin typeface="Microsoft YaHei"/>
+              </a:rPr>
+              <a:t>X</a:t>
             </a:r>
           </a:p>
         </p:txBody>
@@ -7871,8 +7285,8 @@
         </p:nvSpPr>
         <p:spPr>
           <a:xfrm>
-            <a:off x="164592" y="2240280"/>
-            <a:ext cx="1463040" cy="457200"/>
+            <a:off x="146304" y="2697480"/>
+            <a:ext cx="1417320" cy="502920"/>
           </a:xfrm>
           <a:prstGeom prst="rect">
             <a:avLst/>
@@ -7889,11 +7303,11 @@
             <a:r>
               <a:rPr sz="1100" i="0" b="1">
                 <a:solidFill>
-                  <a:srgbClr val="1F3B5B"/>
-                </a:solidFill>
-                <a:latin typeface="Microsoft YaHei"/>
-              </a:rPr>
-              <a:t>自变量</a:t>
+                  <a:srgbClr val="6A3D9A"/>
+                </a:solidFill>
+                <a:latin typeface="Microsoft YaHei"/>
+              </a:rPr>
+              <a:t>双中介</a:t>
             </a:r>
           </a:p>
           <a:p>
@@ -7901,11 +7315,11 @@
             <a:r>
               <a:rPr sz="1100" i="0" b="1">
                 <a:solidFill>
-                  <a:srgbClr val="1F3B5B"/>
-                </a:solidFill>
-                <a:latin typeface="Microsoft YaHei"/>
-              </a:rPr>
-              <a:t>X</a:t>
+                  <a:srgbClr val="6A3D9A"/>
+                </a:solidFill>
+                <a:latin typeface="Microsoft YaHei"/>
+              </a:rPr>
+              <a:t>（命门）</a:t>
             </a:r>
           </a:p>
         </p:txBody>
@@ -7918,8 +7332,8 @@
         </p:nvSpPr>
         <p:spPr>
           <a:xfrm>
-            <a:off x="164592" y="3383280"/>
-            <a:ext cx="1463040" cy="457200"/>
+            <a:off x="146304" y="1783080"/>
+            <a:ext cx="1417320" cy="502920"/>
           </a:xfrm>
           <a:prstGeom prst="rect">
             <a:avLst/>
@@ -7936,11 +7350,11 @@
             <a:r>
               <a:rPr sz="1100" i="0" b="1">
                 <a:solidFill>
-                  <a:srgbClr val="1B7F79"/>
-                </a:solidFill>
-                <a:latin typeface="Microsoft YaHei"/>
-              </a:rPr>
-              <a:t>中介机制</a:t>
+                  <a:srgbClr val="B03A2E"/>
+                </a:solidFill>
+                <a:latin typeface="Microsoft YaHei"/>
+              </a:rPr>
+              <a:t>因变量</a:t>
             </a:r>
           </a:p>
           <a:p>
@@ -7948,11 +7362,11 @@
             <a:r>
               <a:rPr sz="1100" i="0" b="1">
                 <a:solidFill>
-                  <a:srgbClr val="1B7F79"/>
-                </a:solidFill>
-                <a:latin typeface="Microsoft YaHei"/>
-              </a:rPr>
-              <a:t>M</a:t>
+                  <a:srgbClr val="B03A2E"/>
+                </a:solidFill>
+                <a:latin typeface="Microsoft YaHei"/>
+              </a:rPr>
+              <a:t>Y</a:t>
             </a:r>
           </a:p>
         </p:txBody>
@@ -7965,8 +7379,8 @@
         </p:nvSpPr>
         <p:spPr>
           <a:xfrm>
-            <a:off x="164592" y="4526280"/>
-            <a:ext cx="1463040" cy="457200"/>
+            <a:off x="146304" y="4526280"/>
+            <a:ext cx="1417320" cy="502920"/>
           </a:xfrm>
           <a:prstGeom prst="rect">
             <a:avLst/>
@@ -7983,11 +7397,11 @@
             <a:r>
               <a:rPr sz="1100" i="0" b="1">
                 <a:solidFill>
-                  <a:srgbClr val="C05A16"/>
-                </a:solidFill>
-                <a:latin typeface="Microsoft YaHei"/>
-              </a:rPr>
-              <a:t>因变量</a:t>
+                  <a:srgbClr val="6A3D9A"/>
+                </a:solidFill>
+                <a:latin typeface="Microsoft YaHei"/>
+              </a:rPr>
+              <a:t>调节</a:t>
             </a:r>
           </a:p>
           <a:p>
@@ -7995,11 +7409,11 @@
             <a:r>
               <a:rPr sz="1100" i="0" b="1">
                 <a:solidFill>
-                  <a:srgbClr val="C05A16"/>
-                </a:solidFill>
-                <a:latin typeface="Microsoft YaHei"/>
-              </a:rPr>
-              <a:t>Y</a:t>
+                  <a:srgbClr val="6A3D9A"/>
+                </a:solidFill>
+                <a:latin typeface="Microsoft YaHei"/>
+              </a:rPr>
+              <a:t>W</a:t>
             </a:r>
           </a:p>
         </p:txBody>
@@ -8012,63 +7426,8 @@
         </p:nvSpPr>
         <p:spPr>
           <a:xfrm>
-            <a:off x="1691640" y="868680"/>
-            <a:ext cx="8778240" cy="512064"/>
-          </a:xfrm>
-          <a:prstGeom prst="roundRect">
-            <a:avLst/>
-          </a:prstGeom>
-          <a:solidFill>
-            <a:srgbClr val="C87F0A"/>
-          </a:solidFill>
-          <a:ln w="12700">
-            <a:solidFill>
-              <a:srgbClr val="C87F0A"/>
-            </a:solidFill>
-          </a:ln>
-          <a:effectLst/>
-        </p:spPr>
-        <p:style>
-          <a:lnRef idx="1">
-            <a:schemeClr val="accent1"/>
-          </a:lnRef>
-          <a:fillRef idx="3">
-            <a:schemeClr val="accent1"/>
-          </a:fillRef>
-          <a:effectRef idx="2">
-            <a:schemeClr val="accent1"/>
-          </a:effectRef>
-          <a:fontRef idx="minor">
-            <a:schemeClr val="lt1"/>
-          </a:fontRef>
-        </p:style>
-        <p:txBody>
-          <a:bodyPr rtlCol="0" anchor="ctr" wrap="square" lIns="50800" rIns="50800" tIns="25400" bIns="25400"/>
-          <a:lstStyle/>
-          <a:p>
-            <a:pPr algn="ctr"/>
-            <a:r>
-              <a:rPr sz="1100" b="1">
-                <a:solidFill>
-                  <a:srgbClr val="FFFFFF"/>
-                </a:solidFill>
-                <a:latin typeface="Microsoft YaHei"/>
-              </a:rPr>
-              <a:t>识别：Bartik 移动份额IV  /  2017现金贷·2020网络小贷监管冲击</a:t>
-            </a:r>
-          </a:p>
-        </p:txBody>
-      </p:sp>
-      <p:sp>
-        <p:nvSpPr>
-          <p:cNvPr id="8" name="Rounded Rectangle 7"/>
-          <p:cNvSpPr/>
-          <p:nvPr/>
-        </p:nvSpPr>
-        <p:spPr>
-          <a:xfrm>
-            <a:off x="1691640" y="2148840"/>
-            <a:ext cx="8778240" cy="512064"/>
+            <a:off x="1691640" y="960120"/>
+            <a:ext cx="3840480" cy="566928"/>
           </a:xfrm>
           <a:prstGeom prst="roundRect">
             <a:avLst/>
@@ -8109,76 +7468,33 @@
                 </a:solidFill>
                 <a:latin typeface="Microsoft YaHei"/>
               </a:rPr>
-              <a:t>X｜区域智能外呼·数字营销扩散度（招聘大数据构造 / 数字普惠信贷子项）</a:t>
-            </a:r>
-          </a:p>
-        </p:txBody>
-      </p:sp>
-      <p:sp>
-        <p:nvSpPr>
-          <p:cNvPr id="9" name="Rounded Rectangle 8"/>
+              <a:t>X｜LLM 上线</a:t>
+            </a:r>
+          </a:p>
+          <a:p>
+            <a:pPr algn="ctr"/>
+            <a:r>
+              <a:rPr sz="1100" b="1">
+                <a:solidFill>
+                  <a:srgbClr val="FFFFFF"/>
+                </a:solidFill>
+                <a:latin typeface="Microsoft YaHei"/>
+              </a:rPr>
+              <a:t>（机构级错时上线）</a:t>
+            </a:r>
+          </a:p>
+        </p:txBody>
+      </p:sp>
+      <p:sp>
+        <p:nvSpPr>
+          <p:cNvPr id="8" name="Rounded Rectangle 7"/>
           <p:cNvSpPr/>
           <p:nvPr/>
         </p:nvSpPr>
         <p:spPr>
           <a:xfrm>
-            <a:off x="1691640" y="3291840"/>
-            <a:ext cx="8778240" cy="512064"/>
-          </a:xfrm>
-          <a:prstGeom prst="roundRect">
-            <a:avLst/>
-          </a:prstGeom>
-          <a:solidFill>
-            <a:srgbClr val="1B7F79"/>
-          </a:solidFill>
-          <a:ln w="12700">
-            <a:solidFill>
-              <a:srgbClr val="1B7F79"/>
-            </a:solidFill>
-          </a:ln>
-          <a:effectLst/>
-        </p:spPr>
-        <p:style>
-          <a:lnRef idx="1">
-            <a:schemeClr val="accent1"/>
-          </a:lnRef>
-          <a:fillRef idx="3">
-            <a:schemeClr val="accent1"/>
-          </a:fillRef>
-          <a:effectRef idx="2">
-            <a:schemeClr val="accent1"/>
-          </a:effectRef>
-          <a:fontRef idx="minor">
-            <a:schemeClr val="lt1"/>
-          </a:fontRef>
-        </p:style>
-        <p:txBody>
-          <a:bodyPr rtlCol="0" anchor="ctr" wrap="square" lIns="50800" rIns="50800" tIns="25400" bIns="25400"/>
-          <a:lstStyle/>
-          <a:p>
-            <a:pPr algn="ctr"/>
-            <a:r>
-              <a:rPr sz="1100" b="1">
-                <a:solidFill>
-                  <a:srgbClr val="FFFFFF"/>
-                </a:solidFill>
-                <a:latin typeface="Microsoft YaHei"/>
-              </a:rPr>
-              <a:t>M｜获客技术扩散 → 边际·脆弱客群被开发</a:t>
-            </a:r>
-          </a:p>
-        </p:txBody>
-      </p:sp>
-      <p:sp>
-        <p:nvSpPr>
-          <p:cNvPr id="10" name="Rounded Rectangle 9"/>
-          <p:cNvSpPr/>
-          <p:nvPr/>
-        </p:nvSpPr>
-        <p:spPr>
-          <a:xfrm>
-            <a:off x="1691640" y="4434840"/>
-            <a:ext cx="8778240" cy="566928"/>
+            <a:off x="1691640" y="2240280"/>
+            <a:ext cx="3840480" cy="603504"/>
           </a:xfrm>
           <a:prstGeom prst="roundRect">
             <a:avLst/>
@@ -8213,55 +7529,230 @@
           <a:p>
             <a:pPr algn="ctr"/>
             <a:r>
-              <a:rPr sz="1100" b="1">
+              <a:rPr sz="1000" b="1">
                 <a:solidFill>
                   <a:srgbClr val="FFFFFF"/>
                 </a:solidFill>
                 <a:latin typeface="Microsoft YaHei"/>
               </a:rPr>
-              <a:t>Y｜区域金融借款/民间借贷纠纷（人口标准化）· 区域过度负债 ↑</a:t>
-            </a:r>
-          </a:p>
-        </p:txBody>
-      </p:sp>
-      <p:cxnSp>
-        <p:nvCxnSpPr>
-          <p:cNvPr id="11" name="Connector 10"/>
-          <p:cNvCxnSpPr/>
-          <p:nvPr/>
-        </p:nvCxnSpPr>
-        <p:spPr>
-          <a:xfrm flipV="1">
-            <a:off x="6080760" y="1380744"/>
-            <a:ext cx="0" cy="768096"/>
-          </a:xfrm>
-          <a:prstGeom prst="line">
-            <a:avLst/>
-          </a:prstGeom>
-          <a:ln w="16510">
+              <a:t>真实风险暴露 ↑</a:t>
+            </a:r>
+          </a:p>
+          <a:p>
+            <a:pPr algn="ctr"/>
+            <a:r>
+              <a:rPr sz="1000" b="1">
+                <a:solidFill>
+                  <a:srgbClr val="FFFFFF"/>
+                </a:solidFill>
+                <a:latin typeface="Microsoft YaHei"/>
+              </a:rPr>
+              <a:t>诱导借款·高息·暴力催收等真实损害</a:t>
+            </a:r>
+          </a:p>
+        </p:txBody>
+      </p:sp>
+      <p:sp>
+        <p:nvSpPr>
+          <p:cNvPr id="9" name="Rounded Rectangle 8"/>
+          <p:cNvSpPr/>
+          <p:nvPr/>
+        </p:nvSpPr>
+        <p:spPr>
+          <a:xfrm>
+            <a:off x="1691640" y="2971800"/>
+            <a:ext cx="3840480" cy="603504"/>
+          </a:xfrm>
+          <a:prstGeom prst="roundRect">
+            <a:avLst/>
+          </a:prstGeom>
+          <a:solidFill>
+            <a:srgbClr val="6A3D9A"/>
+          </a:solidFill>
+          <a:ln w="12700">
             <a:solidFill>
-              <a:srgbClr val="C87F0A"/>
+              <a:srgbClr val="6A3D9A"/>
             </a:solidFill>
-            <a:prstDash val="dash"/>
-            <a:tailEnd type="triangle" w="med" len="med"/>
-          </a:ln>
-          <a:effectLst/>
-        </p:spPr>
-        <p:style>
-          <a:lnRef idx="2">
-            <a:schemeClr val="accent1"/>
-          </a:lnRef>
-          <a:fillRef idx="0">
-            <a:schemeClr val="accent1"/>
-          </a:fillRef>
-          <a:effectRef idx="1">
-            <a:schemeClr val="accent1"/>
-          </a:effectRef>
-          <a:fontRef idx="minor">
-            <a:schemeClr val="tx1"/>
-          </a:fontRef>
-        </p:style>
-      </p:cxnSp>
+          </a:ln>
+          <a:effectLst/>
+        </p:spPr>
+        <p:style>
+          <a:lnRef idx="1">
+            <a:schemeClr val="accent1"/>
+          </a:lnRef>
+          <a:fillRef idx="3">
+            <a:schemeClr val="accent1"/>
+          </a:fillRef>
+          <a:effectRef idx="2">
+            <a:schemeClr val="accent1"/>
+          </a:effectRef>
+          <a:fontRef idx="minor">
+            <a:schemeClr val="lt1"/>
+          </a:fontRef>
+        </p:style>
+        <p:txBody>
+          <a:bodyPr rtlCol="0" anchor="ctr" wrap="square" lIns="50800" rIns="50800" tIns="25400" bIns="25400"/>
+          <a:lstStyle/>
+          <a:p>
+            <a:pPr algn="ctr"/>
+            <a:r>
+              <a:rPr sz="950" b="1">
+                <a:solidFill>
+                  <a:srgbClr val="FFFFFF"/>
+                </a:solidFill>
+                <a:latin typeface="Microsoft YaHei"/>
+              </a:rPr>
+              <a:t>客户表达成本 ↓</a:t>
+            </a:r>
+          </a:p>
+          <a:p>
+            <a:pPr algn="ctr"/>
+            <a:r>
+              <a:rPr sz="950" b="1">
+                <a:solidFill>
+                  <a:srgbClr val="FFFFFF"/>
+                </a:solidFill>
+                <a:latin typeface="Microsoft YaHei"/>
+              </a:rPr>
+              <a:t>LLM 降低投诉撰写门槛：文本长度/规范性/要素完备度↑</a:t>
+            </a:r>
+          </a:p>
+        </p:txBody>
+      </p:sp>
+      <p:sp>
+        <p:nvSpPr>
+          <p:cNvPr id="10" name="Rounded Rectangle 9"/>
+          <p:cNvSpPr/>
+          <p:nvPr/>
+        </p:nvSpPr>
+        <p:spPr>
+          <a:xfrm>
+            <a:off x="6492240" y="1783080"/>
+            <a:ext cx="5349240" cy="1188720"/>
+          </a:xfrm>
+          <a:prstGeom prst="roundRect">
+            <a:avLst/>
+          </a:prstGeom>
+          <a:solidFill>
+            <a:srgbClr val="B03A2E"/>
+          </a:solidFill>
+          <a:ln w="12700">
+            <a:solidFill>
+              <a:srgbClr val="B03A2E"/>
+            </a:solidFill>
+          </a:ln>
+          <a:effectLst/>
+        </p:spPr>
+        <p:style>
+          <a:lnRef idx="1">
+            <a:schemeClr val="accent1"/>
+          </a:lnRef>
+          <a:fillRef idx="3">
+            <a:schemeClr val="accent1"/>
+          </a:fillRef>
+          <a:effectRef idx="2">
+            <a:schemeClr val="accent1"/>
+          </a:effectRef>
+          <a:fontRef idx="minor">
+            <a:schemeClr val="lt1"/>
+          </a:fontRef>
+        </p:style>
+        <p:txBody>
+          <a:bodyPr rtlCol="0" anchor="ctr" wrap="square" lIns="50800" rIns="50800" tIns="25400" bIns="25400"/>
+          <a:lstStyle/>
+          <a:p>
+            <a:pPr algn="ctr"/>
+            <a:r>
+              <a:rPr sz="1050" b="1">
+                <a:solidFill>
+                  <a:srgbClr val="FFFFFF"/>
+                </a:solidFill>
+                <a:latin typeface="Microsoft YaHei"/>
+              </a:rPr>
+              <a:t>Y｜互联网消金高风险投诉 ↑</a:t>
+            </a:r>
+          </a:p>
+          <a:p>
+            <a:pPr algn="ctr"/>
+            <a:r>
+              <a:rPr sz="1050" b="1">
+                <a:solidFill>
+                  <a:srgbClr val="FFFFFF"/>
+                </a:solidFill>
+                <a:latin typeface="Microsoft YaHei"/>
+              </a:rPr>
+              <a:t>催收·逾期·征信·高息/隐形收费·诱导借款·个人信息骚扰（数量）</a:t>
+            </a:r>
+          </a:p>
+          <a:p>
+            <a:pPr algn="ctr"/>
+            <a:r>
+              <a:rPr sz="1050" b="1">
+                <a:solidFill>
+                  <a:srgbClr val="FFFFFF"/>
+                </a:solidFill>
+                <a:latin typeface="Microsoft YaHei"/>
+              </a:rPr>
+              <a:t>互联网消金投诉数 / 全部投诉数（占比）</a:t>
+            </a:r>
+          </a:p>
+        </p:txBody>
+      </p:sp>
+      <p:sp>
+        <p:nvSpPr>
+          <p:cNvPr id="11" name="Rounded Rectangle 10"/>
+          <p:cNvSpPr/>
+          <p:nvPr/>
+        </p:nvSpPr>
+        <p:spPr>
+          <a:xfrm>
+            <a:off x="1691640" y="4160520"/>
+            <a:ext cx="3840480" cy="603504"/>
+          </a:xfrm>
+          <a:prstGeom prst="roundRect">
+            <a:avLst/>
+          </a:prstGeom>
+          <a:solidFill>
+            <a:srgbClr val="6A3D9A"/>
+          </a:solidFill>
+          <a:ln w="12700">
+            <a:solidFill>
+              <a:srgbClr val="6A3D9A"/>
+            </a:solidFill>
+          </a:ln>
+          <a:effectLst/>
+        </p:spPr>
+        <p:style>
+          <a:lnRef idx="1">
+            <a:schemeClr val="accent1"/>
+          </a:lnRef>
+          <a:fillRef idx="3">
+            <a:schemeClr val="accent1"/>
+          </a:fillRef>
+          <a:effectRef idx="2">
+            <a:schemeClr val="accent1"/>
+          </a:effectRef>
+          <a:fontRef idx="minor">
+            <a:schemeClr val="lt1"/>
+          </a:fontRef>
+        </p:style>
+        <p:txBody>
+          <a:bodyPr rtlCol="0" anchor="ctr" wrap="square" lIns="50800" rIns="50800" tIns="25400" bIns="25400"/>
+          <a:lstStyle/>
+          <a:p>
+            <a:pPr algn="ctr"/>
+            <a:r>
+              <a:rPr sz="1000" b="1">
+                <a:solidFill>
+                  <a:srgbClr val="FFFFFF"/>
+                </a:solidFill>
+                <a:latin typeface="Microsoft YaHei"/>
+              </a:rPr>
+              <a:t>调节 W｜是否持牌机构 · 上线前机构高风险投诉占比</a:t>
+            </a:r>
+          </a:p>
+        </p:txBody>
+      </p:sp>
       <p:cxnSp>
         <p:nvCxnSpPr>
           <p:cNvPr id="12" name="Connector 11"/>
@@ -8270,8 +7761,8 @@
         </p:nvCxnSpPr>
         <p:spPr>
           <a:xfrm>
-            <a:off x="6080760" y="2660904"/>
-            <a:ext cx="0" cy="630936"/>
+            <a:off x="3611880" y="1527048"/>
+            <a:ext cx="0" cy="658368"/>
           </a:xfrm>
           <a:prstGeom prst="line">
             <a:avLst/>
@@ -8306,9 +7797,9 @@
           <p:nvPr/>
         </p:nvCxnSpPr>
         <p:spPr>
-          <a:xfrm>
-            <a:off x="6080760" y="3803904"/>
-            <a:ext cx="0" cy="630936"/>
+          <a:xfrm flipV="1">
+            <a:off x="5532120" y="2212848"/>
+            <a:ext cx="960120" cy="329184"/>
           </a:xfrm>
           <a:prstGeom prst="line">
             <a:avLst/>
@@ -8336,9 +7827,321 @@
           </a:fontRef>
         </p:style>
       </p:cxnSp>
-      <p:sp>
-        <p:nvSpPr>
-          <p:cNvPr id="14" name="Rectangle 13"/>
+      <p:cxnSp>
+        <p:nvCxnSpPr>
+          <p:cNvPr id="14" name="Connector 13"/>
+          <p:cNvCxnSpPr/>
+          <p:nvPr/>
+        </p:nvCxnSpPr>
+        <p:spPr>
+          <a:xfrm flipV="1">
+            <a:off x="5532120" y="2542032"/>
+            <a:ext cx="960120" cy="731520"/>
+          </a:xfrm>
+          <a:prstGeom prst="line">
+            <a:avLst/>
+          </a:prstGeom>
+          <a:ln w="19050">
+            <a:solidFill>
+              <a:srgbClr val="5A6B7B"/>
+            </a:solidFill>
+            <a:tailEnd type="triangle" w="med" len="med"/>
+          </a:ln>
+          <a:effectLst/>
+        </p:spPr>
+        <p:style>
+          <a:lnRef idx="2">
+            <a:schemeClr val="accent1"/>
+          </a:lnRef>
+          <a:fillRef idx="0">
+            <a:schemeClr val="accent1"/>
+          </a:fillRef>
+          <a:effectRef idx="1">
+            <a:schemeClr val="accent1"/>
+          </a:effectRef>
+          <a:fontRef idx="minor">
+            <a:schemeClr val="tx1"/>
+          </a:fontRef>
+        </p:style>
+      </p:cxnSp>
+      <p:cxnSp>
+        <p:nvCxnSpPr>
+          <p:cNvPr id="15" name="Connector 14"/>
+          <p:cNvCxnSpPr/>
+          <p:nvPr/>
+        </p:nvCxnSpPr>
+        <p:spPr>
+          <a:xfrm>
+            <a:off x="5440680" y="2843784"/>
+            <a:ext cx="0" cy="128016"/>
+          </a:xfrm>
+          <a:prstGeom prst="line">
+            <a:avLst/>
+          </a:prstGeom>
+          <a:ln w="15240">
+            <a:solidFill>
+              <a:srgbClr val="6A3D9A"/>
+            </a:solidFill>
+            <a:prstDash val="dash"/>
+          </a:ln>
+          <a:effectLst/>
+        </p:spPr>
+        <p:style>
+          <a:lnRef idx="2">
+            <a:schemeClr val="accent1"/>
+          </a:lnRef>
+          <a:fillRef idx="0">
+            <a:schemeClr val="accent1"/>
+          </a:fillRef>
+          <a:effectRef idx="1">
+            <a:schemeClr val="accent1"/>
+          </a:effectRef>
+          <a:fontRef idx="minor">
+            <a:schemeClr val="tx1"/>
+          </a:fontRef>
+        </p:style>
+      </p:cxnSp>
+      <p:cxnSp>
+        <p:nvCxnSpPr>
+          <p:cNvPr id="16" name="Connector 15"/>
+          <p:cNvCxnSpPr/>
+          <p:nvPr/>
+        </p:nvCxnSpPr>
+        <p:spPr>
+          <a:xfrm flipV="1">
+            <a:off x="3611880" y="2761488"/>
+            <a:ext cx="2880360" cy="1399032"/>
+          </a:xfrm>
+          <a:prstGeom prst="line">
+            <a:avLst/>
+          </a:prstGeom>
+          <a:ln w="16510">
+            <a:solidFill>
+              <a:srgbClr val="6A3D9A"/>
+            </a:solidFill>
+            <a:prstDash val="dash"/>
+            <a:tailEnd type="triangle" w="med" len="med"/>
+          </a:ln>
+          <a:effectLst/>
+        </p:spPr>
+        <p:style>
+          <a:lnRef idx="2">
+            <a:schemeClr val="accent1"/>
+          </a:lnRef>
+          <a:fillRef idx="0">
+            <a:schemeClr val="accent1"/>
+          </a:fillRef>
+          <a:effectRef idx="1">
+            <a:schemeClr val="accent1"/>
+          </a:effectRef>
+          <a:fontRef idx="minor">
+            <a:schemeClr val="tx1"/>
+          </a:fontRef>
+        </p:style>
+      </p:cxnSp>
+      <p:sp>
+        <p:nvSpPr>
+          <p:cNvPr id="17" name="Rounded Rectangle 16"/>
+          <p:cNvSpPr/>
+          <p:nvPr/>
+        </p:nvSpPr>
+        <p:spPr>
+          <a:xfrm>
+            <a:off x="5650992" y="960120"/>
+            <a:ext cx="502920" cy="274320"/>
+          </a:xfrm>
+          <a:prstGeom prst="roundRect">
+            <a:avLst/>
+          </a:prstGeom>
+          <a:solidFill>
+            <a:srgbClr val="FFFFFF"/>
+          </a:solidFill>
+          <a:ln w="15875">
+            <a:solidFill>
+              <a:srgbClr val="B03A2E"/>
+            </a:solidFill>
+          </a:ln>
+          <a:effectLst/>
+        </p:spPr>
+        <p:style>
+          <a:lnRef idx="1">
+            <a:schemeClr val="accent1"/>
+          </a:lnRef>
+          <a:fillRef idx="3">
+            <a:schemeClr val="accent1"/>
+          </a:fillRef>
+          <a:effectRef idx="2">
+            <a:schemeClr val="accent1"/>
+          </a:effectRef>
+          <a:fontRef idx="minor">
+            <a:schemeClr val="lt1"/>
+          </a:fontRef>
+        </p:style>
+        <p:txBody>
+          <a:bodyPr rtlCol="0" anchor="ctr" wrap="none" lIns="12700" rIns="12700" tIns="0" bIns="0"/>
+          <a:lstStyle/>
+          <a:p>
+            <a:pPr algn="ctr"/>
+            <a:r>
+              <a:rPr sz="1000" b="1">
+                <a:solidFill>
+                  <a:srgbClr val="B03A2E"/>
+                </a:solidFill>
+                <a:latin typeface="Microsoft YaHei"/>
+              </a:rPr>
+              <a:t>H5</a:t>
+            </a:r>
+          </a:p>
+        </p:txBody>
+      </p:sp>
+      <p:sp>
+        <p:nvSpPr>
+          <p:cNvPr id="18" name="Rounded Rectangle 17"/>
+          <p:cNvSpPr/>
+          <p:nvPr/>
+        </p:nvSpPr>
+        <p:spPr>
+          <a:xfrm>
+            <a:off x="5650992" y="2542032"/>
+            <a:ext cx="1417320" cy="274320"/>
+          </a:xfrm>
+          <a:prstGeom prst="roundRect">
+            <a:avLst/>
+          </a:prstGeom>
+          <a:solidFill>
+            <a:srgbClr val="FFFFFF"/>
+          </a:solidFill>
+          <a:ln w="15875">
+            <a:solidFill>
+              <a:srgbClr val="C87F0A"/>
+            </a:solidFill>
+          </a:ln>
+          <a:effectLst/>
+        </p:spPr>
+        <p:style>
+          <a:lnRef idx="1">
+            <a:schemeClr val="accent1"/>
+          </a:lnRef>
+          <a:fillRef idx="3">
+            <a:schemeClr val="accent1"/>
+          </a:fillRef>
+          <a:effectRef idx="2">
+            <a:schemeClr val="accent1"/>
+          </a:effectRef>
+          <a:fontRef idx="minor">
+            <a:schemeClr val="lt1"/>
+          </a:fontRef>
+        </p:style>
+        <p:txBody>
+          <a:bodyPr rtlCol="0" anchor="ctr" wrap="none" lIns="12700" rIns="12700" tIns="0" bIns="0"/>
+          <a:lstStyle/>
+          <a:p>
+            <a:pPr algn="ctr"/>
+            <a:r>
+              <a:rPr sz="1000" b="1">
+                <a:solidFill>
+                  <a:srgbClr val="C87F0A"/>
+                </a:solidFill>
+                <a:latin typeface="Microsoft YaHei"/>
+              </a:rPr>
+              <a:t>H6</a:t>
+            </a:r>
+          </a:p>
+        </p:txBody>
+      </p:sp>
+      <p:sp>
+        <p:nvSpPr>
+          <p:cNvPr id="19" name="TextBox 18"/>
+          <p:cNvSpPr txBox="1"/>
+          <p:nvPr/>
+        </p:nvSpPr>
+        <p:spPr>
+          <a:xfrm>
+            <a:off x="5440680" y="2907792"/>
+            <a:ext cx="1828800" cy="274320"/>
+          </a:xfrm>
+          <a:prstGeom prst="rect">
+            <a:avLst/>
+          </a:prstGeom>
+          <a:noFill/>
+        </p:spPr>
+        <p:txBody>
+          <a:bodyPr wrap="square" anchor="ctr">
+            <a:spAutoFit/>
+          </a:bodyPr>
+          <a:lstStyle/>
+          <a:p>
+            <a:pPr algn="l"/>
+            <a:r>
+              <a:rPr sz="850" i="1" b="0">
+                <a:solidFill>
+                  <a:srgbClr val="C87F0A"/>
+                </a:solidFill>
+                <a:latin typeface="Microsoft YaHei"/>
+              </a:rPr>
+              <a:t>核心识别：分解二者</a:t>
+            </a:r>
+          </a:p>
+        </p:txBody>
+      </p:sp>
+      <p:sp>
+        <p:nvSpPr>
+          <p:cNvPr id="20" name="Rounded Rectangle 19"/>
+          <p:cNvSpPr/>
+          <p:nvPr/>
+        </p:nvSpPr>
+        <p:spPr>
+          <a:xfrm>
+            <a:off x="5650992" y="4160520"/>
+            <a:ext cx="502920" cy="274320"/>
+          </a:xfrm>
+          <a:prstGeom prst="roundRect">
+            <a:avLst/>
+          </a:prstGeom>
+          <a:solidFill>
+            <a:srgbClr val="FFFFFF"/>
+          </a:solidFill>
+          <a:ln w="15875">
+            <a:solidFill>
+              <a:srgbClr val="6A3D9A"/>
+            </a:solidFill>
+          </a:ln>
+          <a:effectLst/>
+        </p:spPr>
+        <p:style>
+          <a:lnRef idx="1">
+            <a:schemeClr val="accent1"/>
+          </a:lnRef>
+          <a:fillRef idx="3">
+            <a:schemeClr val="accent1"/>
+          </a:fillRef>
+          <a:effectRef idx="2">
+            <a:schemeClr val="accent1"/>
+          </a:effectRef>
+          <a:fontRef idx="minor">
+            <a:schemeClr val="lt1"/>
+          </a:fontRef>
+        </p:style>
+        <p:txBody>
+          <a:bodyPr rtlCol="0" anchor="ctr" wrap="none" lIns="12700" rIns="12700" tIns="0" bIns="0"/>
+          <a:lstStyle/>
+          <a:p>
+            <a:pPr algn="ctr"/>
+            <a:r>
+              <a:rPr sz="1000" b="1">
+                <a:solidFill>
+                  <a:srgbClr val="6A3D9A"/>
+                </a:solidFill>
+                <a:latin typeface="Microsoft YaHei"/>
+              </a:rPr>
+              <a:t>H7</a:t>
+            </a:r>
+          </a:p>
+        </p:txBody>
+      </p:sp>
+      <p:sp>
+        <p:nvSpPr>
+          <p:cNvPr id="21" name="Rectangle 20"/>
           <p:cNvSpPr/>
           <p:nvPr/>
         </p:nvSpPr>
@@ -8386,20 +8189,336 @@
                 </a:solidFill>
                 <a:latin typeface="Microsoft YaHei"/>
               </a:rPr>
-              <a:t>控制 Z：人均GDP·人口·产业结构·传统金融密度　|　单元：城市(或省)×年面板，双向固定效应 μ_r + λ_t</a:t>
-            </a:r>
-          </a:p>
-        </p:txBody>
-      </p:sp>
-      <p:sp>
-        <p:nvSpPr>
-          <p:cNvPr id="15" name="Rectangle 14"/>
+              <a:t>识别：机构级错时 DiD / 事件研究　|　核心：以投诉文本特征为表达成本代理，分离“净真实风险”与“表达便利虚增”</a:t>
+            </a:r>
+          </a:p>
+        </p:txBody>
+      </p:sp>
+      <p:sp>
+        <p:nvSpPr>
+          <p:cNvPr id="22" name="Rectangle 21"/>
           <p:cNvSpPr/>
           <p:nvPr/>
         </p:nvSpPr>
         <p:spPr>
           <a:xfrm>
             <a:off x="274320" y="6446520"/>
+            <a:ext cx="201168" cy="146304"/>
+          </a:xfrm>
+          <a:prstGeom prst="rect">
+            <a:avLst/>
+          </a:prstGeom>
+          <a:solidFill>
+            <a:srgbClr val="1F3B5B"/>
+          </a:solidFill>
+          <a:ln>
+            <a:noFill/>
+          </a:ln>
+          <a:effectLst/>
+        </p:spPr>
+        <p:style>
+          <a:lnRef idx="1">
+            <a:schemeClr val="accent1"/>
+          </a:lnRef>
+          <a:fillRef idx="3">
+            <a:schemeClr val="accent1"/>
+          </a:fillRef>
+          <a:effectRef idx="2">
+            <a:schemeClr val="accent1"/>
+          </a:effectRef>
+          <a:fontRef idx="minor">
+            <a:schemeClr val="lt1"/>
+          </a:fontRef>
+        </p:style>
+        <p:txBody>
+          <a:bodyPr rtlCol="0" anchor="ctr"/>
+          <a:lstStyle/>
+          <a:p>
+            <a:pPr algn="ctr"/>
+          </a:p>
+        </p:txBody>
+      </p:sp>
+      <p:sp>
+        <p:nvSpPr>
+          <p:cNvPr id="23" name="TextBox 22"/>
+          <p:cNvSpPr txBox="1"/>
+          <p:nvPr/>
+        </p:nvSpPr>
+        <p:spPr>
+          <a:xfrm>
+            <a:off x="512064" y="6391656"/>
+            <a:ext cx="1737360" cy="274320"/>
+          </a:xfrm>
+          <a:prstGeom prst="rect">
+            <a:avLst/>
+          </a:prstGeom>
+          <a:noFill/>
+        </p:spPr>
+        <p:txBody>
+          <a:bodyPr wrap="square" anchor="ctr">
+            <a:spAutoFit/>
+          </a:bodyPr>
+          <a:lstStyle/>
+          <a:p>
+            <a:pPr algn="l"/>
+            <a:r>
+              <a:rPr sz="900" i="0" b="0">
+                <a:solidFill>
+                  <a:srgbClr val="202833"/>
+                </a:solidFill>
+                <a:latin typeface="Microsoft YaHei"/>
+              </a:rPr>
+              <a:t>自变量X</a:t>
+            </a:r>
+          </a:p>
+        </p:txBody>
+      </p:sp>
+      <p:sp>
+        <p:nvSpPr>
+          <p:cNvPr id="24" name="Rectangle 23"/>
+          <p:cNvSpPr/>
+          <p:nvPr/>
+        </p:nvSpPr>
+        <p:spPr>
+          <a:xfrm>
+            <a:off x="1773936" y="6446520"/>
+            <a:ext cx="201168" cy="146304"/>
+          </a:xfrm>
+          <a:prstGeom prst="rect">
+            <a:avLst/>
+          </a:prstGeom>
+          <a:solidFill>
+            <a:srgbClr val="C05A16"/>
+          </a:solidFill>
+          <a:ln>
+            <a:noFill/>
+          </a:ln>
+          <a:effectLst/>
+        </p:spPr>
+        <p:style>
+          <a:lnRef idx="1">
+            <a:schemeClr val="accent1"/>
+          </a:lnRef>
+          <a:fillRef idx="3">
+            <a:schemeClr val="accent1"/>
+          </a:fillRef>
+          <a:effectRef idx="2">
+            <a:schemeClr val="accent1"/>
+          </a:effectRef>
+          <a:fontRef idx="minor">
+            <a:schemeClr val="lt1"/>
+          </a:fontRef>
+        </p:style>
+        <p:txBody>
+          <a:bodyPr rtlCol="0" anchor="ctr"/>
+          <a:lstStyle/>
+          <a:p>
+            <a:pPr algn="ctr"/>
+          </a:p>
+        </p:txBody>
+      </p:sp>
+      <p:sp>
+        <p:nvSpPr>
+          <p:cNvPr id="25" name="TextBox 24"/>
+          <p:cNvSpPr txBox="1"/>
+          <p:nvPr/>
+        </p:nvSpPr>
+        <p:spPr>
+          <a:xfrm>
+            <a:off x="2011680" y="6391656"/>
+            <a:ext cx="1737360" cy="274320"/>
+          </a:xfrm>
+          <a:prstGeom prst="rect">
+            <a:avLst/>
+          </a:prstGeom>
+          <a:noFill/>
+        </p:spPr>
+        <p:txBody>
+          <a:bodyPr wrap="square" anchor="ctr">
+            <a:spAutoFit/>
+          </a:bodyPr>
+          <a:lstStyle/>
+          <a:p>
+            <a:pPr algn="l"/>
+            <a:r>
+              <a:rPr sz="900" i="0" b="0">
+                <a:solidFill>
+                  <a:srgbClr val="202833"/>
+                </a:solidFill>
+                <a:latin typeface="Microsoft YaHei"/>
+              </a:rPr>
+              <a:t>真实风险</a:t>
+            </a:r>
+          </a:p>
+        </p:txBody>
+      </p:sp>
+      <p:sp>
+        <p:nvSpPr>
+          <p:cNvPr id="26" name="Rectangle 25"/>
+          <p:cNvSpPr/>
+          <p:nvPr/>
+        </p:nvSpPr>
+        <p:spPr>
+          <a:xfrm>
+            <a:off x="3273552" y="6446520"/>
+            <a:ext cx="201168" cy="146304"/>
+          </a:xfrm>
+          <a:prstGeom prst="rect">
+            <a:avLst/>
+          </a:prstGeom>
+          <a:solidFill>
+            <a:srgbClr val="6A3D9A"/>
+          </a:solidFill>
+          <a:ln>
+            <a:noFill/>
+          </a:ln>
+          <a:effectLst/>
+        </p:spPr>
+        <p:style>
+          <a:lnRef idx="1">
+            <a:schemeClr val="accent1"/>
+          </a:lnRef>
+          <a:fillRef idx="3">
+            <a:schemeClr val="accent1"/>
+          </a:fillRef>
+          <a:effectRef idx="2">
+            <a:schemeClr val="accent1"/>
+          </a:effectRef>
+          <a:fontRef idx="minor">
+            <a:schemeClr val="lt1"/>
+          </a:fontRef>
+        </p:style>
+        <p:txBody>
+          <a:bodyPr rtlCol="0" anchor="ctr"/>
+          <a:lstStyle/>
+          <a:p>
+            <a:pPr algn="ctr"/>
+          </a:p>
+        </p:txBody>
+      </p:sp>
+      <p:sp>
+        <p:nvSpPr>
+          <p:cNvPr id="27" name="TextBox 26"/>
+          <p:cNvSpPr txBox="1"/>
+          <p:nvPr/>
+        </p:nvSpPr>
+        <p:spPr>
+          <a:xfrm>
+            <a:off x="3511296" y="6391656"/>
+            <a:ext cx="1737360" cy="274320"/>
+          </a:xfrm>
+          <a:prstGeom prst="rect">
+            <a:avLst/>
+          </a:prstGeom>
+          <a:noFill/>
+        </p:spPr>
+        <p:txBody>
+          <a:bodyPr wrap="square" anchor="ctr">
+            <a:spAutoFit/>
+          </a:bodyPr>
+          <a:lstStyle/>
+          <a:p>
+            <a:pPr algn="l"/>
+            <a:r>
+              <a:rPr sz="900" i="0" b="0">
+                <a:solidFill>
+                  <a:srgbClr val="202833"/>
+                </a:solidFill>
+                <a:latin typeface="Microsoft YaHei"/>
+              </a:rPr>
+              <a:t>表达成本/调节</a:t>
+            </a:r>
+          </a:p>
+        </p:txBody>
+      </p:sp>
+      <p:sp>
+        <p:nvSpPr>
+          <p:cNvPr id="28" name="Rectangle 27"/>
+          <p:cNvSpPr/>
+          <p:nvPr/>
+        </p:nvSpPr>
+        <p:spPr>
+          <a:xfrm>
+            <a:off x="5212080" y="6446520"/>
+            <a:ext cx="201168" cy="146304"/>
+          </a:xfrm>
+          <a:prstGeom prst="rect">
+            <a:avLst/>
+          </a:prstGeom>
+          <a:solidFill>
+            <a:srgbClr val="B03A2E"/>
+          </a:solidFill>
+          <a:ln>
+            <a:noFill/>
+          </a:ln>
+          <a:effectLst/>
+        </p:spPr>
+        <p:style>
+          <a:lnRef idx="1">
+            <a:schemeClr val="accent1"/>
+          </a:lnRef>
+          <a:fillRef idx="3">
+            <a:schemeClr val="accent1"/>
+          </a:fillRef>
+          <a:effectRef idx="2">
+            <a:schemeClr val="accent1"/>
+          </a:effectRef>
+          <a:fontRef idx="minor">
+            <a:schemeClr val="lt1"/>
+          </a:fontRef>
+        </p:style>
+        <p:txBody>
+          <a:bodyPr rtlCol="0" anchor="ctr"/>
+          <a:lstStyle/>
+          <a:p>
+            <a:pPr algn="ctr"/>
+          </a:p>
+        </p:txBody>
+      </p:sp>
+      <p:sp>
+        <p:nvSpPr>
+          <p:cNvPr id="29" name="TextBox 28"/>
+          <p:cNvSpPr txBox="1"/>
+          <p:nvPr/>
+        </p:nvSpPr>
+        <p:spPr>
+          <a:xfrm>
+            <a:off x="5449824" y="6391656"/>
+            <a:ext cx="1737360" cy="274320"/>
+          </a:xfrm>
+          <a:prstGeom prst="rect">
+            <a:avLst/>
+          </a:prstGeom>
+          <a:noFill/>
+        </p:spPr>
+        <p:txBody>
+          <a:bodyPr wrap="square" anchor="ctr">
+            <a:spAutoFit/>
+          </a:bodyPr>
+          <a:lstStyle/>
+          <a:p>
+            <a:pPr algn="l"/>
+            <a:r>
+              <a:rPr sz="900" i="0" b="0">
+                <a:solidFill>
+                  <a:srgbClr val="202833"/>
+                </a:solidFill>
+                <a:latin typeface="Microsoft YaHei"/>
+              </a:rPr>
+              <a:t>因变量Y</a:t>
+            </a:r>
+          </a:p>
+        </p:txBody>
+      </p:sp>
+      <p:sp>
+        <p:nvSpPr>
+          <p:cNvPr id="30" name="Rectangle 29"/>
+          <p:cNvSpPr/>
+          <p:nvPr/>
+        </p:nvSpPr>
+        <p:spPr>
+          <a:xfrm>
+            <a:off x="6711696" y="6446520"/>
             <a:ext cx="201168" cy="146304"/>
           </a:xfrm>
           <a:prstGeom prst="rect">
@@ -8437,13 +8556,13 @@
       </p:sp>
       <p:sp>
         <p:nvSpPr>
-          <p:cNvPr id="16" name="TextBox 15"/>
+          <p:cNvPr id="31" name="TextBox 30"/>
           <p:cNvSpPr txBox="1"/>
           <p:nvPr/>
         </p:nvSpPr>
         <p:spPr>
           <a:xfrm>
-            <a:off x="512064" y="6391656"/>
+            <a:off x="6949440" y="6391656"/>
             <a:ext cx="1737360" cy="274320"/>
           </a:xfrm>
           <a:prstGeom prst="rect">
@@ -8465,244 +8584,7 @@
                 </a:solidFill>
                 <a:latin typeface="Microsoft YaHei"/>
               </a:rPr>
-              <a:t>识别IV</a:t>
-            </a:r>
-          </a:p>
-        </p:txBody>
-      </p:sp>
-      <p:sp>
-        <p:nvSpPr>
-          <p:cNvPr id="17" name="Rectangle 16"/>
-          <p:cNvSpPr/>
-          <p:nvPr/>
-        </p:nvSpPr>
-        <p:spPr>
-          <a:xfrm>
-            <a:off x="1773936" y="6446520"/>
-            <a:ext cx="201168" cy="146304"/>
-          </a:xfrm>
-          <a:prstGeom prst="rect">
-            <a:avLst/>
-          </a:prstGeom>
-          <a:solidFill>
-            <a:srgbClr val="1F3B5B"/>
-          </a:solidFill>
-          <a:ln>
-            <a:noFill/>
-          </a:ln>
-          <a:effectLst/>
-        </p:spPr>
-        <p:style>
-          <a:lnRef idx="1">
-            <a:schemeClr val="accent1"/>
-          </a:lnRef>
-          <a:fillRef idx="3">
-            <a:schemeClr val="accent1"/>
-          </a:fillRef>
-          <a:effectRef idx="2">
-            <a:schemeClr val="accent1"/>
-          </a:effectRef>
-          <a:fontRef idx="minor">
-            <a:schemeClr val="lt1"/>
-          </a:fontRef>
-        </p:style>
-        <p:txBody>
-          <a:bodyPr rtlCol="0" anchor="ctr"/>
-          <a:lstStyle/>
-          <a:p>
-            <a:pPr algn="ctr"/>
-          </a:p>
-        </p:txBody>
-      </p:sp>
-      <p:sp>
-        <p:nvSpPr>
-          <p:cNvPr id="18" name="TextBox 17"/>
-          <p:cNvSpPr txBox="1"/>
-          <p:nvPr/>
-        </p:nvSpPr>
-        <p:spPr>
-          <a:xfrm>
-            <a:off x="2011680" y="6391656"/>
-            <a:ext cx="1737360" cy="274320"/>
-          </a:xfrm>
-          <a:prstGeom prst="rect">
-            <a:avLst/>
-          </a:prstGeom>
-          <a:noFill/>
-        </p:spPr>
-        <p:txBody>
-          <a:bodyPr wrap="square" anchor="ctr">
-            <a:spAutoFit/>
-          </a:bodyPr>
-          <a:lstStyle/>
-          <a:p>
-            <a:pPr algn="l"/>
-            <a:r>
-              <a:rPr sz="900" i="0" b="0">
-                <a:solidFill>
-                  <a:srgbClr val="202833"/>
-                </a:solidFill>
-                <a:latin typeface="Microsoft YaHei"/>
-              </a:rPr>
-              <a:t>自变量X</a:t>
-            </a:r>
-          </a:p>
-        </p:txBody>
-      </p:sp>
-      <p:sp>
-        <p:nvSpPr>
-          <p:cNvPr id="19" name="Rectangle 18"/>
-          <p:cNvSpPr/>
-          <p:nvPr/>
-        </p:nvSpPr>
-        <p:spPr>
-          <a:xfrm>
-            <a:off x="3273552" y="6446520"/>
-            <a:ext cx="201168" cy="146304"/>
-          </a:xfrm>
-          <a:prstGeom prst="rect">
-            <a:avLst/>
-          </a:prstGeom>
-          <a:solidFill>
-            <a:srgbClr val="1B7F79"/>
-          </a:solidFill>
-          <a:ln>
-            <a:noFill/>
-          </a:ln>
-          <a:effectLst/>
-        </p:spPr>
-        <p:style>
-          <a:lnRef idx="1">
-            <a:schemeClr val="accent1"/>
-          </a:lnRef>
-          <a:fillRef idx="3">
-            <a:schemeClr val="accent1"/>
-          </a:fillRef>
-          <a:effectRef idx="2">
-            <a:schemeClr val="accent1"/>
-          </a:effectRef>
-          <a:fontRef idx="minor">
-            <a:schemeClr val="lt1"/>
-          </a:fontRef>
-        </p:style>
-        <p:txBody>
-          <a:bodyPr rtlCol="0" anchor="ctr"/>
-          <a:lstStyle/>
-          <a:p>
-            <a:pPr algn="ctr"/>
-          </a:p>
-        </p:txBody>
-      </p:sp>
-      <p:sp>
-        <p:nvSpPr>
-          <p:cNvPr id="20" name="TextBox 19"/>
-          <p:cNvSpPr txBox="1"/>
-          <p:nvPr/>
-        </p:nvSpPr>
-        <p:spPr>
-          <a:xfrm>
-            <a:off x="3511296" y="6391656"/>
-            <a:ext cx="1737360" cy="274320"/>
-          </a:xfrm>
-          <a:prstGeom prst="rect">
-            <a:avLst/>
-          </a:prstGeom>
-          <a:noFill/>
-        </p:spPr>
-        <p:txBody>
-          <a:bodyPr wrap="square" anchor="ctr">
-            <a:spAutoFit/>
-          </a:bodyPr>
-          <a:lstStyle/>
-          <a:p>
-            <a:pPr algn="l"/>
-            <a:r>
-              <a:rPr sz="900" i="0" b="0">
-                <a:solidFill>
-                  <a:srgbClr val="202833"/>
-                </a:solidFill>
-                <a:latin typeface="Microsoft YaHei"/>
-              </a:rPr>
-              <a:t>中介机制M</a:t>
-            </a:r>
-          </a:p>
-        </p:txBody>
-      </p:sp>
-      <p:sp>
-        <p:nvSpPr>
-          <p:cNvPr id="21" name="Rectangle 20"/>
-          <p:cNvSpPr/>
-          <p:nvPr/>
-        </p:nvSpPr>
-        <p:spPr>
-          <a:xfrm>
-            <a:off x="4919472" y="6446520"/>
-            <a:ext cx="201168" cy="146304"/>
-          </a:xfrm>
-          <a:prstGeom prst="rect">
-            <a:avLst/>
-          </a:prstGeom>
-          <a:solidFill>
-            <a:srgbClr val="C05A16"/>
-          </a:solidFill>
-          <a:ln>
-            <a:noFill/>
-          </a:ln>
-          <a:effectLst/>
-        </p:spPr>
-        <p:style>
-          <a:lnRef idx="1">
-            <a:schemeClr val="accent1"/>
-          </a:lnRef>
-          <a:fillRef idx="3">
-            <a:schemeClr val="accent1"/>
-          </a:fillRef>
-          <a:effectRef idx="2">
-            <a:schemeClr val="accent1"/>
-          </a:effectRef>
-          <a:fontRef idx="minor">
-            <a:schemeClr val="lt1"/>
-          </a:fontRef>
-        </p:style>
-        <p:txBody>
-          <a:bodyPr rtlCol="0" anchor="ctr"/>
-          <a:lstStyle/>
-          <a:p>
-            <a:pPr algn="ctr"/>
-          </a:p>
-        </p:txBody>
-      </p:sp>
-      <p:sp>
-        <p:nvSpPr>
-          <p:cNvPr id="22" name="TextBox 21"/>
-          <p:cNvSpPr txBox="1"/>
-          <p:nvPr/>
-        </p:nvSpPr>
-        <p:spPr>
-          <a:xfrm>
-            <a:off x="5157216" y="6391656"/>
-            <a:ext cx="1737360" cy="274320"/>
-          </a:xfrm>
-          <a:prstGeom prst="rect">
-            <a:avLst/>
-          </a:prstGeom>
-          <a:noFill/>
-        </p:spPr>
-        <p:txBody>
-          <a:bodyPr wrap="square" anchor="ctr">
-            <a:spAutoFit/>
-          </a:bodyPr>
-          <a:lstStyle/>
-          <a:p>
-            <a:pPr algn="l"/>
-            <a:r>
-              <a:rPr sz="900" i="0" b="0">
-                <a:solidFill>
-                  <a:srgbClr val="202833"/>
-                </a:solidFill>
-                <a:latin typeface="Microsoft YaHei"/>
-              </a:rPr>
-              <a:t>因变量Y</a:t>
+              <a:t>分解H6</a:t>
             </a:r>
           </a:p>
         </p:txBody>
@@ -8734,7 +8616,7 @@
         <p:spPr>
           <a:xfrm>
             <a:off x="0" y="0"/>
-            <a:ext cx="12191695" cy="603504"/>
+            <a:ext cx="12191695" cy="566928"/>
           </a:xfrm>
           <a:prstGeom prst="rect">
             <a:avLst/>
@@ -8767,13 +8649,13 @@
           <a:p>
             <a:pPr algn="ctr"/>
             <a:r>
-              <a:rPr sz="1900" b="1">
+              <a:rPr sz="1800" b="1">
                 <a:solidFill>
                   <a:srgbClr val="FFFFFF"/>
                 </a:solidFill>
                 <a:latin typeface="Microsoft YaHei"/>
               </a:rPr>
-              <a:t>第二章 技术路线图  问题 → 数据 → 识别 → 备择 → 结论</a:t>
+              <a:t>第二章 技术路线图（风险显化）  问题→数据→识别→真实vs表达分解</a:t>
             </a:r>
           </a:p>
         </p:txBody>
@@ -8786,8 +8668,8 @@
         </p:nvSpPr>
         <p:spPr>
           <a:xfrm>
-            <a:off x="3355848" y="960120"/>
-            <a:ext cx="5486400" cy="566928"/>
+            <a:off x="2743200" y="749808"/>
+            <a:ext cx="6675120" cy="566928"/>
           </a:xfrm>
           <a:prstGeom prst="roundRect">
             <a:avLst/>
@@ -8822,13 +8704,13 @@
           <a:p>
             <a:pPr algn="ctr"/>
             <a:r>
-              <a:rPr sz="1200" b="1">
+              <a:rPr sz="1100" b="1">
                 <a:solidFill>
                   <a:srgbClr val="FFFFFF"/>
                 </a:solidFill>
                 <a:latin typeface="Microsoft YaHei"/>
               </a:rPr>
-              <a:t>研究问题：智能外呼扩散是否伴随区域过度负债上升？</a:t>
+              <a:t>研究问题：LLM 上线是否放大互金消金风险？投诉上升中真实风险 vs 表达成本各几何？</a:t>
             </a:r>
           </a:p>
         </p:txBody>
@@ -8841,8 +8723,8 @@
         </p:nvSpPr>
         <p:spPr>
           <a:xfrm>
-            <a:off x="3355848" y="1874519"/>
-            <a:ext cx="5486400" cy="640080"/>
+            <a:off x="2743200" y="1481328"/>
+            <a:ext cx="6675120" cy="530352"/>
           </a:xfrm>
           <a:prstGeom prst="roundRect">
             <a:avLst/>
@@ -8877,13 +8759,13 @@
           <a:p>
             <a:pPr algn="ctr"/>
             <a:r>
-              <a:rPr sz="1100" b="1">
+              <a:rPr sz="1050" b="1">
                 <a:solidFill>
                   <a:srgbClr val="FFFFFF"/>
                 </a:solidFill>
                 <a:latin typeface="Microsoft YaHei"/>
               </a:rPr>
-              <a:t>数据：裁判文书面板 + 招聘数据构造扩散代理 + 数字普惠指数</a:t>
+              <a:t>数据：黑猫投诉/12378（备选裁判文书）+ 机构LLM上线时点 + 投诉文本特征</a:t>
             </a:r>
           </a:p>
         </p:txBody>
@@ -8896,8 +8778,8 @@
         </p:nvSpPr>
         <p:spPr>
           <a:xfrm>
-            <a:off x="3355848" y="2862072"/>
-            <a:ext cx="5486400" cy="566928"/>
+            <a:off x="2743200" y="2194560"/>
+            <a:ext cx="6675120" cy="530352"/>
           </a:xfrm>
           <a:prstGeom prst="roundRect">
             <a:avLst/>
@@ -8932,13 +8814,13 @@
           <a:p>
             <a:pPr algn="ctr"/>
             <a:r>
-              <a:rPr sz="1100" b="1">
+              <a:rPr sz="1050" b="1">
                 <a:solidFill>
                   <a:srgbClr val="FFFFFF"/>
                 </a:solidFill>
                 <a:latin typeface="Microsoft YaHei"/>
               </a:rPr>
-              <a:t>基准：双向固定效应  +  Bartik 移动份额 IV</a:t>
+              <a:t>主识别：机构级错时 DiD / 事件研究（稳健估计量 + 前趋势检验）</a:t>
             </a:r>
           </a:p>
         </p:txBody>
@@ -8951,8 +8833,8 @@
         </p:nvSpPr>
         <p:spPr>
           <a:xfrm>
-            <a:off x="3355848" y="3703320"/>
-            <a:ext cx="5486400" cy="640080"/>
+            <a:off x="2743200" y="2907792"/>
+            <a:ext cx="6675120" cy="676656"/>
           </a:xfrm>
           <a:prstGeom prst="roundRect">
             <a:avLst/>
@@ -8987,13 +8869,25 @@
           <a:p>
             <a:pPr algn="ctr"/>
             <a:r>
-              <a:rPr sz="1100" b="1">
+              <a:rPr sz="1000" b="1">
                 <a:solidFill>
                   <a:srgbClr val="FFFFFF"/>
                 </a:solidFill>
                 <a:latin typeface="Microsoft YaHei"/>
               </a:rPr>
-              <a:t>备择识别：2017/2020 监管冲击 DiD/DDD  +  事件研究前趋势检验</a:t>
+              <a:t>核心分解（H6）：文本特征构造表达成本代理 E</a:t>
+            </a:r>
+          </a:p>
+          <a:p>
+            <a:pPr algn="ctr"/>
+            <a:r>
+              <a:rPr sz="1000" b="1">
+                <a:solidFill>
+                  <a:srgbClr val="FFFFFF"/>
+                </a:solidFill>
+                <a:latin typeface="Microsoft YaHei"/>
+              </a:rPr>
+              <a:t>C = π·Post + φ·E + ψ·(Post×E)；控制 E 后 π ＝ 净真实风险显化</a:t>
             </a:r>
           </a:p>
         </p:txBody>
@@ -9006,8 +8900,63 @@
         </p:nvSpPr>
         <p:spPr>
           <a:xfrm>
-            <a:off x="3355848" y="4690872"/>
-            <a:ext cx="5486400" cy="566928"/>
+            <a:off x="2743200" y="3767328"/>
+            <a:ext cx="6675120" cy="530352"/>
+          </a:xfrm>
+          <a:prstGeom prst="roundRect">
+            <a:avLst/>
+          </a:prstGeom>
+          <a:solidFill>
+            <a:srgbClr val="6B7682"/>
+          </a:solidFill>
+          <a:ln w="12700">
+            <a:solidFill>
+              <a:srgbClr val="6B7682"/>
+            </a:solidFill>
+          </a:ln>
+          <a:effectLst/>
+        </p:spPr>
+        <p:style>
+          <a:lnRef idx="1">
+            <a:schemeClr val="accent1"/>
+          </a:lnRef>
+          <a:fillRef idx="3">
+            <a:schemeClr val="accent1"/>
+          </a:fillRef>
+          <a:effectRef idx="2">
+            <a:schemeClr val="accent1"/>
+          </a:effectRef>
+          <a:fontRef idx="minor">
+            <a:schemeClr val="lt1"/>
+          </a:fontRef>
+        </p:style>
+        <p:txBody>
+          <a:bodyPr rtlCol="0" anchor="ctr" wrap="square" lIns="50800" rIns="50800" tIns="25400" bIns="25400"/>
+          <a:lstStyle/>
+          <a:p>
+            <a:pPr algn="ctr"/>
+            <a:r>
+              <a:rPr sz="1000" b="1">
+                <a:solidFill>
+                  <a:srgbClr val="FFFFFF"/>
+                </a:solidFill>
+                <a:latin typeface="Microsoft YaHei"/>
+              </a:rPr>
+              <a:t>安慰剂：非消金投诉作对照（表达成本同步、真实风险不应同步）+ 可模板化子类</a:t>
+            </a:r>
+          </a:p>
+        </p:txBody>
+      </p:sp>
+      <p:sp>
+        <p:nvSpPr>
+          <p:cNvPr id="8" name="Rounded Rectangle 7"/>
+          <p:cNvSpPr/>
+          <p:nvPr/>
+        </p:nvSpPr>
+        <p:spPr>
+          <a:xfrm>
+            <a:off x="2743200" y="4480560"/>
+            <a:ext cx="6675120" cy="512064"/>
           </a:xfrm>
           <a:prstGeom prst="roundRect">
             <a:avLst/>
@@ -9048,21 +8997,21 @@
                 </a:solidFill>
                 <a:latin typeface="Microsoft YaHei"/>
               </a:rPr>
-              <a:t>结论：中观扩散 → 区域过度负债 的因果证据</a:t>
+              <a:t>结论：净真实风险显化幅度 与 表达便利虚增 的分离估计</a:t>
             </a:r>
           </a:p>
         </p:txBody>
       </p:sp>
       <p:cxnSp>
         <p:nvCxnSpPr>
-          <p:cNvPr id="8" name="Connector 7"/>
+          <p:cNvPr id="9" name="Connector 8"/>
           <p:cNvCxnSpPr/>
           <p:nvPr/>
         </p:nvCxnSpPr>
         <p:spPr>
           <a:xfrm>
-            <a:off x="6099048" y="1527048"/>
-            <a:ext cx="0" cy="347471"/>
+            <a:off x="6080760" y="1316736"/>
+            <a:ext cx="0" cy="164592"/>
           </a:xfrm>
           <a:prstGeom prst="line">
             <a:avLst/>
@@ -9092,14 +9041,14 @@
       </p:cxnSp>
       <p:cxnSp>
         <p:nvCxnSpPr>
-          <p:cNvPr id="9" name="Connector 8"/>
+          <p:cNvPr id="10" name="Connector 9"/>
           <p:cNvCxnSpPr/>
           <p:nvPr/>
         </p:nvCxnSpPr>
         <p:spPr>
           <a:xfrm>
-            <a:off x="6099048" y="2514599"/>
-            <a:ext cx="0" cy="347473"/>
+            <a:off x="6080760" y="2011680"/>
+            <a:ext cx="0" cy="182880"/>
           </a:xfrm>
           <a:prstGeom prst="line">
             <a:avLst/>
@@ -9129,14 +9078,14 @@
       </p:cxnSp>
       <p:cxnSp>
         <p:nvCxnSpPr>
-          <p:cNvPr id="10" name="Connector 9"/>
+          <p:cNvPr id="11" name="Connector 10"/>
           <p:cNvCxnSpPr/>
           <p:nvPr/>
         </p:nvCxnSpPr>
         <p:spPr>
           <a:xfrm>
-            <a:off x="6099048" y="3429000"/>
-            <a:ext cx="0" cy="274320"/>
+            <a:off x="6080760" y="2724912"/>
+            <a:ext cx="0" cy="182880"/>
           </a:xfrm>
           <a:prstGeom prst="line">
             <a:avLst/>
@@ -9166,14 +9115,14 @@
       </p:cxnSp>
       <p:cxnSp>
         <p:nvCxnSpPr>
-          <p:cNvPr id="11" name="Connector 10"/>
+          <p:cNvPr id="12" name="Connector 11"/>
           <p:cNvCxnSpPr/>
           <p:nvPr/>
         </p:nvCxnSpPr>
         <p:spPr>
           <a:xfrm>
-            <a:off x="6099048" y="4343400"/>
-            <a:ext cx="0" cy="347472"/>
+            <a:off x="6080760" y="3584448"/>
+            <a:ext cx="0" cy="182880"/>
           </a:xfrm>
           <a:prstGeom prst="line">
             <a:avLst/>
@@ -9201,9 +9150,46 @@
           </a:fontRef>
         </p:style>
       </p:cxnSp>
-      <p:sp>
-        <p:nvSpPr>
-          <p:cNvPr id="12" name="Rectangle 11"/>
+      <p:cxnSp>
+        <p:nvCxnSpPr>
+          <p:cNvPr id="13" name="Connector 12"/>
+          <p:cNvCxnSpPr/>
+          <p:nvPr/>
+        </p:nvCxnSpPr>
+        <p:spPr>
+          <a:xfrm>
+            <a:off x="6080760" y="4297680"/>
+            <a:ext cx="0" cy="182880"/>
+          </a:xfrm>
+          <a:prstGeom prst="line">
+            <a:avLst/>
+          </a:prstGeom>
+          <a:ln w="19050">
+            <a:solidFill>
+              <a:srgbClr val="5A6B7B"/>
+            </a:solidFill>
+            <a:tailEnd type="triangle" w="med" len="med"/>
+          </a:ln>
+          <a:effectLst/>
+        </p:spPr>
+        <p:style>
+          <a:lnRef idx="2">
+            <a:schemeClr val="accent1"/>
+          </a:lnRef>
+          <a:fillRef idx="0">
+            <a:schemeClr val="accent1"/>
+          </a:fillRef>
+          <a:effectRef idx="1">
+            <a:schemeClr val="accent1"/>
+          </a:effectRef>
+          <a:fontRef idx="minor">
+            <a:schemeClr val="tx1"/>
+          </a:fontRef>
+        </p:style>
+      </p:cxnSp>
+      <p:sp>
+        <p:nvSpPr>
+          <p:cNvPr id="14" name="Rectangle 13"/>
           <p:cNvSpPr/>
           <p:nvPr/>
         </p:nvSpPr>
@@ -9251,7 +9237,7 @@
                 </a:solidFill>
                 <a:latin typeface="Microsoft YaHei"/>
               </a:rPr>
-              <a:t>工具变量有效性报告：Goldsmith-Pinkham-Sorkin-Swift / Borusyak-Hull-Jaravel 检验</a:t>
+              <a:t>要点：解决“LLM 也让人更会写投诉”的长期混淆——投诉量↑不等于真实风险↑</a:t>
             </a:r>
           </a:p>
         </p:txBody>
@@ -9283,7 +9269,7 @@
         <p:spPr>
           <a:xfrm>
             <a:off x="0" y="0"/>
-            <a:ext cx="12191695" cy="603504"/>
+            <a:ext cx="12191695" cy="566928"/>
           </a:xfrm>
           <a:prstGeom prst="rect">
             <a:avLst/>
@@ -9316,13 +9302,13 @@
           <a:p>
             <a:pPr algn="ctr"/>
             <a:r>
-              <a:rPr sz="1900" b="1">
+              <a:rPr sz="1800" b="1">
                 <a:solidFill>
                   <a:srgbClr val="FFFFFF"/>
                 </a:solidFill>
                 <a:latin typeface="Microsoft YaHei"/>
               </a:rPr>
-              <a:t>第三章 框架图  数字金融/AI信贷X →（家庭传导M）→ 脆弱性Y</a:t>
+              <a:t>第三章 框架图（风险纠偏）  准实验 · X →（治理过程M）→ Y</a:t>
             </a:r>
           </a:p>
         </p:txBody>
@@ -9335,8 +9321,8 @@
         </p:nvSpPr>
         <p:spPr>
           <a:xfrm>
-            <a:off x="164592" y="1143000"/>
-            <a:ext cx="1463040" cy="457200"/>
+            <a:off x="146304" y="914400"/>
+            <a:ext cx="1417320" cy="502920"/>
           </a:xfrm>
           <a:prstGeom prst="rect">
             <a:avLst/>
@@ -9353,11 +9339,11 @@
             <a:r>
               <a:rPr sz="1100" i="0" b="1">
                 <a:solidFill>
-                  <a:srgbClr val="1F3B5B"/>
-                </a:solidFill>
-                <a:latin typeface="Microsoft YaHei"/>
-              </a:rPr>
-              <a:t>自变量</a:t>
+                  <a:srgbClr val="C87F0A"/>
+                </a:solidFill>
+                <a:latin typeface="Microsoft YaHei"/>
+              </a:rPr>
+              <a:t>识别</a:t>
             </a:r>
           </a:p>
           <a:p>
@@ -9365,11 +9351,11 @@
             <a:r>
               <a:rPr sz="1100" i="0" b="1">
                 <a:solidFill>
-                  <a:srgbClr val="1F3B5B"/>
-                </a:solidFill>
-                <a:latin typeface="Microsoft YaHei"/>
-              </a:rPr>
-              <a:t>X</a:t>
+                  <a:srgbClr val="C87F0A"/>
+                </a:solidFill>
+                <a:latin typeface="Microsoft YaHei"/>
+              </a:rPr>
+              <a:t>准实验</a:t>
             </a:r>
           </a:p>
         </p:txBody>
@@ -9382,8 +9368,8 @@
         </p:nvSpPr>
         <p:spPr>
           <a:xfrm>
-            <a:off x="164592" y="2423160"/>
-            <a:ext cx="1463040" cy="457200"/>
+            <a:off x="146304" y="2240280"/>
+            <a:ext cx="1417320" cy="502920"/>
           </a:xfrm>
           <a:prstGeom prst="rect">
             <a:avLst/>
@@ -9400,11 +9386,11 @@
             <a:r>
               <a:rPr sz="1100" i="0" b="1">
                 <a:solidFill>
-                  <a:srgbClr val="1B7F79"/>
-                </a:solidFill>
-                <a:latin typeface="Microsoft YaHei"/>
-              </a:rPr>
-              <a:t>中介机制</a:t>
+                  <a:srgbClr val="1F3B5B"/>
+                </a:solidFill>
+                <a:latin typeface="Microsoft YaHei"/>
+              </a:rPr>
+              <a:t>自变量</a:t>
             </a:r>
           </a:p>
           <a:p>
@@ -9412,11 +9398,11 @@
             <a:r>
               <a:rPr sz="1100" i="0" b="1">
                 <a:solidFill>
-                  <a:srgbClr val="1B7F79"/>
-                </a:solidFill>
-                <a:latin typeface="Microsoft YaHei"/>
-              </a:rPr>
-              <a:t>M</a:t>
+                  <a:srgbClr val="1F3B5B"/>
+                </a:solidFill>
+                <a:latin typeface="Microsoft YaHei"/>
+              </a:rPr>
+              <a:t>X</a:t>
             </a:r>
           </a:p>
         </p:txBody>
@@ -9429,8 +9415,8 @@
         </p:nvSpPr>
         <p:spPr>
           <a:xfrm>
-            <a:off x="164592" y="3566160"/>
-            <a:ext cx="1463040" cy="457200"/>
+            <a:off x="146304" y="3383280"/>
+            <a:ext cx="1417320" cy="502920"/>
           </a:xfrm>
           <a:prstGeom prst="rect">
             <a:avLst/>
@@ -9447,11 +9433,11 @@
             <a:r>
               <a:rPr sz="1100" i="0" b="1">
                 <a:solidFill>
-                  <a:srgbClr val="C05A16"/>
-                </a:solidFill>
-                <a:latin typeface="Microsoft YaHei"/>
-              </a:rPr>
-              <a:t>因变量</a:t>
+                  <a:srgbClr val="1B7F79"/>
+                </a:solidFill>
+                <a:latin typeface="Microsoft YaHei"/>
+              </a:rPr>
+              <a:t>中介</a:t>
             </a:r>
           </a:p>
           <a:p>
@@ -9459,11 +9445,11 @@
             <a:r>
               <a:rPr sz="1100" i="0" b="1">
                 <a:solidFill>
-                  <a:srgbClr val="C05A16"/>
-                </a:solidFill>
-                <a:latin typeface="Microsoft YaHei"/>
-              </a:rPr>
-              <a:t>Y</a:t>
+                  <a:srgbClr val="1B7F79"/>
+                </a:solidFill>
+                <a:latin typeface="Microsoft YaHei"/>
+              </a:rPr>
+              <a:t>M</a:t>
             </a:r>
           </a:p>
         </p:txBody>
@@ -9476,8 +9462,8 @@
         </p:nvSpPr>
         <p:spPr>
           <a:xfrm>
-            <a:off x="164592" y="4709160"/>
-            <a:ext cx="1463040" cy="457200"/>
+            <a:off x="146304" y="4526280"/>
+            <a:ext cx="1417320" cy="502920"/>
           </a:xfrm>
           <a:prstGeom prst="rect">
             <a:avLst/>
@@ -9494,11 +9480,11 @@
             <a:r>
               <a:rPr sz="1100" i="0" b="1">
                 <a:solidFill>
-                  <a:srgbClr val="6A3D9A"/>
-                </a:solidFill>
-                <a:latin typeface="Microsoft YaHei"/>
-              </a:rPr>
-              <a:t>调节</a:t>
+                  <a:srgbClr val="2E7D32"/>
+                </a:solidFill>
+                <a:latin typeface="Microsoft YaHei"/>
+              </a:rPr>
+              <a:t>因变量</a:t>
             </a:r>
           </a:p>
           <a:p>
@@ -9506,11 +9492,11 @@
             <a:r>
               <a:rPr sz="1100" i="0" b="1">
                 <a:solidFill>
-                  <a:srgbClr val="6A3D9A"/>
-                </a:solidFill>
-                <a:latin typeface="Microsoft YaHei"/>
-              </a:rPr>
-              <a:t>W·异质</a:t>
+                  <a:srgbClr val="2E7D32"/>
+                </a:solidFill>
+                <a:latin typeface="Microsoft YaHei"/>
+              </a:rPr>
+              <a:t>Y</a:t>
             </a:r>
           </a:p>
         </p:txBody>
@@ -9523,8 +9509,63 @@
         </p:nvSpPr>
         <p:spPr>
           <a:xfrm>
-            <a:off x="1691640" y="1051560"/>
-            <a:ext cx="8778240" cy="566928"/>
+            <a:off x="1691640" y="868680"/>
+            <a:ext cx="8778240" cy="512064"/>
+          </a:xfrm>
+          <a:prstGeom prst="roundRect">
+            <a:avLst/>
+          </a:prstGeom>
+          <a:solidFill>
+            <a:srgbClr val="C87F0A"/>
+          </a:solidFill>
+          <a:ln w="12700">
+            <a:solidFill>
+              <a:srgbClr val="C87F0A"/>
+            </a:solidFill>
+          </a:ln>
+          <a:effectLst/>
+        </p:spPr>
+        <p:style>
+          <a:lnRef idx="1">
+            <a:schemeClr val="accent1"/>
+          </a:lnRef>
+          <a:fillRef idx="3">
+            <a:schemeClr val="accent1"/>
+          </a:fillRef>
+          <a:effectRef idx="2">
+            <a:schemeClr val="accent1"/>
+          </a:effectRef>
+          <a:fontRef idx="minor">
+            <a:schemeClr val="lt1"/>
+          </a:fontRef>
+        </p:style>
+        <p:txBody>
+          <a:bodyPr rtlCol="0" anchor="ctr" wrap="square" lIns="50800" rIns="50800" tIns="25400" bIns="25400"/>
+          <a:lstStyle/>
+          <a:p>
+            <a:pPr algn="ctr"/>
+            <a:r>
+              <a:rPr sz="1050" b="1">
+                <a:solidFill>
+                  <a:srgbClr val="FFFFFF"/>
+                </a:solidFill>
+                <a:latin typeface="Microsoft YaHei"/>
+              </a:rPr>
+              <a:t>准实验：处理组 持牌 vs 非持牌（或上线前高风险占比 高 vs 低）× 前后  DiD / 三重差分</a:t>
+            </a:r>
+          </a:p>
+        </p:txBody>
+      </p:sp>
+      <p:sp>
+        <p:nvSpPr>
+          <p:cNvPr id="8" name="Rounded Rectangle 7"/>
+          <p:cNvSpPr/>
+          <p:nvPr/>
+        </p:nvSpPr>
+        <p:spPr>
+          <a:xfrm>
+            <a:off x="1691640" y="2148840"/>
+            <a:ext cx="8778240" cy="512064"/>
           </a:xfrm>
           <a:prstGeom prst="roundRect">
             <a:avLst/>
@@ -9565,20 +9606,20 @@
                 </a:solidFill>
                 <a:latin typeface="Microsoft YaHei"/>
               </a:rPr>
-              <a:t>X｜数字金融·AI信贷暴露  +  2017/2020 监管冲击（准实验）</a:t>
-            </a:r>
-          </a:p>
-        </p:txBody>
-      </p:sp>
-      <p:sp>
-        <p:nvSpPr>
-          <p:cNvPr id="8" name="Rounded Rectangle 7"/>
+              <a:t>X｜2025 智慧315 / 监管治理冲击（Post）</a:t>
+            </a:r>
+          </a:p>
+        </p:txBody>
+      </p:sp>
+      <p:sp>
+        <p:nvSpPr>
+          <p:cNvPr id="9" name="Rounded Rectangle 8"/>
           <p:cNvSpPr/>
           <p:nvPr/>
         </p:nvSpPr>
         <p:spPr>
           <a:xfrm>
-            <a:off x="1691640" y="2331720"/>
+            <a:off x="1691640" y="3291840"/>
             <a:ext cx="8778240" cy="512064"/>
           </a:xfrm>
           <a:prstGeom prst="roundRect">
@@ -9614,37 +9655,37 @@
           <a:p>
             <a:pPr algn="ctr"/>
             <a:r>
-              <a:rPr sz="1100" b="1">
+              <a:rPr sz="1050" b="1">
                 <a:solidFill>
                   <a:srgbClr val="FFFFFF"/>
                 </a:solidFill>
                 <a:latin typeface="Microsoft YaHei"/>
               </a:rPr>
-              <a:t>M｜信贷可得 与 劝说 在家庭层的传导</a:t>
-            </a:r>
-          </a:p>
-        </p:txBody>
-      </p:sp>
-      <p:sp>
-        <p:nvSpPr>
-          <p:cNvPr id="9" name="Rounded Rectangle 8"/>
+              <a:t>M｜治理过程：投诉回复率↑ · 解决率↑ · 平均响应时长↓ · 是否伴随监管处罚</a:t>
+            </a:r>
+          </a:p>
+        </p:txBody>
+      </p:sp>
+      <p:sp>
+        <p:nvSpPr>
+          <p:cNvPr id="10" name="Rounded Rectangle 9"/>
           <p:cNvSpPr/>
           <p:nvPr/>
         </p:nvSpPr>
         <p:spPr>
           <a:xfrm>
-            <a:off x="1691640" y="3474720"/>
+            <a:off x="1691640" y="4434840"/>
             <a:ext cx="8778240" cy="566928"/>
           </a:xfrm>
           <a:prstGeom prst="roundRect">
             <a:avLst/>
           </a:prstGeom>
           <a:solidFill>
-            <a:srgbClr val="C05A16"/>
+            <a:srgbClr val="2E7D32"/>
           </a:solidFill>
           <a:ln w="12700">
             <a:solidFill>
-              <a:srgbClr val="C05A16"/>
+              <a:srgbClr val="2E7D32"/>
             </a:solidFill>
           </a:ln>
           <a:effectLst/>
@@ -9675,62 +9716,7 @@
                 </a:solidFill>
                 <a:latin typeface="Microsoft YaHei"/>
               </a:rPr>
-              <a:t>Y｜负债收入比·偿债比·逾期·无法应急筹款·是否多头</a:t>
-            </a:r>
-          </a:p>
-        </p:txBody>
-      </p:sp>
-      <p:sp>
-        <p:nvSpPr>
-          <p:cNvPr id="10" name="Rounded Rectangle 9"/>
-          <p:cNvSpPr/>
-          <p:nvPr/>
-        </p:nvSpPr>
-        <p:spPr>
-          <a:xfrm>
-            <a:off x="1691640" y="4617720"/>
-            <a:ext cx="8778240" cy="512064"/>
-          </a:xfrm>
-          <a:prstGeom prst="roundRect">
-            <a:avLst/>
-          </a:prstGeom>
-          <a:solidFill>
-            <a:srgbClr val="6A3D9A"/>
-          </a:solidFill>
-          <a:ln w="12700">
-            <a:solidFill>
-              <a:srgbClr val="6A3D9A"/>
-            </a:solidFill>
-          </a:ln>
-          <a:effectLst/>
-        </p:spPr>
-        <p:style>
-          <a:lnRef idx="1">
-            <a:schemeClr val="accent1"/>
-          </a:lnRef>
-          <a:fillRef idx="3">
-            <a:schemeClr val="accent1"/>
-          </a:fillRef>
-          <a:effectRef idx="2">
-            <a:schemeClr val="accent1"/>
-          </a:effectRef>
-          <a:fontRef idx="minor">
-            <a:schemeClr val="lt1"/>
-          </a:fontRef>
-        </p:style>
-        <p:txBody>
-          <a:bodyPr rtlCol="0" anchor="ctr" wrap="square" lIns="50800" rIns="50800" tIns="25400" bIns="25400"/>
-          <a:lstStyle/>
-          <a:p>
-            <a:pPr algn="ctr"/>
-            <a:r>
-              <a:rPr sz="1100" b="1">
-                <a:solidFill>
-                  <a:srgbClr val="FFFFFF"/>
-                </a:solidFill>
-                <a:latin typeface="Microsoft YaHei"/>
-              </a:rPr>
-              <a:t>调节 W·异质性：低收入 / 年轻 / 已多头 组效应更强</a:t>
+              <a:t>Y｜治理结果：投诉总数↓ · 重复投诉↓ · 高风险投诉占比↓ · 未解决投诉↓</a:t>
             </a:r>
           </a:p>
         </p:txBody>
@@ -9742,9 +9728,47 @@
           <p:nvPr/>
         </p:nvCxnSpPr>
         <p:spPr>
-          <a:xfrm>
-            <a:off x="6080760" y="1618488"/>
-            <a:ext cx="0" cy="713232"/>
+          <a:xfrm flipV="1">
+            <a:off x="6080760" y="1380744"/>
+            <a:ext cx="0" cy="768096"/>
+          </a:xfrm>
+          <a:prstGeom prst="line">
+            <a:avLst/>
+          </a:prstGeom>
+          <a:ln w="16510">
+            <a:solidFill>
+              <a:srgbClr val="C87F0A"/>
+            </a:solidFill>
+            <a:prstDash val="dash"/>
+            <a:tailEnd type="triangle" w="med" len="med"/>
+          </a:ln>
+          <a:effectLst/>
+        </p:spPr>
+        <p:style>
+          <a:lnRef idx="2">
+            <a:schemeClr val="accent1"/>
+          </a:lnRef>
+          <a:fillRef idx="0">
+            <a:schemeClr val="accent1"/>
+          </a:fillRef>
+          <a:effectRef idx="1">
+            <a:schemeClr val="accent1"/>
+          </a:effectRef>
+          <a:fontRef idx="minor">
+            <a:schemeClr val="tx1"/>
+          </a:fontRef>
+        </p:style>
+      </p:cxnSp>
+      <p:cxnSp>
+        <p:nvCxnSpPr>
+          <p:cNvPr id="12" name="Connector 11"/>
+          <p:cNvCxnSpPr/>
+          <p:nvPr/>
+        </p:nvCxnSpPr>
+        <p:spPr>
+          <a:xfrm>
+            <a:off x="6080760" y="2660904"/>
+            <a:ext cx="0" cy="630936"/>
           </a:xfrm>
           <a:prstGeom prst="line">
             <a:avLst/>
@@ -9774,13 +9798,13 @@
       </p:cxnSp>
       <p:cxnSp>
         <p:nvCxnSpPr>
-          <p:cNvPr id="12" name="Connector 11"/>
+          <p:cNvPr id="13" name="Connector 12"/>
           <p:cNvCxnSpPr/>
           <p:nvPr/>
         </p:nvCxnSpPr>
         <p:spPr>
           <a:xfrm>
-            <a:off x="6080760" y="2843784"/>
+            <a:off x="6080760" y="3803904"/>
             <a:ext cx="0" cy="630936"/>
           </a:xfrm>
           <a:prstGeom prst="line">
@@ -9809,82 +9833,119 @@
           </a:fontRef>
         </p:style>
       </p:cxnSp>
-      <p:cxnSp>
-        <p:nvCxnSpPr>
-          <p:cNvPr id="13" name="Connector 12"/>
-          <p:cNvCxnSpPr/>
-          <p:nvPr/>
-        </p:nvCxnSpPr>
-        <p:spPr>
-          <a:xfrm flipV="1">
-            <a:off x="6080760" y="3159252"/>
-            <a:ext cx="0" cy="1458468"/>
-          </a:xfrm>
-          <a:prstGeom prst="line">
-            <a:avLst/>
-          </a:prstGeom>
-          <a:ln w="17780">
+      <p:sp>
+        <p:nvSpPr>
+          <p:cNvPr id="14" name="Rounded Rectangle 13"/>
+          <p:cNvSpPr/>
+          <p:nvPr/>
+        </p:nvSpPr>
+        <p:spPr>
+          <a:xfrm>
+            <a:off x="5852160" y="2788920"/>
+            <a:ext cx="502920" cy="274320"/>
+          </a:xfrm>
+          <a:prstGeom prst="roundRect">
+            <a:avLst/>
+          </a:prstGeom>
+          <a:solidFill>
+            <a:srgbClr val="FFFFFF"/>
+          </a:solidFill>
+          <a:ln w="15875">
             <a:solidFill>
-              <a:srgbClr val="6A3D9A"/>
+              <a:srgbClr val="1B7F79"/>
             </a:solidFill>
-            <a:prstDash val="dash"/>
-            <a:tailEnd type="triangle" w="med" len="med"/>
-          </a:ln>
-          <a:effectLst/>
-        </p:spPr>
-        <p:style>
-          <a:lnRef idx="2">
-            <a:schemeClr val="accent1"/>
-          </a:lnRef>
-          <a:fillRef idx="0">
-            <a:schemeClr val="accent1"/>
-          </a:fillRef>
-          <a:effectRef idx="1">
-            <a:schemeClr val="accent1"/>
-          </a:effectRef>
-          <a:fontRef idx="minor">
-            <a:schemeClr val="tx1"/>
-          </a:fontRef>
-        </p:style>
-      </p:cxnSp>
-      <p:sp>
-        <p:nvSpPr>
-          <p:cNvPr id="14" name="TextBox 13"/>
-          <p:cNvSpPr txBox="1"/>
-          <p:nvPr/>
-        </p:nvSpPr>
-        <p:spPr>
-          <a:xfrm>
-            <a:off x="6263640" y="3611880"/>
-            <a:ext cx="1280160" cy="274320"/>
-          </a:xfrm>
-          <a:prstGeom prst="rect">
-            <a:avLst/>
-          </a:prstGeom>
-          <a:noFill/>
-        </p:spPr>
-        <p:txBody>
-          <a:bodyPr wrap="square" anchor="ctr">
-            <a:spAutoFit/>
-          </a:bodyPr>
-          <a:lstStyle/>
-          <a:p>
-            <a:pPr algn="l"/>
-            <a:r>
-              <a:rPr sz="900" i="1" b="0">
-                <a:solidFill>
-                  <a:srgbClr val="6A3D9A"/>
-                </a:solidFill>
-                <a:latin typeface="Microsoft YaHei"/>
-              </a:rPr>
-              <a:t>调节路径</a:t>
-            </a:r>
-          </a:p>
-        </p:txBody>
-      </p:sp>
-      <p:sp>
-        <p:nvSpPr>
-          <p:cNvPr id="15" name="Rectangle 14"/>
+          </a:ln>
+          <a:effectLst/>
+        </p:spPr>
+        <p:style>
+          <a:lnRef idx="1">
+            <a:schemeClr val="accent1"/>
+          </a:lnRef>
+          <a:fillRef idx="3">
+            <a:schemeClr val="accent1"/>
+          </a:fillRef>
+          <a:effectRef idx="2">
+            <a:schemeClr val="accent1"/>
+          </a:effectRef>
+          <a:fontRef idx="minor">
+            <a:schemeClr val="lt1"/>
+          </a:fontRef>
+        </p:style>
+        <p:txBody>
+          <a:bodyPr rtlCol="0" anchor="ctr" wrap="none" lIns="12700" rIns="12700" tIns="0" bIns="0"/>
+          <a:lstStyle/>
+          <a:p>
+            <a:pPr algn="ctr"/>
+            <a:r>
+              <a:rPr sz="1000" b="1">
+                <a:solidFill>
+                  <a:srgbClr val="1B7F79"/>
+                </a:solidFill>
+                <a:latin typeface="Microsoft YaHei"/>
+              </a:rPr>
+              <a:t>H9</a:t>
+            </a:r>
+          </a:p>
+        </p:txBody>
+      </p:sp>
+      <p:sp>
+        <p:nvSpPr>
+          <p:cNvPr id="15" name="Rounded Rectangle 14"/>
+          <p:cNvSpPr/>
+          <p:nvPr/>
+        </p:nvSpPr>
+        <p:spPr>
+          <a:xfrm>
+            <a:off x="5852160" y="3931920"/>
+            <a:ext cx="502920" cy="274320"/>
+          </a:xfrm>
+          <a:prstGeom prst="roundRect">
+            <a:avLst/>
+          </a:prstGeom>
+          <a:solidFill>
+            <a:srgbClr val="FFFFFF"/>
+          </a:solidFill>
+          <a:ln w="15875">
+            <a:solidFill>
+              <a:srgbClr val="2E7D32"/>
+            </a:solidFill>
+          </a:ln>
+          <a:effectLst/>
+        </p:spPr>
+        <p:style>
+          <a:lnRef idx="1">
+            <a:schemeClr val="accent1"/>
+          </a:lnRef>
+          <a:fillRef idx="3">
+            <a:schemeClr val="accent1"/>
+          </a:fillRef>
+          <a:effectRef idx="2">
+            <a:schemeClr val="accent1"/>
+          </a:effectRef>
+          <a:fontRef idx="minor">
+            <a:schemeClr val="lt1"/>
+          </a:fontRef>
+        </p:style>
+        <p:txBody>
+          <a:bodyPr rtlCol="0" anchor="ctr" wrap="none" lIns="12700" rIns="12700" tIns="0" bIns="0"/>
+          <a:lstStyle/>
+          <a:p>
+            <a:pPr algn="ctr"/>
+            <a:r>
+              <a:rPr sz="1000" b="1">
+                <a:solidFill>
+                  <a:srgbClr val="2E7D32"/>
+                </a:solidFill>
+                <a:latin typeface="Microsoft YaHei"/>
+              </a:rPr>
+              <a:t>H8</a:t>
+            </a:r>
+          </a:p>
+        </p:txBody>
+      </p:sp>
+      <p:sp>
+        <p:nvSpPr>
+          <p:cNvPr id="16" name="Rectangle 15"/>
           <p:cNvSpPr/>
           <p:nvPr/>
         </p:nvSpPr>
@@ -9932,20 +9993,99 @@
                 </a:solidFill>
                 <a:latin typeface="Microsoft YaHei"/>
               </a:rPr>
-              <a:t>识别：高/低暴露区 × 前后 三重差分(DDD)　|　稳健：数字普惠指数连续处理 2SLS（到杭州距离/历史银行网点）+ PSM-DID</a:t>
-            </a:r>
-          </a:p>
-        </p:txBody>
-      </p:sp>
-      <p:sp>
-        <p:nvSpPr>
-          <p:cNvPr id="16" name="Rectangle 15"/>
+              <a:t>稳健：PSM-DID · 替代处理组定义 · 事件研究前趋势　|　局限：2025 冲击数据窗口偏薄，以高频月度弥补</a:t>
+            </a:r>
+          </a:p>
+        </p:txBody>
+      </p:sp>
+      <p:sp>
+        <p:nvSpPr>
+          <p:cNvPr id="17" name="Rectangle 16"/>
           <p:cNvSpPr/>
           <p:nvPr/>
         </p:nvSpPr>
         <p:spPr>
           <a:xfrm>
             <a:off x="274320" y="6446520"/>
+            <a:ext cx="201168" cy="146304"/>
+          </a:xfrm>
+          <a:prstGeom prst="rect">
+            <a:avLst/>
+          </a:prstGeom>
+          <a:solidFill>
+            <a:srgbClr val="C87F0A"/>
+          </a:solidFill>
+          <a:ln>
+            <a:noFill/>
+          </a:ln>
+          <a:effectLst/>
+        </p:spPr>
+        <p:style>
+          <a:lnRef idx="1">
+            <a:schemeClr val="accent1"/>
+          </a:lnRef>
+          <a:fillRef idx="3">
+            <a:schemeClr val="accent1"/>
+          </a:fillRef>
+          <a:effectRef idx="2">
+            <a:schemeClr val="accent1"/>
+          </a:effectRef>
+          <a:fontRef idx="minor">
+            <a:schemeClr val="lt1"/>
+          </a:fontRef>
+        </p:style>
+        <p:txBody>
+          <a:bodyPr rtlCol="0" anchor="ctr"/>
+          <a:lstStyle/>
+          <a:p>
+            <a:pPr algn="ctr"/>
+          </a:p>
+        </p:txBody>
+      </p:sp>
+      <p:sp>
+        <p:nvSpPr>
+          <p:cNvPr id="18" name="TextBox 17"/>
+          <p:cNvSpPr txBox="1"/>
+          <p:nvPr/>
+        </p:nvSpPr>
+        <p:spPr>
+          <a:xfrm>
+            <a:off x="512064" y="6391656"/>
+            <a:ext cx="1737360" cy="274320"/>
+          </a:xfrm>
+          <a:prstGeom prst="rect">
+            <a:avLst/>
+          </a:prstGeom>
+          <a:noFill/>
+        </p:spPr>
+        <p:txBody>
+          <a:bodyPr wrap="square" anchor="ctr">
+            <a:spAutoFit/>
+          </a:bodyPr>
+          <a:lstStyle/>
+          <a:p>
+            <a:pPr algn="l"/>
+            <a:r>
+              <a:rPr sz="900" i="0" b="0">
+                <a:solidFill>
+                  <a:srgbClr val="202833"/>
+                </a:solidFill>
+                <a:latin typeface="Microsoft YaHei"/>
+              </a:rPr>
+              <a:t>识别/冲击</a:t>
+            </a:r>
+          </a:p>
+        </p:txBody>
+      </p:sp>
+      <p:sp>
+        <p:nvSpPr>
+          <p:cNvPr id="19" name="Rectangle 18"/>
+          <p:cNvSpPr/>
+          <p:nvPr/>
+        </p:nvSpPr>
+        <p:spPr>
+          <a:xfrm>
+            <a:off x="1920239" y="6446520"/>
             <a:ext cx="201168" cy="146304"/>
           </a:xfrm>
           <a:prstGeom prst="rect">
@@ -9983,13 +10123,13 @@
       </p:sp>
       <p:sp>
         <p:nvSpPr>
-          <p:cNvPr id="17" name="TextBox 16"/>
+          <p:cNvPr id="20" name="TextBox 19"/>
           <p:cNvSpPr txBox="1"/>
           <p:nvPr/>
         </p:nvSpPr>
         <p:spPr>
           <a:xfrm>
-            <a:off x="512064" y="6391656"/>
+            <a:off x="2157983" y="6391656"/>
             <a:ext cx="1737360" cy="274320"/>
           </a:xfrm>
           <a:prstGeom prst="rect">
@@ -10018,13 +10158,13 @@
       </p:sp>
       <p:sp>
         <p:nvSpPr>
-          <p:cNvPr id="18" name="Rectangle 17"/>
+          <p:cNvPr id="21" name="Rectangle 20"/>
           <p:cNvSpPr/>
           <p:nvPr/>
         </p:nvSpPr>
         <p:spPr>
           <a:xfrm>
-            <a:off x="1773936" y="6446520"/>
+            <a:off x="3419856" y="6446520"/>
             <a:ext cx="201168" cy="146304"/>
           </a:xfrm>
           <a:prstGeom prst="rect">
@@ -10062,13 +10202,13 @@
       </p:sp>
       <p:sp>
         <p:nvSpPr>
-          <p:cNvPr id="19" name="TextBox 18"/>
+          <p:cNvPr id="22" name="TextBox 21"/>
           <p:cNvSpPr txBox="1"/>
           <p:nvPr/>
         </p:nvSpPr>
         <p:spPr>
           <a:xfrm>
-            <a:off x="2011680" y="6391656"/>
+            <a:off x="3657600" y="6391656"/>
             <a:ext cx="1737360" cy="274320"/>
           </a:xfrm>
           <a:prstGeom prst="rect">
@@ -10090,27 +10230,27 @@
                 </a:solidFill>
                 <a:latin typeface="Microsoft YaHei"/>
               </a:rPr>
-              <a:t>中介机制M</a:t>
-            </a:r>
-          </a:p>
-        </p:txBody>
-      </p:sp>
-      <p:sp>
-        <p:nvSpPr>
-          <p:cNvPr id="20" name="Rectangle 19"/>
+              <a:t>中介M</a:t>
+            </a:r>
+          </a:p>
+        </p:txBody>
+      </p:sp>
+      <p:sp>
+        <p:nvSpPr>
+          <p:cNvPr id="23" name="Rectangle 22"/>
           <p:cNvSpPr/>
           <p:nvPr/>
         </p:nvSpPr>
         <p:spPr>
           <a:xfrm>
-            <a:off x="3419856" y="6446520"/>
+            <a:off x="4773168" y="6446520"/>
             <a:ext cx="201168" cy="146304"/>
           </a:xfrm>
           <a:prstGeom prst="rect">
             <a:avLst/>
           </a:prstGeom>
           <a:solidFill>
-            <a:srgbClr val="C05A16"/>
+            <a:srgbClr val="2E7D32"/>
           </a:solidFill>
           <a:ln>
             <a:noFill/>
@@ -10141,13 +10281,13 @@
       </p:sp>
       <p:sp>
         <p:nvSpPr>
-          <p:cNvPr id="21" name="TextBox 20"/>
+          <p:cNvPr id="24" name="TextBox 23"/>
           <p:cNvSpPr txBox="1"/>
           <p:nvPr/>
         </p:nvSpPr>
         <p:spPr>
           <a:xfrm>
-            <a:off x="3657600" y="6391656"/>
+            <a:off x="5010912" y="6391656"/>
             <a:ext cx="1737360" cy="274320"/>
           </a:xfrm>
           <a:prstGeom prst="rect">
@@ -10170,85 +10310,6 @@
                 <a:latin typeface="Microsoft YaHei"/>
               </a:rPr>
               <a:t>因变量Y</a:t>
-            </a:r>
-          </a:p>
-        </p:txBody>
-      </p:sp>
-      <p:sp>
-        <p:nvSpPr>
-          <p:cNvPr id="22" name="Rectangle 21"/>
-          <p:cNvSpPr/>
-          <p:nvPr/>
-        </p:nvSpPr>
-        <p:spPr>
-          <a:xfrm>
-            <a:off x="4919472" y="6446520"/>
-            <a:ext cx="201168" cy="146304"/>
-          </a:xfrm>
-          <a:prstGeom prst="rect">
-            <a:avLst/>
-          </a:prstGeom>
-          <a:solidFill>
-            <a:srgbClr val="6A3D9A"/>
-          </a:solidFill>
-          <a:ln>
-            <a:noFill/>
-          </a:ln>
-          <a:effectLst/>
-        </p:spPr>
-        <p:style>
-          <a:lnRef idx="1">
-            <a:schemeClr val="accent1"/>
-          </a:lnRef>
-          <a:fillRef idx="3">
-            <a:schemeClr val="accent1"/>
-          </a:fillRef>
-          <a:effectRef idx="2">
-            <a:schemeClr val="accent1"/>
-          </a:effectRef>
-          <a:fontRef idx="minor">
-            <a:schemeClr val="lt1"/>
-          </a:fontRef>
-        </p:style>
-        <p:txBody>
-          <a:bodyPr rtlCol="0" anchor="ctr"/>
-          <a:lstStyle/>
-          <a:p>
-            <a:pPr algn="ctr"/>
-          </a:p>
-        </p:txBody>
-      </p:sp>
-      <p:sp>
-        <p:nvSpPr>
-          <p:cNvPr id="23" name="TextBox 22"/>
-          <p:cNvSpPr txBox="1"/>
-          <p:nvPr/>
-        </p:nvSpPr>
-        <p:spPr>
-          <a:xfrm>
-            <a:off x="5157216" y="6391656"/>
-            <a:ext cx="1737360" cy="274320"/>
-          </a:xfrm>
-          <a:prstGeom prst="rect">
-            <a:avLst/>
-          </a:prstGeom>
-          <a:noFill/>
-        </p:spPr>
-        <p:txBody>
-          <a:bodyPr wrap="square" anchor="ctr">
-            <a:spAutoFit/>
-          </a:bodyPr>
-          <a:lstStyle/>
-          <a:p>
-            <a:pPr algn="l"/>
-            <a:r>
-              <a:rPr sz="900" i="0" b="0">
-                <a:solidFill>
-                  <a:srgbClr val="202833"/>
-                </a:solidFill>
-                <a:latin typeface="Microsoft YaHei"/>
-              </a:rPr>
-              <a:t>调节W</a:t>
             </a:r>
           </a:p>
         </p:txBody>
@@ -10280,7 +10341,7 @@
         <p:spPr>
           <a:xfrm>
             <a:off x="0" y="0"/>
-            <a:ext cx="12191695" cy="603504"/>
+            <a:ext cx="12191695" cy="566928"/>
           </a:xfrm>
           <a:prstGeom prst="rect">
             <a:avLst/>
@@ -10313,13 +10374,13 @@
           <a:p>
             <a:pPr algn="ctr"/>
             <a:r>
-              <a:rPr sz="1900" b="1">
+              <a:rPr sz="1800" b="1">
                 <a:solidFill>
                   <a:srgbClr val="FFFFFF"/>
                 </a:solidFill>
                 <a:latin typeface="Microsoft YaHei"/>
               </a:rPr>
-              <a:t>第三章 技术路线图  问题 → 数据 → 主识别 → 稳健 → 异质 → 政策</a:t>
+              <a:t>第三章 技术路线图（风险纠偏）  问题→数据→DiD→中介→稳健→政策</a:t>
             </a:r>
           </a:p>
         </p:txBody>
@@ -10332,8 +10393,8 @@
         </p:nvSpPr>
         <p:spPr>
           <a:xfrm>
-            <a:off x="3355848" y="822960"/>
-            <a:ext cx="5486400" cy="512064"/>
+            <a:off x="2926080" y="786384"/>
+            <a:ext cx="6309360" cy="566928"/>
           </a:xfrm>
           <a:prstGeom prst="roundRect">
             <a:avLst/>
@@ -10368,13 +10429,13 @@
           <a:p>
             <a:pPr algn="ctr"/>
             <a:r>
-              <a:rPr sz="1200" b="1">
+              <a:rPr sz="1100" b="1">
                 <a:solidFill>
                   <a:srgbClr val="FFFFFF"/>
                 </a:solidFill>
                 <a:latin typeface="Microsoft YaHei"/>
               </a:rPr>
-              <a:t>研究问题：家庭金融脆弱性后果与监管含义为何？</a:t>
+              <a:t>研究问题：监管与智慧投诉治理能否、经由何种过程缓解 LLM 带来的消金风险？</a:t>
             </a:r>
           </a:p>
         </p:txBody>
@@ -10387,8 +10448,8 @@
         </p:nvSpPr>
         <p:spPr>
           <a:xfrm>
-            <a:off x="3355848" y="1517904"/>
-            <a:ext cx="5486400" cy="512064"/>
+            <a:off x="2926080" y="1517904"/>
+            <a:ext cx="6309360" cy="512064"/>
           </a:xfrm>
           <a:prstGeom prst="roundRect">
             <a:avLst/>
@@ -10423,13 +10484,13 @@
           <a:p>
             <a:pPr algn="ctr"/>
             <a:r>
-              <a:rPr sz="1100" b="1">
+              <a:rPr sz="1050" b="1">
                 <a:solidFill>
                   <a:srgbClr val="FFFFFF"/>
                 </a:solidFill>
                 <a:latin typeface="Microsoft YaHei"/>
               </a:rPr>
-              <a:t>数据：CHFS / CFPS + 数字普惠指数 + 监管事件</a:t>
+              <a:t>数据：第三方投诉 + 监管处罚 + 2025智慧315治理时点（机构×月面板）</a:t>
             </a:r>
           </a:p>
         </p:txBody>
@@ -10442,8 +10503,8 @@
         </p:nvSpPr>
         <p:spPr>
           <a:xfrm>
-            <a:off x="3355848" y="2212848"/>
-            <a:ext cx="5486400" cy="512064"/>
+            <a:off x="2926080" y="2212848"/>
+            <a:ext cx="6309360" cy="512064"/>
           </a:xfrm>
           <a:prstGeom prst="roundRect">
             <a:avLst/>
@@ -10484,7 +10545,7 @@
                 </a:solidFill>
                 <a:latin typeface="Microsoft YaHei"/>
               </a:rPr>
-              <a:t>主识别：高/低暴露区 × 前后  三重差分（DDD）</a:t>
+              <a:t>主识别：处理组 vs 对照组 × 前后  DiD / 三重差分</a:t>
             </a:r>
           </a:p>
         </p:txBody>
@@ -10497,8 +10558,8 @@
         </p:nvSpPr>
         <p:spPr>
           <a:xfrm>
-            <a:off x="3355848" y="2907792"/>
-            <a:ext cx="5486400" cy="566928"/>
+            <a:off x="2926080" y="2907792"/>
+            <a:ext cx="6309360" cy="566928"/>
           </a:xfrm>
           <a:prstGeom prst="roundRect">
             <a:avLst/>
@@ -10533,13 +10594,25 @@
           <a:p>
             <a:pPr algn="ctr"/>
             <a:r>
-              <a:rPr sz="1100" b="1">
+              <a:rPr sz="1000" b="1">
                 <a:solidFill>
                   <a:srgbClr val="FFFFFF"/>
                 </a:solidFill>
                 <a:latin typeface="Microsoft YaHei"/>
               </a:rPr>
-              <a:t>稳健：数字普惠连续处理 2SLS  +  PSM-DID  +  平行趋势</a:t>
+              <a:t>治理过程中介检验：回复率/解决率/响应时长/处罚 是否为纠偏路径</a:t>
+            </a:r>
+          </a:p>
+          <a:p>
+            <a:pPr algn="ctr"/>
+            <a:r>
+              <a:rPr sz="1000" b="1">
+                <a:solidFill>
+                  <a:srgbClr val="FFFFFF"/>
+                </a:solidFill>
+                <a:latin typeface="Microsoft YaHei"/>
+              </a:rPr>
+              <a:t>（对照“投诉自然回落”安慰剂）</a:t>
             </a:r>
           </a:p>
         </p:txBody>
@@ -10552,18 +10625,18 @@
         </p:nvSpPr>
         <p:spPr>
           <a:xfrm>
-            <a:off x="3355848" y="3675887"/>
-            <a:ext cx="5486400" cy="512064"/>
+            <a:off x="2926080" y="3749039"/>
+            <a:ext cx="6309360" cy="512064"/>
           </a:xfrm>
           <a:prstGeom prst="roundRect">
             <a:avLst/>
           </a:prstGeom>
           <a:solidFill>
-            <a:srgbClr val="6A3D9A"/>
+            <a:srgbClr val="6B7682"/>
           </a:solidFill>
           <a:ln w="12700">
             <a:solidFill>
-              <a:srgbClr val="6A3D9A"/>
+              <a:srgbClr val="6B7682"/>
             </a:solidFill>
           </a:ln>
           <a:effectLst/>
@@ -10588,13 +10661,13 @@
           <a:p>
             <a:pPr algn="ctr"/>
             <a:r>
-              <a:rPr sz="1100" b="1">
+              <a:rPr sz="1000" b="1">
                 <a:solidFill>
                   <a:srgbClr val="FFFFFF"/>
                 </a:solidFill>
                 <a:latin typeface="Microsoft YaHei"/>
               </a:rPr>
-              <a:t>异质性：低收入 / 年轻 / 已多头 组应更强</a:t>
+              <a:t>稳健：PSM-DID · 替代处理组 · 事件研究前趋势 ·（窗口偏薄→高频月度补）</a:t>
             </a:r>
           </a:p>
         </p:txBody>
@@ -10607,8 +10680,8 @@
         </p:nvSpPr>
         <p:spPr>
           <a:xfrm>
-            <a:off x="3355848" y="4370832"/>
-            <a:ext cx="5486400" cy="566928"/>
+            <a:off x="2926080" y="4443984"/>
+            <a:ext cx="6309360" cy="530352"/>
           </a:xfrm>
           <a:prstGeom prst="roundRect">
             <a:avLst/>
@@ -10649,7 +10722,7 @@
                 </a:solidFill>
                 <a:latin typeface="Microsoft YaHei"/>
               </a:rPr>
-              <a:t>结论与政策闭环：金融AI消费者保护 · 共债治理</a:t>
+              <a:t>结论与政策闭环：金融AI消保 · 智能外呼合规 · 投诉治理</a:t>
             </a:r>
           </a:p>
         </p:txBody>
@@ -10662,8 +10735,8 @@
         </p:nvCxnSpPr>
         <p:spPr>
           <a:xfrm>
-            <a:off x="6099048" y="1335024"/>
-            <a:ext cx="0" cy="182880"/>
+            <a:off x="6080760" y="1353312"/>
+            <a:ext cx="0" cy="164592"/>
           </a:xfrm>
           <a:prstGeom prst="line">
             <a:avLst/>
@@ -10699,7 +10772,7 @@
         </p:nvCxnSpPr>
         <p:spPr>
           <a:xfrm>
-            <a:off x="6099048" y="2029968"/>
+            <a:off x="6080760" y="2029968"/>
             <a:ext cx="0" cy="182880"/>
           </a:xfrm>
           <a:prstGeom prst="line">
@@ -10736,7 +10809,7 @@
         </p:nvCxnSpPr>
         <p:spPr>
           <a:xfrm>
-            <a:off x="6099048" y="2724912"/>
+            <a:off x="6080760" y="2724912"/>
             <a:ext cx="0" cy="182880"/>
           </a:xfrm>
           <a:prstGeom prst="line">
@@ -10773,8 +10846,8 @@
         </p:nvCxnSpPr>
         <p:spPr>
           <a:xfrm>
-            <a:off x="6099048" y="3474720"/>
-            <a:ext cx="0" cy="201167"/>
+            <a:off x="6080760" y="3474720"/>
+            <a:ext cx="0" cy="274319"/>
           </a:xfrm>
           <a:prstGeom prst="line">
             <a:avLst/>
@@ -10810,7 +10883,7 @@
         </p:nvCxnSpPr>
         <p:spPr>
           <a:xfrm>
-            <a:off x="6099048" y="4187951"/>
+            <a:off x="6080760" y="4261103"/>
             <a:ext cx="0" cy="182881"/>
           </a:xfrm>
           <a:prstGeom prst="line">
@@ -10889,7 +10962,7 @@
                 </a:solidFill>
                 <a:latin typeface="Microsoft YaHei"/>
               </a:rPr>
-              <a:t>三章逻辑闭环：微观(公司内组成效应) → 中观(行业/区域扩散) → 宏观(家庭脆弱性与监管)</a:t>
+              <a:t>三章闭环：产生（机构内）→ 显化（市场投诉，真实/表达两分）→ 纠偏（治理冲击经治理过程回拉）</a:t>
             </a:r>
           </a:p>
         </p:txBody>
